--- a/docs/content/presentation.pptx
+++ b/docs/content/presentation.pptx
@@ -6614,6 +6614,14 @@
 <file path=ppt/slides/slide1.xml><?xml version="1.0" encoding="utf-8"?>
 <p:sld xmlns:a="http://schemas.openxmlformats.org/drawingml/2006/main" xmlns:r="http://schemas.openxmlformats.org/officeDocument/2006/relationships" xmlns:p="http://schemas.openxmlformats.org/presentationml/2006/main">
   <p:cSld>
+    <p:bg>
+      <p:bgPr>
+        <a:solidFill>
+          <a:schemeClr val="bg1"/>
+        </a:solidFill>
+        <a:effectLst/>
+      </p:bgPr>
+    </p:bg>
     <p:spTree>
       <p:nvGrpSpPr>
         <p:cNvPr id="1" name=""/>
@@ -6628,87 +6636,144 @@
           <a:chExt cx="0" cy="0"/>
         </a:xfrm>
       </p:grpSpPr>
-      <p:sp>
-        <p:nvSpPr>
-          <p:cNvPr id="2" name="Title 1"/>
-          <p:cNvSpPr>
-            <a:spLocks noGrp="1"/>
-          </p:cNvSpPr>
-          <p:nvPr>
-            <p:ph type="ctrTitle"/>
+      <p:sp useBgFill="1">
+        <p:nvSpPr>
+          <p:cNvPr id="19" name="Rectangle 18">
+            <a:extLst>
+              <a:ext uri="{FF2B5EF4-FFF2-40B4-BE49-F238E27FC236}">
+                <a16:creationId xmlns:a16="http://schemas.microsoft.com/office/drawing/2014/main" id="{7DA3C418-758E-4180-A5D0-8655D6804587}"/>
+              </a:ext>
+              <a:ext uri="{C183D7F6-B498-43B3-948B-1728B52AA6E4}">
+                <adec:decorative xmlns:adec="http://schemas.microsoft.com/office/drawing/2017/decorative" val="1"/>
+              </a:ext>
+            </a:extLst>
+          </p:cNvPr>
+          <p:cNvSpPr>
+            <a:spLocks noGrp="1" noRot="1" noChangeAspect="1" noMove="1" noResize="1" noEditPoints="1" noAdjustHandles="1" noChangeArrowheads="1" noChangeShapeType="1" noTextEdit="1"/>
+          </p:cNvSpPr>
+          <p:nvPr>
+            <p:extLst>
+              <p:ext uri="{386F3935-93C4-4BCD-93E2-E3B085C9AB24}">
+                <p16:designElem xmlns:p16="http://schemas.microsoft.com/office/powerpoint/2015/main" val="1"/>
+              </p:ext>
+            </p:extLst>
           </p:nvPr>
         </p:nvSpPr>
         <p:spPr>
           <a:xfrm>
-            <a:off x="685800" y="1597819"/>
-            <a:ext cx="7772400" cy="1102519"/>
+            <a:off x="0" y="0"/>
+            <a:ext cx="9144000" cy="5143500"/>
           </a:xfrm>
+          <a:prstGeom prst="rect">
+            <a:avLst/>
+          </a:prstGeom>
+          <a:ln w="12700" cap="flat" cmpd="sng" algn="ctr">
+            <a:noFill/>
+            <a:prstDash val="solid"/>
+            <a:miter lim="800000"/>
+          </a:ln>
+          <a:effectLst/>
+          <a:extLst>
+            <a:ext uri="{91240B29-F687-4F45-9708-019B960494DF}">
+              <a14:hiddenLine xmlns:a14="http://schemas.microsoft.com/office/drawing/2010/main" w="12700" cap="flat" cmpd="sng" algn="ctr">
+                <a:solidFill>
+                  <a:schemeClr val="accent1">
+                    <a:shade val="50000"/>
+                  </a:schemeClr>
+                </a:solidFill>
+                <a:prstDash val="solid"/>
+                <a:miter lim="800000"/>
+              </a14:hiddenLine>
+            </a:ext>
+          </a:extLst>
         </p:spPr>
-        <p:txBody>
-          <a:bodyPr/>
+        <p:style>
+          <a:lnRef idx="2">
+            <a:schemeClr val="accent1">
+              <a:shade val="50000"/>
+            </a:schemeClr>
+          </a:lnRef>
+          <a:fillRef idx="1">
+            <a:schemeClr val="accent1"/>
+          </a:fillRef>
+          <a:effectRef idx="0">
+            <a:schemeClr val="accent1"/>
+          </a:effectRef>
+          <a:fontRef idx="minor">
+            <a:schemeClr val="lt1"/>
+          </a:fontRef>
+        </p:style>
+        <p:txBody>
+          <a:bodyPr rtlCol="0" anchor="ctr"/>
           <a:lstStyle/>
           <a:p>
-            <a:pPr marL="0" lvl="0" indent="0">
-              <a:buNone/>
-            </a:pPr>
-            <a:r>
-              <a:t>AI in Pedagogical Design and Delivery</a:t>
-            </a:r>
-          </a:p>
-        </p:txBody>
-      </p:sp>
-      <p:sp>
-        <p:nvSpPr>
-          <p:cNvPr id="3" name="Subtitle 2"/>
-          <p:cNvSpPr>
-            <a:spLocks noGrp="1"/>
-          </p:cNvSpPr>
-          <p:nvPr>
-            <p:ph type="subTitle" idx="1"/>
+            <a:pPr algn="ctr"/>
+            <a:endParaRPr lang="en-US"/>
+          </a:p>
+        </p:txBody>
+      </p:sp>
+      <p:sp>
+        <p:nvSpPr>
+          <p:cNvPr id="21" name="Rectangle 20">
+            <a:extLst>
+              <a:ext uri="{FF2B5EF4-FFF2-40B4-BE49-F238E27FC236}">
+                <a16:creationId xmlns:a16="http://schemas.microsoft.com/office/drawing/2014/main" id="{28C8EF06-5EC3-4883-AFAF-D74FF46550FB}"/>
+              </a:ext>
+              <a:ext uri="{C183D7F6-B498-43B3-948B-1728B52AA6E4}">
+                <adec:decorative xmlns:adec="http://schemas.microsoft.com/office/drawing/2017/decorative" val="1"/>
+              </a:ext>
+            </a:extLst>
+          </p:cNvPr>
+          <p:cNvSpPr>
+            <a:spLocks noGrp="1" noRot="1" noChangeAspect="1" noMove="1" noResize="1" noEditPoints="1" noAdjustHandles="1" noChangeArrowheads="1" noChangeShapeType="1" noTextEdit="1"/>
+          </p:cNvSpPr>
+          <p:nvPr>
+            <p:extLst>
+              <p:ext uri="{386F3935-93C4-4BCD-93E2-E3B085C9AB24}">
+                <p16:designElem xmlns:p16="http://schemas.microsoft.com/office/powerpoint/2015/main" val="1"/>
+              </p:ext>
+            </p:extLst>
           </p:nvPr>
         </p:nvSpPr>
         <p:spPr>
           <a:xfrm>
-            <a:off x="1371600" y="2914650"/>
-            <a:ext cx="6400800" cy="1314450"/>
+            <a:off x="-2" y="0"/>
+            <a:ext cx="3851978" cy="5153736"/>
           </a:xfrm>
+          <a:prstGeom prst="rect">
+            <a:avLst/>
+          </a:prstGeom>
+          <a:solidFill>
+            <a:srgbClr val="82766A">
+              <a:alpha val="15000"/>
+            </a:srgbClr>
+          </a:solidFill>
+          <a:ln>
+            <a:noFill/>
+          </a:ln>
         </p:spPr>
-        <p:txBody>
-          <a:bodyPr/>
+        <p:style>
+          <a:lnRef idx="2">
+            <a:schemeClr val="accent1">
+              <a:shade val="50000"/>
+            </a:schemeClr>
+          </a:lnRef>
+          <a:fillRef idx="1">
+            <a:schemeClr val="accent1"/>
+          </a:fillRef>
+          <a:effectRef idx="0">
+            <a:schemeClr val="accent1"/>
+          </a:effectRef>
+          <a:fontRef idx="minor">
+            <a:schemeClr val="lt1"/>
+          </a:fontRef>
+        </p:style>
+        <p:txBody>
+          <a:bodyPr rtlCol="0" anchor="ctr"/>
           <a:lstStyle/>
           <a:p>
-            <a:pPr marL="0" lvl="0" indent="0">
-              <a:buNone/>
-            </a:pPr>
-            <a:br/>
-            <a:br/>
-            <a:r>
-              <a:t>Michael Borck</a:t>
-            </a:r>
-          </a:p>
-        </p:txBody>
-      </p:sp>
-      <p:sp>
-        <p:nvSpPr>
-          <p:cNvPr id="4" name="Date Placeholder 3"/>
-          <p:cNvSpPr>
-            <a:spLocks noGrp="1"/>
-          </p:cNvSpPr>
-          <p:nvPr>
-            <p:ph type="dt" sz="half" idx="10"/>
-          </p:nvPr>
-        </p:nvSpPr>
-        <p:spPr/>
-        <p:txBody>
-          <a:bodyPr/>
-          <a:lstStyle/>
-          <a:p>
-            <a:pPr marL="0" lvl="0" indent="0">
-              <a:buNone/>
-            </a:pPr>
-            <a:r>
-              <a:t>2025-11-17</a:t>
-            </a:r>
+            <a:pPr algn="ctr"/>
+            <a:endParaRPr lang="en-US"/>
           </a:p>
         </p:txBody>
       </p:sp>
@@ -6728,26 +6793,639 @@
         </p:nvPicPr>
         <p:blipFill>
           <a:blip r:embed="rId3"/>
+          <a:srcRect l="4005" r="11454"/>
           <a:stretch>
             <a:fillRect/>
           </a:stretch>
         </p:blipFill>
         <p:spPr bwMode="auto">
           <a:xfrm>
-            <a:off x="1854200" y="1193800"/>
-            <a:ext cx="5422900" cy="3390900"/>
+            <a:off x="2186591" y="10"/>
+            <a:ext cx="6957409" cy="5143490"/>
           </a:xfrm>
-          <a:prstGeom prst="rect">
+          <a:custGeom>
             <a:avLst/>
-          </a:prstGeom>
+            <a:gdLst/>
+            <a:ahLst/>
+            <a:cxnLst/>
+            <a:rect l="l" t="t" r="r" b="b"/>
+            <a:pathLst>
+              <a:path w="9276545" h="6871647">
+                <a:moveTo>
+                  <a:pt x="9276545" y="0"/>
+                </a:moveTo>
+                <a:lnTo>
+                  <a:pt x="9276545" y="6858000"/>
+                </a:lnTo>
+                <a:lnTo>
+                  <a:pt x="1546051" y="6871647"/>
+                </a:lnTo>
+                <a:lnTo>
+                  <a:pt x="1535751" y="6828910"/>
+                </a:lnTo>
+                <a:cubicBezTo>
+                  <a:pt x="1530460" y="6775140"/>
+                  <a:pt x="1515370" y="6618042"/>
+                  <a:pt x="1514301" y="6549029"/>
+                </a:cubicBezTo>
+                <a:cubicBezTo>
+                  <a:pt x="1518045" y="6491396"/>
+                  <a:pt x="1528503" y="6450608"/>
+                  <a:pt x="1529339" y="6414828"/>
+                </a:cubicBezTo>
+                <a:cubicBezTo>
+                  <a:pt x="1525062" y="6359280"/>
+                  <a:pt x="1502062" y="6307149"/>
+                  <a:pt x="1493941" y="6268848"/>
+                </a:cubicBezTo>
+                <a:cubicBezTo>
+                  <a:pt x="1502669" y="6254191"/>
+                  <a:pt x="1469920" y="6200171"/>
+                  <a:pt x="1480613" y="6185025"/>
+                </a:cubicBezTo>
+                <a:cubicBezTo>
+                  <a:pt x="1481020" y="6164522"/>
+                  <a:pt x="1458164" y="6060790"/>
+                  <a:pt x="1443364" y="6018360"/>
+                </a:cubicBezTo>
+                <a:cubicBezTo>
+                  <a:pt x="1426694" y="5970758"/>
+                  <a:pt x="1390307" y="5920074"/>
+                  <a:pt x="1380584" y="5899407"/>
+                </a:cubicBezTo>
+                <a:cubicBezTo>
+                  <a:pt x="1370860" y="5878740"/>
+                  <a:pt x="1392244" y="5920877"/>
+                  <a:pt x="1385023" y="5894356"/>
+                </a:cubicBezTo>
+                <a:cubicBezTo>
+                  <a:pt x="1377800" y="5867835"/>
+                  <a:pt x="1345702" y="5770498"/>
+                  <a:pt x="1337254" y="5740279"/>
+                </a:cubicBezTo>
+                <a:cubicBezTo>
+                  <a:pt x="1353956" y="5738860"/>
+                  <a:pt x="1323673" y="5722040"/>
+                  <a:pt x="1334321" y="5713042"/>
+                </a:cubicBezTo>
+                <a:cubicBezTo>
+                  <a:pt x="1343675" y="5706701"/>
+                  <a:pt x="1336672" y="5700118"/>
+                  <a:pt x="1335877" y="5692870"/>
+                </a:cubicBezTo>
+                <a:cubicBezTo>
+                  <a:pt x="1343201" y="5683812"/>
+                  <a:pt x="1329617" y="5652064"/>
+                  <a:pt x="1319978" y="5643427"/>
+                </a:cubicBezTo>
+                <a:cubicBezTo>
+                  <a:pt x="1286551" y="5622177"/>
+                  <a:pt x="1310947" y="5579803"/>
+                  <a:pt x="1285321" y="5562271"/>
+                </a:cubicBezTo>
+                <a:cubicBezTo>
+                  <a:pt x="1281540" y="5556238"/>
+                  <a:pt x="1279983" y="5550455"/>
+                  <a:pt x="1279815" y="5544867"/>
+                </a:cubicBezTo>
+                <a:lnTo>
+                  <a:pt x="1282507" y="5529404"/>
+                </a:lnTo>
+                <a:lnTo>
+                  <a:pt x="1289604" y="5525378"/>
+                </a:lnTo>
+                <a:lnTo>
+                  <a:pt x="1287766" y="5515726"/>
+                </a:lnTo>
+                <a:lnTo>
+                  <a:pt x="1288829" y="5513051"/>
+                </a:lnTo>
+                <a:cubicBezTo>
+                  <a:pt x="1290896" y="5507946"/>
+                  <a:pt x="1292688" y="5502897"/>
+                  <a:pt x="1293373" y="5497833"/>
+                </a:cubicBezTo>
+                <a:cubicBezTo>
+                  <a:pt x="1288690" y="5483829"/>
+                  <a:pt x="1272696" y="5459278"/>
+                  <a:pt x="1260736" y="5429027"/>
+                </a:cubicBezTo>
+                <a:cubicBezTo>
+                  <a:pt x="1238579" y="5396416"/>
+                  <a:pt x="1238884" y="5351600"/>
+                  <a:pt x="1221610" y="5316328"/>
+                </a:cubicBezTo>
+                <a:lnTo>
+                  <a:pt x="1216099" y="5309330"/>
+                </a:lnTo>
+                <a:lnTo>
+                  <a:pt x="1217278" y="5279477"/>
+                </a:lnTo>
+                <a:cubicBezTo>
+                  <a:pt x="1221588" y="5274318"/>
+                  <a:pt x="1222716" y="5266940"/>
+                  <a:pt x="1218469" y="5260597"/>
+                </a:cubicBezTo>
+                <a:lnTo>
+                  <a:pt x="1206220" y="5152555"/>
+                </a:lnTo>
+                <a:cubicBezTo>
+                  <a:pt x="1205294" y="5116878"/>
+                  <a:pt x="1196908" y="5101727"/>
+                  <a:pt x="1212921" y="5046536"/>
+                </a:cubicBezTo>
+                <a:cubicBezTo>
+                  <a:pt x="1234138" y="4987918"/>
+                  <a:pt x="1204801" y="4903116"/>
+                  <a:pt x="1212183" y="4837345"/>
+                </a:cubicBezTo>
+                <a:cubicBezTo>
+                  <a:pt x="1183151" y="4802424"/>
+                  <a:pt x="1209228" y="4821062"/>
+                  <a:pt x="1202048" y="4784195"/>
+                </a:cubicBezTo>
+                <a:cubicBezTo>
+                  <a:pt x="1202483" y="4760878"/>
+                  <a:pt x="1202919" y="4737561"/>
+                  <a:pt x="1203354" y="4714245"/>
+                </a:cubicBezTo>
+                <a:lnTo>
+                  <a:pt x="1201502" y="4700836"/>
+                </a:lnTo>
+                <a:lnTo>
+                  <a:pt x="1194919" y="4697224"/>
+                </a:lnTo>
+                <a:lnTo>
+                  <a:pt x="1187792" y="4677162"/>
+                </a:lnTo>
+                <a:cubicBezTo>
+                  <a:pt x="1186060" y="4669625"/>
+                  <a:pt x="1185291" y="4661478"/>
+                  <a:pt x="1186080" y="4652429"/>
+                </a:cubicBezTo>
+                <a:cubicBezTo>
+                  <a:pt x="1199189" y="4622456"/>
+                  <a:pt x="1167081" y="4571771"/>
+                  <a:pt x="1184722" y="4534840"/>
+                </a:cubicBezTo>
+                <a:cubicBezTo>
+                  <a:pt x="1182407" y="4499077"/>
+                  <a:pt x="1175424" y="4460227"/>
+                  <a:pt x="1172188" y="4437851"/>
+                </a:cubicBezTo>
+                <a:cubicBezTo>
+                  <a:pt x="1161331" y="4428466"/>
+                  <a:pt x="1178123" y="4398274"/>
+                  <a:pt x="1165306" y="4400581"/>
+                </a:cubicBezTo>
+                <a:cubicBezTo>
+                  <a:pt x="1171061" y="4389819"/>
+                  <a:pt x="1173552" y="4346771"/>
+                  <a:pt x="1168602" y="4335651"/>
+                </a:cubicBezTo>
+                <a:lnTo>
+                  <a:pt x="1178384" y="4280215"/>
+                </a:lnTo>
+                <a:lnTo>
+                  <a:pt x="1177294" y="4274660"/>
+                </a:lnTo>
+                <a:cubicBezTo>
+                  <a:pt x="1177138" y="4268882"/>
+                  <a:pt x="1177520" y="4251103"/>
+                  <a:pt x="1177448" y="4245552"/>
+                </a:cubicBezTo>
+                <a:cubicBezTo>
+                  <a:pt x="1177252" y="4244155"/>
+                  <a:pt x="1177058" y="4242757"/>
+                  <a:pt x="1176863" y="4241361"/>
+                </a:cubicBezTo>
+                <a:lnTo>
+                  <a:pt x="1162386" y="4207167"/>
+                </a:lnTo>
+                <a:cubicBezTo>
+                  <a:pt x="1162950" y="4202536"/>
+                  <a:pt x="1174655" y="4199565"/>
+                  <a:pt x="1174343" y="4192380"/>
+                </a:cubicBezTo>
+                <a:lnTo>
+                  <a:pt x="1160516" y="4164062"/>
+                </a:lnTo>
+                <a:lnTo>
+                  <a:pt x="1161365" y="4158623"/>
+                </a:lnTo>
+                <a:lnTo>
+                  <a:pt x="1144878" y="4076261"/>
+                </a:lnTo>
+                <a:lnTo>
+                  <a:pt x="1123687" y="4005692"/>
+                </a:lnTo>
+                <a:lnTo>
+                  <a:pt x="1096720" y="3754257"/>
+                </a:lnTo>
+                <a:cubicBezTo>
+                  <a:pt x="1083618" y="3639924"/>
+                  <a:pt x="1064313" y="3636659"/>
+                  <a:pt x="1047682" y="3517638"/>
+                </a:cubicBezTo>
+                <a:cubicBezTo>
+                  <a:pt x="1048550" y="3477187"/>
+                  <a:pt x="1049418" y="3436735"/>
+                  <a:pt x="1050285" y="3396284"/>
+                </a:cubicBezTo>
+                <a:lnTo>
+                  <a:pt x="1030166" y="3320814"/>
+                </a:lnTo>
+                <a:lnTo>
+                  <a:pt x="1034128" y="3260443"/>
+                </a:lnTo>
+                <a:lnTo>
+                  <a:pt x="1007751" y="3198916"/>
+                </a:lnTo>
+                <a:cubicBezTo>
+                  <a:pt x="1003323" y="3193074"/>
+                  <a:pt x="1001150" y="3187393"/>
+                  <a:pt x="1000384" y="3181839"/>
+                </a:cubicBezTo>
+                <a:cubicBezTo>
+                  <a:pt x="1000734" y="3176675"/>
+                  <a:pt x="1001085" y="3171511"/>
+                  <a:pt x="1001435" y="3166346"/>
+                </a:cubicBezTo>
+                <a:lnTo>
+                  <a:pt x="968918" y="3112638"/>
+                </a:lnTo>
+                <a:cubicBezTo>
+                  <a:pt x="957125" y="3092489"/>
+                  <a:pt x="955617" y="3065232"/>
+                  <a:pt x="934483" y="3031628"/>
+                </a:cubicBezTo>
+                <a:cubicBezTo>
+                  <a:pt x="914631" y="2997037"/>
+                  <a:pt x="908933" y="3005661"/>
+                  <a:pt x="879229" y="2948196"/>
+                </a:cubicBezTo>
+                <a:cubicBezTo>
+                  <a:pt x="850845" y="2897154"/>
+                  <a:pt x="820829" y="2806798"/>
+                  <a:pt x="798666" y="2761198"/>
+                </a:cubicBezTo>
+                <a:cubicBezTo>
+                  <a:pt x="773970" y="2714562"/>
+                  <a:pt x="758278" y="2715446"/>
+                  <a:pt x="746962" y="2694939"/>
+                </a:cubicBezTo>
+                <a:lnTo>
+                  <a:pt x="712796" y="2614779"/>
+                </a:lnTo>
+                <a:lnTo>
+                  <a:pt x="697701" y="2600020"/>
+                </a:lnTo>
+                <a:cubicBezTo>
+                  <a:pt x="697743" y="2598787"/>
+                  <a:pt x="697784" y="2597555"/>
+                  <a:pt x="697823" y="2596321"/>
+                </a:cubicBezTo>
+                <a:lnTo>
+                  <a:pt x="679645" y="2572602"/>
+                </a:lnTo>
+                <a:lnTo>
+                  <a:pt x="680789" y="2571831"/>
+                </a:lnTo>
+                <a:cubicBezTo>
+                  <a:pt x="682946" y="2569560"/>
+                  <a:pt x="683757" y="2566863"/>
+                  <a:pt x="681771" y="2563200"/>
+                </a:cubicBezTo>
+                <a:cubicBezTo>
+                  <a:pt x="705290" y="2562299"/>
+                  <a:pt x="688388" y="2558438"/>
+                  <a:pt x="680456" y="2547723"/>
+                </a:cubicBezTo>
+                <a:cubicBezTo>
+                  <a:pt x="679482" y="2534148"/>
+                  <a:pt x="677183" y="2493617"/>
+                  <a:pt x="675922" y="2481749"/>
+                </a:cubicBezTo>
+                <a:lnTo>
+                  <a:pt x="672894" y="2476509"/>
+                </a:lnTo>
+                <a:lnTo>
+                  <a:pt x="673143" y="2476297"/>
+                </a:lnTo>
+                <a:cubicBezTo>
+                  <a:pt x="673152" y="2474932"/>
+                  <a:pt x="672405" y="2473126"/>
+                  <a:pt x="670567" y="2470561"/>
+                </a:cubicBezTo>
+                <a:lnTo>
+                  <a:pt x="667369" y="2466951"/>
+                </a:lnTo>
+                <a:lnTo>
+                  <a:pt x="661495" y="2456785"/>
+                </a:lnTo>
+                <a:cubicBezTo>
+                  <a:pt x="661510" y="2455387"/>
+                  <a:pt x="661525" y="2453987"/>
+                  <a:pt x="661540" y="2452588"/>
+                </a:cubicBezTo>
+                <a:lnTo>
+                  <a:pt x="664540" y="2449913"/>
+                </a:lnTo>
+                <a:lnTo>
+                  <a:pt x="663581" y="2449129"/>
+                </a:lnTo>
+                <a:cubicBezTo>
+                  <a:pt x="653014" y="2444453"/>
+                  <a:pt x="642406" y="2445872"/>
+                  <a:pt x="663129" y="2426579"/>
+                </a:cubicBezTo>
+                <a:cubicBezTo>
+                  <a:pt x="643271" y="2414167"/>
+                  <a:pt x="657229" y="2404769"/>
+                  <a:pt x="650205" y="2379928"/>
+                </a:cubicBezTo>
+                <a:cubicBezTo>
+                  <a:pt x="634911" y="2374359"/>
+                  <a:pt x="634260" y="2365346"/>
+                  <a:pt x="638008" y="2354824"/>
+                </a:cubicBezTo>
+                <a:cubicBezTo>
+                  <a:pt x="621083" y="2334576"/>
+                  <a:pt x="620949" y="2310146"/>
+                  <a:pt x="609851" y="2284299"/>
+                </a:cubicBezTo>
+                <a:lnTo>
+                  <a:pt x="585585" y="2155739"/>
+                </a:lnTo>
+                <a:lnTo>
+                  <a:pt x="581391" y="2152892"/>
+                </a:lnTo>
+                <a:cubicBezTo>
+                  <a:pt x="578821" y="2150768"/>
+                  <a:pt x="577525" y="2149149"/>
+                  <a:pt x="577083" y="2147807"/>
+                </a:cubicBezTo>
+                <a:lnTo>
+                  <a:pt x="577251" y="2147544"/>
+                </a:lnTo>
+                <a:lnTo>
+                  <a:pt x="546845" y="2085601"/>
+                </a:lnTo>
+                <a:cubicBezTo>
+                  <a:pt x="538270" y="2073917"/>
+                  <a:pt x="486356" y="1955894"/>
+                  <a:pt x="470837" y="1931362"/>
+                </a:cubicBezTo>
+                <a:lnTo>
+                  <a:pt x="428154" y="1657167"/>
+                </a:lnTo>
+                <a:lnTo>
+                  <a:pt x="392797" y="1510175"/>
+                </a:lnTo>
+                <a:cubicBezTo>
+                  <a:pt x="380165" y="1504446"/>
+                  <a:pt x="369910" y="1451095"/>
+                  <a:pt x="372847" y="1440507"/>
+                </a:cubicBezTo>
+                <a:cubicBezTo>
+                  <a:pt x="369015" y="1433783"/>
+                  <a:pt x="338503" y="1376212"/>
+                  <a:pt x="344479" y="1367690"/>
+                </a:cubicBezTo>
+                <a:cubicBezTo>
+                  <a:pt x="332264" y="1342150"/>
+                  <a:pt x="321736" y="1310521"/>
+                  <a:pt x="299558" y="1287266"/>
+                </a:cubicBezTo>
+                <a:cubicBezTo>
+                  <a:pt x="277380" y="1264010"/>
+                  <a:pt x="259203" y="1269909"/>
+                  <a:pt x="243216" y="1249403"/>
+                </a:cubicBezTo>
+                <a:cubicBezTo>
+                  <a:pt x="227230" y="1228898"/>
+                  <a:pt x="218454" y="1166841"/>
+                  <a:pt x="203639" y="1164232"/>
+                </a:cubicBezTo>
+                <a:cubicBezTo>
+                  <a:pt x="192352" y="1144923"/>
+                  <a:pt x="198158" y="1133798"/>
+                  <a:pt x="169195" y="1087898"/>
+                </a:cubicBezTo>
+                <a:cubicBezTo>
+                  <a:pt x="139228" y="1002950"/>
+                  <a:pt x="140891" y="969630"/>
+                  <a:pt x="98775" y="910071"/>
+                </a:cubicBezTo>
+                <a:cubicBezTo>
+                  <a:pt x="45025" y="831068"/>
+                  <a:pt x="34038" y="817468"/>
+                  <a:pt x="43820" y="712632"/>
+                </a:cubicBezTo>
+                <a:cubicBezTo>
+                  <a:pt x="34816" y="659496"/>
+                  <a:pt x="43273" y="613587"/>
+                  <a:pt x="44748" y="591246"/>
+                </a:cubicBezTo>
+                <a:lnTo>
+                  <a:pt x="36767" y="546725"/>
+                </a:lnTo>
+                <a:cubicBezTo>
+                  <a:pt x="36093" y="528360"/>
+                  <a:pt x="35418" y="509996"/>
+                  <a:pt x="34744" y="491632"/>
+                </a:cubicBezTo>
+                <a:cubicBezTo>
+                  <a:pt x="34670" y="458441"/>
+                  <a:pt x="29296" y="473054"/>
+                  <a:pt x="29222" y="439863"/>
+                </a:cubicBezTo>
+                <a:cubicBezTo>
+                  <a:pt x="29152" y="439762"/>
+                  <a:pt x="2578" y="397168"/>
+                  <a:pt x="2507" y="397065"/>
+                </a:cubicBezTo>
+                <a:cubicBezTo>
+                  <a:pt x="-7796" y="385479"/>
+                  <a:pt x="17492" y="336832"/>
+                  <a:pt x="9810" y="317232"/>
+                </a:cubicBezTo>
+                <a:lnTo>
+                  <a:pt x="25323" y="268841"/>
+                </a:lnTo>
+                <a:cubicBezTo>
+                  <a:pt x="20582" y="241406"/>
+                  <a:pt x="55391" y="238509"/>
+                  <a:pt x="50278" y="195107"/>
+                </a:cubicBezTo>
+                <a:cubicBezTo>
+                  <a:pt x="49891" y="157638"/>
+                  <a:pt x="41873" y="124837"/>
+                  <a:pt x="47653" y="93413"/>
+                </a:cubicBezTo>
+                <a:cubicBezTo>
+                  <a:pt x="41389" y="80245"/>
+                  <a:pt x="38874" y="67990"/>
+                  <a:pt x="48323" y="56668"/>
+                </a:cubicBezTo>
+                <a:cubicBezTo>
+                  <a:pt x="46028" y="30349"/>
+                  <a:pt x="37896" y="18658"/>
+                  <a:pt x="38423" y="5323"/>
+                </a:cubicBezTo>
+                <a:lnTo>
+                  <a:pt x="39875" y="1"/>
+                </a:lnTo>
+                <a:close/>
+              </a:path>
+            </a:pathLst>
+          </a:custGeom>
           <a:noFill/>
-          <a:ln w="9525">
-            <a:noFill/>
-            <a:headEnd/>
-            <a:tailEnd/>
-          </a:ln>
         </p:spPr>
       </p:pic>
+      <p:sp>
+        <p:nvSpPr>
+          <p:cNvPr id="2" name="Title 1"/>
+          <p:cNvSpPr>
+            <a:spLocks noGrp="1"/>
+          </p:cNvSpPr>
+          <p:nvPr>
+            <p:ph type="ctrTitle"/>
+          </p:nvPr>
+        </p:nvSpPr>
+        <p:spPr>
+          <a:xfrm>
+            <a:off x="496437" y="2139285"/>
+            <a:ext cx="2371455" cy="1980186"/>
+          </a:xfrm>
+        </p:spPr>
+        <p:txBody>
+          <a:bodyPr>
+            <a:normAutofit/>
+          </a:bodyPr>
+          <a:lstStyle/>
+          <a:p>
+            <a:pPr marL="0" lvl="0" indent="0" algn="l">
+              <a:buNone/>
+            </a:pPr>
+            <a:r>
+              <a:rPr lang="en-AU" sz="2700">
+                <a:solidFill>
+                  <a:schemeClr val="tx1">
+                    <a:lumMod val="85000"/>
+                    <a:lumOff val="15000"/>
+                  </a:schemeClr>
+                </a:solidFill>
+              </a:rPr>
+              <a:t>AI in Pedagogical Design and Delivery</a:t>
+            </a:r>
+          </a:p>
+        </p:txBody>
+      </p:sp>
+      <p:sp>
+        <p:nvSpPr>
+          <p:cNvPr id="3" name="Subtitle 2"/>
+          <p:cNvSpPr>
+            <a:spLocks noGrp="1"/>
+          </p:cNvSpPr>
+          <p:nvPr>
+            <p:ph type="subTitle" idx="1"/>
+          </p:nvPr>
+        </p:nvSpPr>
+        <p:spPr>
+          <a:xfrm>
+            <a:off x="496436" y="4257675"/>
+            <a:ext cx="2479567" cy="499352"/>
+          </a:xfrm>
+        </p:spPr>
+        <p:txBody>
+          <a:bodyPr>
+            <a:normAutofit/>
+          </a:bodyPr>
+          <a:lstStyle/>
+          <a:p>
+            <a:pPr marL="0" lvl="0" indent="0" algn="l">
+              <a:lnSpc>
+                <a:spcPct val="90000"/>
+              </a:lnSpc>
+              <a:buNone/>
+            </a:pPr>
+            <a:br>
+              <a:rPr lang="en-AU" sz="900">
+                <a:solidFill>
+                  <a:schemeClr val="tx1">
+                    <a:lumMod val="85000"/>
+                    <a:lumOff val="15000"/>
+                  </a:schemeClr>
+                </a:solidFill>
+              </a:rPr>
+            </a:br>
+            <a:br>
+              <a:rPr lang="en-AU" sz="900">
+                <a:solidFill>
+                  <a:schemeClr val="tx1">
+                    <a:lumMod val="85000"/>
+                    <a:lumOff val="15000"/>
+                  </a:schemeClr>
+                </a:solidFill>
+              </a:rPr>
+            </a:br>
+            <a:r>
+              <a:rPr lang="en-AU" sz="900">
+                <a:solidFill>
+                  <a:schemeClr val="tx1">
+                    <a:lumMod val="85000"/>
+                    <a:lumOff val="15000"/>
+                  </a:schemeClr>
+                </a:solidFill>
+              </a:rPr>
+              <a:t>Michael Borck</a:t>
+            </a:r>
+          </a:p>
+        </p:txBody>
+      </p:sp>
+      <p:sp>
+        <p:nvSpPr>
+          <p:cNvPr id="4" name="Date Placeholder 3"/>
+          <p:cNvSpPr>
+            <a:spLocks noGrp="1"/>
+          </p:cNvSpPr>
+          <p:nvPr>
+            <p:ph type="dt" sz="half" idx="10"/>
+          </p:nvPr>
+        </p:nvSpPr>
+        <p:spPr>
+          <a:xfrm>
+            <a:off x="628650" y="4767262"/>
+            <a:ext cx="2057400" cy="273844"/>
+          </a:xfrm>
+        </p:spPr>
+        <p:txBody>
+          <a:bodyPr>
+            <a:normAutofit/>
+          </a:bodyPr>
+          <a:lstStyle/>
+          <a:p>
+            <a:pPr marL="0" lvl="0" indent="0">
+              <a:spcAft>
+                <a:spcPts val="600"/>
+              </a:spcAft>
+              <a:buNone/>
+            </a:pPr>
+            <a:r>
+              <a:rPr lang="en-AU" sz="800">
+                <a:solidFill>
+                  <a:schemeClr val="tx1">
+                    <a:lumMod val="50000"/>
+                    <a:lumOff val="50000"/>
+                  </a:schemeClr>
+                </a:solidFill>
+              </a:rPr>
+              <a:t>2025-11-17</a:t>
+            </a:r>
+          </a:p>
+        </p:txBody>
+      </p:sp>
     </p:spTree>
   </p:cSld>
   <p:clrMapOvr>

--- a/docs/content/presentation.pptx
+++ b/docs/content/presentation.pptx
@@ -1,27 +1,29 @@
 
 <file path=ppt/presentation.xml><?xml version="1.0" encoding="utf-8"?>
-<p:presentation xmlns:a="http://schemas.openxmlformats.org/drawingml/2006/main" xmlns:r="http://schemas.openxmlformats.org/officeDocument/2006/relationships" xmlns:p="http://schemas.openxmlformats.org/presentationml/2006/main" saveSubsetFonts="1" autoCompressPictures="0">
+<p:presentation xmlns:a="http://schemas.openxmlformats.org/drawingml/2006/main" xmlns:p="http://schemas.openxmlformats.org/presentationml/2006/main" xmlns:r="http://schemas.openxmlformats.org/officeDocument/2006/relationships" autoCompressPictures="0" saveSubsetFonts="1">
   <p:sldMasterIdLst>
     <p:sldMasterId id="2147483648" r:id="rId1"/>
   </p:sldMasterIdLst>
   <p:notesMasterIdLst>
-    <p:notesMasterId r:id="rId16"/>
+    <p:notesMasterId r:id="rId18"/>
   </p:notesMasterIdLst>
   <p:sldIdLst>
     <p:sldId id="256" r:id="rId2"/>
-    <p:sldId id="258" r:id="rId3"/>
-    <p:sldId id="259" r:id="rId4"/>
-    <p:sldId id="260" r:id="rId5"/>
-    <p:sldId id="261" r:id="rId6"/>
-    <p:sldId id="262" r:id="rId7"/>
-    <p:sldId id="263" r:id="rId8"/>
-    <p:sldId id="264" r:id="rId9"/>
-    <p:sldId id="265" r:id="rId10"/>
-    <p:sldId id="266" r:id="rId11"/>
-    <p:sldId id="267" r:id="rId12"/>
-    <p:sldId id="268" r:id="rId13"/>
-    <p:sldId id="269" r:id="rId14"/>
-    <p:sldId id="270" r:id="rId15"/>
+    <p:sldId id="257" r:id="rId3"/>
+    <p:sldId id="258" r:id="rId4"/>
+    <p:sldId id="259" r:id="rId5"/>
+    <p:sldId id="260" r:id="rId6"/>
+    <p:sldId id="261" r:id="rId7"/>
+    <p:sldId id="262" r:id="rId8"/>
+    <p:sldId id="263" r:id="rId9"/>
+    <p:sldId id="264" r:id="rId10"/>
+    <p:sldId id="265" r:id="rId11"/>
+    <p:sldId id="266" r:id="rId12"/>
+    <p:sldId id="267" r:id="rId13"/>
+    <p:sldId id="268" r:id="rId14"/>
+    <p:sldId id="269" r:id="rId15"/>
+    <p:sldId id="270" r:id="rId16"/>
+    <p:sldId id="271" r:id="rId17"/>
   </p:sldIdLst>
   <p:sldSz cx="9144000" cy="5143500" type="screen16x9"/>
   <p:notesSz cx="6858000" cy="9144000"/>
@@ -29,8 +31,8 @@
     <a:defPPr>
       <a:defRPr lang="en-US"/>
     </a:defPPr>
-    <a:lvl1pPr marL="0" algn="l" defTabSz="457200" rtl="0" eaLnBrk="1" latinLnBrk="0" hangingPunct="1">
-      <a:defRPr sz="1800" kern="1200">
+    <a:lvl1pPr algn="l" defTabSz="457200" eaLnBrk="1" hangingPunct="1" latinLnBrk="0" marL="0" rtl="0">
+      <a:defRPr kern="1200" sz="1800">
         <a:solidFill>
           <a:schemeClr val="tx1"/>
         </a:solidFill>
@@ -39,8 +41,8 @@
         <a:cs typeface="+mn-cs"/>
       </a:defRPr>
     </a:lvl1pPr>
-    <a:lvl2pPr marL="457200" algn="l" defTabSz="457200" rtl="0" eaLnBrk="1" latinLnBrk="0" hangingPunct="1">
-      <a:defRPr sz="1800" kern="1200">
+    <a:lvl2pPr algn="l" defTabSz="457200" eaLnBrk="1" hangingPunct="1" latinLnBrk="0" marL="457200" rtl="0">
+      <a:defRPr kern="1200" sz="1800">
         <a:solidFill>
           <a:schemeClr val="tx1"/>
         </a:solidFill>
@@ -49,8 +51,8 @@
         <a:cs typeface="+mn-cs"/>
       </a:defRPr>
     </a:lvl2pPr>
-    <a:lvl3pPr marL="914400" algn="l" defTabSz="457200" rtl="0" eaLnBrk="1" latinLnBrk="0" hangingPunct="1">
-      <a:defRPr sz="1800" kern="1200">
+    <a:lvl3pPr algn="l" defTabSz="457200" eaLnBrk="1" hangingPunct="1" latinLnBrk="0" marL="914400" rtl="0">
+      <a:defRPr kern="1200" sz="1800">
         <a:solidFill>
           <a:schemeClr val="tx1"/>
         </a:solidFill>
@@ -59,8 +61,8 @@
         <a:cs typeface="+mn-cs"/>
       </a:defRPr>
     </a:lvl3pPr>
-    <a:lvl4pPr marL="1371600" algn="l" defTabSz="457200" rtl="0" eaLnBrk="1" latinLnBrk="0" hangingPunct="1">
-      <a:defRPr sz="1800" kern="1200">
+    <a:lvl4pPr algn="l" defTabSz="457200" eaLnBrk="1" hangingPunct="1" latinLnBrk="0" marL="1371600" rtl="0">
+      <a:defRPr kern="1200" sz="1800">
         <a:solidFill>
           <a:schemeClr val="tx1"/>
         </a:solidFill>
@@ -69,8 +71,8 @@
         <a:cs typeface="+mn-cs"/>
       </a:defRPr>
     </a:lvl4pPr>
-    <a:lvl5pPr marL="1828800" algn="l" defTabSz="457200" rtl="0" eaLnBrk="1" latinLnBrk="0" hangingPunct="1">
-      <a:defRPr sz="1800" kern="1200">
+    <a:lvl5pPr algn="l" defTabSz="457200" eaLnBrk="1" hangingPunct="1" latinLnBrk="0" marL="1828800" rtl="0">
+      <a:defRPr kern="1200" sz="1800">
         <a:solidFill>
           <a:schemeClr val="tx1"/>
         </a:solidFill>
@@ -79,8 +81,8 @@
         <a:cs typeface="+mn-cs"/>
       </a:defRPr>
     </a:lvl5pPr>
-    <a:lvl6pPr marL="2286000" algn="l" defTabSz="457200" rtl="0" eaLnBrk="1" latinLnBrk="0" hangingPunct="1">
-      <a:defRPr sz="1800" kern="1200">
+    <a:lvl6pPr algn="l" defTabSz="457200" eaLnBrk="1" hangingPunct="1" latinLnBrk="0" marL="2286000" rtl="0">
+      <a:defRPr kern="1200" sz="1800">
         <a:solidFill>
           <a:schemeClr val="tx1"/>
         </a:solidFill>
@@ -89,8 +91,8 @@
         <a:cs typeface="+mn-cs"/>
       </a:defRPr>
     </a:lvl6pPr>
-    <a:lvl7pPr marL="2743200" algn="l" defTabSz="457200" rtl="0" eaLnBrk="1" latinLnBrk="0" hangingPunct="1">
-      <a:defRPr sz="1800" kern="1200">
+    <a:lvl7pPr algn="l" defTabSz="457200" eaLnBrk="1" hangingPunct="1" latinLnBrk="0" marL="2743200" rtl="0">
+      <a:defRPr kern="1200" sz="1800">
         <a:solidFill>
           <a:schemeClr val="tx1"/>
         </a:solidFill>
@@ -99,8 +101,8 @@
         <a:cs typeface="+mn-cs"/>
       </a:defRPr>
     </a:lvl7pPr>
-    <a:lvl8pPr marL="3200400" algn="l" defTabSz="457200" rtl="0" eaLnBrk="1" latinLnBrk="0" hangingPunct="1">
-      <a:defRPr sz="1800" kern="1200">
+    <a:lvl8pPr algn="l" defTabSz="457200" eaLnBrk="1" hangingPunct="1" latinLnBrk="0" marL="3200400" rtl="0">
+      <a:defRPr kern="1200" sz="1800">
         <a:solidFill>
           <a:schemeClr val="tx1"/>
         </a:solidFill>
@@ -109,8 +111,8 @@
         <a:cs typeface="+mn-cs"/>
       </a:defRPr>
     </a:lvl8pPr>
-    <a:lvl9pPr marL="3657600" algn="l" defTabSz="457200" rtl="0" eaLnBrk="1" latinLnBrk="0" hangingPunct="1">
-      <a:defRPr sz="1800" kern="1200">
+    <a:lvl9pPr algn="l" defTabSz="457200" eaLnBrk="1" hangingPunct="1" latinLnBrk="0" marL="3657600" rtl="0">
+      <a:defRPr kern="1200" sz="1800">
         <a:solidFill>
           <a:schemeClr val="tx1"/>
         </a:solidFill>
@@ -221,7 +223,7 @@
           <a:p>
             <a:fld id="{0F9C1CCF-B725-44A7-AA57-5E433BD85C9F}" type="datetimeFigureOut">
               <a:rPr lang="en-US" smtClean="0"/>
-              <a:t>11/17/25</a:t>
+              <a:t>1/2/22</a:t>
             </a:fld>
             <a:endParaRPr lang="en-US"/>
           </a:p>
@@ -532,293 +534,267 @@
           <a:bodyPr/>
           <a:lstStyle/>
           <a:p>
-            <a:pPr marL="0" lvl="0" indent="0">
-              <a:buNone/>
-            </a:pPr>
-            <a:r>
-              <a:rPr lang="en-AU" b="1" dirty="0"/>
+            <a:pPr lvl="0" indent="0" marL="0">
+              <a:buNone/>
+            </a:pPr>
+            <a:r>
+              <a:rPr b="1"/>
               <a:t>Opening hook (Bloom + AI tutors):</a:t>
             </a:r>
           </a:p>
           <a:p>
-            <a:pPr marL="0" lvl="0" indent="0">
-              <a:buNone/>
-            </a:pPr>
-            <a:endParaRPr lang="en-AU" b="1" dirty="0"/>
-          </a:p>
-          <a:p>
-            <a:pPr marL="1270000" lvl="0" indent="0">
-              <a:buNone/>
-            </a:pPr>
-            <a:r>
-              <a:rPr lang="en-AU" sz="1200" dirty="0"/>
+            <a:pPr lvl="0" indent="0" marL="0">
+              <a:buNone/>
+            </a:pPr>
+          </a:p>
+          <a:p>
+            <a:pPr lvl="0" indent="0" marL="1270000">
+              <a:buNone/>
+            </a:pPr>
+            <a:r>
+              <a:rPr sz="2000"/>
               <a:t>“Two standard deviations.</a:t>
             </a:r>
-            <a:br>
-              <a:rPr lang="en-AU" dirty="0"/>
-            </a:br>
-            <a:r>
-              <a:rPr lang="en-AU" sz="1200" dirty="0"/>
+            <a:br/>
+            <a:r>
+              <a:rPr sz="2000"/>
               <a:t>[pause 2–3 seconds, make eye contact]</a:t>
             </a:r>
-            <a:br>
-              <a:rPr lang="en-AU" dirty="0"/>
-            </a:br>
-            <a:r>
-              <a:rPr lang="en-AU" sz="1200" dirty="0"/>
+            <a:br/>
+            <a:r>
+              <a:rPr sz="2000"/>
               <a:t>That’s the gap Benjamin Bloom reported in the 1980s between students in a typical classroom and students who received </a:t>
             </a:r>
             <a:r>
-              <a:rPr lang="en-AU" sz="1200" b="1" dirty="0"/>
+              <a:rPr sz="2000" b="1"/>
               <a:t>one‑to‑one human tutoring</a:t>
             </a:r>
             <a:r>
-              <a:rPr lang="en-AU" sz="1200" dirty="0"/>
+              <a:rPr sz="2000"/>
               <a:t> – enough to turn an average student into a top performer.</a:t>
             </a:r>
           </a:p>
           <a:p>
-            <a:pPr marL="0" lvl="0" indent="0">
-              <a:buNone/>
-            </a:pPr>
-            <a:endParaRPr lang="en-AU" sz="1200" dirty="0"/>
-          </a:p>
-          <a:p>
-            <a:pPr marL="1270000" lvl="0" indent="0">
-              <a:buNone/>
-            </a:pPr>
-            <a:r>
-              <a:rPr lang="en-AU" sz="1200" dirty="0"/>
+            <a:pPr lvl="0" indent="0" marL="0">
+              <a:buNone/>
+            </a:pPr>
+          </a:p>
+          <a:p>
+            <a:pPr lvl="0" indent="0" marL="1270000">
+              <a:buNone/>
+            </a:pPr>
+            <a:r>
+              <a:rPr sz="2000"/>
               <a:t>Fast‑forward forty years. Sal Khan – the Khan Academy guy – stands on a TED stage and says: with AI tutors and AI teaching assistants, we might finally be able to get </a:t>
             </a:r>
             <a:r>
-              <a:rPr lang="en-AU" sz="1200" b="1" dirty="0"/>
+              <a:rPr sz="2000" b="1"/>
               <a:t>something like that 2‑sigma effect at scale</a:t>
             </a:r>
             <a:r>
-              <a:rPr lang="en-AU" sz="1200" dirty="0"/>
+              <a:rPr sz="2000"/>
               <a:t>. A personal tutor for every student, and an AI assistant for every teacher.</a:t>
             </a:r>
           </a:p>
           <a:p>
-            <a:pPr marL="0" lvl="0" indent="0">
-              <a:buNone/>
-            </a:pPr>
-            <a:endParaRPr lang="en-AU" sz="1200" dirty="0"/>
-          </a:p>
-          <a:p>
-            <a:pPr marL="1270000" lvl="0" indent="0">
-              <a:buNone/>
-            </a:pPr>
-            <a:r>
-              <a:rPr lang="en-AU" sz="1200" dirty="0"/>
+            <a:pPr lvl="0" indent="0" marL="0">
+              <a:buNone/>
+            </a:pPr>
+          </a:p>
+          <a:p>
+            <a:pPr lvl="0" indent="0" marL="1270000">
+              <a:buNone/>
+            </a:pPr>
+            <a:r>
+              <a:rPr sz="2000"/>
               <a:t>Whether that makes you excited or slightly ill, it raises a very practical question for us here at Curtin:</a:t>
             </a:r>
-            <a:br>
-              <a:rPr lang="en-AU" dirty="0"/>
-            </a:br>
-            <a:r>
-              <a:rPr lang="en-AU" sz="1200" dirty="0"/>
+            <a:br/>
+            <a:r>
+              <a:rPr sz="2000"/>
               <a:t>If tools like this are going to sit in our students’ hands – and in our own enterprise Copilot environment – </a:t>
             </a:r>
             <a:r>
-              <a:rPr lang="en-AU" sz="1200" b="1" dirty="0"/>
+              <a:rPr sz="2000" b="1"/>
               <a:t>how do we design teaching, assessment and support so that we get the upside without losing what actually matters?</a:t>
             </a:r>
-            <a:br>
-              <a:rPr lang="en-AU" dirty="0"/>
-            </a:br>
-            <a:r>
-              <a:rPr lang="en-AU" sz="1200" dirty="0"/>
+            <a:br/>
+            <a:r>
+              <a:rPr sz="2000"/>
               <a:t>And how does that sit alongside </a:t>
             </a:r>
             <a:r>
-              <a:rPr lang="en-AU" sz="1200" b="1" dirty="0"/>
+              <a:rPr sz="2000" b="1"/>
               <a:t>Assessment 2030</a:t>
             </a:r>
             <a:r>
-              <a:rPr lang="en-AU" sz="1200" dirty="0"/>
+              <a:rPr sz="2000"/>
               <a:t>, academic integrity, and the reality that students can now summon a ‘tutor’ at 2am from their phone?”</a:t>
             </a:r>
           </a:p>
           <a:p>
-            <a:pPr marL="0" lvl="0" indent="0">
-              <a:buNone/>
-            </a:pPr>
-            <a:endParaRPr lang="en-AU" sz="1200" dirty="0"/>
-          </a:p>
-          <a:p>
-            <a:pPr marL="0" lvl="0" indent="0">
-              <a:buNone/>
-            </a:pPr>
-            <a:r>
-              <a:rPr lang="en-AU" dirty="0"/>
+            <a:pPr lvl="0" indent="0" marL="0">
+              <a:buNone/>
+            </a:pPr>
+          </a:p>
+          <a:p>
+            <a:pPr lvl="0" indent="0" marL="0">
+              <a:buNone/>
+            </a:pPr>
+            <a:r>
+              <a:rPr/>
               <a:t>To widen beyond teaching staff, you can add:</a:t>
             </a:r>
           </a:p>
           <a:p>
-            <a:pPr marL="0" lvl="0" indent="0">
-              <a:buNone/>
-            </a:pPr>
-            <a:endParaRPr lang="en-AU" dirty="0"/>
-          </a:p>
-          <a:p>
-            <a:pPr marL="1270000" lvl="0" indent="0">
-              <a:buNone/>
-            </a:pPr>
-            <a:r>
-              <a:rPr lang="en-AU" sz="1200" dirty="0"/>
+            <a:pPr lvl="0" indent="0" marL="0">
+              <a:buNone/>
+            </a:pPr>
+          </a:p>
+          <a:p>
+            <a:pPr lvl="0" indent="0" marL="1270000">
+              <a:buNone/>
+            </a:pPr>
+            <a:r>
+              <a:rPr sz="2000"/>
               <a:t>“Even if you’re not teaching every day, there’s a similar promise in our research and professional roles – a kind of </a:t>
             </a:r>
             <a:r>
-              <a:rPr lang="en-AU" sz="1200" b="1" dirty="0"/>
+              <a:rPr sz="2000" b="1"/>
               <a:t>co‑pilot for the boring parts</a:t>
             </a:r>
             <a:r>
-              <a:rPr lang="en-AU" sz="1200" dirty="0"/>
+              <a:rPr sz="2000"/>
               <a:t> of our jobs – drafting, summarising, chasing patterns – so we can spend more time on work that needs human judgement and relationships.”</a:t>
             </a:r>
           </a:p>
           <a:p>
-            <a:pPr marL="0" lvl="0" indent="0">
-              <a:buNone/>
-            </a:pPr>
-            <a:endParaRPr lang="en-AU" sz="1200" dirty="0"/>
-          </a:p>
-          <a:p>
-            <a:pPr marL="0" lvl="0" indent="0">
-              <a:buNone/>
-            </a:pPr>
-            <a:r>
-              <a:rPr lang="en-AU" b="1" dirty="0"/>
+            <a:pPr lvl="0" indent="0" marL="0">
+              <a:buNone/>
+            </a:pPr>
+          </a:p>
+          <a:p>
+            <a:pPr lvl="0" indent="0" marL="0">
+              <a:buNone/>
+            </a:pPr>
+            <a:r>
+              <a:rPr b="1"/>
               <a:t>Position the session:</a:t>
             </a:r>
           </a:p>
           <a:p>
-            <a:pPr marL="0" lvl="0" indent="0">
-              <a:buNone/>
-            </a:pPr>
-            <a:endParaRPr lang="en-AU" b="1" dirty="0"/>
-          </a:p>
-          <a:p>
-            <a:pPr marL="1270000" lvl="0" indent="0">
-              <a:buNone/>
-            </a:pPr>
-            <a:r>
-              <a:rPr lang="en-AU" sz="1200" dirty="0"/>
+            <a:pPr lvl="0" indent="0" marL="0">
+              <a:buNone/>
+            </a:pPr>
+          </a:p>
+          <a:p>
+            <a:pPr lvl="0" indent="0" marL="1270000">
+              <a:buNone/>
+            </a:pPr>
+            <a:r>
+              <a:rPr sz="2000"/>
               <a:t>“That’s what this session is about. We’re going to:</a:t>
             </a:r>
-            <a:br>
-              <a:rPr lang="en-AU" dirty="0"/>
-            </a:br>
-            <a:r>
-              <a:rPr lang="en-AU" sz="1200" dirty="0"/>
+            <a:br/>
+            <a:r>
+              <a:rPr sz="2000"/>
               <a:t>– Experiment with using AI to </a:t>
             </a:r>
             <a:r>
-              <a:rPr lang="en-AU" sz="1200" b="1" dirty="0"/>
+              <a:rPr sz="2000" b="1"/>
               <a:t>automate some of the tedious work</a:t>
             </a:r>
             <a:r>
-              <a:rPr lang="en-AU" sz="1200" dirty="0"/>
+              <a:rPr sz="2000"/>
               <a:t>,</a:t>
             </a:r>
-            <a:br>
-              <a:rPr lang="en-AU" dirty="0"/>
-            </a:br>
-            <a:r>
-              <a:rPr lang="en-AU" sz="1200" dirty="0"/>
+            <a:br/>
+            <a:r>
+              <a:rPr sz="2000"/>
               <a:t>– Practise how to </a:t>
             </a:r>
             <a:r>
-              <a:rPr lang="en-AU" sz="1200" b="1" dirty="0"/>
+              <a:rPr sz="2000" b="1"/>
               <a:t>design prompts</a:t>
             </a:r>
             <a:r>
-              <a:rPr lang="en-AU" sz="1200" dirty="0"/>
+              <a:rPr sz="2000"/>
               <a:t> and </a:t>
             </a:r>
             <a:r>
-              <a:rPr lang="en-AU" sz="1200" b="1" dirty="0"/>
+              <a:rPr sz="2000" b="1"/>
               <a:t>critique AI outputs</a:t>
             </a:r>
             <a:r>
-              <a:rPr lang="en-AU" sz="1200" dirty="0"/>
+              <a:rPr sz="2000"/>
               <a:t>, and</a:t>
             </a:r>
-            <a:br>
-              <a:rPr lang="en-AU" dirty="0"/>
-            </a:br>
-            <a:r>
-              <a:rPr lang="en-AU" sz="1200" dirty="0"/>
+            <a:br/>
+            <a:r>
+              <a:rPr sz="2000"/>
               <a:t>– Stress‑test our own assessments and practices in the spirit of </a:t>
             </a:r>
             <a:r>
-              <a:rPr lang="en-AU" sz="1200" b="1" dirty="0"/>
+              <a:rPr sz="2000" b="1"/>
               <a:t>Assessment 2030</a:t>
             </a:r>
             <a:r>
-              <a:rPr lang="en-AU" sz="1200" dirty="0"/>
+              <a:rPr sz="2000"/>
               <a:t> – not to ban AI, but to redesign so that </a:t>
             </a:r>
             <a:r>
-              <a:rPr lang="en-AU" sz="1200" b="1" dirty="0"/>
+              <a:rPr sz="2000" b="1"/>
               <a:t>student judgement, process, and human skills</a:t>
             </a:r>
             <a:r>
-              <a:rPr lang="en-AU" sz="1200" dirty="0"/>
+              <a:rPr sz="2000"/>
               <a:t> remain irreplaceable.”</a:t>
             </a:r>
           </a:p>
           <a:p>
-            <a:pPr marL="0" lvl="0" indent="0">
-              <a:buNone/>
-            </a:pPr>
-            <a:endParaRPr lang="en-AU" sz="1200" dirty="0"/>
-          </a:p>
-          <a:p>
-            <a:pPr marL="0" lvl="0" indent="0">
-              <a:buNone/>
-            </a:pPr>
-            <a:r>
-              <a:rPr lang="en-AU" dirty="0"/>
+            <a:pPr lvl="0" indent="0" marL="0">
+              <a:buNone/>
+            </a:pPr>
+          </a:p>
+          <a:p>
+            <a:pPr lvl="0" indent="0" marL="0">
+              <a:buNone/>
+            </a:pPr>
+            <a:r>
+              <a:rPr/>
               <a:t>You can lightly nod to risks, but unpack them later:</a:t>
             </a:r>
           </a:p>
           <a:p>
-            <a:pPr marL="0" lvl="0" indent="0">
-              <a:buNone/>
-            </a:pPr>
-            <a:endParaRPr lang="en-AU" dirty="0"/>
-          </a:p>
-          <a:p>
-            <a:pPr marL="1270000" lvl="0" indent="0">
-              <a:buNone/>
-            </a:pPr>
-            <a:r>
-              <a:rPr lang="en-AU" sz="1200" dirty="0"/>
+            <a:pPr lvl="0" indent="0" marL="0">
+              <a:buNone/>
+            </a:pPr>
+          </a:p>
+          <a:p>
+            <a:pPr lvl="0" indent="0" marL="1270000">
+              <a:buNone/>
+            </a:pPr>
+            <a:r>
+              <a:rPr sz="2000"/>
               <a:t>“We also know from recent work that if we lean too hard on these tools, we risk </a:t>
             </a:r>
             <a:r>
-              <a:rPr lang="en-AU" sz="1200" b="1" dirty="0"/>
+              <a:rPr sz="2000" b="1"/>
               <a:t>cognitive offloading</a:t>
             </a:r>
             <a:r>
-              <a:rPr lang="en-AU" sz="1200" dirty="0"/>
+              <a:rPr sz="2000"/>
               <a:t>, students feeling less connected, and making cheating easier if our assessments are too automatable. So we’ll spend as much time on </a:t>
             </a:r>
             <a:r>
-              <a:rPr lang="en-AU" sz="1200" b="1" dirty="0"/>
+              <a:rPr sz="2000" b="1"/>
               <a:t>how to critique and design around AI</a:t>
             </a:r>
             <a:r>
-              <a:rPr lang="en-AU" sz="1200" dirty="0"/>
+              <a:rPr sz="2000"/>
               <a:t> as we do on the shiny productivity side.”</a:t>
             </a:r>
           </a:p>
-          <a:p>
-            <a:endParaRPr lang="en-US" dirty="0"/>
-          </a:p>
         </p:txBody>
       </p:sp>
       <p:sp>
@@ -828,7 +804,7 @@
             <a:spLocks noGrp="1"/>
           </p:cNvSpPr>
           <p:nvPr>
-            <p:ph type="sldNum" sz="quarter" idx="5"/>
+            <p:ph type="sldNum" sz="quarter" idx="10"/>
           </p:nvPr>
         </p:nvSpPr>
         <p:spPr/>
@@ -837,23 +813,15 @@
           <a:lstStyle/>
           <a:p>
             <a:fld id="{18BDFEC3-8487-43E8-A154-7C12CBC1FFF2}" type="slidenum">
-              <a:rPr lang="en-US" smtClean="0"/>
-              <a:t>1</a:t>
+              <a:rPr lang="en-US"/>
+              <a:t>3</a:t>
             </a:fld>
             <a:endParaRPr lang="en-US"/>
           </a:p>
         </p:txBody>
       </p:sp>
     </p:spTree>
-    <p:extLst>
-      <p:ext uri="{BB962C8B-B14F-4D97-AF65-F5344CB8AC3E}">
-        <p14:creationId xmlns:p14="http://schemas.microsoft.com/office/powerpoint/2010/main" val="2996944276"/>
-      </p:ext>
-    </p:extLst>
   </p:cSld>
-  <p:clrMapOvr>
-    <a:masterClrMapping/>
-  </p:clrMapOvr>
 </p:notes>
 </file>
 
@@ -901,170 +869,169 @@
           <a:bodyPr/>
           <a:lstStyle/>
           <a:p>
-            <a:pPr marL="0" lvl="0" indent="0">
-              <a:buNone/>
-            </a:pPr>
-            <a:r>
+            <a:pPr lvl="0" indent="0" marL="0">
+              <a:buNone/>
+            </a:pPr>
+            <a:r>
+              <a:rPr/>
               <a:t>Purpose: “Evaluate AI outputs quickly and decide: refine, re‑prompt, or start over.”</a:t>
             </a:r>
           </a:p>
           <a:p>
-            <a:pPr marL="0" lvl="0" indent="0">
-              <a:buNone/>
-            </a:pPr>
-            <a:endParaRPr/>
-          </a:p>
-          <a:p>
-            <a:pPr marL="0" lvl="0" indent="0">
-              <a:buNone/>
-            </a:pPr>
-            <a:r>
+            <a:pPr lvl="0" indent="0" marL="0">
+              <a:buNone/>
+            </a:pPr>
+          </a:p>
+          <a:p>
+            <a:pPr lvl="0" indent="0" marL="0">
+              <a:buNone/>
+            </a:pPr>
+            <a:r>
+              <a:rPr/>
               <a:t>Core instructions:</a:t>
             </a:r>
           </a:p>
           <a:p>
-            <a:pPr marL="0" lvl="0" indent="0">
-              <a:buNone/>
-            </a:pPr>
-            <a:endParaRPr/>
-          </a:p>
-          <a:p>
-            <a:pPr marL="342900" lvl="0" indent="-342900">
+            <a:pPr lvl="0" indent="0" marL="0">
+              <a:buNone/>
+            </a:pPr>
+          </a:p>
+          <a:p>
+            <a:pPr lvl="0" indent="-342900" marL="342900">
               <a:buAutoNum type="arabicPeriod"/>
             </a:pPr>
             <a:r>
+              <a:rPr/>
               <a:t>Pick one AI output from Activities 1–2.</a:t>
             </a:r>
           </a:p>
           <a:p>
-            <a:pPr marL="0" lvl="0" indent="0">
-              <a:buNone/>
-            </a:pPr>
-            <a:endParaRPr/>
-          </a:p>
-          <a:p>
-            <a:pPr marL="342900" lvl="0" indent="-342900">
+            <a:pPr lvl="0" indent="0" marL="0">
+              <a:buNone/>
+            </a:pPr>
+          </a:p>
+          <a:p>
+            <a:pPr lvl="0" indent="-342900" marL="342900">
               <a:buAutoNum type="arabicPeriod"/>
             </a:pPr>
             <a:r>
+              <a:rPr/>
               <a:t>For each step, note one strength + one concern:</a:t>
             </a:r>
           </a:p>
           <a:p>
-            <a:pPr marL="0" lvl="0" indent="0">
-              <a:buNone/>
-            </a:pPr>
-            <a:endParaRPr/>
+            <a:pPr lvl="0" indent="0" marL="0">
+              <a:buNone/>
+            </a:pPr>
           </a:p>
           <a:p>
             <a:pPr lvl="1"/>
             <a:r>
+              <a:rPr/>
               <a:t>Purpose, Plausibility, Evidence, Stakes, Action.</a:t>
             </a:r>
           </a:p>
           <a:p>
-            <a:pPr marL="0" lvl="0" indent="0">
-              <a:buNone/>
-            </a:pPr>
-            <a:endParaRPr/>
-          </a:p>
-          <a:p>
-            <a:pPr marL="342900" lvl="0" indent="-342900">
+            <a:pPr lvl="0" indent="0" marL="0">
+              <a:buNone/>
+            </a:pPr>
+          </a:p>
+          <a:p>
+            <a:pPr lvl="0" indent="-342900" marL="342900">
               <a:buAutoNum type="arabicPeriod"/>
             </a:pPr>
             <a:r>
+              <a:rPr/>
               <a:t>Decide:</a:t>
             </a:r>
           </a:p>
           <a:p>
-            <a:pPr marL="0" lvl="0" indent="0">
-              <a:buNone/>
-            </a:pPr>
-            <a:endParaRPr/>
+            <a:pPr lvl="0" indent="0" marL="0">
+              <a:buNone/>
+            </a:pPr>
           </a:p>
           <a:p>
             <a:pPr lvl="1"/>
             <a:r>
+              <a:rPr/>
               <a:t>Keep and lightly edit?</a:t>
             </a:r>
             <a:br/>
-            <a:endParaRPr/>
-          </a:p>
-          <a:p>
-            <a:pPr marL="0" lvl="0" indent="0">
-              <a:buNone/>
-            </a:pPr>
-            <a:endParaRPr/>
+          </a:p>
+          <a:p>
+            <a:pPr lvl="0" indent="0" marL="0">
+              <a:buNone/>
+            </a:pPr>
           </a:p>
           <a:p>
             <a:pPr lvl="1"/>
             <a:r>
+              <a:rPr/>
               <a:t>Re‑prompt in a new direction?</a:t>
             </a:r>
             <a:br/>
-            <a:endParaRPr/>
-          </a:p>
-          <a:p>
-            <a:pPr marL="0" lvl="0" indent="0">
-              <a:buNone/>
-            </a:pPr>
-            <a:endParaRPr/>
+          </a:p>
+          <a:p>
+            <a:pPr lvl="0" indent="0" marL="0">
+              <a:buNone/>
+            </a:pPr>
           </a:p>
           <a:p>
             <a:pPr lvl="1"/>
             <a:r>
+              <a:rPr/>
               <a:t>Discard and start fresh?</a:t>
             </a:r>
           </a:p>
           <a:p>
-            <a:pPr marL="0" lvl="0" indent="0">
-              <a:buNone/>
-            </a:pPr>
-            <a:endParaRPr/>
-          </a:p>
-          <a:p>
-            <a:pPr marL="0" lvl="0" indent="0">
-              <a:buNone/>
-            </a:pPr>
-            <a:r>
+            <a:pPr lvl="0" indent="0" marL="0">
+              <a:buNone/>
+            </a:pPr>
+          </a:p>
+          <a:p>
+            <a:pPr lvl="0" indent="0" marL="0">
+              <a:buNone/>
+            </a:pPr>
+            <a:r>
+              <a:rPr/>
               <a:t>Include a small 5‑column table they can scribble in.</a:t>
             </a:r>
           </a:p>
           <a:p>
-            <a:pPr marL="0" lvl="0" indent="0">
-              <a:buNone/>
-            </a:pPr>
-            <a:endParaRPr/>
-          </a:p>
-          <a:p>
-            <a:pPr marL="0" lvl="0" indent="0">
-              <a:buNone/>
-            </a:pPr>
-            <a:r>
+            <a:pPr lvl="0" indent="0" marL="0">
+              <a:buNone/>
+            </a:pPr>
+          </a:p>
+          <a:p>
+            <a:pPr lvl="0" indent="0" marL="0">
+              <a:buNone/>
+            </a:pPr>
+            <a:r>
+              <a:rPr/>
               <a:t>Variants box:</a:t>
             </a:r>
           </a:p>
           <a:p>
-            <a:pPr marL="0" lvl="0" indent="0">
-              <a:buNone/>
-            </a:pPr>
-            <a:endParaRPr/>
+            <a:pPr lvl="0" indent="0" marL="0">
+              <a:buNone/>
+            </a:pPr>
           </a:p>
           <a:p>
             <a:pPr lvl="0"/>
             <a:r>
+              <a:rPr/>
               <a:t>Researchers: critique an AI‑generated abstract, “related work” section, or summary.</a:t>
             </a:r>
           </a:p>
           <a:p>
-            <a:pPr marL="0" lvl="0" indent="0">
-              <a:buNone/>
-            </a:pPr>
-            <a:endParaRPr/>
+            <a:pPr lvl="0" indent="0" marL="0">
+              <a:buNone/>
+            </a:pPr>
           </a:p>
           <a:p>
             <a:pPr lvl="0"/>
             <a:r>
+              <a:rPr/>
               <a:t>Professional staff: critique an AI‑generated student email, FAQ, or web page.</a:t>
             </a:r>
           </a:p>
@@ -1087,7 +1054,7 @@
           <a:p>
             <a:fld id="{18BDFEC3-8487-43E8-A154-7C12CBC1FFF2}" type="slidenum">
               <a:rPr lang="en-US"/>
-              <a:t>10</a:t>
+              <a:t>12</a:t>
             </a:fld>
             <a:endParaRPr lang="en-US"/>
           </a:p>
@@ -1095,9 +1062,6 @@
       </p:sp>
     </p:spTree>
   </p:cSld>
-  <p:clrMapOvr>
-    <a:masterClrMapping/>
-  </p:clrMapOvr>
 </p:notes>
 </file>
 
@@ -1145,194 +1109,193 @@
           <a:bodyPr/>
           <a:lstStyle/>
           <a:p>
-            <a:pPr marL="0" lvl="0" indent="0">
-              <a:buNone/>
-            </a:pPr>
-            <a:r>
+            <a:pPr lvl="0" indent="0" marL="0">
+              <a:buNone/>
+            </a:pPr>
+            <a:r>
+              <a:rPr/>
               <a:t>Purpose: “Use AI to stress‑test an assessment (or parallel task) and sketch small redesigns.”</a:t>
             </a:r>
           </a:p>
           <a:p>
-            <a:pPr marL="0" lvl="0" indent="0">
-              <a:buNone/>
-            </a:pPr>
-            <a:endParaRPr/>
-          </a:p>
-          <a:p>
-            <a:pPr marL="0" lvl="0" indent="0">
-              <a:buNone/>
-            </a:pPr>
-            <a:r>
+            <a:pPr lvl="0" indent="0" marL="0">
+              <a:buNone/>
+            </a:pPr>
+          </a:p>
+          <a:p>
+            <a:pPr lvl="0" indent="0" marL="0">
+              <a:buNone/>
+            </a:pPr>
+            <a:r>
+              <a:rPr/>
               <a:t>Core instructions:</a:t>
             </a:r>
           </a:p>
           <a:p>
-            <a:pPr marL="0" lvl="0" indent="0">
-              <a:buNone/>
-            </a:pPr>
-            <a:endParaRPr/>
-          </a:p>
-          <a:p>
-            <a:pPr marL="342900" lvl="0" indent="-342900">
+            <a:pPr lvl="0" indent="0" marL="0">
+              <a:buNone/>
+            </a:pPr>
+          </a:p>
+          <a:p>
+            <a:pPr lvl="0" indent="-342900" marL="342900">
               <a:buAutoNum type="arabicPeriod"/>
             </a:pPr>
             <a:r>
+              <a:rPr/>
               <a:t>Choose a task:</a:t>
             </a:r>
           </a:p>
           <a:p>
-            <a:pPr marL="0" lvl="0" indent="0">
-              <a:buNone/>
-            </a:pPr>
-            <a:endParaRPr/>
+            <a:pPr lvl="0" indent="0" marL="0">
+              <a:buNone/>
+            </a:pPr>
           </a:p>
           <a:p>
             <a:pPr lvl="1"/>
             <a:r>
+              <a:rPr/>
               <a:t>Your own assessment, or a provided example.</a:t>
             </a:r>
           </a:p>
           <a:p>
-            <a:pPr marL="0" lvl="0" indent="0">
-              <a:buNone/>
-            </a:pPr>
-            <a:endParaRPr/>
-          </a:p>
-          <a:p>
-            <a:pPr marL="342900" lvl="0" indent="-342900">
+            <a:pPr lvl="0" indent="0" marL="0">
+              <a:buNone/>
+            </a:pPr>
+          </a:p>
+          <a:p>
+            <a:pPr lvl="0" indent="-342900" marL="342900">
               <a:buAutoNum type="arabicPeriod"/>
             </a:pPr>
             <a:r>
+              <a:rPr/>
               <a:t>Step 1 – Completion:</a:t>
             </a:r>
           </a:p>
           <a:p>
-            <a:pPr marL="0" lvl="0" indent="0">
-              <a:buNone/>
-            </a:pPr>
-            <a:endParaRPr/>
+            <a:pPr lvl="0" indent="0" marL="0">
+              <a:buNone/>
+            </a:pPr>
           </a:p>
           <a:p>
             <a:pPr lvl="1"/>
             <a:r>
+              <a:rPr/>
               <a:t>(If AI available) Ask AI to complete the task as a strong student.</a:t>
             </a:r>
           </a:p>
           <a:p>
-            <a:pPr marL="0" lvl="0" indent="0">
-              <a:buNone/>
-            </a:pPr>
-            <a:endParaRPr/>
-          </a:p>
-          <a:p>
-            <a:pPr marL="342900" lvl="0" indent="-342900">
+            <a:pPr lvl="0" indent="0" marL="0">
+              <a:buNone/>
+            </a:pPr>
+          </a:p>
+          <a:p>
+            <a:pPr lvl="0" indent="-342900" marL="342900">
               <a:buAutoNum type="arabicPeriod"/>
             </a:pPr>
             <a:r>
+              <a:rPr/>
               <a:t>Step 2 – Critique:</a:t>
             </a:r>
           </a:p>
           <a:p>
-            <a:pPr marL="0" lvl="0" indent="0">
-              <a:buNone/>
-            </a:pPr>
-            <a:endParaRPr/>
+            <a:pPr lvl="0" indent="0" marL="0">
+              <a:buNone/>
+            </a:pPr>
           </a:p>
           <a:p>
             <a:pPr lvl="1"/>
             <a:r>
+              <a:rPr/>
               <a:t>Where does the AI answer look like a pass/HD?</a:t>
             </a:r>
             <a:br/>
-            <a:endParaRPr/>
-          </a:p>
-          <a:p>
-            <a:pPr marL="0" lvl="0" indent="0">
-              <a:buNone/>
-            </a:pPr>
-            <a:endParaRPr/>
+          </a:p>
+          <a:p>
+            <a:pPr lvl="0" indent="0" marL="0">
+              <a:buNone/>
+            </a:pPr>
           </a:p>
           <a:p>
             <a:pPr lvl="1"/>
             <a:r>
+              <a:rPr/>
               <a:t>Where is student thinking/judgement invisible?</a:t>
             </a:r>
             <a:br/>
-            <a:endParaRPr/>
-          </a:p>
-          <a:p>
-            <a:pPr marL="0" lvl="0" indent="0">
-              <a:buNone/>
-            </a:pPr>
-            <a:endParaRPr/>
+          </a:p>
+          <a:p>
+            <a:pPr lvl="0" indent="0" marL="0">
+              <a:buNone/>
+            </a:pPr>
           </a:p>
           <a:p>
             <a:pPr lvl="1"/>
             <a:r>
+              <a:rPr/>
               <a:t>What worries you most?</a:t>
             </a:r>
           </a:p>
           <a:p>
-            <a:pPr marL="0" lvl="0" indent="0">
-              <a:buNone/>
-            </a:pPr>
-            <a:endParaRPr/>
-          </a:p>
-          <a:p>
-            <a:pPr marL="342900" lvl="0" indent="-342900">
+            <a:pPr lvl="0" indent="0" marL="0">
+              <a:buNone/>
+            </a:pPr>
+          </a:p>
+          <a:p>
+            <a:pPr lvl="0" indent="-342900" marL="342900">
               <a:buAutoNum type="arabicPeriod"/>
             </a:pPr>
             <a:r>
+              <a:rPr/>
               <a:t>Step 3 – Redesign:</a:t>
             </a:r>
           </a:p>
           <a:p>
-            <a:pPr marL="0" lvl="0" indent="0">
-              <a:buNone/>
-            </a:pPr>
-            <a:endParaRPr/>
+            <a:pPr lvl="0" indent="0" marL="0">
+              <a:buNone/>
+            </a:pPr>
           </a:p>
           <a:p>
             <a:pPr lvl="1"/>
             <a:r>
+              <a:rPr/>
               <a:t>Brainstorm 2–3 tweaks that would make student process more visible and allow transparent, limited AI use (e.g., in‑class element, AI use log, personal context).</a:t>
             </a:r>
           </a:p>
           <a:p>
-            <a:pPr marL="0" lvl="0" indent="0">
-              <a:buNone/>
-            </a:pPr>
-            <a:endParaRPr/>
-          </a:p>
-          <a:p>
-            <a:pPr marL="0" lvl="0" indent="0">
-              <a:buNone/>
-            </a:pPr>
-            <a:r>
+            <a:pPr lvl="0" indent="0" marL="0">
+              <a:buNone/>
+            </a:pPr>
+          </a:p>
+          <a:p>
+            <a:pPr lvl="0" indent="0" marL="0">
+              <a:buNone/>
+            </a:pPr>
+            <a:r>
+              <a:rPr/>
               <a:t>Variants box:</a:t>
             </a:r>
           </a:p>
           <a:p>
-            <a:pPr marL="0" lvl="0" indent="0">
-              <a:buNone/>
-            </a:pPr>
-            <a:endParaRPr/>
+            <a:pPr lvl="0" indent="0" marL="0">
+              <a:buNone/>
+            </a:pPr>
           </a:p>
           <a:p>
             <a:pPr lvl="0"/>
             <a:r>
+              <a:rPr/>
               <a:t>Researchers: stress‑test a grant section, data‑collection plan, or “impact” statement.</a:t>
             </a:r>
           </a:p>
           <a:p>
-            <a:pPr marL="0" lvl="0" indent="0">
-              <a:buNone/>
-            </a:pPr>
-            <a:endParaRPr/>
+            <a:pPr lvl="0" indent="0" marL="0">
+              <a:buNone/>
+            </a:pPr>
           </a:p>
           <a:p>
             <a:pPr lvl="0"/>
             <a:r>
+              <a:rPr/>
               <a:t>Professional staff: stress‑test a process description or comms piece (e.g., special consideration instructions).</a:t>
             </a:r>
           </a:p>
@@ -1355,7 +1318,7 @@
           <a:p>
             <a:fld id="{18BDFEC3-8487-43E8-A154-7C12CBC1FFF2}" type="slidenum">
               <a:rPr lang="en-US"/>
-              <a:t>11</a:t>
+              <a:t>13</a:t>
             </a:fld>
             <a:endParaRPr lang="en-US"/>
           </a:p>
@@ -1363,9 +1326,6 @@
       </p:sp>
     </p:spTree>
   </p:cSld>
-  <p:clrMapOvr>
-    <a:masterClrMapping/>
-  </p:clrMapOvr>
 </p:notes>
 </file>
 
@@ -1413,115 +1373,111 @@
           <a:bodyPr/>
           <a:lstStyle/>
           <a:p>
-            <a:pPr marL="0" lvl="0" indent="0">
-              <a:buNone/>
-            </a:pPr>
-            <a:r>
+            <a:pPr lvl="0" indent="0" marL="0">
+              <a:buNone/>
+            </a:pPr>
+            <a:r>
+              <a:rPr/>
               <a:t>Purpose: “Make one small, realistic commitment about safe AI use in your context.”</a:t>
             </a:r>
           </a:p>
           <a:p>
-            <a:pPr marL="0" lvl="0" indent="0">
-              <a:buNone/>
-            </a:pPr>
-            <a:endParaRPr/>
-          </a:p>
-          <a:p>
-            <a:pPr marL="0" lvl="0" indent="0">
-              <a:buNone/>
-            </a:pPr>
-            <a:r>
+            <a:pPr lvl="0" indent="0" marL="0">
+              <a:buNone/>
+            </a:pPr>
+          </a:p>
+          <a:p>
+            <a:pPr lvl="0" indent="0" marL="0">
+              <a:buNone/>
+            </a:pPr>
+            <a:r>
+              <a:rPr/>
               <a:t>“Secure, Safe, Sustainable AI – Why it matters”</a:t>
             </a:r>
           </a:p>
           <a:p>
-            <a:pPr marL="0" lvl="0" indent="0">
-              <a:buNone/>
-            </a:pPr>
-            <a:endParaRPr/>
+            <a:pPr lvl="0" indent="0" marL="0">
+              <a:buNone/>
+            </a:pPr>
           </a:p>
           <a:p>
             <a:pPr lvl="0"/>
             <a:r>
+              <a:rPr/>
               <a:t>We now have enterprise Copilot (data protection) and tools like Turnitin Clarity.</a:t>
             </a:r>
             <a:br/>
-            <a:endParaRPr/>
-          </a:p>
-          <a:p>
-            <a:pPr marL="0" lvl="0" indent="0">
-              <a:buNone/>
-            </a:pPr>
-            <a:endParaRPr/>
+          </a:p>
+          <a:p>
+            <a:pPr lvl="0" indent="0" marL="0">
+              <a:buNone/>
+            </a:pPr>
           </a:p>
           <a:p>
             <a:pPr lvl="0"/>
             <a:r>
+              <a:rPr/>
               <a:t>Security ≠ safety ≠ good pedagogy.</a:t>
             </a:r>
             <a:br/>
-            <a:endParaRPr/>
-          </a:p>
-          <a:p>
-            <a:pPr marL="0" lvl="0" indent="0">
-              <a:buNone/>
-            </a:pPr>
-            <a:endParaRPr/>
+          </a:p>
+          <a:p>
+            <a:pPr lvl="0" indent="0" marL="0">
+              <a:buNone/>
+            </a:pPr>
           </a:p>
           <a:p>
             <a:pPr lvl="0"/>
             <a:r>
+              <a:rPr/>
               <a:t>We still need simple, explicit norms for:</a:t>
             </a:r>
           </a:p>
           <a:p>
-            <a:pPr marL="0" lvl="0" indent="0">
-              <a:buNone/>
-            </a:pPr>
-            <a:endParaRPr/>
+            <a:pPr lvl="0" indent="0" marL="0">
+              <a:buNone/>
+            </a:pPr>
           </a:p>
           <a:p>
             <a:pPr lvl="1"/>
             <a:r>
+              <a:rPr/>
               <a:t>how we use AI in teaching</a:t>
             </a:r>
             <a:br/>
-            <a:endParaRPr/>
-          </a:p>
-          <a:p>
-            <a:pPr marL="0" lvl="0" indent="0">
-              <a:buNone/>
-            </a:pPr>
-            <a:endParaRPr/>
+          </a:p>
+          <a:p>
+            <a:pPr lvl="0" indent="0" marL="0">
+              <a:buNone/>
+            </a:pPr>
           </a:p>
           <a:p>
             <a:pPr lvl="1"/>
             <a:r>
+              <a:rPr/>
               <a:t>what we ask / allow from students</a:t>
             </a:r>
             <a:br/>
-            <a:endParaRPr/>
-          </a:p>
-          <a:p>
-            <a:pPr marL="0" lvl="0" indent="0">
-              <a:buNone/>
-            </a:pPr>
-            <a:endParaRPr/>
+          </a:p>
+          <a:p>
+            <a:pPr lvl="0" indent="0" marL="0">
+              <a:buNone/>
+            </a:pPr>
           </a:p>
           <a:p>
             <a:pPr lvl="1"/>
             <a:r>
+              <a:rPr/>
               <a:t>how this aligns with Assessment 2030 (human irreplaceability).</a:t>
             </a:r>
           </a:p>
           <a:p>
-            <a:pPr marL="0" lvl="0" indent="0">
-              <a:buNone/>
-            </a:pPr>
-            <a:endParaRPr/>
-          </a:p>
-          <a:p>
-            <a:pPr marL="1270000" lvl="0" indent="0">
+            <a:pPr lvl="0" indent="0" marL="0">
+              <a:buNone/>
+            </a:pPr>
+          </a:p>
+          <a:p>
+            <a:pPr lvl="0" indent="0" marL="1270000">
               <a:buNone/>
             </a:pPr>
             <a:r>
@@ -1530,236 +1486,232 @@
             </a:r>
           </a:p>
           <a:p>
-            <a:pPr marL="0" lvl="0" indent="0">
-              <a:buNone/>
-            </a:pPr>
-            <a:endParaRPr sz="2000"/>
-          </a:p>
-          <a:p>
-            <a:pPr marL="0" lvl="0" indent="0">
-              <a:buNone/>
-            </a:pPr>
-            <a:r>
+            <a:pPr lvl="0" indent="0" marL="0">
+              <a:buNone/>
+            </a:pPr>
+          </a:p>
+          <a:p>
+            <a:pPr lvl="0" indent="0" marL="0">
+              <a:buNone/>
+            </a:pPr>
+            <a:r>
+              <a:rPr/>
               <a:t>Core instructions:</a:t>
             </a:r>
           </a:p>
           <a:p>
-            <a:pPr marL="0" lvl="0" indent="0">
-              <a:buNone/>
-            </a:pPr>
-            <a:endParaRPr/>
-          </a:p>
-          <a:p>
-            <a:pPr marL="342900" lvl="0" indent="-342900">
+            <a:pPr lvl="0" indent="0" marL="0">
+              <a:buNone/>
+            </a:pPr>
+          </a:p>
+          <a:p>
+            <a:pPr lvl="0" indent="-342900" marL="342900">
               <a:buAutoNum type="arabicPeriod"/>
             </a:pPr>
             <a:r>
+              <a:rPr/>
               <a:t>Choose one micro‑task:</a:t>
             </a:r>
           </a:p>
           <a:p>
-            <a:pPr marL="0" lvl="0" indent="0">
-              <a:buNone/>
-            </a:pPr>
-            <a:endParaRPr/>
+            <a:pPr lvl="0" indent="0" marL="0">
+              <a:buNone/>
+            </a:pPr>
           </a:p>
           <a:p>
             <a:pPr lvl="1"/>
             <a:r>
+              <a:rPr/>
               <a:t>A short “AI use in this unit/team” guideline,</a:t>
             </a:r>
             <a:br/>
-            <a:endParaRPr/>
-          </a:p>
-          <a:p>
-            <a:pPr marL="0" lvl="0" indent="0">
-              <a:buNone/>
-            </a:pPr>
-            <a:endParaRPr/>
+          </a:p>
+          <a:p>
+            <a:pPr lvl="0" indent="0" marL="0">
+              <a:buNone/>
+            </a:pPr>
           </a:p>
           <a:p>
             <a:pPr lvl="1"/>
             <a:r>
+              <a:rPr/>
               <a:t>A risk/benefit check for one planned AI use,</a:t>
             </a:r>
             <a:br/>
-            <a:endParaRPr/>
-          </a:p>
-          <a:p>
-            <a:pPr marL="0" lvl="0" indent="0">
-              <a:buNone/>
-            </a:pPr>
-            <a:endParaRPr/>
+          </a:p>
+          <a:p>
+            <a:pPr lvl="0" indent="0" marL="0">
+              <a:buNone/>
+            </a:pPr>
           </a:p>
           <a:p>
             <a:pPr lvl="1"/>
             <a:r>
+              <a:rPr/>
               <a:t>A Week‑1 statement for students/staff.</a:t>
             </a:r>
           </a:p>
           <a:p>
-            <a:pPr marL="0" lvl="0" indent="0">
-              <a:buNone/>
-            </a:pPr>
-            <a:endParaRPr/>
-          </a:p>
-          <a:p>
-            <a:pPr marL="342900" lvl="0" indent="-342900">
+            <a:pPr lvl="0" indent="0" marL="0">
+              <a:buNone/>
+            </a:pPr>
+          </a:p>
+          <a:p>
+            <a:pPr lvl="0" indent="-342900" marL="342900">
               <a:buAutoNum type="arabicPeriod"/>
             </a:pPr>
             <a:r>
+              <a:rPr/>
               <a:t>Use AI to draft it (or write by hand).</a:t>
             </a:r>
           </a:p>
           <a:p>
-            <a:pPr marL="0" lvl="0" indent="0">
-              <a:buNone/>
-            </a:pPr>
-            <a:endParaRPr/>
-          </a:p>
-          <a:p>
-            <a:pPr marL="342900" lvl="0" indent="-342900">
+            <a:pPr lvl="0" indent="0" marL="0">
+              <a:buNone/>
+            </a:pPr>
+          </a:p>
+          <a:p>
+            <a:pPr lvl="0" indent="-342900" marL="342900">
               <a:buAutoNum type="arabicPeriod"/>
             </a:pPr>
             <a:r>
+              <a:rPr/>
               <a:t>Edit to:</a:t>
             </a:r>
           </a:p>
           <a:p>
-            <a:pPr marL="0" lvl="0" indent="0">
-              <a:buNone/>
-            </a:pPr>
-            <a:endParaRPr/>
+            <a:pPr lvl="0" indent="0" marL="0">
+              <a:buNone/>
+            </a:pPr>
           </a:p>
           <a:p>
             <a:pPr lvl="1"/>
             <a:r>
+              <a:rPr/>
               <a:t>Fit your tone,</a:t>
             </a:r>
             <a:br/>
-            <a:endParaRPr/>
-          </a:p>
-          <a:p>
-            <a:pPr marL="0" lvl="0" indent="0">
-              <a:buNone/>
-            </a:pPr>
-            <a:endParaRPr/>
+          </a:p>
+          <a:p>
+            <a:pPr lvl="0" indent="0" marL="0">
+              <a:buNone/>
+            </a:pPr>
           </a:p>
           <a:p>
             <a:pPr lvl="1"/>
             <a:r>
+              <a:rPr/>
               <a:t>Align with policy,</a:t>
             </a:r>
             <a:br/>
-            <a:endParaRPr/>
-          </a:p>
-          <a:p>
-            <a:pPr marL="0" lvl="0" indent="0">
-              <a:buNone/>
-            </a:pPr>
-            <a:endParaRPr/>
+          </a:p>
+          <a:p>
+            <a:pPr lvl="0" indent="0" marL="0">
+              <a:buNone/>
+            </a:pPr>
           </a:p>
           <a:p>
             <a:pPr lvl="1"/>
             <a:r>
+              <a:rPr/>
               <a:t>Emphasise human judgement and transparency.</a:t>
             </a:r>
           </a:p>
           <a:p>
-            <a:pPr marL="0" lvl="0" indent="0">
-              <a:buNone/>
-            </a:pPr>
-            <a:endParaRPr/>
-          </a:p>
-          <a:p>
-            <a:pPr marL="0" lvl="0" indent="0">
-              <a:buNone/>
-            </a:pPr>
-            <a:r>
+            <a:pPr lvl="0" indent="0" marL="0">
+              <a:buNone/>
+            </a:pPr>
+          </a:p>
+          <a:p>
+            <a:pPr lvl="0" indent="0" marL="0">
+              <a:buNone/>
+            </a:pPr>
+            <a:r>
+              <a:rPr/>
               <a:t>Variants box:</a:t>
             </a:r>
           </a:p>
           <a:p>
-            <a:pPr marL="0" lvl="0" indent="0">
-              <a:buNone/>
-            </a:pPr>
-            <a:endParaRPr/>
+            <a:pPr lvl="0" indent="0" marL="0">
+              <a:buNone/>
+            </a:pPr>
           </a:p>
           <a:p>
             <a:pPr lvl="0"/>
             <a:r>
+              <a:rPr/>
               <a:t>Researchers: “AI in this project” statement; risk check for AI in data analysis or writing.</a:t>
             </a:r>
           </a:p>
           <a:p>
-            <a:pPr marL="0" lvl="0" indent="0">
-              <a:buNone/>
-            </a:pPr>
-            <a:endParaRPr/>
+            <a:pPr lvl="0" indent="0" marL="0">
+              <a:buNone/>
+            </a:pPr>
           </a:p>
           <a:p>
             <a:pPr lvl="0"/>
             <a:r>
+              <a:rPr/>
               <a:t>Professional staff: “AI in this team” guideline; student‑facing statement about how you’ll (not) use AI on their data.</a:t>
             </a:r>
           </a:p>
           <a:p>
-            <a:pPr marL="0" lvl="0" indent="0">
-              <a:buNone/>
-            </a:pPr>
-            <a:endParaRPr/>
+            <a:pPr lvl="0" indent="0" marL="0">
+              <a:buNone/>
+            </a:pPr>
           </a:p>
           <a:p>
             <a:pPr lvl="0"/>
             <a:r>
+              <a:rPr/>
               <a:t>If the morning session already had heavy discussion on privacy/ethics, you can:</a:t>
             </a:r>
           </a:p>
           <a:p>
-            <a:pPr marL="0" lvl="0" indent="0">
-              <a:buNone/>
-            </a:pPr>
-            <a:endParaRPr/>
+            <a:pPr lvl="0" indent="0" marL="0">
+              <a:buNone/>
+            </a:pPr>
           </a:p>
           <a:p>
             <a:pPr lvl="1"/>
             <a:r>
+              <a:rPr/>
               <a:t>Shrink Activity 5 to a 5–7 minute micro‑task, not a big new block.</a:t>
             </a:r>
           </a:p>
           <a:p>
-            <a:pPr marL="0" lvl="0" indent="0">
-              <a:buNone/>
-            </a:pPr>
-            <a:endParaRPr/>
+            <a:pPr lvl="0" indent="0" marL="0">
+              <a:buNone/>
+            </a:pPr>
           </a:p>
           <a:p>
             <a:pPr lvl="1"/>
             <a:r>
+              <a:rPr/>
               <a:t>Focus on one concrete output:</a:t>
             </a:r>
           </a:p>
           <a:p>
-            <a:pPr marL="0" lvl="0" indent="0">
-              <a:buNone/>
-            </a:pPr>
-            <a:endParaRPr/>
+            <a:pPr lvl="0" indent="0" marL="0">
+              <a:buNone/>
+            </a:pPr>
           </a:p>
           <a:p>
             <a:pPr lvl="2"/>
             <a:r>
+              <a:rPr/>
               <a:t>Option 1 (if they’re fresh): run the 3‑option micro‑task we designed (guideline, risk check, Week‑1 statement).</a:t>
             </a:r>
           </a:p>
           <a:p>
-            <a:pPr marL="0" lvl="0" indent="0">
-              <a:buNone/>
-            </a:pPr>
-            <a:endParaRPr/>
+            <a:pPr lvl="0" indent="0" marL="0">
+              <a:buNone/>
+            </a:pPr>
           </a:p>
           <a:p>
             <a:pPr lvl="2"/>
             <a:r>
+              <a:rPr/>
               <a:t>Option 2 (if they’re exhausted): just do one thing: &gt; “Take 3 minutes to draft a single sentence you could say to your students in Week 1 about how AI may be used in this unit, in a way that supports human judgement and Assessment 2030. You can use AI to help, or just write it.”</a:t>
             </a:r>
           </a:p>
@@ -1782,7 +1734,7 @@
           <a:p>
             <a:fld id="{18BDFEC3-8487-43E8-A154-7C12CBC1FFF2}" type="slidenum">
               <a:rPr lang="en-US"/>
-              <a:t>12</a:t>
+              <a:t>14</a:t>
             </a:fld>
             <a:endParaRPr lang="en-US"/>
           </a:p>
@@ -1790,9 +1742,6 @@
       </p:sp>
     </p:spTree>
   </p:cSld>
-  <p:clrMapOvr>
-    <a:masterClrMapping/>
-  </p:clrMapOvr>
 </p:notes>
 </file>
 
@@ -1840,250 +1789,228 @@
           <a:bodyPr/>
           <a:lstStyle/>
           <a:p>
-            <a:pPr marL="0" lvl="0" indent="0">
-              <a:buNone/>
-            </a:pPr>
-            <a:r>
-              <a:rPr b="1" dirty="0"/>
+            <a:pPr lvl="0" indent="0" marL="0">
+              <a:buNone/>
+            </a:pPr>
+            <a:r>
+              <a:rPr b="1"/>
               <a:t>Suggested closing thread:</a:t>
             </a:r>
           </a:p>
           <a:p>
-            <a:pPr marL="0" lvl="0" indent="0">
-              <a:buNone/>
-            </a:pPr>
-            <a:endParaRPr b="1" dirty="0"/>
+            <a:pPr lvl="0" indent="0" marL="0">
+              <a:buNone/>
+            </a:pPr>
           </a:p>
           <a:p>
             <a:pPr lvl="0"/>
             <a:r>
-              <a:rPr b="1" dirty="0"/>
+              <a:rPr b="1"/>
               <a:t>Recap the journey</a:t>
             </a:r>
             <a:r>
-              <a:rPr dirty="0"/>
+              <a:rPr/>
               <a:t> very briefly:</a:t>
             </a:r>
           </a:p>
           <a:p>
-            <a:pPr marL="0" lvl="0" indent="0">
-              <a:buNone/>
-            </a:pPr>
-            <a:endParaRPr dirty="0"/>
+            <a:pPr lvl="0" indent="0" marL="0">
+              <a:buNone/>
+            </a:pPr>
           </a:p>
           <a:p>
             <a:pPr lvl="1"/>
             <a:r>
-              <a:rPr dirty="0"/>
+              <a:rPr/>
               <a:t>“We started by seeing how AI can </a:t>
             </a:r>
             <a:r>
-              <a:rPr b="1" dirty="0"/>
+              <a:rPr b="1"/>
               <a:t>automate tedious tasks</a:t>
             </a:r>
             <a:r>
-              <a:rPr dirty="0"/>
+              <a:rPr/>
               <a:t> and draft first versions for us.</a:t>
             </a:r>
-            <a:br>
-              <a:rPr dirty="0"/>
-            </a:br>
-            <a:r>
-              <a:rPr dirty="0"/>
+            <a:br/>
+            <a:r>
+              <a:rPr/>
               <a:t>We then worked on </a:t>
             </a:r>
             <a:r>
-              <a:rPr b="1" dirty="0"/>
+              <a:rPr b="1"/>
               <a:t>designing better prompts</a:t>
             </a:r>
             <a:r>
-              <a:rPr dirty="0"/>
+              <a:rPr/>
               <a:t>, </a:t>
             </a:r>
             <a:r>
-              <a:rPr b="1" dirty="0"/>
+              <a:rPr b="1"/>
               <a:t>critiquing AI outputs</a:t>
             </a:r>
             <a:r>
-              <a:rPr dirty="0"/>
+              <a:rPr/>
               <a:t>, and finally </a:t>
             </a:r>
             <a:r>
-              <a:rPr b="1" dirty="0"/>
+              <a:rPr b="1"/>
               <a:t>stress‑testing our assessments</a:t>
             </a:r>
             <a:r>
-              <a:rPr dirty="0"/>
+              <a:rPr/>
               <a:t> and thinking about </a:t>
             </a:r>
             <a:r>
-              <a:rPr b="1" dirty="0"/>
+              <a:rPr b="1"/>
               <a:t>safe, sustainable use</a:t>
             </a:r>
             <a:r>
-              <a:rPr dirty="0"/>
+              <a:rPr/>
               <a:t>.”</a:t>
             </a:r>
           </a:p>
           <a:p>
-            <a:pPr marL="0" lvl="0" indent="0">
-              <a:buNone/>
-            </a:pPr>
-            <a:endParaRPr dirty="0"/>
+            <a:pPr lvl="0" indent="0" marL="0">
+              <a:buNone/>
+            </a:pPr>
           </a:p>
           <a:p>
             <a:pPr lvl="0"/>
             <a:r>
-              <a:rPr b="1" dirty="0"/>
+              <a:rPr b="1"/>
               <a:t>Tie back to Assessment 2030 and your stance:</a:t>
             </a:r>
           </a:p>
           <a:p>
-            <a:pPr marL="0" lvl="0" indent="0">
-              <a:buNone/>
-            </a:pPr>
-            <a:endParaRPr b="1" dirty="0"/>
+            <a:pPr lvl="0" indent="0" marL="0">
+              <a:buNone/>
+            </a:pPr>
           </a:p>
           <a:p>
             <a:pPr lvl="1"/>
             <a:r>
-              <a:rPr dirty="0"/>
+              <a:rPr/>
               <a:t>“All of that sits inside the Assessment 2030 idea: we’re not trying to ban AI, and we’re not blindly embracing it. We’re redesigning assessment and teaching so that </a:t>
             </a:r>
             <a:r>
-              <a:rPr b="1" dirty="0"/>
+              <a:rPr b="1"/>
               <a:t>student judgement, process, and human skills</a:t>
             </a:r>
             <a:r>
-              <a:rPr dirty="0"/>
+              <a:rPr/>
               <a:t> are what really matter.”</a:t>
             </a:r>
           </a:p>
           <a:p>
-            <a:pPr marL="0" lvl="0" indent="0">
-              <a:buNone/>
-            </a:pPr>
-            <a:endParaRPr dirty="0"/>
+            <a:pPr lvl="0" indent="0" marL="0">
+              <a:buNone/>
+            </a:pPr>
           </a:p>
           <a:p>
             <a:pPr lvl="0"/>
             <a:r>
-              <a:rPr b="1" dirty="0"/>
+              <a:rPr b="1"/>
               <a:t>Reinforce the human edge:</a:t>
             </a:r>
           </a:p>
           <a:p>
-            <a:pPr marL="0" lvl="0" indent="0">
-              <a:buNone/>
-            </a:pPr>
-            <a:endParaRPr b="1" dirty="0"/>
+            <a:pPr lvl="0" indent="0" marL="0">
+              <a:buNone/>
+            </a:pPr>
           </a:p>
           <a:p>
             <a:pPr lvl="1"/>
             <a:r>
-              <a:rPr dirty="0"/>
-              <a:t>“As more routine writing and </a:t>
-            </a:r>
-            <a:r>
-              <a:rPr dirty="0" err="1"/>
-              <a:t>summarising</a:t>
-            </a:r>
-            <a:r>
-              <a:rPr dirty="0"/>
-              <a:t> gets automated, the value of what only we can do – </a:t>
-            </a:r>
-            <a:r>
-              <a:rPr b="1" dirty="0"/>
+              <a:rPr/>
+              <a:t>“As more routine writing and summarising gets automated, the value of what only we can do – </a:t>
+            </a:r>
+            <a:r>
+              <a:rPr b="1"/>
               <a:t>empathy, feedback, facilitation, contextual judgement</a:t>
             </a:r>
             <a:r>
-              <a:rPr dirty="0"/>
+              <a:rPr/>
               <a:t> – actually goes up. AI is the infrastructure; our job is to design how it supports learning, not replaces it.”</a:t>
             </a:r>
           </a:p>
           <a:p>
-            <a:pPr marL="0" lvl="0" indent="0">
-              <a:buNone/>
-            </a:pPr>
-            <a:endParaRPr dirty="0"/>
+            <a:pPr lvl="0" indent="0" marL="0">
+              <a:buNone/>
+            </a:pPr>
           </a:p>
           <a:p>
             <a:pPr lvl="0"/>
             <a:r>
-              <a:rPr b="1" dirty="0"/>
+              <a:rPr b="1"/>
               <a:t>Point to next steps and resources:</a:t>
             </a:r>
           </a:p>
           <a:p>
-            <a:pPr marL="0" lvl="0" indent="0">
-              <a:buNone/>
-            </a:pPr>
-            <a:endParaRPr b="1" dirty="0"/>
+            <a:pPr lvl="0" indent="0" marL="0">
+              <a:buNone/>
+            </a:pPr>
           </a:p>
           <a:p>
             <a:pPr lvl="1"/>
             <a:r>
-              <a:rPr dirty="0"/>
+              <a:rPr/>
               <a:t>“If you want to keep experimenting, the companion website has the handouts, prompt frameworks, and references we’ve touched on today. You can pick one activity and try it in a small way in your own unit or team.”</a:t>
             </a:r>
           </a:p>
           <a:p>
-            <a:pPr marL="0" lvl="0" indent="0">
-              <a:buNone/>
-            </a:pPr>
-            <a:endParaRPr dirty="0"/>
-          </a:p>
-          <a:p>
-            <a:pPr marL="0" lvl="0" indent="0">
-              <a:buNone/>
-            </a:pPr>
-            <a:r>
-              <a:rPr b="1" dirty="0"/>
+            <a:pPr lvl="0" indent="0" marL="0">
+              <a:buNone/>
+            </a:pPr>
+          </a:p>
+          <a:p>
+            <a:pPr lvl="0" indent="0" marL="0">
+              <a:buNone/>
+            </a:pPr>
+            <a:r>
+              <a:rPr b="1"/>
               <a:t>Pause for questions (no dedicated Q&amp;A slide):</a:t>
             </a:r>
           </a:p>
           <a:p>
-            <a:pPr marL="0" lvl="0" indent="0">
-              <a:buNone/>
-            </a:pPr>
-            <a:endParaRPr b="1" dirty="0"/>
-          </a:p>
-          <a:p>
-            <a:pPr marL="1270000" lvl="0" indent="0">
-              <a:buNone/>
-            </a:pPr>
-            <a:r>
-              <a:rPr sz="2000" dirty="0"/>
+            <a:pPr lvl="0" indent="0" marL="0">
+              <a:buNone/>
+            </a:pPr>
+          </a:p>
+          <a:p>
+            <a:pPr lvl="0" indent="0" marL="1270000">
+              <a:buNone/>
+            </a:pPr>
+            <a:r>
+              <a:rPr sz="2000"/>
               <a:t>“I’ll pause here – what questions, worries, or ideas are bubbling up for you? They can be about the tools, the activities, or how this fits with Assessment 2030 in your own context.”</a:t>
             </a:r>
           </a:p>
           <a:p>
-            <a:pPr marL="0" lvl="0" indent="0">
-              <a:buNone/>
-            </a:pPr>
-            <a:endParaRPr sz="2000" dirty="0"/>
-          </a:p>
-          <a:p>
-            <a:pPr marL="0" lvl="0" indent="0">
-              <a:buNone/>
-            </a:pPr>
-            <a:r>
-              <a:rPr dirty="0"/>
+            <a:pPr lvl="0" indent="0" marL="0">
+              <a:buNone/>
+            </a:pPr>
+          </a:p>
+          <a:p>
+            <a:pPr lvl="0" indent="0" marL="0">
+              <a:buNone/>
+            </a:pPr>
+            <a:r>
+              <a:rPr/>
               <a:t>Because this is an internal session, you can close informally, for example:</a:t>
             </a:r>
           </a:p>
           <a:p>
-            <a:pPr marL="0" lvl="0" indent="0">
-              <a:buNone/>
-            </a:pPr>
-            <a:endParaRPr dirty="0"/>
-          </a:p>
-          <a:p>
-            <a:pPr marL="1270000" lvl="0" indent="0">
-              <a:buNone/>
-            </a:pPr>
-            <a:r>
-              <a:rPr sz="2000" dirty="0"/>
+            <a:pPr lvl="0" indent="0" marL="0">
+              <a:buNone/>
+            </a:pPr>
+          </a:p>
+          <a:p>
+            <a:pPr lvl="0" indent="0" marL="1270000">
+              <a:buNone/>
+            </a:pPr>
+            <a:r>
+              <a:rPr sz="2000"/>
               <a:t>“If things come to you later, feel free to grab me in the corridor, drop me a message, or send through a sample assessment you’d like to stress‑test. I’m very happy to keep working on this with you.”</a:t>
             </a:r>
           </a:p>
@@ -2106,7 +2033,7 @@
           <a:p>
             <a:fld id="{18BDFEC3-8487-43E8-A154-7C12CBC1FFF2}" type="slidenum">
               <a:rPr lang="en-US"/>
-              <a:t>13</a:t>
+              <a:t>15</a:t>
             </a:fld>
             <a:endParaRPr lang="en-US"/>
           </a:p>
@@ -2114,9 +2041,6 @@
       </p:sp>
     </p:spTree>
   </p:cSld>
-  <p:clrMapOvr>
-    <a:masterClrMapping/>
-  </p:clrMapOvr>
 </p:notes>
 </file>
 
@@ -2164,10 +2088,11 @@
           <a:bodyPr/>
           <a:lstStyle/>
           <a:p>
-            <a:pPr marL="0" lvl="0" indent="0">
-              <a:buNone/>
-            </a:pPr>
-            <a:r>
+            <a:pPr lvl="0" indent="0" marL="0">
+              <a:buNone/>
+            </a:pPr>
+            <a:r>
+              <a:rPr/>
               <a:t>This slide is mainly for people who scroll the deck later and want to see </a:t>
             </a:r>
             <a:r>
@@ -2175,6 +2100,7 @@
               <a:t>which references connect to which ideas</a:t>
             </a:r>
             <a:r>
+              <a:rPr/>
               <a:t>. You don’t have to talk through it, but you can point participants to the full References page on the website if they want to explore further.</a:t>
             </a:r>
           </a:p>
@@ -2197,7 +2123,7 @@
           <a:p>
             <a:fld id="{18BDFEC3-8487-43E8-A154-7C12CBC1FFF2}" type="slidenum">
               <a:rPr lang="en-US"/>
-              <a:t>14</a:t>
+              <a:t>16</a:t>
             </a:fld>
             <a:endParaRPr lang="en-US"/>
           </a:p>
@@ -2205,9 +2131,6 @@
       </p:sp>
     </p:spTree>
   </p:cSld>
-  <p:clrMapOvr>
-    <a:masterClrMapping/>
-  </p:clrMapOvr>
 </p:notes>
 </file>
 
@@ -2255,56 +2178,58 @@
           <a:bodyPr/>
           <a:lstStyle/>
           <a:p>
-            <a:pPr marL="0" lvl="0" indent="0">
-              <a:buNone/>
-            </a:pPr>
-            <a:r>
+            <a:pPr lvl="0" indent="0" marL="0">
+              <a:buNone/>
+            </a:pPr>
+            <a:r>
+              <a:rPr/>
               <a:t>So the shape of the next two hours is roughly this: a bit of context to connect AI to Assessment 2030, then five very practical activities – automate, prompt, critique, multi‑step workflows, and safe use – and then a short wrap‑up.</a:t>
             </a:r>
           </a:p>
           <a:p>
-            <a:pPr marL="0" lvl="0" indent="0">
-              <a:buNone/>
-            </a:pPr>
-            <a:endParaRPr/>
-          </a:p>
-          <a:p>
-            <a:pPr marL="0" lvl="0" indent="0">
-              <a:buNone/>
-            </a:pPr>
-            <a:r>
+            <a:pPr lvl="0" indent="0" marL="0">
+              <a:buNone/>
+            </a:pPr>
+          </a:p>
+          <a:p>
+            <a:pPr lvl="0" indent="0" marL="0">
+              <a:buNone/>
+            </a:pPr>
+            <a:r>
+              <a:rPr/>
               <a:t>It’s designed to be mostly hands‑on and beginner‑friendly, with space for questions and discussion as we go.</a:t>
             </a:r>
           </a:p>
           <a:p>
-            <a:pPr marL="0" lvl="0" indent="0">
-              <a:buNone/>
-            </a:pPr>
-            <a:endParaRPr/>
-          </a:p>
-          <a:p>
-            <a:pPr marL="0" lvl="0" indent="0">
-              <a:buNone/>
-            </a:pPr>
-            <a:r>
+            <a:pPr lvl="0" indent="0" marL="0">
+              <a:buNone/>
+            </a:pPr>
+          </a:p>
+          <a:p>
+            <a:pPr lvl="0" indent="0" marL="0">
+              <a:buNone/>
+            </a:pPr>
+            <a:r>
+              <a:rPr/>
               <a:t>For Activity 4 we have two possible paths, depending on how much Assessment 2030 you’ve already had today:</a:t>
             </a:r>
             <a:br/>
             <a:r>
+              <a:rPr/>
               <a:t>we can either probe one of our assessments with AI and discuss redesign, or we can use a multi‑step AI workflow to tackle one of those ‘impossible’ teaching or design problems. We’ll pick on the day based on the room.</a:t>
             </a:r>
           </a:p>
           <a:p>
-            <a:pPr marL="0" lvl="0" indent="0">
-              <a:buNone/>
-            </a:pPr>
-            <a:endParaRPr/>
-          </a:p>
-          <a:p>
-            <a:pPr marL="0" lvl="0" indent="0">
-              <a:buNone/>
-            </a:pPr>
-            <a:r>
+            <a:pPr lvl="0" indent="0" marL="0">
+              <a:buNone/>
+            </a:pPr>
+          </a:p>
+          <a:p>
+            <a:pPr lvl="0" indent="0" marL="0">
+              <a:buNone/>
+            </a:pPr>
+            <a:r>
+              <a:rPr/>
               <a:t>You can also briefly note that the </a:t>
             </a:r>
             <a:r>
@@ -2312,17 +2237,17 @@
               <a:t>presentation and companion website themselves</a:t>
             </a:r>
             <a:r>
+              <a:rPr/>
               <a:t> are examples of using AI as a co‑pilot:</a:t>
             </a:r>
           </a:p>
           <a:p>
-            <a:pPr marL="0" lvl="0" indent="0">
-              <a:buNone/>
-            </a:pPr>
-            <a:endParaRPr/>
-          </a:p>
-          <a:p>
-            <a:pPr marL="1270000" lvl="0" indent="0">
+            <a:pPr lvl="0" indent="0" marL="0">
+              <a:buNone/>
+            </a:pPr>
+          </a:p>
+          <a:p>
+            <a:pPr lvl="0" indent="0" marL="1270000">
               <a:buNone/>
             </a:pPr>
             <a:r>
@@ -2357,7 +2282,7 @@
           <a:p>
             <a:fld id="{18BDFEC3-8487-43E8-A154-7C12CBC1FFF2}" type="slidenum">
               <a:rPr lang="en-US"/>
-              <a:t>2</a:t>
+              <a:t>4</a:t>
             </a:fld>
             <a:endParaRPr lang="en-US"/>
           </a:p>
@@ -2365,9 +2290,6 @@
       </p:sp>
     </p:spTree>
   </p:cSld>
-  <p:clrMapOvr>
-    <a:masterClrMapping/>
-  </p:clrMapOvr>
 </p:notes>
 </file>
 
@@ -2415,7 +2337,7 @@
           <a:bodyPr/>
           <a:lstStyle/>
           <a:p>
-            <a:pPr marL="0" lvl="0" indent="0">
+            <a:pPr lvl="0" indent="0" marL="0">
               <a:buNone/>
             </a:pPr>
             <a:r>
@@ -2423,6 +2345,7 @@
               <a:t>Key Takeaway:</a:t>
             </a:r>
             <a:r>
+              <a:rPr/>
               <a:t> ITS deliver </a:t>
             </a:r>
             <a:r>
@@ -2430,6 +2353,7 @@
               <a:t>personalised, one-on-one instruction</a:t>
             </a:r>
             <a:r>
+              <a:rPr/>
               <a:t> by relying on an integrated architecture of four key components: the </a:t>
             </a:r>
             <a:r>
@@ -2437,6 +2361,7 @@
               <a:t>Domain Model</a:t>
             </a:r>
             <a:r>
+              <a:rPr/>
               <a:t> (what is taught), the </a:t>
             </a:r>
             <a:r>
@@ -2444,6 +2369,7 @@
               <a:t>Learner Model</a:t>
             </a:r>
             <a:r>
+              <a:rPr/>
               <a:t> (who is learning, including successes and misconceptions), the </a:t>
             </a:r>
             <a:r>
@@ -2451,6 +2377,7 @@
               <a:t>Tutoring Model</a:t>
             </a:r>
             <a:r>
+              <a:rPr/>
               <a:t> (how to teach), and the </a:t>
             </a:r>
             <a:r>
@@ -2458,17 +2385,17 @@
               <a:t>User Interface Model</a:t>
             </a:r>
             <a:r>
+              <a:rPr/>
               <a:t> (interaction). The quality of instruction is directly determined by the sophistication of these underlying models, which collectively ensure that the system adjusts the pace, difficulty, and focus of lessons in real-time.</a:t>
             </a:r>
           </a:p>
           <a:p>
-            <a:pPr marL="0" lvl="0" indent="0">
-              <a:buNone/>
-            </a:pPr>
-            <a:endParaRPr/>
-          </a:p>
-          <a:p>
-            <a:pPr marL="0" lvl="0" indent="0">
+            <a:pPr lvl="0" indent="0" marL="0">
+              <a:buNone/>
+            </a:pPr>
+          </a:p>
+          <a:p>
+            <a:pPr lvl="0" indent="0" marL="0">
               <a:buNone/>
             </a:pPr>
             <a:r>
@@ -2476,6 +2403,7 @@
               <a:t>Analogy:</a:t>
             </a:r>
             <a:r>
+              <a:rPr/>
               <a:t> Intelligent Tutoring Systems function much like an automated personal trainer at a gym. Just as the trainer analyzes your current fitness level, pace, and weaknesses (the </a:t>
             </a:r>
             <a:r>
@@ -2483,6 +2411,7 @@
               <a:t>Student Model</a:t>
             </a:r>
             <a:r>
+              <a:rPr/>
               <a:t>), knows the curriculum of exercises (the </a:t>
             </a:r>
             <a:r>
@@ -2490,6 +2419,7 @@
               <a:t>Domain Model</a:t>
             </a:r>
             <a:r>
+              <a:rPr/>
               <a:t>), and determines the optimal routine to challenge you without overwhelming you (the </a:t>
             </a:r>
             <a:r>
@@ -2497,6 +2427,7 @@
               <a:t>Tutoring Model</a:t>
             </a:r>
             <a:r>
+              <a:rPr/>
               <a:t>), the ITS continuously adjusts the learning path to ensure instruction is both challenging and achievable, promoting deeper understanding.</a:t>
             </a:r>
           </a:p>
@@ -2519,7 +2450,7 @@
           <a:p>
             <a:fld id="{18BDFEC3-8487-43E8-A154-7C12CBC1FFF2}" type="slidenum">
               <a:rPr lang="en-US"/>
-              <a:t>3</a:t>
+              <a:t>5</a:t>
             </a:fld>
             <a:endParaRPr lang="en-US"/>
           </a:p>
@@ -2527,9 +2458,6 @@
       </p:sp>
     </p:spTree>
   </p:cSld>
-  <p:clrMapOvr>
-    <a:masterClrMapping/>
-  </p:clrMapOvr>
 </p:notes>
 </file>
 
@@ -2577,59 +2505,50 @@
           <a:bodyPr/>
           <a:lstStyle/>
           <a:p>
-            <a:pPr marL="0" lvl="0" indent="0">
-              <a:buNone/>
-            </a:pPr>
-            <a:r>
-              <a:rPr b="1" dirty="0"/>
+            <a:pPr lvl="0" indent="0" marL="0">
+              <a:buNone/>
+            </a:pPr>
+            <a:r>
+              <a:rPr b="1"/>
               <a:t>Key Takeaway:</a:t>
             </a:r>
             <a:r>
-              <a:rPr dirty="0"/>
+              <a:rPr/>
               <a:t> AI fundamentally transforms the pedagogical designer’s role from a manual content creator to a </a:t>
             </a:r>
             <a:r>
-              <a:rPr b="1" dirty="0"/>
+              <a:rPr b="1"/>
               <a:t>Strategic Architect</a:t>
             </a:r>
             <a:r>
-              <a:rPr dirty="0"/>
+              <a:rPr/>
               <a:t> by automating previously slow and tedious tasks, such as generating course outlines, assessments, and multimedia. This automation forces the designer to focus on </a:t>
             </a:r>
             <a:r>
-              <a:rPr b="1" dirty="0"/>
+              <a:rPr b="1"/>
               <a:t>high-level, human-centric design</a:t>
             </a:r>
             <a:r>
-              <a:rPr dirty="0"/>
+              <a:rPr/>
               <a:t>—creating flexible, dynamic frameworks and addressing emotional barriers to learning, rather than formatting slides or writing quiz questions.</a:t>
             </a:r>
           </a:p>
           <a:p>
-            <a:pPr marL="0" lvl="0" indent="0">
-              <a:buNone/>
-            </a:pPr>
-            <a:endParaRPr dirty="0"/>
-          </a:p>
-          <a:p>
-            <a:pPr marL="0" lvl="0" indent="0">
-              <a:buNone/>
-            </a:pPr>
-            <a:r>
-              <a:rPr b="1" dirty="0"/>
+            <a:pPr lvl="0" indent="0" marL="0">
+              <a:buNone/>
+            </a:pPr>
+          </a:p>
+          <a:p>
+            <a:pPr lvl="0" indent="0" marL="0">
+              <a:buNone/>
+            </a:pPr>
+            <a:r>
+              <a:rPr b="1"/>
               <a:t>Analogy:</a:t>
             </a:r>
             <a:r>
-              <a:rPr dirty="0"/>
-              <a:t> If traditional pedagogical design was like crafting a single, hand-built ship (a static course) that everyone had to sail on, the AI era redesigns the role of the architect. The new Pedagogical Architect now designs a complex, adaptive fleet where each ship (module) can adjust its sails, speed, and navigation (difficulty, pace, content) based on the real-time weather (student performance data), ensuring everyone reaches their destination, but along a </a:t>
-            </a:r>
-            <a:r>
-              <a:rPr dirty="0" err="1"/>
-              <a:t>personalised</a:t>
-            </a:r>
-            <a:r>
-              <a:rPr dirty="0"/>
-              <a:t> route. The architect’s most critical new job is ensuring the human crew (teachers and students) still communicate and build rapport, not just follow the automated navigation system.</a:t>
+              <a:rPr/>
+              <a:t> If traditional pedagogical design was like crafting a single, hand-built ship (a static course) that everyone had to sail on, the AI era redesigns the role of the architect. The new Pedagogical Architect now designs a complex, adaptive fleet where each ship (module) can adjust its sails, speed, and navigation (difficulty, pace, content) based on the real-time weather (student performance data), ensuring everyone reaches their destination, but along a personalised route. The architect’s most critical new job is ensuring the human crew (teachers and students) still communicate and build rapport, not just follow the automated navigation system.</a:t>
             </a:r>
           </a:p>
         </p:txBody>
@@ -2651,7 +2570,7 @@
           <a:p>
             <a:fld id="{18BDFEC3-8487-43E8-A154-7C12CBC1FFF2}" type="slidenum">
               <a:rPr lang="en-US"/>
-              <a:t>4</a:t>
+              <a:t>6</a:t>
             </a:fld>
             <a:endParaRPr lang="en-US"/>
           </a:p>
@@ -2659,9 +2578,6 @@
       </p:sp>
     </p:spTree>
   </p:cSld>
-  <p:clrMapOvr>
-    <a:masterClrMapping/>
-  </p:clrMapOvr>
 </p:notes>
 </file>
 
@@ -2709,7 +2625,7 @@
           <a:bodyPr/>
           <a:lstStyle/>
           <a:p>
-            <a:pPr marL="0" lvl="0" indent="0">
+            <a:pPr lvl="0" indent="0" marL="0">
               <a:buNone/>
             </a:pPr>
             <a:r>
@@ -2717,6 +2633,7 @@
               <a:t>Key Takeaway:</a:t>
             </a:r>
             <a:r>
+              <a:rPr/>
               <a:t> AI revolutionizes pedagogical delivery by collapsing the feedback loop and providing educators with </a:t>
             </a:r>
             <a:r>
@@ -2724,6 +2641,7 @@
               <a:t>real-time data insights</a:t>
             </a:r>
             <a:r>
+              <a:rPr/>
               <a:t> into student progress, performance patterns, and cognitive states. This data-driven delivery allows the human teacher to transition into a </a:t>
             </a:r>
             <a:r>
@@ -2731,17 +2649,17 @@
               <a:t>“real-time interventionist,”</a:t>
             </a:r>
             <a:r>
+              <a:rPr/>
               <a:t> enabling them to abandon content presentation to the “average” student and instead focus on targeted, high-value interventions based on immediate, actionable data. It can be viewed the impact of AI on pedagogical delivery not as a replacement for the teacher, but as an augmented reality for the classroom. AI handles the mechanics of instruction and data analysis, allowing the human practitioner to execute their craft with surgical precision, focusing their limited time on high-value, empathetic, and complex human interactions.</a:t>
             </a:r>
           </a:p>
           <a:p>
-            <a:pPr marL="0" lvl="0" indent="0">
-              <a:buNone/>
-            </a:pPr>
-            <a:endParaRPr/>
-          </a:p>
-          <a:p>
-            <a:pPr marL="0" lvl="0" indent="0">
+            <a:pPr lvl="0" indent="0" marL="0">
+              <a:buNone/>
+            </a:pPr>
+          </a:p>
+          <a:p>
+            <a:pPr lvl="0" indent="0" marL="0">
               <a:buNone/>
             </a:pPr>
             <a:r>
@@ -2749,6 +2667,7 @@
               <a:t>Analogy:</a:t>
             </a:r>
             <a:r>
+              <a:rPr/>
               <a:t>. AI in the classroom functions as an AI Co-Pilot. The AI (co-pilot) handles the routine mechanics of flight (content delivery, system monitoring, and performance tracking), allowing the human pilot (the educator) to focus on complex navigation, communicating with the crew (students), and managing unexpected turbulence (misconceptions or emotional barriers) with surgical precision.</a:t>
             </a:r>
           </a:p>
@@ -2771,7 +2690,7 @@
           <a:p>
             <a:fld id="{18BDFEC3-8487-43E8-A154-7C12CBC1FFF2}" type="slidenum">
               <a:rPr lang="en-US"/>
-              <a:t>5</a:t>
+              <a:t>7</a:t>
             </a:fld>
             <a:endParaRPr lang="en-US"/>
           </a:p>
@@ -2779,9 +2698,6 @@
       </p:sp>
     </p:spTree>
   </p:cSld>
-  <p:clrMapOvr>
-    <a:masterClrMapping/>
-  </p:clrMapOvr>
 </p:notes>
 </file>
 
@@ -2829,7 +2745,7 @@
           <a:bodyPr/>
           <a:lstStyle/>
           <a:p>
-            <a:pPr marL="0" lvl="0" indent="0">
+            <a:pPr lvl="0" indent="0" marL="0">
               <a:buNone/>
             </a:pPr>
             <a:r>
@@ -2837,6 +2753,7 @@
               <a:t>Key Takeaway:</a:t>
             </a:r>
             <a:r>
+              <a:rPr/>
               <a:t> Despite the technological promise, a critical challenge for AIED is the </a:t>
             </a:r>
             <a:r>
@@ -2844,6 +2761,7 @@
               <a:t>risk of eroding the human element</a:t>
             </a:r>
             <a:r>
+              <a:rPr/>
               <a:t> and exacerbating </a:t>
             </a:r>
             <a:r>
@@ -2851,6 +2769,7 @@
               <a:t>educational inequity</a:t>
             </a:r>
             <a:r>
+              <a:rPr/>
               <a:t> through algorithmic bias. Over-reliance on ITS and generative tools can reduce valuable face-to-face interactions, while studies show that students using AI sometimes feel </a:t>
             </a:r>
             <a:r>
@@ -2858,20 +2777,21 @@
               <a:t>less connected to their teachers</a:t>
             </a:r>
             <a:r>
+              <a:rPr/>
               <a:t> (the “paradox of connection”). Furthermore, predictive models trained on historical data risk perpetuating existing biases against marginalized groups when allocating resources or flagging “at-risk” learners.</a:t>
             </a:r>
           </a:p>
           <a:p>
-            <a:pPr marL="0" lvl="0" indent="0">
-              <a:buNone/>
-            </a:pPr>
-            <a:endParaRPr/>
-          </a:p>
-          <a:p>
-            <a:pPr marL="0" lvl="0" indent="0">
-              <a:buNone/>
-            </a:pPr>
-            <a:r>
+            <a:pPr lvl="0" indent="0" marL="0">
+              <a:buNone/>
+            </a:pPr>
+          </a:p>
+          <a:p>
+            <a:pPr lvl="0" indent="0" marL="0">
+              <a:buNone/>
+            </a:pPr>
+            <a:r>
+              <a:rPr/>
               <a:t>Recent work also highlights broader risks: generative AI can </a:t>
             </a:r>
             <a:r>
@@ -2879,6 +2799,7 @@
               <a:t>hallucinate</a:t>
             </a:r>
             <a:r>
+              <a:rPr/>
               <a:t> plausible but incorrect information, enable large‑scale </a:t>
             </a:r>
             <a:r>
@@ -2886,6 +2807,7 @@
               <a:t>misinformation and deepfakes</a:t>
             </a:r>
             <a:r>
+              <a:rPr/>
               <a:t>, and make it easier to </a:t>
             </a:r>
             <a:r>
@@ -2893,6 +2815,7 @@
               <a:t>circumvent traditional assessments</a:t>
             </a:r>
             <a:r>
+              <a:rPr/>
               <a:t> if those tasks are easily automated. These are not reasons to ban AI outright, but reasons to </a:t>
             </a:r>
             <a:r>
@@ -2900,20 +2823,21 @@
               <a:t>redesign tasks and guardrails</a:t>
             </a:r>
             <a:r>
+              <a:rPr/>
               <a:t> so that human judgement and process remain visible.</a:t>
             </a:r>
           </a:p>
           <a:p>
-            <a:pPr marL="0" lvl="0" indent="0">
-              <a:buNone/>
-            </a:pPr>
-            <a:endParaRPr/>
-          </a:p>
-          <a:p>
-            <a:pPr marL="0" lvl="0" indent="0">
-              <a:buNone/>
-            </a:pPr>
-            <a:r>
+            <a:pPr lvl="0" indent="0" marL="0">
+              <a:buNone/>
+            </a:pPr>
+          </a:p>
+          <a:p>
+            <a:pPr lvl="0" indent="0" marL="0">
+              <a:buNone/>
+            </a:pPr>
+            <a:r>
+              <a:rPr/>
               <a:t>You can link this directly to </a:t>
             </a:r>
             <a:r>
@@ -2921,17 +2845,17 @@
               <a:t>Assessment 2030</a:t>
             </a:r>
             <a:r>
+              <a:rPr/>
               <a:t> and later activities:</a:t>
             </a:r>
           </a:p>
           <a:p>
-            <a:pPr marL="0" lvl="0" indent="0">
-              <a:buNone/>
-            </a:pPr>
-            <a:endParaRPr/>
-          </a:p>
-          <a:p>
-            <a:pPr marL="1270000" lvl="0" indent="0">
+            <a:pPr lvl="0" indent="0" marL="0">
+              <a:buNone/>
+            </a:pPr>
+          </a:p>
+          <a:p>
+            <a:pPr lvl="0" indent="0" marL="1270000">
               <a:buNone/>
             </a:pPr>
             <a:r>
@@ -2948,13 +2872,12 @@
             </a:r>
           </a:p>
           <a:p>
-            <a:pPr marL="0" lvl="0" indent="0">
-              <a:buNone/>
-            </a:pPr>
-            <a:endParaRPr sz="2000"/>
-          </a:p>
-          <a:p>
-            <a:pPr marL="0" lvl="0" indent="0">
+            <a:pPr lvl="0" indent="0" marL="0">
+              <a:buNone/>
+            </a:pPr>
+          </a:p>
+          <a:p>
+            <a:pPr lvl="0" indent="0" marL="0">
               <a:buNone/>
             </a:pPr>
             <a:r>
@@ -2962,6 +2885,7 @@
               <a:t>Analogy:</a:t>
             </a:r>
             <a:r>
+              <a:rPr/>
               <a:t> Think of AIED as a new, highly efficient Automated Factory. While it produces learning materials at scale (efficiency), it risks creating a sterile, one-size-fits-all product that lacks the “human touch” (eroding connection). More dangerously, if the factory’s blueprints (the algorithm) have a flaw (bias), it doesn’t just create one bad product; it replicates that flaw thousands of times, perpetuating the inequity at scale.</a:t>
             </a:r>
           </a:p>
@@ -2984,7 +2908,7 @@
           <a:p>
             <a:fld id="{18BDFEC3-8487-43E8-A154-7C12CBC1FFF2}" type="slidenum">
               <a:rPr lang="en-US"/>
-              <a:t>6</a:t>
+              <a:t>8</a:t>
             </a:fld>
             <a:endParaRPr lang="en-US"/>
           </a:p>
@@ -2992,9 +2916,6 @@
       </p:sp>
     </p:spTree>
   </p:cSld>
-  <p:clrMapOvr>
-    <a:masterClrMapping/>
-  </p:clrMapOvr>
 </p:notes>
 </file>
 
@@ -3042,7 +2963,7 @@
           <a:bodyPr/>
           <a:lstStyle/>
           <a:p>
-            <a:pPr marL="0" lvl="0" indent="0">
+            <a:pPr lvl="0" indent="0" marL="0">
               <a:buNone/>
             </a:pPr>
             <a:r>
@@ -3050,6 +2971,7 @@
               <a:t>Key Takeaway:</a:t>
             </a:r>
             <a:r>
+              <a:rPr/>
               <a:t> The long-term impact of AI is a </a:t>
             </a:r>
             <a:r>
@@ -3057,6 +2979,7 @@
               <a:t>forced re-humanization</a:t>
             </a:r>
             <a:r>
+              <a:rPr/>
               <a:t> of the educator’s role, where the practitioner is compelled to abandon the commoditized, technical tasks (which AI can perform) and focus on the </a:t>
             </a:r>
             <a:r>
@@ -3064,6 +2987,7 @@
               <a:t>Human Edge of AI</a:t>
             </a:r>
             <a:r>
+              <a:rPr/>
               <a:t>. This means prioritizing </a:t>
             </a:r>
             <a:r>
@@ -3071,6 +2995,7 @@
               <a:t>empathy, creativity, strategic thinking, mentorship, and socio-emotional support</a:t>
             </a:r>
             <a:r>
+              <a:rPr/>
               <a:t>—the unique human skills vital for holistic student development that AI fundamentally cannot replicate. Educators must also become proficient in </a:t>
             </a:r>
             <a:r>
@@ -3078,6 +3003,7 @@
               <a:t>interpreting AI data</a:t>
             </a:r>
             <a:r>
+              <a:rPr/>
               <a:t> and developing </a:t>
             </a:r>
             <a:r>
@@ -3085,17 +3011,17 @@
               <a:t>ethical reasoning</a:t>
             </a:r>
             <a:r>
+              <a:rPr/>
               <a:t> to guide responsible technology use.</a:t>
             </a:r>
           </a:p>
           <a:p>
-            <a:pPr marL="0" lvl="0" indent="0">
-              <a:buNone/>
-            </a:pPr>
-            <a:endParaRPr/>
-          </a:p>
-          <a:p>
-            <a:pPr marL="0" lvl="0" indent="0">
+            <a:pPr lvl="0" indent="0" marL="0">
+              <a:buNone/>
+            </a:pPr>
+          </a:p>
+          <a:p>
+            <a:pPr lvl="0" indent="0" marL="0">
               <a:buNone/>
             </a:pPr>
             <a:r>
@@ -3103,6 +3029,7 @@
               <a:t>Analogy:</a:t>
             </a:r>
             <a:r>
+              <a:rPr/>
               <a:t> The integration of AI is like a Rising Tide. As the AI “tide” rises, it automates and submerges all the routine, technical “lowlands” of the job (grading, content delivery). This forces the educator to move to the “high ground”—the uniquely human skills of empathy, mentorship, and creative problem-solving that the tide cannot reach. Their value is no longer in the submerged tasks, but on this new, more human-centric high ground.</a:t>
             </a:r>
           </a:p>
@@ -3125,7 +3052,7 @@
           <a:p>
             <a:fld id="{18BDFEC3-8487-43E8-A154-7C12CBC1FFF2}" type="slidenum">
               <a:rPr lang="en-US"/>
-              <a:t>7</a:t>
+              <a:t>9</a:t>
             </a:fld>
             <a:endParaRPr lang="en-US"/>
           </a:p>
@@ -3133,9 +3060,6 @@
       </p:sp>
     </p:spTree>
   </p:cSld>
-  <p:clrMapOvr>
-    <a:masterClrMapping/>
-  </p:clrMapOvr>
 </p:notes>
 </file>
 
@@ -3183,182 +3107,181 @@
           <a:bodyPr/>
           <a:lstStyle/>
           <a:p>
-            <a:pPr marL="0" lvl="0" indent="0">
-              <a:buNone/>
-            </a:pPr>
-            <a:r>
+            <a:pPr lvl="0" indent="0" marL="0">
+              <a:buNone/>
+            </a:pPr>
+            <a:r>
+              <a:rPr/>
               <a:t>Purpose: “Use AI to draft summaries and repurpose them for teaching tasks.”</a:t>
             </a:r>
           </a:p>
           <a:p>
-            <a:pPr marL="0" lvl="0" indent="0">
-              <a:buNone/>
-            </a:pPr>
-            <a:endParaRPr/>
-          </a:p>
-          <a:p>
-            <a:pPr marL="0" lvl="0" indent="0">
-              <a:buNone/>
-            </a:pPr>
-            <a:r>
+            <a:pPr lvl="0" indent="0" marL="0">
+              <a:buNone/>
+            </a:pPr>
+          </a:p>
+          <a:p>
+            <a:pPr lvl="0" indent="0" marL="0">
+              <a:buNone/>
+            </a:pPr>
+            <a:r>
+              <a:rPr/>
               <a:t>Core instructions:</a:t>
             </a:r>
           </a:p>
           <a:p>
-            <a:pPr marL="0" lvl="0" indent="0">
-              <a:buNone/>
-            </a:pPr>
-            <a:endParaRPr/>
-          </a:p>
-          <a:p>
-            <a:pPr marL="342900" lvl="0" indent="-342900">
+            <a:pPr lvl="0" indent="0" marL="0">
+              <a:buNone/>
+            </a:pPr>
+          </a:p>
+          <a:p>
+            <a:pPr lvl="0" indent="-342900" marL="342900">
               <a:buAutoNum type="arabicPeriod"/>
             </a:pPr>
             <a:r>
+              <a:rPr/>
               <a:t>Choose a short text:</a:t>
             </a:r>
           </a:p>
           <a:p>
-            <a:pPr marL="0" lvl="0" indent="0">
-              <a:buNone/>
-            </a:pPr>
-            <a:endParaRPr/>
+            <a:pPr lvl="0" indent="0" marL="0">
+              <a:buNone/>
+            </a:pPr>
           </a:p>
           <a:p>
             <a:pPr lvl="1"/>
             <a:r>
+              <a:rPr/>
               <a:t>reading excerpt, assignment brief, policy section, etc.</a:t>
             </a:r>
           </a:p>
           <a:p>
-            <a:pPr marL="0" lvl="0" indent="0">
-              <a:buNone/>
-            </a:pPr>
-            <a:endParaRPr/>
-          </a:p>
-          <a:p>
-            <a:pPr marL="342900" lvl="0" indent="-342900">
+            <a:pPr lvl="0" indent="0" marL="0">
+              <a:buNone/>
+            </a:pPr>
+          </a:p>
+          <a:p>
+            <a:pPr lvl="0" indent="-342900" marL="342900">
               <a:buAutoNum type="arabicPeriod"/>
             </a:pPr>
             <a:r>
+              <a:rPr/>
               <a:t>Run the summary prompt:</a:t>
             </a:r>
           </a:p>
           <a:p>
-            <a:pPr marL="0" lvl="0" indent="0">
-              <a:buNone/>
-            </a:pPr>
-            <a:endParaRPr/>
+            <a:pPr lvl="0" indent="0" marL="0">
+              <a:buNone/>
+            </a:pPr>
           </a:p>
           <a:p>
             <a:pPr lvl="1"/>
             <a:r>
+              <a:rPr/>
               <a:t>“Summarise this for year level students in 5–7 bullet points. Use plain language, highlight 2–3 key ideas, end with one discussion question.”</a:t>
             </a:r>
           </a:p>
           <a:p>
-            <a:pPr marL="0" lvl="0" indent="0">
-              <a:buNone/>
-            </a:pPr>
-            <a:endParaRPr/>
-          </a:p>
-          <a:p>
-            <a:pPr marL="342900" lvl="0" indent="-342900">
+            <a:pPr lvl="0" indent="0" marL="0">
+              <a:buNone/>
+            </a:pPr>
+          </a:p>
+          <a:p>
+            <a:pPr lvl="0" indent="-342900" marL="342900">
               <a:buAutoNum type="arabicPeriod"/>
             </a:pPr>
             <a:r>
+              <a:rPr/>
               <a:t>Choose a twist:</a:t>
             </a:r>
           </a:p>
           <a:p>
-            <a:pPr marL="0" lvl="0" indent="0">
-              <a:buNone/>
-            </a:pPr>
-            <a:endParaRPr/>
+            <a:pPr lvl="0" indent="0" marL="0">
+              <a:buNone/>
+            </a:pPr>
           </a:p>
           <a:p>
             <a:pPr lvl="1"/>
             <a:r>
+              <a:rPr/>
               <a:t>LMS announcement,</a:t>
             </a:r>
             <a:br/>
-            <a:endParaRPr/>
-          </a:p>
-          <a:p>
-            <a:pPr marL="0" lvl="0" indent="0">
-              <a:buNone/>
-            </a:pPr>
-            <a:endParaRPr/>
+          </a:p>
+          <a:p>
+            <a:pPr lvl="0" indent="0" marL="0">
+              <a:buNone/>
+            </a:pPr>
           </a:p>
           <a:p>
             <a:pPr lvl="1"/>
             <a:r>
+              <a:rPr/>
               <a:t>2‑slide outline,</a:t>
             </a:r>
             <a:br/>
-            <a:endParaRPr/>
-          </a:p>
-          <a:p>
-            <a:pPr marL="0" lvl="0" indent="0">
-              <a:buNone/>
-            </a:pPr>
-            <a:endParaRPr/>
+          </a:p>
+          <a:p>
+            <a:pPr lvl="0" indent="0" marL="0">
+              <a:buNone/>
+            </a:pPr>
           </a:p>
           <a:p>
             <a:pPr lvl="1"/>
             <a:r>
+              <a:rPr/>
               <a:t>short quiz.</a:t>
             </a:r>
           </a:p>
           <a:p>
-            <a:pPr marL="0" lvl="0" indent="0">
-              <a:buNone/>
-            </a:pPr>
-            <a:endParaRPr/>
-          </a:p>
-          <a:p>
-            <a:pPr marL="342900" lvl="0" indent="-342900">
+            <a:pPr lvl="0" indent="0" marL="0">
+              <a:buNone/>
+            </a:pPr>
+          </a:p>
+          <a:p>
+            <a:pPr lvl="0" indent="-342900" marL="342900">
               <a:buAutoNum type="arabicPeriod"/>
             </a:pPr>
             <a:r>
+              <a:rPr/>
               <a:t>Edit the output as needed.</a:t>
             </a:r>
           </a:p>
           <a:p>
-            <a:pPr marL="0" lvl="0" indent="0">
-              <a:buNone/>
-            </a:pPr>
-            <a:endParaRPr/>
-          </a:p>
-          <a:p>
-            <a:pPr marL="0" lvl="0" indent="0">
-              <a:buNone/>
-            </a:pPr>
-            <a:r>
+            <a:pPr lvl="0" indent="0" marL="0">
+              <a:buNone/>
+            </a:pPr>
+          </a:p>
+          <a:p>
+            <a:pPr lvl="0" indent="0" marL="0">
+              <a:buNone/>
+            </a:pPr>
+            <a:r>
+              <a:rPr/>
               <a:t>Variants box:</a:t>
             </a:r>
           </a:p>
           <a:p>
-            <a:pPr marL="0" lvl="0" indent="0">
-              <a:buNone/>
-            </a:pPr>
-            <a:endParaRPr/>
+            <a:pPr lvl="0" indent="0" marL="0">
+              <a:buNone/>
+            </a:pPr>
           </a:p>
           <a:p>
             <a:pPr lvl="0"/>
             <a:r>
+              <a:rPr/>
               <a:t>Researchers: summarise an abstract → plain English for participants / media; summarise reviewer comments → draft response.</a:t>
             </a:r>
           </a:p>
           <a:p>
-            <a:pPr marL="0" lvl="0" indent="0">
-              <a:buNone/>
-            </a:pPr>
-            <a:endParaRPr/>
+            <a:pPr lvl="0" indent="0" marL="0">
+              <a:buNone/>
+            </a:pPr>
           </a:p>
           <a:p>
             <a:pPr lvl="0"/>
             <a:r>
+              <a:rPr/>
               <a:t>Professional staff: summarise a policy or process → student email, FAQ, or staff bulletin.</a:t>
             </a:r>
           </a:p>
@@ -3381,7 +3304,7 @@
           <a:p>
             <a:fld id="{18BDFEC3-8487-43E8-A154-7C12CBC1FFF2}" type="slidenum">
               <a:rPr lang="en-US"/>
-              <a:t>8</a:t>
+              <a:t>10</a:t>
             </a:fld>
             <a:endParaRPr lang="en-US"/>
           </a:p>
@@ -3389,9 +3312,6 @@
       </p:sp>
     </p:spTree>
   </p:cSld>
-  <p:clrMapOvr>
-    <a:masterClrMapping/>
-  </p:clrMapOvr>
 </p:notes>
 </file>
 
@@ -3439,192 +3359,193 @@
           <a:bodyPr/>
           <a:lstStyle/>
           <a:p>
-            <a:pPr marL="0" lvl="0" indent="0">
-              <a:buNone/>
-            </a:pPr>
-            <a:r>
+            <a:pPr lvl="0" indent="0" marL="0">
+              <a:buNone/>
+            </a:pPr>
+            <a:r>
+              <a:rPr/>
               <a:t>Purpose: “Move from vague prompts to structured, high‑quality ones.”</a:t>
             </a:r>
           </a:p>
           <a:p>
-            <a:pPr marL="0" lvl="0" indent="0">
-              <a:buNone/>
-            </a:pPr>
-            <a:endParaRPr/>
-          </a:p>
-          <a:p>
-            <a:pPr marL="0" lvl="0" indent="0">
-              <a:buNone/>
-            </a:pPr>
-            <a:r>
+            <a:pPr lvl="0" indent="0" marL="0">
+              <a:buNone/>
+            </a:pPr>
+          </a:p>
+          <a:p>
+            <a:pPr lvl="0" indent="0" marL="0">
+              <a:buNone/>
+            </a:pPr>
+            <a:r>
+              <a:rPr/>
               <a:t>Core instructions:</a:t>
             </a:r>
           </a:p>
           <a:p>
-            <a:pPr marL="0" lvl="0" indent="0">
-              <a:buNone/>
-            </a:pPr>
-            <a:endParaRPr/>
-          </a:p>
-          <a:p>
-            <a:pPr marL="342900" lvl="0" indent="-342900">
+            <a:pPr lvl="0" indent="0" marL="0">
+              <a:buNone/>
+            </a:pPr>
+          </a:p>
+          <a:p>
+            <a:pPr lvl="0" indent="-342900" marL="342900">
               <a:buAutoNum type="arabicPeriod"/>
             </a:pPr>
             <a:r>
+              <a:rPr/>
               <a:t>Copy one prompt you actually used in Activity 1.</a:t>
             </a:r>
           </a:p>
           <a:p>
-            <a:pPr marL="0" lvl="0" indent="0">
-              <a:buNone/>
-            </a:pPr>
-            <a:endParaRPr/>
-          </a:p>
-          <a:p>
-            <a:pPr marL="342900" lvl="0" indent="-342900">
+            <a:pPr lvl="0" indent="0" marL="0">
+              <a:buNone/>
+            </a:pPr>
+          </a:p>
+          <a:p>
+            <a:pPr lvl="0" indent="-342900" marL="342900">
               <a:buAutoNum type="arabicPeriod"/>
             </a:pPr>
             <a:r>
+              <a:rPr/>
               <a:t>Underneath it, rewrite using:</a:t>
             </a:r>
           </a:p>
           <a:p>
-            <a:pPr marL="0" lvl="0" indent="0">
-              <a:buNone/>
-            </a:pPr>
-            <a:endParaRPr/>
+            <a:pPr lvl="0" indent="0" marL="0">
+              <a:buNone/>
+            </a:pPr>
           </a:p>
           <a:p>
             <a:pPr lvl="1"/>
             <a:r>
+              <a:rPr/>
               <a:t>CONTEXT (unit/role, level, constraints)</a:t>
             </a:r>
           </a:p>
           <a:p>
-            <a:pPr marL="0" lvl="0" indent="0">
-              <a:buNone/>
-            </a:pPr>
-            <a:endParaRPr/>
+            <a:pPr lvl="0" indent="0" marL="0">
+              <a:buNone/>
+            </a:pPr>
           </a:p>
           <a:p>
             <a:pPr lvl="1"/>
             <a:r>
+              <a:rPr/>
               <a:t>ROLE (“You are a…”)</a:t>
             </a:r>
           </a:p>
           <a:p>
-            <a:pPr marL="0" lvl="0" indent="0">
-              <a:buNone/>
-            </a:pPr>
-            <a:endParaRPr/>
+            <a:pPr lvl="0" indent="0" marL="0">
+              <a:buNone/>
+            </a:pPr>
           </a:p>
           <a:p>
             <a:pPr lvl="1"/>
             <a:r>
+              <a:rPr/>
               <a:t>ACTION (what you want AI to do)</a:t>
             </a:r>
           </a:p>
           <a:p>
-            <a:pPr marL="0" lvl="0" indent="0">
-              <a:buNone/>
-            </a:pPr>
-            <a:endParaRPr/>
+            <a:pPr lvl="0" indent="0" marL="0">
+              <a:buNone/>
+            </a:pPr>
           </a:p>
           <a:p>
             <a:pPr lvl="1"/>
             <a:r>
+              <a:rPr/>
               <a:t>FORMAT (bullets, table, slides, etc.)</a:t>
             </a:r>
           </a:p>
           <a:p>
-            <a:pPr marL="0" lvl="0" indent="0">
-              <a:buNone/>
-            </a:pPr>
-            <a:endParaRPr/>
+            <a:pPr lvl="0" indent="0" marL="0">
+              <a:buNone/>
+            </a:pPr>
           </a:p>
           <a:p>
             <a:pPr lvl="1"/>
             <a:r>
+              <a:rPr/>
               <a:t>TONE/CONSTRAINTS (word limit, level, etc.)</a:t>
             </a:r>
           </a:p>
           <a:p>
-            <a:pPr marL="0" lvl="0" indent="0">
-              <a:buNone/>
-            </a:pPr>
-            <a:endParaRPr/>
-          </a:p>
-          <a:p>
-            <a:pPr marL="342900" lvl="0" indent="-342900">
+            <a:pPr lvl="0" indent="0" marL="0">
+              <a:buNone/>
+            </a:pPr>
+          </a:p>
+          <a:p>
+            <a:pPr lvl="0" indent="-342900" marL="342900">
               <a:buAutoNum type="arabicPeriod"/>
             </a:pPr>
             <a:r>
+              <a:rPr/>
               <a:t>Run both prompts and compare outputs.</a:t>
             </a:r>
           </a:p>
           <a:p>
-            <a:pPr marL="0" lvl="0" indent="0">
-              <a:buNone/>
-            </a:pPr>
-            <a:endParaRPr/>
-          </a:p>
-          <a:p>
-            <a:pPr marL="342900" lvl="0" indent="-342900">
+            <a:pPr lvl="0" indent="0" marL="0">
+              <a:buNone/>
+            </a:pPr>
+          </a:p>
+          <a:p>
+            <a:pPr lvl="0" indent="-342900" marL="342900">
               <a:buAutoNum type="arabicPeriod"/>
             </a:pPr>
             <a:r>
+              <a:rPr/>
               <a:t>Note what changed in quality, relevance, and usefulness.</a:t>
             </a:r>
           </a:p>
           <a:p>
-            <a:pPr marL="0" lvl="0" indent="0">
-              <a:buNone/>
-            </a:pPr>
-            <a:endParaRPr/>
-          </a:p>
-          <a:p>
-            <a:pPr marL="0" lvl="0" indent="0">
-              <a:buNone/>
-            </a:pPr>
-            <a:r>
+            <a:pPr lvl="0" indent="0" marL="0">
+              <a:buNone/>
+            </a:pPr>
+          </a:p>
+          <a:p>
+            <a:pPr lvl="0" indent="0" marL="0">
+              <a:buNone/>
+            </a:pPr>
+            <a:r>
+              <a:rPr/>
               <a:t>Include 1–2 patterns on the page (e.g. teaching activity prompt + feedback helper).</a:t>
             </a:r>
           </a:p>
           <a:p>
-            <a:pPr marL="0" lvl="0" indent="0">
-              <a:buNone/>
-            </a:pPr>
-            <a:endParaRPr/>
-          </a:p>
-          <a:p>
-            <a:pPr marL="0" lvl="0" indent="0">
-              <a:buNone/>
-            </a:pPr>
-            <a:r>
+            <a:pPr lvl="0" indent="0" marL="0">
+              <a:buNone/>
+            </a:pPr>
+          </a:p>
+          <a:p>
+            <a:pPr lvl="0" indent="0" marL="0">
+              <a:buNone/>
+            </a:pPr>
+            <a:r>
+              <a:rPr/>
               <a:t>Variants box:</a:t>
             </a:r>
           </a:p>
           <a:p>
-            <a:pPr marL="0" lvl="0" indent="0">
-              <a:buNone/>
-            </a:pPr>
-            <a:endParaRPr/>
+            <a:pPr lvl="0" indent="0" marL="0">
+              <a:buNone/>
+            </a:pPr>
           </a:p>
           <a:p>
             <a:pPr lvl="0"/>
             <a:r>
+              <a:rPr/>
               <a:t>Researchers: prompt makeover for literature review help, grant impact section, interview protocol.</a:t>
             </a:r>
           </a:p>
           <a:p>
-            <a:pPr marL="0" lvl="0" indent="0">
-              <a:buNone/>
-            </a:pPr>
-            <a:endParaRPr/>
+            <a:pPr lvl="0" indent="0" marL="0">
+              <a:buNone/>
+            </a:pPr>
           </a:p>
           <a:p>
             <a:pPr lvl="0"/>
             <a:r>
+              <a:rPr/>
               <a:t>Professional staff: prompt makeover for student comms, website copy, internal memos.</a:t>
             </a:r>
           </a:p>
@@ -3647,7 +3568,7 @@
           <a:p>
             <a:fld id="{18BDFEC3-8487-43E8-A154-7C12CBC1FFF2}" type="slidenum">
               <a:rPr lang="en-US"/>
-              <a:t>9</a:t>
+              <a:t>11</a:t>
             </a:fld>
             <a:endParaRPr lang="en-US"/>
           </a:p>
@@ -3655,9 +3576,6 @@
       </p:sp>
     </p:spTree>
   </p:cSld>
-  <p:clrMapOvr>
-    <a:masterClrMapping/>
-  </p:clrMapOvr>
 </p:notes>
 </file>
 
@@ -3840,7 +3758,7 @@
           <a:p>
             <a:fld id="{241EB5C9-1307-BA42-ABA2-0BC069CD8E7F}" type="datetimeFigureOut">
               <a:rPr lang="en-US" smtClean="0"/>
-              <a:t>11/17/25</a:t>
+              <a:t>1/2/22</a:t>
             </a:fld>
             <a:endParaRPr lang="en-US"/>
           </a:p>
@@ -4008,7 +3926,7 @@
           <a:p>
             <a:fld id="{241EB5C9-1307-BA42-ABA2-0BC069CD8E7F}" type="datetimeFigureOut">
               <a:rPr lang="en-US" smtClean="0"/>
-              <a:t>11/17/25</a:t>
+              <a:t>1/2/22</a:t>
             </a:fld>
             <a:endParaRPr lang="en-US"/>
           </a:p>
@@ -4186,7 +4104,7 @@
           <a:p>
             <a:fld id="{241EB5C9-1307-BA42-ABA2-0BC069CD8E7F}" type="datetimeFigureOut">
               <a:rPr lang="en-US" smtClean="0"/>
-              <a:t>11/17/25</a:t>
+              <a:t>1/2/22</a:t>
             </a:fld>
             <a:endParaRPr lang="en-US"/>
           </a:p>
@@ -4354,7 +4272,7 @@
           <a:p>
             <a:fld id="{241EB5C9-1307-BA42-ABA2-0BC069CD8E7F}" type="datetimeFigureOut">
               <a:rPr lang="en-US" smtClean="0"/>
-              <a:t>11/17/25</a:t>
+              <a:t>1/2/22</a:t>
             </a:fld>
             <a:endParaRPr lang="en-US"/>
           </a:p>
@@ -4599,7 +4517,7 @@
           <a:p>
             <a:fld id="{241EB5C9-1307-BA42-ABA2-0BC069CD8E7F}" type="datetimeFigureOut">
               <a:rPr lang="en-US" smtClean="0"/>
-              <a:t>11/17/25</a:t>
+              <a:t>1/2/22</a:t>
             </a:fld>
             <a:endParaRPr lang="en-US"/>
           </a:p>
@@ -4884,7 +4802,7 @@
           <a:p>
             <a:fld id="{241EB5C9-1307-BA42-ABA2-0BC069CD8E7F}" type="datetimeFigureOut">
               <a:rPr lang="en-US" smtClean="0"/>
-              <a:t>11/17/25</a:t>
+              <a:t>1/2/22</a:t>
             </a:fld>
             <a:endParaRPr lang="en-US"/>
           </a:p>
@@ -5303,7 +5221,7 @@
           <a:p>
             <a:fld id="{241EB5C9-1307-BA42-ABA2-0BC069CD8E7F}" type="datetimeFigureOut">
               <a:rPr lang="en-US" smtClean="0"/>
-              <a:t>11/17/25</a:t>
+              <a:t>1/2/22</a:t>
             </a:fld>
             <a:endParaRPr lang="en-US"/>
           </a:p>
@@ -5420,7 +5338,7 @@
           <a:p>
             <a:fld id="{241EB5C9-1307-BA42-ABA2-0BC069CD8E7F}" type="datetimeFigureOut">
               <a:rPr lang="en-US" smtClean="0"/>
-              <a:t>11/17/25</a:t>
+              <a:t>1/2/22</a:t>
             </a:fld>
             <a:endParaRPr lang="en-US"/>
           </a:p>
@@ -5515,7 +5433,7 @@
           <a:p>
             <a:fld id="{241EB5C9-1307-BA42-ABA2-0BC069CD8E7F}" type="datetimeFigureOut">
               <a:rPr lang="en-US" smtClean="0"/>
-              <a:t>11/17/25</a:t>
+              <a:t>1/2/22</a:t>
             </a:fld>
             <a:endParaRPr lang="en-US"/>
           </a:p>
@@ -5790,7 +5708,7 @@
           <a:p>
             <a:fld id="{241EB5C9-1307-BA42-ABA2-0BC069CD8E7F}" type="datetimeFigureOut">
               <a:rPr lang="en-US" smtClean="0"/>
-              <a:t>11/17/25</a:t>
+              <a:t>1/2/22</a:t>
             </a:fld>
             <a:endParaRPr lang="en-US"/>
           </a:p>
@@ -6042,7 +5960,7 @@
           <a:p>
             <a:fld id="{241EB5C9-1307-BA42-ABA2-0BC069CD8E7F}" type="datetimeFigureOut">
               <a:rPr lang="en-US" smtClean="0"/>
-              <a:t>11/17/25</a:t>
+              <a:t>1/2/22</a:t>
             </a:fld>
             <a:endParaRPr lang="en-US"/>
           </a:p>
@@ -6104,7 +6022,7 @@
 </file>
 
 <file path=ppt/slideMasters/slideMaster1.xml><?xml version="1.0" encoding="utf-8"?>
-<p:sldMaster xmlns:a="http://schemas.openxmlformats.org/drawingml/2006/main" xmlns:r="http://schemas.openxmlformats.org/officeDocument/2006/relationships" xmlns:p="http://schemas.openxmlformats.org/presentationml/2006/main">
+<p:sldMaster xmlns:a="http://schemas.openxmlformats.org/drawingml/2006/main" xmlns:p="http://schemas.openxmlformats.org/presentationml/2006/main" xmlns:r="http://schemas.openxmlformats.org/officeDocument/2006/relationships">
   <p:cSld>
     <p:bg>
       <p:bgRef idx="1001">
@@ -6145,7 +6063,7 @@
           </a:prstGeom>
         </p:spPr>
         <p:txBody>
-          <a:bodyPr vert="horz" lIns="91440" tIns="45720" rIns="91440" bIns="45720" rtlCol="0" anchor="ctr">
+          <a:bodyPr anchor="ctr" bIns="45720" lIns="91440" rIns="91440" rtlCol="0" tIns="45720" vert="horz">
             <a:normAutofit/>
           </a:bodyPr>
           <a:lstStyle/>
@@ -6164,7 +6082,7 @@
             <a:spLocks noGrp="1"/>
           </p:cNvSpPr>
           <p:nvPr>
-            <p:ph type="body" idx="1"/>
+            <p:ph idx="1" type="body"/>
           </p:nvPr>
         </p:nvSpPr>
         <p:spPr>
@@ -6177,7 +6095,7 @@
           </a:prstGeom>
         </p:spPr>
         <p:txBody>
-          <a:bodyPr vert="horz" lIns="91440" tIns="45720" rIns="91440" bIns="45720" rtlCol="0">
+          <a:bodyPr bIns="45720" lIns="91440" rIns="91440" rtlCol="0" tIns="45720" vert="horz">
             <a:normAutofit/>
           </a:bodyPr>
           <a:lstStyle/>
@@ -6225,7 +6143,7 @@
             <a:spLocks noGrp="1"/>
           </p:cNvSpPr>
           <p:nvPr>
-            <p:ph type="dt" sz="half" idx="2"/>
+            <p:ph idx="2" sz="half" type="dt"/>
           </p:nvPr>
         </p:nvSpPr>
         <p:spPr>
@@ -6238,7 +6156,7 @@
           </a:prstGeom>
         </p:spPr>
         <p:txBody>
-          <a:bodyPr vert="horz" lIns="91440" tIns="45720" rIns="91440" bIns="45720" rtlCol="0" anchor="ctr"/>
+          <a:bodyPr anchor="ctr" bIns="45720" lIns="91440" rIns="91440" rtlCol="0" tIns="45720" vert="horz"/>
           <a:lstStyle>
             <a:lvl1pPr algn="l">
               <a:defRPr sz="900">
@@ -6253,7 +6171,7 @@
           <a:p>
             <a:fld id="{241EB5C9-1307-BA42-ABA2-0BC069CD8E7F}" type="datetimeFigureOut">
               <a:rPr lang="en-US" smtClean="0"/>
-              <a:t>11/17/25</a:t>
+              <a:t>1/2/22</a:t>
             </a:fld>
             <a:endParaRPr lang="en-US"/>
           </a:p>
@@ -6266,7 +6184,7 @@
             <a:spLocks noGrp="1"/>
           </p:cNvSpPr>
           <p:nvPr>
-            <p:ph type="ftr" sz="quarter" idx="3"/>
+            <p:ph idx="3" sz="quarter" type="ftr"/>
           </p:nvPr>
         </p:nvSpPr>
         <p:spPr>
@@ -6279,7 +6197,7 @@
           </a:prstGeom>
         </p:spPr>
         <p:txBody>
-          <a:bodyPr vert="horz" lIns="91440" tIns="45720" rIns="91440" bIns="45720" rtlCol="0" anchor="ctr"/>
+          <a:bodyPr anchor="ctr" bIns="45720" lIns="91440" rIns="91440" rtlCol="0" tIns="45720" vert="horz"/>
           <a:lstStyle>
             <a:lvl1pPr algn="ctr">
               <a:defRPr sz="900">
@@ -6303,7 +6221,7 @@
             <a:spLocks noGrp="1"/>
           </p:cNvSpPr>
           <p:nvPr>
-            <p:ph type="sldNum" sz="quarter" idx="4"/>
+            <p:ph idx="4" sz="quarter" type="sldNum"/>
           </p:nvPr>
         </p:nvSpPr>
         <p:spPr>
@@ -6316,7 +6234,7 @@
           </a:prstGeom>
         </p:spPr>
         <p:txBody>
-          <a:bodyPr vert="horz" lIns="91440" tIns="45720" rIns="91440" bIns="45720" rtlCol="0" anchor="ctr"/>
+          <a:bodyPr anchor="ctr" bIns="45720" lIns="91440" rIns="91440" rtlCol="0" tIns="45720" vert="horz"/>
           <a:lstStyle>
             <a:lvl1pPr algn="r">
               <a:defRPr sz="900">
@@ -6344,7 +6262,7 @@
       </p:ext>
     </p:extLst>
   </p:cSld>
-  <p:clrMap bg1="lt1" tx1="dk1" bg2="lt2" tx2="dk2" accent1="accent1" accent2="accent2" accent3="accent3" accent4="accent4" accent5="accent5" accent6="accent6" hlink="hlink" folHlink="folHlink"/>
+  <p:clrMap accent1="accent1" accent2="accent2" accent3="accent3" accent4="accent4" accent5="accent5" accent6="accent6" bg1="lt1" bg2="lt2" folHlink="folHlink" hlink="hlink" tx1="dk1" tx2="dk2"/>
   <p:sldLayoutIdLst>
     <p:sldLayoutId id="2147483649" r:id="rId1"/>
     <p:sldLayoutId id="2147483650" r:id="rId2"/>
@@ -6360,12 +6278,12 @@
   </p:sldLayoutIdLst>
   <p:txStyles>
     <p:titleStyle>
-      <a:lvl1pPr algn="ctr" defTabSz="342900" rtl="0" eaLnBrk="1" latinLnBrk="0" hangingPunct="1">
+      <a:lvl1pPr algn="ctr" defTabSz="342900" eaLnBrk="1" hangingPunct="1" latinLnBrk="0" rtl="0">
         <a:spcBef>
           <a:spcPct val="0"/>
         </a:spcBef>
         <a:buNone/>
-        <a:defRPr sz="3300" kern="1200">
+        <a:defRPr kern="1200" sz="3300">
           <a:solidFill>
             <a:schemeClr val="tx1"/>
           </a:solidFill>
@@ -6376,13 +6294,13 @@
       </a:lvl1pPr>
     </p:titleStyle>
     <p:bodyStyle>
-      <a:lvl1pPr marL="342900" indent="-342900" algn="l" defTabSz="342900" rtl="0" eaLnBrk="1" latinLnBrk="0" hangingPunct="1">
+      <a:lvl1pPr algn="l" defTabSz="342900" eaLnBrk="1" hangingPunct="1" indent="-342900" latinLnBrk="0" marL="342900" rtl="0">
         <a:spcBef>
           <a:spcPct val="20000"/>
         </a:spcBef>
         <a:buFont typeface="Arial"/>
         <a:buChar char="•"/>
-        <a:defRPr sz="2400" kern="1200">
+        <a:defRPr kern="1200" sz="2400">
           <a:solidFill>
             <a:schemeClr val="tx1"/>
           </a:solidFill>
@@ -6391,13 +6309,13 @@
           <a:cs typeface="+mn-cs"/>
         </a:defRPr>
       </a:lvl1pPr>
-      <a:lvl2pPr marL="685800" indent="-342900" algn="l" defTabSz="342900" rtl="0" eaLnBrk="1" latinLnBrk="0" hangingPunct="1">
+      <a:lvl2pPr algn="l" defTabSz="342900" eaLnBrk="1" hangingPunct="1" indent="-342900" latinLnBrk="0" marL="685800" rtl="0">
         <a:spcBef>
           <a:spcPct val="20000"/>
         </a:spcBef>
         <a:buFont typeface="Arial"/>
         <a:buChar char="–"/>
-        <a:defRPr sz="2100" kern="1200">
+        <a:defRPr kern="1200" sz="2100">
           <a:solidFill>
             <a:schemeClr val="tx1"/>
           </a:solidFill>
@@ -6406,13 +6324,13 @@
           <a:cs typeface="+mn-cs"/>
         </a:defRPr>
       </a:lvl2pPr>
-      <a:lvl3pPr marL="1028700" indent="-342900" algn="l" defTabSz="342900" rtl="0" eaLnBrk="1" latinLnBrk="0" hangingPunct="1">
+      <a:lvl3pPr algn="l" defTabSz="342900" eaLnBrk="1" hangingPunct="1" indent="-342900" latinLnBrk="0" marL="1028700" rtl="0">
         <a:spcBef>
           <a:spcPct val="20000"/>
         </a:spcBef>
         <a:buFont typeface="Arial"/>
         <a:buChar char="•"/>
-        <a:defRPr sz="1800" kern="1200">
+        <a:defRPr kern="1200" sz="1800">
           <a:solidFill>
             <a:schemeClr val="tx1"/>
           </a:solidFill>
@@ -6421,13 +6339,13 @@
           <a:cs typeface="+mn-cs"/>
         </a:defRPr>
       </a:lvl3pPr>
-      <a:lvl4pPr marL="1371600" indent="-342900" algn="l" defTabSz="342900" rtl="0" eaLnBrk="1" latinLnBrk="0" hangingPunct="1">
+      <a:lvl4pPr algn="l" defTabSz="342900" eaLnBrk="1" hangingPunct="1" indent="-342900" latinLnBrk="0" marL="1371600" rtl="0">
         <a:spcBef>
           <a:spcPct val="20000"/>
         </a:spcBef>
         <a:buFont typeface="Arial"/>
         <a:buChar char="–"/>
-        <a:defRPr sz="1500" kern="1200">
+        <a:defRPr kern="1200" sz="1500">
           <a:solidFill>
             <a:schemeClr val="tx1"/>
           </a:solidFill>
@@ -6436,13 +6354,13 @@
           <a:cs typeface="+mn-cs"/>
         </a:defRPr>
       </a:lvl4pPr>
-      <a:lvl5pPr marL="1714500" indent="-342900" algn="l" defTabSz="342900" rtl="0" eaLnBrk="1" latinLnBrk="0" hangingPunct="1">
+      <a:lvl5pPr algn="l" defTabSz="342900" eaLnBrk="1" hangingPunct="1" indent="-342900" latinLnBrk="0" marL="1714500" rtl="0">
         <a:spcBef>
           <a:spcPct val="20000"/>
         </a:spcBef>
         <a:buFont typeface="Arial"/>
         <a:buChar char="»"/>
-        <a:defRPr sz="1500" kern="1200">
+        <a:defRPr kern="1200" sz="1500">
           <a:solidFill>
             <a:schemeClr val="tx1"/>
           </a:solidFill>
@@ -6451,13 +6369,13 @@
           <a:cs typeface="+mn-cs"/>
         </a:defRPr>
       </a:lvl5pPr>
-      <a:lvl6pPr marL="2057400" indent="-342900" algn="l" defTabSz="342900" rtl="0" eaLnBrk="1" latinLnBrk="0" hangingPunct="1">
+      <a:lvl6pPr algn="l" defTabSz="342900" eaLnBrk="1" hangingPunct="1" indent="-342900" latinLnBrk="0" marL="2057400" rtl="0">
         <a:spcBef>
           <a:spcPct val="20000"/>
         </a:spcBef>
         <a:buFont typeface="Arial"/>
         <a:buChar char="•"/>
-        <a:defRPr sz="1500" kern="1200">
+        <a:defRPr kern="1200" sz="1500">
           <a:solidFill>
             <a:schemeClr val="tx1"/>
           </a:solidFill>
@@ -6466,13 +6384,13 @@
           <a:cs typeface="+mn-cs"/>
         </a:defRPr>
       </a:lvl6pPr>
-      <a:lvl7pPr marL="2400300" indent="-342900" algn="l" defTabSz="342900" rtl="0" eaLnBrk="1" latinLnBrk="0" hangingPunct="1">
+      <a:lvl7pPr algn="l" defTabSz="342900" eaLnBrk="1" hangingPunct="1" indent="-342900" latinLnBrk="0" marL="2400300" rtl="0">
         <a:spcBef>
           <a:spcPct val="20000"/>
         </a:spcBef>
         <a:buFont typeface="Arial"/>
         <a:buChar char="•"/>
-        <a:defRPr sz="1500" kern="1200">
+        <a:defRPr kern="1200" sz="1500">
           <a:solidFill>
             <a:schemeClr val="tx1"/>
           </a:solidFill>
@@ -6481,13 +6399,13 @@
           <a:cs typeface="+mn-cs"/>
         </a:defRPr>
       </a:lvl7pPr>
-      <a:lvl8pPr marL="2743200" indent="-342900" algn="l" defTabSz="342900" rtl="0" eaLnBrk="1" latinLnBrk="0" hangingPunct="1">
+      <a:lvl8pPr algn="l" defTabSz="342900" eaLnBrk="1" hangingPunct="1" indent="-342900" latinLnBrk="0" marL="2743200" rtl="0">
         <a:spcBef>
           <a:spcPct val="20000"/>
         </a:spcBef>
         <a:buFont typeface="Arial"/>
         <a:buChar char="•"/>
-        <a:defRPr sz="1500" kern="1200">
+        <a:defRPr kern="1200" sz="1500">
           <a:solidFill>
             <a:schemeClr val="tx1"/>
           </a:solidFill>
@@ -6496,13 +6414,13 @@
           <a:cs typeface="+mn-cs"/>
         </a:defRPr>
       </a:lvl8pPr>
-      <a:lvl9pPr marL="3086100" indent="-342900" algn="l" defTabSz="342900" rtl="0" eaLnBrk="1" latinLnBrk="0" hangingPunct="1">
+      <a:lvl9pPr algn="l" defTabSz="342900" eaLnBrk="1" hangingPunct="1" indent="-342900" latinLnBrk="0" marL="3086100" rtl="0">
         <a:spcBef>
           <a:spcPct val="20000"/>
         </a:spcBef>
         <a:buFont typeface="Arial"/>
         <a:buChar char="•"/>
-        <a:defRPr sz="1500" kern="1200">
+        <a:defRPr kern="1200" sz="1500">
           <a:solidFill>
             <a:schemeClr val="tx1"/>
           </a:solidFill>
@@ -6516,8 +6434,8 @@
       <a:defPPr>
         <a:defRPr lang="en-US"/>
       </a:defPPr>
-      <a:lvl1pPr marL="0" algn="l" defTabSz="342900" rtl="0" eaLnBrk="1" latinLnBrk="0" hangingPunct="1">
-        <a:defRPr sz="1350" kern="1200">
+      <a:lvl1pPr algn="l" defTabSz="342900" eaLnBrk="1" hangingPunct="1" latinLnBrk="0" marL="0" rtl="0">
+        <a:defRPr kern="1200" sz="1350">
           <a:solidFill>
             <a:schemeClr val="tx1"/>
           </a:solidFill>
@@ -6526,8 +6444,8 @@
           <a:cs typeface="+mn-cs"/>
         </a:defRPr>
       </a:lvl1pPr>
-      <a:lvl2pPr marL="342900" algn="l" defTabSz="342900" rtl="0" eaLnBrk="1" latinLnBrk="0" hangingPunct="1">
-        <a:defRPr sz="1350" kern="1200">
+      <a:lvl2pPr algn="l" defTabSz="342900" eaLnBrk="1" hangingPunct="1" latinLnBrk="0" marL="342900" rtl="0">
+        <a:defRPr kern="1200" sz="1350">
           <a:solidFill>
             <a:schemeClr val="tx1"/>
           </a:solidFill>
@@ -6536,8 +6454,8 @@
           <a:cs typeface="+mn-cs"/>
         </a:defRPr>
       </a:lvl2pPr>
-      <a:lvl3pPr marL="685800" algn="l" defTabSz="342900" rtl="0" eaLnBrk="1" latinLnBrk="0" hangingPunct="1">
-        <a:defRPr sz="1350" kern="1200">
+      <a:lvl3pPr algn="l" defTabSz="342900" eaLnBrk="1" hangingPunct="1" latinLnBrk="0" marL="685800" rtl="0">
+        <a:defRPr kern="1200" sz="1350">
           <a:solidFill>
             <a:schemeClr val="tx1"/>
           </a:solidFill>
@@ -6546,8 +6464,8 @@
           <a:cs typeface="+mn-cs"/>
         </a:defRPr>
       </a:lvl3pPr>
-      <a:lvl4pPr marL="1028700" algn="l" defTabSz="342900" rtl="0" eaLnBrk="1" latinLnBrk="0" hangingPunct="1">
-        <a:defRPr sz="1350" kern="1200">
+      <a:lvl4pPr algn="l" defTabSz="342900" eaLnBrk="1" hangingPunct="1" latinLnBrk="0" marL="1028700" rtl="0">
+        <a:defRPr kern="1200" sz="1350">
           <a:solidFill>
             <a:schemeClr val="tx1"/>
           </a:solidFill>
@@ -6556,8 +6474,8 @@
           <a:cs typeface="+mn-cs"/>
         </a:defRPr>
       </a:lvl4pPr>
-      <a:lvl5pPr marL="1371600" algn="l" defTabSz="342900" rtl="0" eaLnBrk="1" latinLnBrk="0" hangingPunct="1">
-        <a:defRPr sz="1350" kern="1200">
+      <a:lvl5pPr algn="l" defTabSz="342900" eaLnBrk="1" hangingPunct="1" latinLnBrk="0" marL="1371600" rtl="0">
+        <a:defRPr kern="1200" sz="1350">
           <a:solidFill>
             <a:schemeClr val="tx1"/>
           </a:solidFill>
@@ -6566,8 +6484,8 @@
           <a:cs typeface="+mn-cs"/>
         </a:defRPr>
       </a:lvl5pPr>
-      <a:lvl6pPr marL="1714500" algn="l" defTabSz="342900" rtl="0" eaLnBrk="1" latinLnBrk="0" hangingPunct="1">
-        <a:defRPr sz="1350" kern="1200">
+      <a:lvl6pPr algn="l" defTabSz="342900" eaLnBrk="1" hangingPunct="1" latinLnBrk="0" marL="1714500" rtl="0">
+        <a:defRPr kern="1200" sz="1350">
           <a:solidFill>
             <a:schemeClr val="tx1"/>
           </a:solidFill>
@@ -6576,8 +6494,8 @@
           <a:cs typeface="+mn-cs"/>
         </a:defRPr>
       </a:lvl6pPr>
-      <a:lvl7pPr marL="2057400" algn="l" defTabSz="342900" rtl="0" eaLnBrk="1" latinLnBrk="0" hangingPunct="1">
-        <a:defRPr sz="1350" kern="1200">
+      <a:lvl7pPr algn="l" defTabSz="342900" eaLnBrk="1" hangingPunct="1" latinLnBrk="0" marL="2057400" rtl="0">
+        <a:defRPr kern="1200" sz="1350">
           <a:solidFill>
             <a:schemeClr val="tx1"/>
           </a:solidFill>
@@ -6586,8 +6504,8 @@
           <a:cs typeface="+mn-cs"/>
         </a:defRPr>
       </a:lvl7pPr>
-      <a:lvl8pPr marL="2400300" algn="l" defTabSz="342900" rtl="0" eaLnBrk="1" latinLnBrk="0" hangingPunct="1">
-        <a:defRPr sz="1350" kern="1200">
+      <a:lvl8pPr algn="l" defTabSz="342900" eaLnBrk="1" hangingPunct="1" latinLnBrk="0" marL="2400300" rtl="0">
+        <a:defRPr kern="1200" sz="1350">
           <a:solidFill>
             <a:schemeClr val="tx1"/>
           </a:solidFill>
@@ -6596,8 +6514,8 @@
           <a:cs typeface="+mn-cs"/>
         </a:defRPr>
       </a:lvl8pPr>
-      <a:lvl9pPr marL="2743200" algn="l" defTabSz="342900" rtl="0" eaLnBrk="1" latinLnBrk="0" hangingPunct="1">
-        <a:defRPr sz="1350" kern="1200">
+      <a:lvl9pPr algn="l" defTabSz="342900" eaLnBrk="1" hangingPunct="1" latinLnBrk="0" marL="2743200" rtl="0">
+        <a:defRPr kern="1200" sz="1350">
           <a:solidFill>
             <a:schemeClr val="tx1"/>
           </a:solidFill>
@@ -6614,14 +6532,6 @@
 <file path=ppt/slides/slide1.xml><?xml version="1.0" encoding="utf-8"?>
 <p:sld xmlns:a="http://schemas.openxmlformats.org/drawingml/2006/main" xmlns:r="http://schemas.openxmlformats.org/officeDocument/2006/relationships" xmlns:p="http://schemas.openxmlformats.org/presentationml/2006/main">
   <p:cSld>
-    <p:bg>
-      <p:bgPr>
-        <a:solidFill>
-          <a:schemeClr val="bg1"/>
-        </a:solidFill>
-        <a:effectLst/>
-      </p:bgPr>
-    </p:bg>
     <p:spTree>
       <p:nvGrpSpPr>
         <p:cNvPr id="1" name=""/>
@@ -6636,749 +6546,63 @@
           <a:chExt cx="0" cy="0"/>
         </a:xfrm>
       </p:grpSpPr>
-      <p:sp useBgFill="1">
-        <p:nvSpPr>
-          <p:cNvPr id="19" name="Rectangle 18">
-            <a:extLst>
-              <a:ext uri="{FF2B5EF4-FFF2-40B4-BE49-F238E27FC236}">
-                <a16:creationId xmlns:a16="http://schemas.microsoft.com/office/drawing/2014/main" id="{7DA3C418-758E-4180-A5D0-8655D6804587}"/>
-              </a:ext>
-              <a:ext uri="{C183D7F6-B498-43B3-948B-1728B52AA6E4}">
-                <adec:decorative xmlns:adec="http://schemas.microsoft.com/office/drawing/2017/decorative" val="1"/>
-              </a:ext>
-            </a:extLst>
-          </p:cNvPr>
-          <p:cNvSpPr>
-            <a:spLocks noGrp="1" noRot="1" noChangeAspect="1" noMove="1" noResize="1" noEditPoints="1" noAdjustHandles="1" noChangeArrowheads="1" noChangeShapeType="1" noTextEdit="1"/>
-          </p:cNvSpPr>
-          <p:nvPr>
-            <p:extLst>
-              <p:ext uri="{386F3935-93C4-4BCD-93E2-E3B085C9AB24}">
-                <p16:designElem xmlns:p16="http://schemas.microsoft.com/office/powerpoint/2015/main" val="1"/>
-              </p:ext>
-            </p:extLst>
+      <p:sp>
+        <p:nvSpPr>
+          <p:cNvPr id="2" name="Title 1"/>
+          <p:cNvSpPr>
+            <a:spLocks noGrp="1"/>
+          </p:cNvSpPr>
+          <p:nvPr>
+            <p:ph type="ctrTitle"/>
           </p:nvPr>
         </p:nvSpPr>
         <p:spPr>
           <a:xfrm>
-            <a:off x="0" y="0"/>
-            <a:ext cx="9144000" cy="5143500"/>
+            <a:off x="685800" y="1597819"/>
+            <a:ext cx="7772400" cy="1102519"/>
           </a:xfrm>
-          <a:prstGeom prst="rect">
-            <a:avLst/>
-          </a:prstGeom>
-          <a:ln w="12700" cap="flat" cmpd="sng" algn="ctr">
-            <a:noFill/>
-            <a:prstDash val="solid"/>
-            <a:miter lim="800000"/>
-          </a:ln>
-          <a:effectLst/>
-          <a:extLst>
-            <a:ext uri="{91240B29-F687-4F45-9708-019B960494DF}">
-              <a14:hiddenLine xmlns:a14="http://schemas.microsoft.com/office/drawing/2010/main" w="12700" cap="flat" cmpd="sng" algn="ctr">
-                <a:solidFill>
-                  <a:schemeClr val="accent1">
-                    <a:shade val="50000"/>
-                  </a:schemeClr>
-                </a:solidFill>
-                <a:prstDash val="solid"/>
-                <a:miter lim="800000"/>
-              </a14:hiddenLine>
-            </a:ext>
-          </a:extLst>
         </p:spPr>
-        <p:style>
-          <a:lnRef idx="2">
-            <a:schemeClr val="accent1">
-              <a:shade val="50000"/>
-            </a:schemeClr>
-          </a:lnRef>
-          <a:fillRef idx="1">
-            <a:schemeClr val="accent1"/>
-          </a:fillRef>
-          <a:effectRef idx="0">
-            <a:schemeClr val="accent1"/>
-          </a:effectRef>
-          <a:fontRef idx="minor">
-            <a:schemeClr val="lt1"/>
-          </a:fontRef>
-        </p:style>
-        <p:txBody>
-          <a:bodyPr rtlCol="0" anchor="ctr"/>
-          <a:lstStyle/>
-          <a:p>
-            <a:pPr algn="ctr"/>
-            <a:endParaRPr lang="en-US"/>
-          </a:p>
-        </p:txBody>
-      </p:sp>
-      <p:sp>
-        <p:nvSpPr>
-          <p:cNvPr id="21" name="Rectangle 20">
-            <a:extLst>
-              <a:ext uri="{FF2B5EF4-FFF2-40B4-BE49-F238E27FC236}">
-                <a16:creationId xmlns:a16="http://schemas.microsoft.com/office/drawing/2014/main" id="{28C8EF06-5EC3-4883-AFAF-D74FF46550FB}"/>
-              </a:ext>
-              <a:ext uri="{C183D7F6-B498-43B3-948B-1728B52AA6E4}">
-                <adec:decorative xmlns:adec="http://schemas.microsoft.com/office/drawing/2017/decorative" val="1"/>
-              </a:ext>
-            </a:extLst>
-          </p:cNvPr>
-          <p:cNvSpPr>
-            <a:spLocks noGrp="1" noRot="1" noChangeAspect="1" noMove="1" noResize="1" noEditPoints="1" noAdjustHandles="1" noChangeArrowheads="1" noChangeShapeType="1" noTextEdit="1"/>
-          </p:cNvSpPr>
-          <p:nvPr>
-            <p:extLst>
-              <p:ext uri="{386F3935-93C4-4BCD-93E2-E3B085C9AB24}">
-                <p16:designElem xmlns:p16="http://schemas.microsoft.com/office/powerpoint/2015/main" val="1"/>
-              </p:ext>
-            </p:extLst>
+        <p:txBody>
+          <a:bodyPr/>
+          <a:lstStyle/>
+          <a:p>
+            <a:pPr lvl="0" indent="0" marL="0">
+              <a:buNone/>
+            </a:pPr>
+            <a:r>
+              <a:rPr/>
+              <a:t>AI in Pedagogical Design and Delivery</a:t>
+            </a:r>
+          </a:p>
+        </p:txBody>
+      </p:sp>
+      <p:sp>
+        <p:nvSpPr>
+          <p:cNvPr id="3" name="Subtitle 2"/>
+          <p:cNvSpPr>
+            <a:spLocks noGrp="1"/>
+          </p:cNvSpPr>
+          <p:nvPr>
+            <p:ph idx="1" type="subTitle"/>
           </p:nvPr>
         </p:nvSpPr>
         <p:spPr>
           <a:xfrm>
-            <a:off x="-2" y="0"/>
-            <a:ext cx="3851978" cy="5153736"/>
-          </a:xfrm>
-          <a:prstGeom prst="rect">
-            <a:avLst/>
-          </a:prstGeom>
-          <a:solidFill>
-            <a:srgbClr val="82766A">
-              <a:alpha val="15000"/>
-            </a:srgbClr>
-          </a:solidFill>
-          <a:ln>
-            <a:noFill/>
-          </a:ln>
-        </p:spPr>
-        <p:style>
-          <a:lnRef idx="2">
-            <a:schemeClr val="accent1">
-              <a:shade val="50000"/>
-            </a:schemeClr>
-          </a:lnRef>
-          <a:fillRef idx="1">
-            <a:schemeClr val="accent1"/>
-          </a:fillRef>
-          <a:effectRef idx="0">
-            <a:schemeClr val="accent1"/>
-          </a:effectRef>
-          <a:fontRef idx="minor">
-            <a:schemeClr val="lt1"/>
-          </a:fontRef>
-        </p:style>
-        <p:txBody>
-          <a:bodyPr rtlCol="0" anchor="ctr"/>
-          <a:lstStyle/>
-          <a:p>
-            <a:pPr algn="ctr"/>
-            <a:endParaRPr lang="en-US"/>
-          </a:p>
-        </p:txBody>
-      </p:sp>
-      <p:pic>
-        <p:nvPicPr>
-          <p:cNvPr id="5" name="Picture 1" descr="../docs/images/copilot-2-sigma.png">
-            <a:extLst>
-              <a:ext uri="{FF2B5EF4-FFF2-40B4-BE49-F238E27FC236}">
-                <a16:creationId xmlns:a16="http://schemas.microsoft.com/office/drawing/2014/main" id="{C3A21620-66A7-3AE4-3A1B-EB7C6754CBBA}"/>
-              </a:ext>
-            </a:extLst>
-          </p:cNvPr>
-          <p:cNvPicPr>
-            <a:picLocks noGrp="1" noChangeAspect="1"/>
-          </p:cNvPicPr>
-          <p:nvPr/>
-        </p:nvPicPr>
-        <p:blipFill>
-          <a:blip r:embed="rId3"/>
-          <a:srcRect l="4005" r="11454"/>
-          <a:stretch>
-            <a:fillRect/>
-          </a:stretch>
-        </p:blipFill>
-        <p:spPr bwMode="auto">
-          <a:xfrm>
-            <a:off x="2186591" y="10"/>
-            <a:ext cx="6957409" cy="5143490"/>
-          </a:xfrm>
-          <a:custGeom>
-            <a:avLst/>
-            <a:gdLst/>
-            <a:ahLst/>
-            <a:cxnLst/>
-            <a:rect l="l" t="t" r="r" b="b"/>
-            <a:pathLst>
-              <a:path w="9276545" h="6871647">
-                <a:moveTo>
-                  <a:pt x="9276545" y="0"/>
-                </a:moveTo>
-                <a:lnTo>
-                  <a:pt x="9276545" y="6858000"/>
-                </a:lnTo>
-                <a:lnTo>
-                  <a:pt x="1546051" y="6871647"/>
-                </a:lnTo>
-                <a:lnTo>
-                  <a:pt x="1535751" y="6828910"/>
-                </a:lnTo>
-                <a:cubicBezTo>
-                  <a:pt x="1530460" y="6775140"/>
-                  <a:pt x="1515370" y="6618042"/>
-                  <a:pt x="1514301" y="6549029"/>
-                </a:cubicBezTo>
-                <a:cubicBezTo>
-                  <a:pt x="1518045" y="6491396"/>
-                  <a:pt x="1528503" y="6450608"/>
-                  <a:pt x="1529339" y="6414828"/>
-                </a:cubicBezTo>
-                <a:cubicBezTo>
-                  <a:pt x="1525062" y="6359280"/>
-                  <a:pt x="1502062" y="6307149"/>
-                  <a:pt x="1493941" y="6268848"/>
-                </a:cubicBezTo>
-                <a:cubicBezTo>
-                  <a:pt x="1502669" y="6254191"/>
-                  <a:pt x="1469920" y="6200171"/>
-                  <a:pt x="1480613" y="6185025"/>
-                </a:cubicBezTo>
-                <a:cubicBezTo>
-                  <a:pt x="1481020" y="6164522"/>
-                  <a:pt x="1458164" y="6060790"/>
-                  <a:pt x="1443364" y="6018360"/>
-                </a:cubicBezTo>
-                <a:cubicBezTo>
-                  <a:pt x="1426694" y="5970758"/>
-                  <a:pt x="1390307" y="5920074"/>
-                  <a:pt x="1380584" y="5899407"/>
-                </a:cubicBezTo>
-                <a:cubicBezTo>
-                  <a:pt x="1370860" y="5878740"/>
-                  <a:pt x="1392244" y="5920877"/>
-                  <a:pt x="1385023" y="5894356"/>
-                </a:cubicBezTo>
-                <a:cubicBezTo>
-                  <a:pt x="1377800" y="5867835"/>
-                  <a:pt x="1345702" y="5770498"/>
-                  <a:pt x="1337254" y="5740279"/>
-                </a:cubicBezTo>
-                <a:cubicBezTo>
-                  <a:pt x="1353956" y="5738860"/>
-                  <a:pt x="1323673" y="5722040"/>
-                  <a:pt x="1334321" y="5713042"/>
-                </a:cubicBezTo>
-                <a:cubicBezTo>
-                  <a:pt x="1343675" y="5706701"/>
-                  <a:pt x="1336672" y="5700118"/>
-                  <a:pt x="1335877" y="5692870"/>
-                </a:cubicBezTo>
-                <a:cubicBezTo>
-                  <a:pt x="1343201" y="5683812"/>
-                  <a:pt x="1329617" y="5652064"/>
-                  <a:pt x="1319978" y="5643427"/>
-                </a:cubicBezTo>
-                <a:cubicBezTo>
-                  <a:pt x="1286551" y="5622177"/>
-                  <a:pt x="1310947" y="5579803"/>
-                  <a:pt x="1285321" y="5562271"/>
-                </a:cubicBezTo>
-                <a:cubicBezTo>
-                  <a:pt x="1281540" y="5556238"/>
-                  <a:pt x="1279983" y="5550455"/>
-                  <a:pt x="1279815" y="5544867"/>
-                </a:cubicBezTo>
-                <a:lnTo>
-                  <a:pt x="1282507" y="5529404"/>
-                </a:lnTo>
-                <a:lnTo>
-                  <a:pt x="1289604" y="5525378"/>
-                </a:lnTo>
-                <a:lnTo>
-                  <a:pt x="1287766" y="5515726"/>
-                </a:lnTo>
-                <a:lnTo>
-                  <a:pt x="1288829" y="5513051"/>
-                </a:lnTo>
-                <a:cubicBezTo>
-                  <a:pt x="1290896" y="5507946"/>
-                  <a:pt x="1292688" y="5502897"/>
-                  <a:pt x="1293373" y="5497833"/>
-                </a:cubicBezTo>
-                <a:cubicBezTo>
-                  <a:pt x="1288690" y="5483829"/>
-                  <a:pt x="1272696" y="5459278"/>
-                  <a:pt x="1260736" y="5429027"/>
-                </a:cubicBezTo>
-                <a:cubicBezTo>
-                  <a:pt x="1238579" y="5396416"/>
-                  <a:pt x="1238884" y="5351600"/>
-                  <a:pt x="1221610" y="5316328"/>
-                </a:cubicBezTo>
-                <a:lnTo>
-                  <a:pt x="1216099" y="5309330"/>
-                </a:lnTo>
-                <a:lnTo>
-                  <a:pt x="1217278" y="5279477"/>
-                </a:lnTo>
-                <a:cubicBezTo>
-                  <a:pt x="1221588" y="5274318"/>
-                  <a:pt x="1222716" y="5266940"/>
-                  <a:pt x="1218469" y="5260597"/>
-                </a:cubicBezTo>
-                <a:lnTo>
-                  <a:pt x="1206220" y="5152555"/>
-                </a:lnTo>
-                <a:cubicBezTo>
-                  <a:pt x="1205294" y="5116878"/>
-                  <a:pt x="1196908" y="5101727"/>
-                  <a:pt x="1212921" y="5046536"/>
-                </a:cubicBezTo>
-                <a:cubicBezTo>
-                  <a:pt x="1234138" y="4987918"/>
-                  <a:pt x="1204801" y="4903116"/>
-                  <a:pt x="1212183" y="4837345"/>
-                </a:cubicBezTo>
-                <a:cubicBezTo>
-                  <a:pt x="1183151" y="4802424"/>
-                  <a:pt x="1209228" y="4821062"/>
-                  <a:pt x="1202048" y="4784195"/>
-                </a:cubicBezTo>
-                <a:cubicBezTo>
-                  <a:pt x="1202483" y="4760878"/>
-                  <a:pt x="1202919" y="4737561"/>
-                  <a:pt x="1203354" y="4714245"/>
-                </a:cubicBezTo>
-                <a:lnTo>
-                  <a:pt x="1201502" y="4700836"/>
-                </a:lnTo>
-                <a:lnTo>
-                  <a:pt x="1194919" y="4697224"/>
-                </a:lnTo>
-                <a:lnTo>
-                  <a:pt x="1187792" y="4677162"/>
-                </a:lnTo>
-                <a:cubicBezTo>
-                  <a:pt x="1186060" y="4669625"/>
-                  <a:pt x="1185291" y="4661478"/>
-                  <a:pt x="1186080" y="4652429"/>
-                </a:cubicBezTo>
-                <a:cubicBezTo>
-                  <a:pt x="1199189" y="4622456"/>
-                  <a:pt x="1167081" y="4571771"/>
-                  <a:pt x="1184722" y="4534840"/>
-                </a:cubicBezTo>
-                <a:cubicBezTo>
-                  <a:pt x="1182407" y="4499077"/>
-                  <a:pt x="1175424" y="4460227"/>
-                  <a:pt x="1172188" y="4437851"/>
-                </a:cubicBezTo>
-                <a:cubicBezTo>
-                  <a:pt x="1161331" y="4428466"/>
-                  <a:pt x="1178123" y="4398274"/>
-                  <a:pt x="1165306" y="4400581"/>
-                </a:cubicBezTo>
-                <a:cubicBezTo>
-                  <a:pt x="1171061" y="4389819"/>
-                  <a:pt x="1173552" y="4346771"/>
-                  <a:pt x="1168602" y="4335651"/>
-                </a:cubicBezTo>
-                <a:lnTo>
-                  <a:pt x="1178384" y="4280215"/>
-                </a:lnTo>
-                <a:lnTo>
-                  <a:pt x="1177294" y="4274660"/>
-                </a:lnTo>
-                <a:cubicBezTo>
-                  <a:pt x="1177138" y="4268882"/>
-                  <a:pt x="1177520" y="4251103"/>
-                  <a:pt x="1177448" y="4245552"/>
-                </a:cubicBezTo>
-                <a:cubicBezTo>
-                  <a:pt x="1177252" y="4244155"/>
-                  <a:pt x="1177058" y="4242757"/>
-                  <a:pt x="1176863" y="4241361"/>
-                </a:cubicBezTo>
-                <a:lnTo>
-                  <a:pt x="1162386" y="4207167"/>
-                </a:lnTo>
-                <a:cubicBezTo>
-                  <a:pt x="1162950" y="4202536"/>
-                  <a:pt x="1174655" y="4199565"/>
-                  <a:pt x="1174343" y="4192380"/>
-                </a:cubicBezTo>
-                <a:lnTo>
-                  <a:pt x="1160516" y="4164062"/>
-                </a:lnTo>
-                <a:lnTo>
-                  <a:pt x="1161365" y="4158623"/>
-                </a:lnTo>
-                <a:lnTo>
-                  <a:pt x="1144878" y="4076261"/>
-                </a:lnTo>
-                <a:lnTo>
-                  <a:pt x="1123687" y="4005692"/>
-                </a:lnTo>
-                <a:lnTo>
-                  <a:pt x="1096720" y="3754257"/>
-                </a:lnTo>
-                <a:cubicBezTo>
-                  <a:pt x="1083618" y="3639924"/>
-                  <a:pt x="1064313" y="3636659"/>
-                  <a:pt x="1047682" y="3517638"/>
-                </a:cubicBezTo>
-                <a:cubicBezTo>
-                  <a:pt x="1048550" y="3477187"/>
-                  <a:pt x="1049418" y="3436735"/>
-                  <a:pt x="1050285" y="3396284"/>
-                </a:cubicBezTo>
-                <a:lnTo>
-                  <a:pt x="1030166" y="3320814"/>
-                </a:lnTo>
-                <a:lnTo>
-                  <a:pt x="1034128" y="3260443"/>
-                </a:lnTo>
-                <a:lnTo>
-                  <a:pt x="1007751" y="3198916"/>
-                </a:lnTo>
-                <a:cubicBezTo>
-                  <a:pt x="1003323" y="3193074"/>
-                  <a:pt x="1001150" y="3187393"/>
-                  <a:pt x="1000384" y="3181839"/>
-                </a:cubicBezTo>
-                <a:cubicBezTo>
-                  <a:pt x="1000734" y="3176675"/>
-                  <a:pt x="1001085" y="3171511"/>
-                  <a:pt x="1001435" y="3166346"/>
-                </a:cubicBezTo>
-                <a:lnTo>
-                  <a:pt x="968918" y="3112638"/>
-                </a:lnTo>
-                <a:cubicBezTo>
-                  <a:pt x="957125" y="3092489"/>
-                  <a:pt x="955617" y="3065232"/>
-                  <a:pt x="934483" y="3031628"/>
-                </a:cubicBezTo>
-                <a:cubicBezTo>
-                  <a:pt x="914631" y="2997037"/>
-                  <a:pt x="908933" y="3005661"/>
-                  <a:pt x="879229" y="2948196"/>
-                </a:cubicBezTo>
-                <a:cubicBezTo>
-                  <a:pt x="850845" y="2897154"/>
-                  <a:pt x="820829" y="2806798"/>
-                  <a:pt x="798666" y="2761198"/>
-                </a:cubicBezTo>
-                <a:cubicBezTo>
-                  <a:pt x="773970" y="2714562"/>
-                  <a:pt x="758278" y="2715446"/>
-                  <a:pt x="746962" y="2694939"/>
-                </a:cubicBezTo>
-                <a:lnTo>
-                  <a:pt x="712796" y="2614779"/>
-                </a:lnTo>
-                <a:lnTo>
-                  <a:pt x="697701" y="2600020"/>
-                </a:lnTo>
-                <a:cubicBezTo>
-                  <a:pt x="697743" y="2598787"/>
-                  <a:pt x="697784" y="2597555"/>
-                  <a:pt x="697823" y="2596321"/>
-                </a:cubicBezTo>
-                <a:lnTo>
-                  <a:pt x="679645" y="2572602"/>
-                </a:lnTo>
-                <a:lnTo>
-                  <a:pt x="680789" y="2571831"/>
-                </a:lnTo>
-                <a:cubicBezTo>
-                  <a:pt x="682946" y="2569560"/>
-                  <a:pt x="683757" y="2566863"/>
-                  <a:pt x="681771" y="2563200"/>
-                </a:cubicBezTo>
-                <a:cubicBezTo>
-                  <a:pt x="705290" y="2562299"/>
-                  <a:pt x="688388" y="2558438"/>
-                  <a:pt x="680456" y="2547723"/>
-                </a:cubicBezTo>
-                <a:cubicBezTo>
-                  <a:pt x="679482" y="2534148"/>
-                  <a:pt x="677183" y="2493617"/>
-                  <a:pt x="675922" y="2481749"/>
-                </a:cubicBezTo>
-                <a:lnTo>
-                  <a:pt x="672894" y="2476509"/>
-                </a:lnTo>
-                <a:lnTo>
-                  <a:pt x="673143" y="2476297"/>
-                </a:lnTo>
-                <a:cubicBezTo>
-                  <a:pt x="673152" y="2474932"/>
-                  <a:pt x="672405" y="2473126"/>
-                  <a:pt x="670567" y="2470561"/>
-                </a:cubicBezTo>
-                <a:lnTo>
-                  <a:pt x="667369" y="2466951"/>
-                </a:lnTo>
-                <a:lnTo>
-                  <a:pt x="661495" y="2456785"/>
-                </a:lnTo>
-                <a:cubicBezTo>
-                  <a:pt x="661510" y="2455387"/>
-                  <a:pt x="661525" y="2453987"/>
-                  <a:pt x="661540" y="2452588"/>
-                </a:cubicBezTo>
-                <a:lnTo>
-                  <a:pt x="664540" y="2449913"/>
-                </a:lnTo>
-                <a:lnTo>
-                  <a:pt x="663581" y="2449129"/>
-                </a:lnTo>
-                <a:cubicBezTo>
-                  <a:pt x="653014" y="2444453"/>
-                  <a:pt x="642406" y="2445872"/>
-                  <a:pt x="663129" y="2426579"/>
-                </a:cubicBezTo>
-                <a:cubicBezTo>
-                  <a:pt x="643271" y="2414167"/>
-                  <a:pt x="657229" y="2404769"/>
-                  <a:pt x="650205" y="2379928"/>
-                </a:cubicBezTo>
-                <a:cubicBezTo>
-                  <a:pt x="634911" y="2374359"/>
-                  <a:pt x="634260" y="2365346"/>
-                  <a:pt x="638008" y="2354824"/>
-                </a:cubicBezTo>
-                <a:cubicBezTo>
-                  <a:pt x="621083" y="2334576"/>
-                  <a:pt x="620949" y="2310146"/>
-                  <a:pt x="609851" y="2284299"/>
-                </a:cubicBezTo>
-                <a:lnTo>
-                  <a:pt x="585585" y="2155739"/>
-                </a:lnTo>
-                <a:lnTo>
-                  <a:pt x="581391" y="2152892"/>
-                </a:lnTo>
-                <a:cubicBezTo>
-                  <a:pt x="578821" y="2150768"/>
-                  <a:pt x="577525" y="2149149"/>
-                  <a:pt x="577083" y="2147807"/>
-                </a:cubicBezTo>
-                <a:lnTo>
-                  <a:pt x="577251" y="2147544"/>
-                </a:lnTo>
-                <a:lnTo>
-                  <a:pt x="546845" y="2085601"/>
-                </a:lnTo>
-                <a:cubicBezTo>
-                  <a:pt x="538270" y="2073917"/>
-                  <a:pt x="486356" y="1955894"/>
-                  <a:pt x="470837" y="1931362"/>
-                </a:cubicBezTo>
-                <a:lnTo>
-                  <a:pt x="428154" y="1657167"/>
-                </a:lnTo>
-                <a:lnTo>
-                  <a:pt x="392797" y="1510175"/>
-                </a:lnTo>
-                <a:cubicBezTo>
-                  <a:pt x="380165" y="1504446"/>
-                  <a:pt x="369910" y="1451095"/>
-                  <a:pt x="372847" y="1440507"/>
-                </a:cubicBezTo>
-                <a:cubicBezTo>
-                  <a:pt x="369015" y="1433783"/>
-                  <a:pt x="338503" y="1376212"/>
-                  <a:pt x="344479" y="1367690"/>
-                </a:cubicBezTo>
-                <a:cubicBezTo>
-                  <a:pt x="332264" y="1342150"/>
-                  <a:pt x="321736" y="1310521"/>
-                  <a:pt x="299558" y="1287266"/>
-                </a:cubicBezTo>
-                <a:cubicBezTo>
-                  <a:pt x="277380" y="1264010"/>
-                  <a:pt x="259203" y="1269909"/>
-                  <a:pt x="243216" y="1249403"/>
-                </a:cubicBezTo>
-                <a:cubicBezTo>
-                  <a:pt x="227230" y="1228898"/>
-                  <a:pt x="218454" y="1166841"/>
-                  <a:pt x="203639" y="1164232"/>
-                </a:cubicBezTo>
-                <a:cubicBezTo>
-                  <a:pt x="192352" y="1144923"/>
-                  <a:pt x="198158" y="1133798"/>
-                  <a:pt x="169195" y="1087898"/>
-                </a:cubicBezTo>
-                <a:cubicBezTo>
-                  <a:pt x="139228" y="1002950"/>
-                  <a:pt x="140891" y="969630"/>
-                  <a:pt x="98775" y="910071"/>
-                </a:cubicBezTo>
-                <a:cubicBezTo>
-                  <a:pt x="45025" y="831068"/>
-                  <a:pt x="34038" y="817468"/>
-                  <a:pt x="43820" y="712632"/>
-                </a:cubicBezTo>
-                <a:cubicBezTo>
-                  <a:pt x="34816" y="659496"/>
-                  <a:pt x="43273" y="613587"/>
-                  <a:pt x="44748" y="591246"/>
-                </a:cubicBezTo>
-                <a:lnTo>
-                  <a:pt x="36767" y="546725"/>
-                </a:lnTo>
-                <a:cubicBezTo>
-                  <a:pt x="36093" y="528360"/>
-                  <a:pt x="35418" y="509996"/>
-                  <a:pt x="34744" y="491632"/>
-                </a:cubicBezTo>
-                <a:cubicBezTo>
-                  <a:pt x="34670" y="458441"/>
-                  <a:pt x="29296" y="473054"/>
-                  <a:pt x="29222" y="439863"/>
-                </a:cubicBezTo>
-                <a:cubicBezTo>
-                  <a:pt x="29152" y="439762"/>
-                  <a:pt x="2578" y="397168"/>
-                  <a:pt x="2507" y="397065"/>
-                </a:cubicBezTo>
-                <a:cubicBezTo>
-                  <a:pt x="-7796" y="385479"/>
-                  <a:pt x="17492" y="336832"/>
-                  <a:pt x="9810" y="317232"/>
-                </a:cubicBezTo>
-                <a:lnTo>
-                  <a:pt x="25323" y="268841"/>
-                </a:lnTo>
-                <a:cubicBezTo>
-                  <a:pt x="20582" y="241406"/>
-                  <a:pt x="55391" y="238509"/>
-                  <a:pt x="50278" y="195107"/>
-                </a:cubicBezTo>
-                <a:cubicBezTo>
-                  <a:pt x="49891" y="157638"/>
-                  <a:pt x="41873" y="124837"/>
-                  <a:pt x="47653" y="93413"/>
-                </a:cubicBezTo>
-                <a:cubicBezTo>
-                  <a:pt x="41389" y="80245"/>
-                  <a:pt x="38874" y="67990"/>
-                  <a:pt x="48323" y="56668"/>
-                </a:cubicBezTo>
-                <a:cubicBezTo>
-                  <a:pt x="46028" y="30349"/>
-                  <a:pt x="37896" y="18658"/>
-                  <a:pt x="38423" y="5323"/>
-                </a:cubicBezTo>
-                <a:lnTo>
-                  <a:pt x="39875" y="1"/>
-                </a:lnTo>
-                <a:close/>
-              </a:path>
-            </a:pathLst>
-          </a:custGeom>
-          <a:noFill/>
-        </p:spPr>
-      </p:pic>
-      <p:sp>
-        <p:nvSpPr>
-          <p:cNvPr id="2" name="Title 1"/>
-          <p:cNvSpPr>
-            <a:spLocks noGrp="1"/>
-          </p:cNvSpPr>
-          <p:nvPr>
-            <p:ph type="ctrTitle"/>
-          </p:nvPr>
-        </p:nvSpPr>
-        <p:spPr>
-          <a:xfrm>
-            <a:off x="496437" y="2139285"/>
-            <a:ext cx="2371455" cy="1980186"/>
+            <a:off x="1371600" y="2914650"/>
+            <a:ext cx="6400800" cy="1314450"/>
           </a:xfrm>
         </p:spPr>
         <p:txBody>
-          <a:bodyPr>
-            <a:normAutofit/>
-          </a:bodyPr>
-          <a:lstStyle/>
-          <a:p>
-            <a:pPr marL="0" lvl="0" indent="0" algn="l">
-              <a:buNone/>
-            </a:pPr>
-            <a:r>
-              <a:rPr lang="en-AU" sz="2700">
-                <a:solidFill>
-                  <a:schemeClr val="tx1">
-                    <a:lumMod val="85000"/>
-                    <a:lumOff val="15000"/>
-                  </a:schemeClr>
-                </a:solidFill>
-              </a:rPr>
-              <a:t>AI in Pedagogical Design and Delivery</a:t>
-            </a:r>
-          </a:p>
-        </p:txBody>
-      </p:sp>
-      <p:sp>
-        <p:nvSpPr>
-          <p:cNvPr id="3" name="Subtitle 2"/>
-          <p:cNvSpPr>
-            <a:spLocks noGrp="1"/>
-          </p:cNvSpPr>
-          <p:nvPr>
-            <p:ph type="subTitle" idx="1"/>
-          </p:nvPr>
-        </p:nvSpPr>
-        <p:spPr>
-          <a:xfrm>
-            <a:off x="496436" y="4257675"/>
-            <a:ext cx="2479567" cy="499352"/>
-          </a:xfrm>
-        </p:spPr>
-        <p:txBody>
-          <a:bodyPr>
-            <a:normAutofit/>
-          </a:bodyPr>
-          <a:lstStyle/>
-          <a:p>
-            <a:pPr marL="0" lvl="0" indent="0" algn="l">
-              <a:lnSpc>
-                <a:spcPct val="90000"/>
-              </a:lnSpc>
-              <a:buNone/>
-            </a:pPr>
-            <a:br>
-              <a:rPr lang="en-AU" sz="900">
-                <a:solidFill>
-                  <a:schemeClr val="tx1">
-                    <a:lumMod val="85000"/>
-                    <a:lumOff val="15000"/>
-                  </a:schemeClr>
-                </a:solidFill>
-              </a:rPr>
-            </a:br>
-            <a:br>
-              <a:rPr lang="en-AU" sz="900">
-                <a:solidFill>
-                  <a:schemeClr val="tx1">
-                    <a:lumMod val="85000"/>
-                    <a:lumOff val="15000"/>
-                  </a:schemeClr>
-                </a:solidFill>
-              </a:rPr>
-            </a:br>
-            <a:r>
-              <a:rPr lang="en-AU" sz="900">
-                <a:solidFill>
-                  <a:schemeClr val="tx1">
-                    <a:lumMod val="85000"/>
-                    <a:lumOff val="15000"/>
-                  </a:schemeClr>
-                </a:solidFill>
-              </a:rPr>
+          <a:bodyPr/>
+          <a:lstStyle/>
+          <a:p>
+            <a:pPr lvl="0" indent="0" marL="0">
+              <a:buNone/>
+            </a:pPr>
+            <a:br/>
+            <a:br/>
+            <a:r>
+              <a:rPr/>
               <a:t>Michael Borck</a:t>
             </a:r>
           </a:p>
@@ -7391,36 +6615,19 @@
             <a:spLocks noGrp="1"/>
           </p:cNvSpPr>
           <p:nvPr>
-            <p:ph type="dt" sz="half" idx="10"/>
-          </p:nvPr>
-        </p:nvSpPr>
-        <p:spPr>
-          <a:xfrm>
-            <a:off x="628650" y="4767262"/>
-            <a:ext cx="2057400" cy="273844"/>
-          </a:xfrm>
-        </p:spPr>
-        <p:txBody>
-          <a:bodyPr>
-            <a:normAutofit/>
-          </a:bodyPr>
-          <a:lstStyle/>
-          <a:p>
-            <a:pPr marL="0" lvl="0" indent="0">
-              <a:spcAft>
-                <a:spcPts val="600"/>
-              </a:spcAft>
-              <a:buNone/>
-            </a:pPr>
-            <a:r>
-              <a:rPr lang="en-AU" sz="800">
-                <a:solidFill>
-                  <a:schemeClr val="tx1">
-                    <a:lumMod val="50000"/>
-                    <a:lumOff val="50000"/>
-                  </a:schemeClr>
-                </a:solidFill>
-              </a:rPr>
+            <p:ph idx="10" sz="half" type="dt"/>
+          </p:nvPr>
+        </p:nvSpPr>
+        <p:spPr/>
+        <p:txBody>
+          <a:bodyPr/>
+          <a:lstStyle/>
+          <a:p>
+            <a:pPr lvl="0" indent="0" marL="0">
+              <a:buNone/>
+            </a:pPr>
+            <a:r>
+              <a:rPr/>
               <a:t>2025-11-17</a:t>
             </a:r>
           </a:p>
@@ -7428,9 +6635,6 @@
       </p:sp>
     </p:spTree>
   </p:cSld>
-  <p:clrMapOvr>
-    <a:masterClrMapping/>
-  </p:clrMapOvr>
 </p:sld>
 </file>
 
@@ -7466,18 +6670,19 @@
           <a:bodyPr/>
           <a:lstStyle/>
           <a:p>
-            <a:pPr marL="0" lvl="0" indent="0">
-              <a:buNone/>
-            </a:pPr>
-            <a:r>
-              <a:t>Activity 3: Your 5-Step Critique Framework</a:t>
+            <a:pPr lvl="0" indent="0" marL="0">
+              <a:buNone/>
+            </a:pPr>
+            <a:r>
+              <a:rPr/>
+              <a:t>Activity 1: Automate the Tedious</a:t>
             </a:r>
           </a:p>
         </p:txBody>
       </p:sp>
       <p:pic>
         <p:nvPicPr>
-          <p:cNvPr id="3" name="Picture 1" descr="../docs/images/check_nobg.png"/>
+          <p:cNvPr descr="../docs/images/automate_nobg.png" id="0" name="Picture 1"/>
           <p:cNvPicPr>
             <a:picLocks noGrp="1" noChangeAspect="1"/>
           </p:cNvPicPr>
@@ -7485,15 +6690,14 @@
         </p:nvPicPr>
         <p:blipFill>
           <a:blip r:embed="rId3"/>
-          <a:srcRect t="17150" b="17036"/>
           <a:stretch>
             <a:fillRect/>
           </a:stretch>
         </p:blipFill>
         <p:spPr bwMode="auto">
           <a:xfrm>
-            <a:off x="0" y="1063228"/>
-            <a:ext cx="9144000" cy="4080271"/>
+            <a:off x="2209800" y="1193800"/>
+            <a:ext cx="4737100" cy="3390900"/>
           </a:xfrm>
           <a:prstGeom prst="rect">
             <a:avLst/>
@@ -7508,9 +6712,6 @@
       </p:pic>
     </p:spTree>
   </p:cSld>
-  <p:clrMapOvr>
-    <a:masterClrMapping/>
-  </p:clrMapOvr>
 </p:sld>
 </file>
 
@@ -7546,18 +6747,19 @@
           <a:bodyPr/>
           <a:lstStyle/>
           <a:p>
-            <a:pPr marL="0" lvl="0" indent="0">
-              <a:buNone/>
-            </a:pPr>
-            <a:r>
-              <a:t>Activity 4: Unlocking The Impossible</a:t>
+            <a:pPr lvl="0" indent="0" marL="0">
+              <a:buNone/>
+            </a:pPr>
+            <a:r>
+              <a:rPr/>
+              <a:t>Activity 2: The Art of the Prompt</a:t>
             </a:r>
           </a:p>
         </p:txBody>
       </p:sp>
       <p:pic>
         <p:nvPicPr>
-          <p:cNvPr id="3" name="Picture 1" descr="../docs/images/stress_nobg.png"/>
+          <p:cNvPr descr="../docs/images/prompt_nobg.png" id="0" name="Picture 1"/>
           <p:cNvPicPr>
             <a:picLocks noGrp="1" noChangeAspect="1"/>
           </p:cNvPicPr>
@@ -7571,8 +6773,8 @@
         </p:blipFill>
         <p:spPr bwMode="auto">
           <a:xfrm>
-            <a:off x="932688" y="1054989"/>
-            <a:ext cx="6986016" cy="3882532"/>
+            <a:off x="2870200" y="1193800"/>
+            <a:ext cx="3390900" cy="3390900"/>
           </a:xfrm>
           <a:prstGeom prst="rect">
             <a:avLst/>
@@ -7587,9 +6789,6 @@
       </p:pic>
     </p:spTree>
   </p:cSld>
-  <p:clrMapOvr>
-    <a:masterClrMapping/>
-  </p:clrMapOvr>
 </p:sld>
 </file>
 
@@ -7625,18 +6824,19 @@
           <a:bodyPr/>
           <a:lstStyle/>
           <a:p>
-            <a:pPr marL="0" lvl="0" indent="0">
-              <a:buNone/>
-            </a:pPr>
-            <a:r>
-              <a:t>Activity 5: Secure, Safe, and Sustainable AI</a:t>
+            <a:pPr lvl="0" indent="0" marL="0">
+              <a:buNone/>
+            </a:pPr>
+            <a:r>
+              <a:rPr/>
+              <a:t>Activity 3: Your 5-Step Critique Framework</a:t>
             </a:r>
           </a:p>
         </p:txBody>
       </p:sp>
       <p:pic>
         <p:nvPicPr>
-          <p:cNvPr id="3" name="Picture 1" descr="../docs/images/safety_nobg.png"/>
+          <p:cNvPr descr="../docs/images/check_nobg.png" id="0" name="Picture 1"/>
           <p:cNvPicPr>
             <a:picLocks noGrp="1" noChangeAspect="1"/>
           </p:cNvPicPr>
@@ -7644,15 +6844,14 @@
         </p:nvPicPr>
         <p:blipFill>
           <a:blip r:embed="rId3"/>
-          <a:srcRect l="18214" t="8602" r="12413" b="7796"/>
           <a:stretch>
             <a:fillRect/>
           </a:stretch>
         </p:blipFill>
         <p:spPr bwMode="auto">
           <a:xfrm>
-            <a:off x="2066544" y="877824"/>
-            <a:ext cx="5468112" cy="4265676"/>
+            <a:off x="2870200" y="1193800"/>
+            <a:ext cx="3390900" cy="3390900"/>
           </a:xfrm>
           <a:prstGeom prst="rect">
             <a:avLst/>
@@ -7667,9 +6866,6 @@
       </p:pic>
     </p:spTree>
   </p:cSld>
-  <p:clrMapOvr>
-    <a:masterClrMapping/>
-  </p:clrMapOvr>
 </p:sld>
 </file>
 
@@ -7705,18 +6901,19 @@
           <a:bodyPr/>
           <a:lstStyle/>
           <a:p>
-            <a:pPr marL="0" lvl="0" indent="0">
-              <a:buNone/>
-            </a:pPr>
-            <a:r>
-              <a:t>Wrap-Up &amp; Next Steps</a:t>
+            <a:pPr lvl="0" indent="0" marL="0">
+              <a:buNone/>
+            </a:pPr>
+            <a:r>
+              <a:rPr/>
+              <a:t>Activity 4: Unlocking The Impossible</a:t>
             </a:r>
           </a:p>
         </p:txBody>
       </p:sp>
       <p:pic>
         <p:nvPicPr>
-          <p:cNvPr id="3" name="Picture 1" descr="../docs/images/next_nobg.png"/>
+          <p:cNvPr descr="../docs/images/stress_nobg.png" id="0" name="Picture 1"/>
           <p:cNvPicPr>
             <a:picLocks noGrp="1" noChangeAspect="1"/>
           </p:cNvPicPr>
@@ -7730,8 +6927,8 @@
         </p:blipFill>
         <p:spPr bwMode="auto">
           <a:xfrm>
-            <a:off x="457200" y="804672"/>
-            <a:ext cx="8229600" cy="4338828"/>
+            <a:off x="2870200" y="1193800"/>
+            <a:ext cx="3390900" cy="3390900"/>
           </a:xfrm>
           <a:prstGeom prst="rect">
             <a:avLst/>
@@ -7746,9 +6943,6 @@
       </p:pic>
     </p:spTree>
   </p:cSld>
-  <p:clrMapOvr>
-    <a:masterClrMapping/>
-  </p:clrMapOvr>
 </p:sld>
 </file>
 
@@ -7769,6 +6963,185 @@
           <a:chExt cx="0" cy="0"/>
         </a:xfrm>
       </p:grpSpPr>
+      <p:sp>
+        <p:nvSpPr>
+          <p:cNvPr id="2" name="Title 1"/>
+          <p:cNvSpPr>
+            <a:spLocks noGrp="1"/>
+          </p:cNvSpPr>
+          <p:nvPr>
+            <p:ph type="title"/>
+          </p:nvPr>
+        </p:nvSpPr>
+        <p:spPr/>
+        <p:txBody>
+          <a:bodyPr/>
+          <a:lstStyle/>
+          <a:p>
+            <a:pPr lvl="0" indent="0" marL="0">
+              <a:buNone/>
+            </a:pPr>
+            <a:r>
+              <a:rPr/>
+              <a:t>Activity 5: Secure, Safe, and Sustainable AI</a:t>
+            </a:r>
+          </a:p>
+        </p:txBody>
+      </p:sp>
+      <p:pic>
+        <p:nvPicPr>
+          <p:cNvPr descr="../docs/images/safety_nobg.png" id="0" name="Picture 1"/>
+          <p:cNvPicPr>
+            <a:picLocks noGrp="1" noChangeAspect="1"/>
+          </p:cNvPicPr>
+          <p:nvPr/>
+        </p:nvPicPr>
+        <p:blipFill>
+          <a:blip r:embed="rId3"/>
+          <a:stretch>
+            <a:fillRect/>
+          </a:stretch>
+        </p:blipFill>
+        <p:spPr bwMode="auto">
+          <a:xfrm>
+            <a:off x="2870200" y="1193800"/>
+            <a:ext cx="3390900" cy="3390900"/>
+          </a:xfrm>
+          <a:prstGeom prst="rect">
+            <a:avLst/>
+          </a:prstGeom>
+          <a:noFill/>
+          <a:ln w="9525">
+            <a:noFill/>
+            <a:headEnd/>
+            <a:tailEnd/>
+          </a:ln>
+        </p:spPr>
+      </p:pic>
+    </p:spTree>
+  </p:cSld>
+</p:sld>
+</file>
+
+<file path=ppt/slides/slide15.xml><?xml version="1.0" encoding="utf-8"?>
+<p:sld xmlns:a="http://schemas.openxmlformats.org/drawingml/2006/main" xmlns:r="http://schemas.openxmlformats.org/officeDocument/2006/relationships" xmlns:p="http://schemas.openxmlformats.org/presentationml/2006/main">
+  <p:cSld>
+    <p:spTree>
+      <p:nvGrpSpPr>
+        <p:cNvPr id="1" name=""/>
+        <p:cNvGrpSpPr/>
+        <p:nvPr/>
+      </p:nvGrpSpPr>
+      <p:grpSpPr>
+        <a:xfrm>
+          <a:off x="0" y="0"/>
+          <a:ext cx="0" cy="0"/>
+          <a:chOff x="0" y="0"/>
+          <a:chExt cx="0" cy="0"/>
+        </a:xfrm>
+      </p:grpSpPr>
+      <p:sp>
+        <p:nvSpPr>
+          <p:cNvPr id="2" name="Title 1"/>
+          <p:cNvSpPr>
+            <a:spLocks noGrp="1"/>
+          </p:cNvSpPr>
+          <p:nvPr>
+            <p:ph type="title"/>
+          </p:nvPr>
+        </p:nvSpPr>
+        <p:spPr/>
+        <p:txBody>
+          <a:bodyPr/>
+          <a:lstStyle/>
+          <a:p>
+            <a:pPr lvl="0" indent="0" marL="0">
+              <a:buNone/>
+            </a:pPr>
+            <a:r>
+              <a:rPr/>
+              <a:t>Wrap-Up &amp; Next Steps</a:t>
+            </a:r>
+          </a:p>
+        </p:txBody>
+      </p:sp>
+      <p:pic>
+        <p:nvPicPr>
+          <p:cNvPr descr="../docs/images/next_nobg.png" id="0" name="Picture 1"/>
+          <p:cNvPicPr>
+            <a:picLocks noGrp="1" noChangeAspect="1"/>
+          </p:cNvPicPr>
+          <p:nvPr/>
+        </p:nvPicPr>
+        <p:blipFill>
+          <a:blip r:embed="rId3"/>
+          <a:stretch>
+            <a:fillRect/>
+          </a:stretch>
+        </p:blipFill>
+        <p:spPr bwMode="auto">
+          <a:xfrm>
+            <a:off x="2870200" y="1193800"/>
+            <a:ext cx="3390900" cy="3390900"/>
+          </a:xfrm>
+          <a:prstGeom prst="rect">
+            <a:avLst/>
+          </a:prstGeom>
+          <a:noFill/>
+          <a:ln w="9525">
+            <a:noFill/>
+            <a:headEnd/>
+            <a:tailEnd/>
+          </a:ln>
+        </p:spPr>
+      </p:pic>
+    </p:spTree>
+  </p:cSld>
+</p:sld>
+</file>
+
+<file path=ppt/slides/slide16.xml><?xml version="1.0" encoding="utf-8"?>
+<p:sld xmlns:a="http://schemas.openxmlformats.org/drawingml/2006/main" xmlns:r="http://schemas.openxmlformats.org/officeDocument/2006/relationships" xmlns:p="http://schemas.openxmlformats.org/presentationml/2006/main">
+  <p:cSld>
+    <p:spTree>
+      <p:nvGrpSpPr>
+        <p:cNvPr id="1" name=""/>
+        <p:cNvGrpSpPr/>
+        <p:nvPr/>
+      </p:nvGrpSpPr>
+      <p:grpSpPr>
+        <a:xfrm>
+          <a:off x="0" y="0"/>
+          <a:ext cx="0" cy="0"/>
+          <a:chOff x="0" y="0"/>
+          <a:chExt cx="0" cy="0"/>
+        </a:xfrm>
+      </p:grpSpPr>
+      <p:sp>
+        <p:nvSpPr>
+          <p:cNvPr id="2" name="Title 1"/>
+          <p:cNvSpPr>
+            <a:spLocks noGrp="1"/>
+          </p:cNvSpPr>
+          <p:nvPr>
+            <p:ph type="title"/>
+          </p:nvPr>
+        </p:nvSpPr>
+        <p:spPr/>
+        <p:txBody>
+          <a:bodyPr/>
+          <a:lstStyle/>
+          <a:p>
+            <a:pPr lvl="0" indent="0" marL="0">
+              <a:buNone/>
+            </a:pPr>
+            <a:r>
+              <a:rPr/>
+              <a:t>Key Sources &amp; Slides (Optional)</a:t>
+            </a:r>
+          </a:p>
+        </p:txBody>
+      </p:sp>
       <p:graphicFrame>
         <p:nvGraphicFramePr>
           <p:cNvPr id="6" name="Content Placeholder 5"/>
@@ -7777,16 +7150,11 @@
           </p:cNvGraphicFramePr>
           <p:nvPr>
             <p:ph idx="1"/>
-            <p:extLst>
-              <p:ext uri="{D42A27DB-BD31-4B8C-83A1-F6EECF244321}">
-                <p14:modId xmlns:p14="http://schemas.microsoft.com/office/powerpoint/2010/main" val="3518197034"/>
-              </p:ext>
-            </p:extLst>
           </p:nvPr>
         </p:nvGraphicFramePr>
         <p:xfrm>
-          <a:off x="0" y="211880"/>
-          <a:ext cx="9144000" cy="4719740"/>
+          <a:off x="457200" y="1193800"/>
+          <a:ext cx="8229600" cy="3390900"/>
         </p:xfrm>
         <a:graphic>
           <a:graphicData uri="http://schemas.openxmlformats.org/drawingml/2006/table">
@@ -7795,31 +7163,20 @@
                 <a:tableStyleId>{5C22544A-7EE6-4342-B048-85BDC9FD1C3A}</a:tableStyleId>
               </a:tblPr>
               <a:tblGrid>
-                <a:gridCol w="2889504">
-                  <a:extLst>
-                    <a:ext uri="{9D8B030D-6E8A-4147-A177-3AD203B41FA5}">
-                      <a16:colId xmlns:a16="http://schemas.microsoft.com/office/drawing/2014/main" val="20000"/>
-                    </a:ext>
-                  </a:extLst>
-                </a:gridCol>
-                <a:gridCol w="6254496">
-                  <a:extLst>
-                    <a:ext uri="{9D8B030D-6E8A-4147-A177-3AD203B41FA5}">
-                      <a16:colId xmlns:a16="http://schemas.microsoft.com/office/drawing/2014/main" val="20001"/>
-                    </a:ext>
-                  </a:extLst>
-                </a:gridCol>
+                <a:gridCol w="4114800"/>
+                <a:gridCol w="4114800"/>
               </a:tblGrid>
-              <a:tr h="225486">
+              <a:tr h="0">
                 <a:tc>
                   <a:txBody>
                     <a:bodyPr/>
                     <a:lstStyle/>
                     <a:p>
-                      <a:pPr marL="0" lvl="0" indent="0">
+                      <a:pPr lvl="0" indent="0" marL="0">
                         <a:buNone/>
                       </a:pPr>
                       <a:r>
+                        <a:rPr/>
                         <a:t>Reference (short)</a:t>
                       </a:r>
                     </a:p>
@@ -7831,398 +7188,341 @@
                     <a:bodyPr/>
                     <a:lstStyle/>
                     <a:p>
-                      <a:pPr marL="0" lvl="0" indent="0">
+                      <a:pPr lvl="0" indent="0" marL="0">
                         <a:buNone/>
                       </a:pPr>
                       <a:r>
+                        <a:rPr/>
                         <a:t>Main slide(s) / themes</a:t>
                       </a:r>
                     </a:p>
                   </a:txBody>
                   <a:tcPr/>
                 </a:tc>
-                <a:extLst>
-                  <a:ext uri="{0D108BD9-81ED-4DB2-BD59-A6C34878D82A}">
-                    <a16:rowId xmlns:a16="http://schemas.microsoft.com/office/drawing/2014/main" val="10000"/>
-                  </a:ext>
-                </a:extLst>
               </a:tr>
-              <a:tr h="381592">
+              <a:tr h="0">
                 <a:tc>
                   <a:txBody>
                     <a:bodyPr/>
                     <a:lstStyle/>
                     <a:p>
-                      <a:pPr marL="0" lvl="0" indent="0">
+                      <a:pPr lvl="0" indent="0" marL="0">
                         <a:buNone/>
                       </a:pPr>
                       <a:r>
-                        <a:rPr dirty="0"/>
+                        <a:rPr/>
                         <a:t>Bloom (1984) – 2 Sigma Problem</a:t>
                       </a:r>
                     </a:p>
                   </a:txBody>
-                  <a:tcPr/>
                 </a:tc>
                 <a:tc>
                   <a:txBody>
                     <a:bodyPr/>
                     <a:lstStyle/>
                     <a:p>
-                      <a:pPr marL="0" lvl="0" indent="0">
+                      <a:pPr lvl="0" indent="0" marL="0">
                         <a:buNone/>
                       </a:pPr>
                       <a:r>
+                        <a:rPr/>
                         <a:t>Welcome &amp; AI Landscape (1‑to‑1 tutoring vs classroom; what we’re trying to approximate).</a:t>
                       </a:r>
                     </a:p>
                   </a:txBody>
-                  <a:tcPr/>
                 </a:tc>
-                <a:extLst>
-                  <a:ext uri="{0D108BD9-81ED-4DB2-BD59-A6C34878D82A}">
-                    <a16:rowId xmlns:a16="http://schemas.microsoft.com/office/drawing/2014/main" val="10001"/>
-                  </a:ext>
-                </a:extLst>
               </a:tr>
-              <a:tr h="381592">
+              <a:tr h="0">
                 <a:tc>
                   <a:txBody>
                     <a:bodyPr/>
                     <a:lstStyle/>
                     <a:p>
-                      <a:pPr marL="0" lvl="0" indent="0">
+                      <a:pPr lvl="0" indent="0" marL="0">
                         <a:buNone/>
                       </a:pPr>
                       <a:r>
-                        <a:rPr dirty="0"/>
+                        <a:rPr/>
                         <a:t>Sal Khan TED (2023) – </a:t>
                       </a:r>
                       <a:r>
-                        <a:rPr i="1" dirty="0"/>
+                        <a:rPr i="1"/>
                         <a:t>How AI Could Save (Not Destroy) Education</a:t>
                       </a:r>
                     </a:p>
                   </a:txBody>
-                  <a:tcPr/>
                 </a:tc>
                 <a:tc>
                   <a:txBody>
                     <a:bodyPr/>
                     <a:lstStyle/>
                     <a:p>
-                      <a:pPr marL="0" lvl="0" indent="0">
+                      <a:pPr lvl="0" indent="0" marL="0">
                         <a:buNone/>
                       </a:pPr>
                       <a:r>
+                        <a:rPr/>
                         <a:t>Welcome (idea of AI tutor for every student, AI assistant for every teacher).</a:t>
                       </a:r>
                     </a:p>
                   </a:txBody>
-                  <a:tcPr/>
                 </a:tc>
-                <a:extLst>
-                  <a:ext uri="{0D108BD9-81ED-4DB2-BD59-A6C34878D82A}">
-                    <a16:rowId xmlns:a16="http://schemas.microsoft.com/office/drawing/2014/main" val="10002"/>
-                  </a:ext>
-                </a:extLst>
               </a:tr>
-              <a:tr h="381592">
+              <a:tr h="0">
                 <a:tc>
                   <a:txBody>
                     <a:bodyPr/>
                     <a:lstStyle/>
                     <a:p>
-                      <a:pPr marL="0" lvl="0" indent="0">
+                      <a:pPr lvl="0" indent="0" marL="0">
                         <a:buNone/>
                       </a:pPr>
                       <a:r>
+                        <a:rPr/>
                         <a:t>Noroozi et al. (2025)</a:t>
                       </a:r>
                     </a:p>
                   </a:txBody>
-                  <a:tcPr/>
                 </a:tc>
                 <a:tc>
                   <a:txBody>
                     <a:bodyPr/>
                     <a:lstStyle/>
                     <a:p>
-                      <a:pPr marL="0" lvl="0" indent="0">
+                      <a:pPr lvl="0" indent="0" marL="0">
                         <a:buNone/>
                       </a:pPr>
                       <a:r>
+                        <a:rPr/>
                         <a:t>Practitioner (human agency, real‑time intervention); Challenges &amp; Limitations; Evolving Role of the Educator.</a:t>
                       </a:r>
                     </a:p>
                   </a:txBody>
-                  <a:tcPr/>
                 </a:tc>
-                <a:extLst>
-                  <a:ext uri="{0D108BD9-81ED-4DB2-BD59-A6C34878D82A}">
-                    <a16:rowId xmlns:a16="http://schemas.microsoft.com/office/drawing/2014/main" val="10003"/>
-                  </a:ext>
-                </a:extLst>
               </a:tr>
-              <a:tr h="381592">
+              <a:tr h="0">
                 <a:tc>
                   <a:txBody>
                     <a:bodyPr/>
                     <a:lstStyle/>
                     <a:p>
-                      <a:pPr marL="0" lvl="0" indent="0">
+                      <a:pPr lvl="0" indent="0" marL="0">
                         <a:buNone/>
                       </a:pPr>
                       <a:r>
+                        <a:rPr/>
                         <a:t>Pireci Sejdiu &amp; Sejdiu (2025)</a:t>
                       </a:r>
                     </a:p>
                   </a:txBody>
-                  <a:tcPr/>
                 </a:tc>
                 <a:tc>
                   <a:txBody>
                     <a:bodyPr/>
                     <a:lstStyle/>
                     <a:p>
-                      <a:pPr marL="0" lvl="0" indent="0">
+                      <a:pPr lvl="0" indent="0" marL="0">
                         <a:buNone/>
                       </a:pPr>
                       <a:r>
+                        <a:rPr/>
                         <a:t>Architect &amp; Practitioner (quiet transformation of HE); Evolving Role of the Educator.</a:t>
                       </a:r>
                     </a:p>
                   </a:txBody>
-                  <a:tcPr/>
                 </a:tc>
-                <a:extLst>
-                  <a:ext uri="{0D108BD9-81ED-4DB2-BD59-A6C34878D82A}">
-                    <a16:rowId xmlns:a16="http://schemas.microsoft.com/office/drawing/2014/main" val="10004"/>
-                  </a:ext>
-                </a:extLst>
               </a:tr>
-              <a:tr h="381592">
+              <a:tr h="0">
                 <a:tc>
                   <a:txBody>
                     <a:bodyPr/>
                     <a:lstStyle/>
                     <a:p>
-                      <a:pPr marL="0" lvl="0" indent="0">
+                      <a:pPr lvl="0" indent="0" marL="0">
                         <a:buNone/>
                       </a:pPr>
                       <a:r>
+                        <a:rPr/>
                         <a:t>Park University (2025)</a:t>
                       </a:r>
                     </a:p>
                   </a:txBody>
-                  <a:tcPr/>
                 </a:tc>
                 <a:tc>
                   <a:txBody>
                     <a:bodyPr/>
                     <a:lstStyle/>
                     <a:p>
-                      <a:pPr marL="0" lvl="0" indent="0">
+                      <a:pPr lvl="0" indent="0" marL="0">
                         <a:buNone/>
                       </a:pPr>
                       <a:r>
+                        <a:rPr/>
                         <a:t>Intelligent Tutoring Systems (overview of ITS and benefits).</a:t>
                       </a:r>
                     </a:p>
                   </a:txBody>
-                  <a:tcPr/>
                 </a:tc>
-                <a:extLst>
-                  <a:ext uri="{0D108BD9-81ED-4DB2-BD59-A6C34878D82A}">
-                    <a16:rowId xmlns:a16="http://schemas.microsoft.com/office/drawing/2014/main" val="10005"/>
-                  </a:ext>
-                </a:extLst>
               </a:tr>
-              <a:tr h="381592">
+              <a:tr h="0">
                 <a:tc>
                   <a:txBody>
                     <a:bodyPr/>
                     <a:lstStyle/>
                     <a:p>
-                      <a:pPr marL="0" lvl="0" indent="0">
+                      <a:pPr lvl="0" indent="0" marL="0">
                         <a:buNone/>
                       </a:pPr>
                       <a:r>
+                        <a:rPr/>
                         <a:t>Li et al. (2025); Budiman et al. (2025); Kwak (2025); Chen (2025)</a:t>
                       </a:r>
                     </a:p>
                   </a:txBody>
-                  <a:tcPr/>
                 </a:tc>
                 <a:tc>
                   <a:txBody>
                     <a:bodyPr/>
                     <a:lstStyle/>
                     <a:p>
-                      <a:pPr marL="0" lvl="0" indent="0">
+                      <a:pPr lvl="0" indent="0" marL="0">
                         <a:buNone/>
                       </a:pPr>
                       <a:r>
+                        <a:rPr/>
                         <a:t>ITS &amp; Practitioner slides (evidence that AI‑mediated teaching can improve outcomes).</a:t>
                       </a:r>
                     </a:p>
                   </a:txBody>
-                  <a:tcPr/>
                 </a:tc>
-                <a:extLst>
-                  <a:ext uri="{0D108BD9-81ED-4DB2-BD59-A6C34878D82A}">
-                    <a16:rowId xmlns:a16="http://schemas.microsoft.com/office/drawing/2014/main" val="10006"/>
-                  </a:ext>
-                </a:extLst>
               </a:tr>
-              <a:tr h="381592">
+              <a:tr h="0">
                 <a:tc>
                   <a:txBody>
                     <a:bodyPr/>
                     <a:lstStyle/>
                     <a:p>
-                      <a:pPr marL="0" lvl="0" indent="0">
+                      <a:pPr lvl="0" indent="0" marL="0">
                         <a:buNone/>
                       </a:pPr>
                       <a:r>
+                        <a:rPr/>
                         <a:t>Rojas (2025)</a:t>
                       </a:r>
                     </a:p>
                   </a:txBody>
-                  <a:tcPr/>
                 </a:tc>
                 <a:tc>
                   <a:txBody>
                     <a:bodyPr/>
                     <a:lstStyle/>
                     <a:p>
-                      <a:pPr marL="0" lvl="0" indent="0">
+                      <a:pPr lvl="0" indent="0" marL="0">
                         <a:buNone/>
                       </a:pPr>
                       <a:r>
+                        <a:rPr/>
                         <a:t>Architect slide (instructional design in the AI era); Evolving Role of the Educator.</a:t>
                       </a:r>
                     </a:p>
                   </a:txBody>
-                  <a:tcPr/>
                 </a:tc>
-                <a:extLst>
-                  <a:ext uri="{0D108BD9-81ED-4DB2-BD59-A6C34878D82A}">
-                    <a16:rowId xmlns:a16="http://schemas.microsoft.com/office/drawing/2014/main" val="10007"/>
-                  </a:ext>
-                </a:extLst>
               </a:tr>
-              <a:tr h="381592">
+              <a:tr h="0">
                 <a:tc>
                   <a:txBody>
                     <a:bodyPr/>
                     <a:lstStyle/>
                     <a:p>
-                      <a:pPr marL="0" lvl="0" indent="0">
+                      <a:pPr lvl="0" indent="0" marL="0">
                         <a:buNone/>
                       </a:pPr>
                       <a:r>
+                        <a:rPr/>
                         <a:t>Dwivedi et al. (2023)</a:t>
                       </a:r>
                     </a:p>
                   </a:txBody>
-                  <a:tcPr/>
                 </a:tc>
                 <a:tc>
                   <a:txBody>
                     <a:bodyPr/>
                     <a:lstStyle/>
                     <a:p>
-                      <a:pPr marL="0" lvl="0" indent="0">
+                      <a:pPr lvl="0" indent="0" marL="0">
                         <a:buNone/>
                       </a:pPr>
                       <a:r>
+                        <a:rPr/>
                         <a:t>Challenges &amp; Limitations (opportunities vs misuse, integrity, policy gaps).</a:t>
                       </a:r>
                     </a:p>
                   </a:txBody>
-                  <a:tcPr/>
                 </a:tc>
-                <a:extLst>
-                  <a:ext uri="{0D108BD9-81ED-4DB2-BD59-A6C34878D82A}">
-                    <a16:rowId xmlns:a16="http://schemas.microsoft.com/office/drawing/2014/main" val="10008"/>
-                  </a:ext>
-                </a:extLst>
               </a:tr>
-              <a:tr h="381592">
+              <a:tr h="0">
                 <a:tc>
                   <a:txBody>
                     <a:bodyPr/>
                     <a:lstStyle/>
                     <a:p>
-                      <a:pPr marL="0" lvl="0" indent="0">
+                      <a:pPr lvl="0" indent="0" marL="0">
                         <a:buNone/>
                       </a:pPr>
                       <a:r>
+                        <a:rPr/>
                         <a:t>Gerlich (2025); Kosmyna et al. (2025)</a:t>
                       </a:r>
                     </a:p>
                   </a:txBody>
-                  <a:tcPr/>
                 </a:tc>
                 <a:tc>
                   <a:txBody>
                     <a:bodyPr/>
                     <a:lstStyle/>
                     <a:p>
-                      <a:pPr marL="0" lvl="0" indent="0">
+                      <a:pPr lvl="0" indent="0" marL="0">
                         <a:buNone/>
                       </a:pPr>
                       <a:r>
+                        <a:rPr/>
                         <a:t>Challenges &amp; Activity 3 (cognitive offloading / cognitive debt in AI‑assisted work).</a:t>
                       </a:r>
                     </a:p>
                   </a:txBody>
-                  <a:tcPr/>
                 </a:tc>
-                <a:extLst>
-                  <a:ext uri="{0D108BD9-81ED-4DB2-BD59-A6C34878D82A}">
-                    <a16:rowId xmlns:a16="http://schemas.microsoft.com/office/drawing/2014/main" val="10009"/>
-                  </a:ext>
-                </a:extLst>
               </a:tr>
-              <a:tr h="381592">
+              <a:tr h="0">
                 <a:tc>
                   <a:txBody>
                     <a:bodyPr/>
                     <a:lstStyle/>
                     <a:p>
-                      <a:pPr marL="0" lvl="0" indent="0">
+                      <a:pPr lvl="0" indent="0" marL="0">
                         <a:buNone/>
                       </a:pPr>
                       <a:r>
+                        <a:rPr/>
                         <a:t>Yin et al. (2025); EDUCAUSE (2025); TEQSA (2025); Russell Group (2023)</a:t>
                       </a:r>
                     </a:p>
                   </a:txBody>
-                  <a:tcPr/>
                 </a:tc>
                 <a:tc>
                   <a:txBody>
                     <a:bodyPr/>
                     <a:lstStyle/>
                     <a:p>
-                      <a:pPr marL="0" lvl="0" indent="0">
+                      <a:pPr lvl="0" indent="0" marL="0">
                         <a:buNone/>
                       </a:pPr>
                       <a:r>
-                        <a:rPr dirty="0"/>
+                        <a:rPr/>
                         <a:t>Challenges &amp; Activity 5 (fairness, bias, ethics, institutional guidelines and guardrails).</a:t>
                       </a:r>
                     </a:p>
                   </a:txBody>
-                  <a:tcPr/>
                 </a:tc>
-                <a:extLst>
-                  <a:ext uri="{0D108BD9-81ED-4DB2-BD59-A6C34878D82A}">
-                    <a16:rowId xmlns:a16="http://schemas.microsoft.com/office/drawing/2014/main" val="10010"/>
-                  </a:ext>
-                </a:extLst>
               </a:tr>
             </a:tbl>
           </a:graphicData>
@@ -8230,9 +7530,6 @@
       </p:graphicFrame>
     </p:spTree>
   </p:cSld>
-  <p:clrMapOvr>
-    <a:masterClrMapping/>
-  </p:clrMapOvr>
 </p:sld>
 </file>
 
@@ -8268,98 +7565,48 @@
           <a:bodyPr/>
           <a:lstStyle/>
           <a:p>
-            <a:pPr marL="0" lvl="0" indent="0">
-              <a:buNone/>
-            </a:pPr>
-            <a:r>
-              <a:t>What We’ll Do Today</a:t>
-            </a:r>
-          </a:p>
-        </p:txBody>
-      </p:sp>
-      <p:sp>
-        <p:nvSpPr>
-          <p:cNvPr id="3" name="Content Placeholder 2"/>
-          <p:cNvSpPr>
-            <a:spLocks noGrp="1"/>
-          </p:cNvSpPr>
-          <p:nvPr>
-            <p:ph idx="1"/>
-          </p:nvPr>
-        </p:nvSpPr>
-        <p:spPr/>
-        <p:txBody>
-          <a:bodyPr>
-            <a:normAutofit fontScale="77500" lnSpcReduction="20000"/>
-          </a:bodyPr>
-          <a:lstStyle/>
-          <a:p>
-            <a:pPr lvl="0"/>
-            <a:r>
-              <a:t>Set the scene: AI, Assessment 2030, and your context</a:t>
-            </a:r>
-            <a:br/>
-            <a:endParaRPr/>
-          </a:p>
-          <a:p>
-            <a:pPr lvl="0"/>
-            <a:r>
-              <a:t>Try out 5 hands‑on activities:</a:t>
-            </a:r>
-          </a:p>
-          <a:p>
-            <a:pPr lvl="1"/>
-            <a:r>
-              <a:t>Automate some of the tedious work</a:t>
-            </a:r>
-            <a:br/>
-            <a:endParaRPr/>
-          </a:p>
-          <a:p>
-            <a:pPr lvl="1"/>
-            <a:r>
-              <a:t>Design better prompts</a:t>
-            </a:r>
-            <a:br/>
-            <a:endParaRPr/>
-          </a:p>
-          <a:p>
-            <a:pPr lvl="1"/>
-            <a:r>
-              <a:t>Critique AI outputs with a simple framework</a:t>
-            </a:r>
-            <a:br/>
-            <a:endParaRPr/>
-          </a:p>
-          <a:p>
-            <a:pPr lvl="1"/>
-            <a:r>
-              <a:t>Use AI in a multi‑step workflow to probe or redesign a task</a:t>
-            </a:r>
-            <a:br/>
-            <a:endParaRPr/>
-          </a:p>
-          <a:p>
-            <a:pPr lvl="1"/>
-            <a:r>
-              <a:t>Make one small commitment about safe AI use</a:t>
-            </a:r>
-            <a:br/>
-            <a:endParaRPr/>
-          </a:p>
-          <a:p>
-            <a:pPr lvl="0"/>
-            <a:r>
-              <a:t>Wrap up with key takeaways and next steps</a:t>
-            </a:r>
-          </a:p>
-        </p:txBody>
-      </p:sp>
+            <a:pPr lvl="0" indent="0" marL="0">
+              <a:buNone/>
+            </a:pPr>
+            <a:r>
+              <a:rPr/>
+              <a:t>Welcome &amp; The AI Landscape</a:t>
+            </a:r>
+          </a:p>
+        </p:txBody>
+      </p:sp>
+      <p:pic>
+        <p:nvPicPr>
+          <p:cNvPr descr="../docs/images/copilot-2-sigma.png" id="0" name="Picture 1"/>
+          <p:cNvPicPr>
+            <a:picLocks noGrp="1" noChangeAspect="1"/>
+          </p:cNvPicPr>
+          <p:nvPr/>
+        </p:nvPicPr>
+        <p:blipFill>
+          <a:blip r:embed="rId2"/>
+          <a:stretch>
+            <a:fillRect/>
+          </a:stretch>
+        </p:blipFill>
+        <p:spPr bwMode="auto">
+          <a:xfrm>
+            <a:off x="1854200" y="1193800"/>
+            <a:ext cx="5422900" cy="3390900"/>
+          </a:xfrm>
+          <a:prstGeom prst="rect">
+            <a:avLst/>
+          </a:prstGeom>
+          <a:noFill/>
+          <a:ln w="9525">
+            <a:noFill/>
+            <a:headEnd/>
+            <a:tailEnd/>
+          </a:ln>
+        </p:spPr>
+      </p:pic>
     </p:spTree>
   </p:cSld>
-  <p:clrMapOvr>
-    <a:masterClrMapping/>
-  </p:clrMapOvr>
 </p:sld>
 </file>
 
@@ -8382,75 +7629,31 @@
       </p:grpSpPr>
       <p:sp>
         <p:nvSpPr>
-          <p:cNvPr id="2" name="Title 1"/>
-          <p:cNvSpPr>
-            <a:spLocks noGrp="1"/>
-          </p:cNvSpPr>
-          <p:nvPr>
-            <p:ph type="title"/>
-          </p:nvPr>
-        </p:nvSpPr>
-        <p:spPr/>
-        <p:txBody>
-          <a:bodyPr/>
-          <a:lstStyle/>
-          <a:p>
-            <a:pPr marL="0" lvl="0" indent="0">
-              <a:buNone/>
-            </a:pPr>
-            <a:r>
-              <a:t>Intelligent Tutoring Systems (ITS)</a:t>
-            </a:r>
-          </a:p>
-        </p:txBody>
-      </p:sp>
-      <p:pic>
-        <p:nvPicPr>
-          <p:cNvPr id="3" name="Picture 1" descr="../docs/images/itts-paths_nobg.png"/>
-          <p:cNvPicPr>
-            <a:picLocks noGrp="1" noChangeAspect="1"/>
-          </p:cNvPicPr>
-          <p:nvPr/>
-        </p:nvPicPr>
-        <p:blipFill>
-          <a:blip r:embed="rId3">
-            <a:extLst>
-              <a:ext uri="{BEBA8EAE-BF5A-486C-A8C5-ECC9F3942E4B}">
-                <a14:imgProps xmlns:a14="http://schemas.microsoft.com/office/drawing/2010/main">
-                  <a14:imgLayer r:embed="rId4">
-                    <a14:imgEffect>
-                      <a14:brightnessContrast bright="-100000" contrast="100000"/>
-                    </a14:imgEffect>
-                  </a14:imgLayer>
-                </a14:imgProps>
-              </a:ext>
-            </a:extLst>
-          </a:blip>
-          <a:stretch>
-            <a:fillRect/>
-          </a:stretch>
-        </p:blipFill>
-        <p:spPr bwMode="auto">
-          <a:xfrm>
-            <a:off x="585216" y="729488"/>
-            <a:ext cx="7717536" cy="4414012"/>
-          </a:xfrm>
-          <a:prstGeom prst="rect">
-            <a:avLst/>
-          </a:prstGeom>
-          <a:noFill/>
-          <a:ln w="9525">
-            <a:noFill/>
-            <a:headEnd/>
-            <a:tailEnd/>
-          </a:ln>
-        </p:spPr>
-      </p:pic>
+          <p:cNvPr id="3" name="Content Placeholder 2"/>
+          <p:cNvSpPr>
+            <a:spLocks noGrp="1"/>
+          </p:cNvSpPr>
+          <p:nvPr>
+            <p:ph idx="1"/>
+          </p:nvPr>
+        </p:nvSpPr>
+        <p:spPr/>
+        <p:txBody>
+          <a:bodyPr/>
+          <a:lstStyle/>
+          <a:p>
+            <a:pPr lvl="0" indent="0" marL="0">
+              <a:buNone/>
+            </a:pPr>
+            <a:r>
+              <a:rPr/>
+              <a:t>Drafting and ideation for these materials were supported by generative AI tools, Python scripts, Quarto, and standard image editors under human oversight. All content has been reviewed, edited and verified by the author.</a:t>
+            </a:r>
+          </a:p>
+        </p:txBody>
+      </p:sp>
     </p:spTree>
   </p:cSld>
-  <p:clrMapOvr>
-    <a:masterClrMapping/>
-  </p:clrMapOvr>
 </p:sld>
 </file>
 
@@ -8486,50 +7689,96 @@
           <a:bodyPr/>
           <a:lstStyle/>
           <a:p>
-            <a:pPr marL="0" lvl="0" indent="0">
-              <a:buNone/>
-            </a:pPr>
-            <a:r>
-              <a:t>The Architect (Pedagogical Design)</a:t>
-            </a:r>
-          </a:p>
-        </p:txBody>
-      </p:sp>
-      <p:pic>
-        <p:nvPicPr>
-          <p:cNvPr id="3" name="Picture 1" descr="../docs/images/architect_nobg.png"/>
-          <p:cNvPicPr>
-            <a:picLocks noGrp="1" noChangeAspect="1"/>
-          </p:cNvPicPr>
-          <p:nvPr/>
-        </p:nvPicPr>
-        <p:blipFill>
-          <a:blip r:embed="rId3"/>
-          <a:stretch>
-            <a:fillRect/>
-          </a:stretch>
-        </p:blipFill>
-        <p:spPr bwMode="auto">
-          <a:xfrm>
-            <a:off x="676656" y="852693"/>
-            <a:ext cx="7187184" cy="4084828"/>
-          </a:xfrm>
-          <a:prstGeom prst="rect">
-            <a:avLst/>
-          </a:prstGeom>
-          <a:noFill/>
-          <a:ln w="9525">
-            <a:noFill/>
-            <a:headEnd/>
-            <a:tailEnd/>
-          </a:ln>
-        </p:spPr>
-      </p:pic>
+            <a:pPr lvl="0" indent="0" marL="0">
+              <a:buNone/>
+            </a:pPr>
+            <a:r>
+              <a:rPr/>
+              <a:t>What We’ll Do Today</a:t>
+            </a:r>
+          </a:p>
+        </p:txBody>
+      </p:sp>
+      <p:sp>
+        <p:nvSpPr>
+          <p:cNvPr id="3" name="Content Placeholder 2"/>
+          <p:cNvSpPr>
+            <a:spLocks noGrp="1"/>
+          </p:cNvSpPr>
+          <p:nvPr>
+            <p:ph idx="1"/>
+          </p:nvPr>
+        </p:nvSpPr>
+        <p:spPr/>
+        <p:txBody>
+          <a:bodyPr/>
+          <a:lstStyle/>
+          <a:p>
+            <a:pPr lvl="0"/>
+            <a:r>
+              <a:rPr/>
+              <a:t>Set the scene: AI, Assessment 2030, and your context</a:t>
+            </a:r>
+            <a:br/>
+          </a:p>
+          <a:p>
+            <a:pPr lvl="0"/>
+            <a:r>
+              <a:rPr/>
+              <a:t>Try out 5 hands‑on activities:</a:t>
+            </a:r>
+          </a:p>
+          <a:p>
+            <a:pPr lvl="1"/>
+            <a:r>
+              <a:rPr/>
+              <a:t>Automate some of the tedious work</a:t>
+            </a:r>
+            <a:br/>
+          </a:p>
+          <a:p>
+            <a:pPr lvl="1"/>
+            <a:r>
+              <a:rPr/>
+              <a:t>Design better prompts</a:t>
+            </a:r>
+            <a:br/>
+          </a:p>
+          <a:p>
+            <a:pPr lvl="1"/>
+            <a:r>
+              <a:rPr/>
+              <a:t>Critique AI outputs with a simple framework</a:t>
+            </a:r>
+            <a:br/>
+          </a:p>
+          <a:p>
+            <a:pPr lvl="1"/>
+            <a:r>
+              <a:rPr/>
+              <a:t>Use AI in a multi‑step workflow to probe or redesign a task</a:t>
+            </a:r>
+            <a:br/>
+          </a:p>
+          <a:p>
+            <a:pPr lvl="1"/>
+            <a:r>
+              <a:rPr/>
+              <a:t>Make one small commitment about safe AI use</a:t>
+            </a:r>
+            <a:br/>
+          </a:p>
+          <a:p>
+            <a:pPr lvl="0"/>
+            <a:r>
+              <a:rPr/>
+              <a:t>Wrap up with key takeaways and next steps</a:t>
+            </a:r>
+          </a:p>
+        </p:txBody>
+      </p:sp>
     </p:spTree>
   </p:cSld>
-  <p:clrMapOvr>
-    <a:masterClrMapping/>
-  </p:clrMapOvr>
 </p:sld>
 </file>
 
@@ -8565,18 +7814,19 @@
           <a:bodyPr/>
           <a:lstStyle/>
           <a:p>
-            <a:pPr marL="0" lvl="0" indent="0">
-              <a:buNone/>
-            </a:pPr>
-            <a:r>
-              <a:t>The Practitioner (Pedagogical Delivery)</a:t>
+            <a:pPr lvl="0" indent="0" marL="0">
+              <a:buNone/>
+            </a:pPr>
+            <a:r>
+              <a:rPr/>
+              <a:t>Intelligent Tutoring Systems (ITS)</a:t>
             </a:r>
           </a:p>
         </p:txBody>
       </p:sp>
       <p:pic>
         <p:nvPicPr>
-          <p:cNvPr id="3" name="Picture 1" descr="../docs/images/ai-copilot_nobg.png"/>
+          <p:cNvPr descr="../docs/images/itts-paths_nobg.png" id="0" name="Picture 1"/>
           <p:cNvPicPr>
             <a:picLocks noGrp="1" noChangeAspect="1"/>
           </p:cNvPicPr>
@@ -8590,8 +7840,8 @@
         </p:blipFill>
         <p:spPr bwMode="auto">
           <a:xfrm>
-            <a:off x="457200" y="425704"/>
-            <a:ext cx="8229600" cy="5072380"/>
+            <a:off x="2870200" y="1193800"/>
+            <a:ext cx="3390900" cy="3390900"/>
           </a:xfrm>
           <a:prstGeom prst="rect">
             <a:avLst/>
@@ -8606,9 +7856,6 @@
       </p:pic>
     </p:spTree>
   </p:cSld>
-  <p:clrMapOvr>
-    <a:masterClrMapping/>
-  </p:clrMapOvr>
 </p:sld>
 </file>
 
@@ -8644,18 +7891,19 @@
           <a:bodyPr/>
           <a:lstStyle/>
           <a:p>
-            <a:pPr marL="0" lvl="0" indent="0">
-              <a:buNone/>
-            </a:pPr>
-            <a:r>
-              <a:t>Challenges &amp; Limitations</a:t>
+            <a:pPr lvl="0" indent="0" marL="0">
+              <a:buNone/>
+            </a:pPr>
+            <a:r>
+              <a:rPr/>
+              <a:t>The Architect (Pedagogical Design)</a:t>
             </a:r>
           </a:p>
         </p:txBody>
       </p:sp>
       <p:pic>
         <p:nvPicPr>
-          <p:cNvPr id="3" name="Picture 1" descr="../docs/images/challenges_nobg.png"/>
+          <p:cNvPr descr="../docs/images/architect_nobg.png" id="0" name="Picture 1"/>
           <p:cNvPicPr>
             <a:picLocks noGrp="1" noChangeAspect="1"/>
           </p:cNvPicPr>
@@ -8663,15 +7911,14 @@
         </p:nvPicPr>
         <p:blipFill>
           <a:blip r:embed="rId3"/>
-          <a:srcRect b="8127"/>
           <a:stretch>
             <a:fillRect/>
           </a:stretch>
         </p:blipFill>
         <p:spPr bwMode="auto">
           <a:xfrm>
-            <a:off x="621792" y="634604"/>
-            <a:ext cx="7790688" cy="4508896"/>
+            <a:off x="2870200" y="1193800"/>
+            <a:ext cx="3390900" cy="3390900"/>
           </a:xfrm>
           <a:prstGeom prst="rect">
             <a:avLst/>
@@ -8686,9 +7933,6 @@
       </p:pic>
     </p:spTree>
   </p:cSld>
-  <p:clrMapOvr>
-    <a:masterClrMapping/>
-  </p:clrMapOvr>
 </p:sld>
 </file>
 
@@ -8724,18 +7968,19 @@
           <a:bodyPr/>
           <a:lstStyle/>
           <a:p>
-            <a:pPr marL="0" lvl="0" indent="0">
-              <a:buNone/>
-            </a:pPr>
-            <a:r>
-              <a:t>The Evolving Role of the Educator</a:t>
+            <a:pPr lvl="0" indent="0" marL="0">
+              <a:buNone/>
+            </a:pPr>
+            <a:r>
+              <a:rPr/>
+              <a:t>The Practitioner (Pedagogical Delivery)</a:t>
             </a:r>
           </a:p>
         </p:txBody>
       </p:sp>
       <p:pic>
         <p:nvPicPr>
-          <p:cNvPr id="3" name="Picture 1" descr="../docs/images/rising-tide_nobg.png"/>
+          <p:cNvPr descr="../docs/images/ai-copilot_nobg.png" id="0" name="Picture 1"/>
           <p:cNvPicPr>
             <a:picLocks noGrp="1" noChangeAspect="1"/>
           </p:cNvPicPr>
@@ -8743,15 +7988,14 @@
         </p:nvPicPr>
         <p:blipFill>
           <a:blip r:embed="rId3"/>
-          <a:srcRect t="25190" b="12734"/>
           <a:stretch>
             <a:fillRect/>
           </a:stretch>
         </p:blipFill>
         <p:spPr bwMode="auto">
           <a:xfrm>
-            <a:off x="1121410" y="859536"/>
-            <a:ext cx="6901180" cy="4283964"/>
+            <a:off x="2870200" y="1193800"/>
+            <a:ext cx="3390900" cy="3390900"/>
           </a:xfrm>
           <a:prstGeom prst="rect">
             <a:avLst/>
@@ -8766,9 +8010,6 @@
       </p:pic>
     </p:spTree>
   </p:cSld>
-  <p:clrMapOvr>
-    <a:masterClrMapping/>
-  </p:clrMapOvr>
 </p:sld>
 </file>
 
@@ -8804,18 +8045,19 @@
           <a:bodyPr/>
           <a:lstStyle/>
           <a:p>
-            <a:pPr marL="0" lvl="0" indent="0">
-              <a:buNone/>
-            </a:pPr>
-            <a:r>
-              <a:t>Activity 1: Automate the Tedious</a:t>
+            <a:pPr lvl="0" indent="0" marL="0">
+              <a:buNone/>
+            </a:pPr>
+            <a:r>
+              <a:rPr/>
+              <a:t>Challenges &amp; Limitations</a:t>
             </a:r>
           </a:p>
         </p:txBody>
       </p:sp>
       <p:pic>
         <p:nvPicPr>
-          <p:cNvPr id="3" name="Picture 1" descr="../docs/images/automate_nobg.png"/>
+          <p:cNvPr descr="../docs/images/challenges_nobg.png" id="0" name="Picture 1"/>
           <p:cNvPicPr>
             <a:picLocks noGrp="1" noChangeAspect="1"/>
           </p:cNvPicPr>
@@ -8829,8 +8071,8 @@
         </p:blipFill>
         <p:spPr bwMode="auto">
           <a:xfrm>
-            <a:off x="1481328" y="498058"/>
-            <a:ext cx="6489700" cy="4645442"/>
+            <a:off x="2870200" y="1193800"/>
+            <a:ext cx="3390900" cy="3390900"/>
           </a:xfrm>
           <a:prstGeom prst="rect">
             <a:avLst/>
@@ -8845,9 +8087,6 @@
       </p:pic>
     </p:spTree>
   </p:cSld>
-  <p:clrMapOvr>
-    <a:masterClrMapping/>
-  </p:clrMapOvr>
 </p:sld>
 </file>
 
@@ -8883,18 +8122,19 @@
           <a:bodyPr/>
           <a:lstStyle/>
           <a:p>
-            <a:pPr marL="0" lvl="0" indent="0">
-              <a:buNone/>
-            </a:pPr>
-            <a:r>
-              <a:t>Activity 2: The Art of the Prompt</a:t>
+            <a:pPr lvl="0" indent="0" marL="0">
+              <a:buNone/>
+            </a:pPr>
+            <a:r>
+              <a:rPr/>
+              <a:t>The Evolving Role of the Educator</a:t>
             </a:r>
           </a:p>
         </p:txBody>
       </p:sp>
       <p:pic>
         <p:nvPicPr>
-          <p:cNvPr id="3" name="Picture 1" descr="../docs/images/prompt_nobg.png"/>
+          <p:cNvPr descr="../docs/images/rising-tide_nobg.png" id="0" name="Picture 1"/>
           <p:cNvPicPr>
             <a:picLocks noGrp="1" noChangeAspect="1"/>
           </p:cNvPicPr>
@@ -8902,15 +8142,14 @@
         </p:nvPicPr>
         <p:blipFill>
           <a:blip r:embed="rId3"/>
-          <a:srcRect t="7085" b="12448"/>
           <a:stretch>
             <a:fillRect/>
           </a:stretch>
         </p:blipFill>
         <p:spPr bwMode="auto">
           <a:xfrm>
-            <a:off x="457200" y="841248"/>
-            <a:ext cx="8229600" cy="4096273"/>
+            <a:off x="2870200" y="1193800"/>
+            <a:ext cx="3390900" cy="3390900"/>
           </a:xfrm>
           <a:prstGeom prst="rect">
             <a:avLst/>
@@ -8925,9 +8164,6 @@
       </p:pic>
     </p:spTree>
   </p:cSld>
-  <p:clrMapOvr>
-    <a:masterClrMapping/>
-  </p:clrMapOvr>
 </p:sld>
 </file>
 

--- a/docs/content/presentation.pptx
+++ b/docs/content/presentation.pptx
@@ -1,29 +1,27 @@
 
 <file path=ppt/presentation.xml><?xml version="1.0" encoding="utf-8"?>
-<p:presentation xmlns:a="http://schemas.openxmlformats.org/drawingml/2006/main" xmlns:p="http://schemas.openxmlformats.org/presentationml/2006/main" xmlns:r="http://schemas.openxmlformats.org/officeDocument/2006/relationships" autoCompressPictures="0" saveSubsetFonts="1">
+<p:presentation xmlns:a="http://schemas.openxmlformats.org/drawingml/2006/main" xmlns:r="http://schemas.openxmlformats.org/officeDocument/2006/relationships" xmlns:p="http://schemas.openxmlformats.org/presentationml/2006/main" saveSubsetFonts="1" autoCompressPictures="0">
   <p:sldMasterIdLst>
     <p:sldMasterId id="2147483648" r:id="rId1"/>
   </p:sldMasterIdLst>
   <p:notesMasterIdLst>
-    <p:notesMasterId r:id="rId18"/>
+    <p:notesMasterId r:id="rId16"/>
   </p:notesMasterIdLst>
   <p:sldIdLst>
     <p:sldId id="256" r:id="rId2"/>
-    <p:sldId id="257" r:id="rId3"/>
-    <p:sldId id="258" r:id="rId4"/>
-    <p:sldId id="259" r:id="rId5"/>
-    <p:sldId id="260" r:id="rId6"/>
-    <p:sldId id="261" r:id="rId7"/>
-    <p:sldId id="262" r:id="rId8"/>
-    <p:sldId id="263" r:id="rId9"/>
-    <p:sldId id="264" r:id="rId10"/>
-    <p:sldId id="265" r:id="rId11"/>
-    <p:sldId id="266" r:id="rId12"/>
-    <p:sldId id="267" r:id="rId13"/>
-    <p:sldId id="268" r:id="rId14"/>
-    <p:sldId id="269" r:id="rId15"/>
-    <p:sldId id="270" r:id="rId16"/>
-    <p:sldId id="271" r:id="rId17"/>
+    <p:sldId id="258" r:id="rId3"/>
+    <p:sldId id="259" r:id="rId4"/>
+    <p:sldId id="260" r:id="rId5"/>
+    <p:sldId id="261" r:id="rId6"/>
+    <p:sldId id="262" r:id="rId7"/>
+    <p:sldId id="263" r:id="rId8"/>
+    <p:sldId id="264" r:id="rId9"/>
+    <p:sldId id="265" r:id="rId10"/>
+    <p:sldId id="266" r:id="rId11"/>
+    <p:sldId id="267" r:id="rId12"/>
+    <p:sldId id="268" r:id="rId13"/>
+    <p:sldId id="269" r:id="rId14"/>
+    <p:sldId id="270" r:id="rId15"/>
   </p:sldIdLst>
   <p:sldSz cx="9144000" cy="5143500" type="screen16x9"/>
   <p:notesSz cx="6858000" cy="9144000"/>
@@ -31,8 +29,8 @@
     <a:defPPr>
       <a:defRPr lang="en-US"/>
     </a:defPPr>
-    <a:lvl1pPr algn="l" defTabSz="457200" eaLnBrk="1" hangingPunct="1" latinLnBrk="0" marL="0" rtl="0">
-      <a:defRPr kern="1200" sz="1800">
+    <a:lvl1pPr marL="0" algn="l" defTabSz="457200" rtl="0" eaLnBrk="1" latinLnBrk="0" hangingPunct="1">
+      <a:defRPr sz="1800" kern="1200">
         <a:solidFill>
           <a:schemeClr val="tx1"/>
         </a:solidFill>
@@ -41,8 +39,8 @@
         <a:cs typeface="+mn-cs"/>
       </a:defRPr>
     </a:lvl1pPr>
-    <a:lvl2pPr algn="l" defTabSz="457200" eaLnBrk="1" hangingPunct="1" latinLnBrk="0" marL="457200" rtl="0">
-      <a:defRPr kern="1200" sz="1800">
+    <a:lvl2pPr marL="457200" algn="l" defTabSz="457200" rtl="0" eaLnBrk="1" latinLnBrk="0" hangingPunct="1">
+      <a:defRPr sz="1800" kern="1200">
         <a:solidFill>
           <a:schemeClr val="tx1"/>
         </a:solidFill>
@@ -51,8 +49,8 @@
         <a:cs typeface="+mn-cs"/>
       </a:defRPr>
     </a:lvl2pPr>
-    <a:lvl3pPr algn="l" defTabSz="457200" eaLnBrk="1" hangingPunct="1" latinLnBrk="0" marL="914400" rtl="0">
-      <a:defRPr kern="1200" sz="1800">
+    <a:lvl3pPr marL="914400" algn="l" defTabSz="457200" rtl="0" eaLnBrk="1" latinLnBrk="0" hangingPunct="1">
+      <a:defRPr sz="1800" kern="1200">
         <a:solidFill>
           <a:schemeClr val="tx1"/>
         </a:solidFill>
@@ -61,8 +59,8 @@
         <a:cs typeface="+mn-cs"/>
       </a:defRPr>
     </a:lvl3pPr>
-    <a:lvl4pPr algn="l" defTabSz="457200" eaLnBrk="1" hangingPunct="1" latinLnBrk="0" marL="1371600" rtl="0">
-      <a:defRPr kern="1200" sz="1800">
+    <a:lvl4pPr marL="1371600" algn="l" defTabSz="457200" rtl="0" eaLnBrk="1" latinLnBrk="0" hangingPunct="1">
+      <a:defRPr sz="1800" kern="1200">
         <a:solidFill>
           <a:schemeClr val="tx1"/>
         </a:solidFill>
@@ -71,8 +69,8 @@
         <a:cs typeface="+mn-cs"/>
       </a:defRPr>
     </a:lvl4pPr>
-    <a:lvl5pPr algn="l" defTabSz="457200" eaLnBrk="1" hangingPunct="1" latinLnBrk="0" marL="1828800" rtl="0">
-      <a:defRPr kern="1200" sz="1800">
+    <a:lvl5pPr marL="1828800" algn="l" defTabSz="457200" rtl="0" eaLnBrk="1" latinLnBrk="0" hangingPunct="1">
+      <a:defRPr sz="1800" kern="1200">
         <a:solidFill>
           <a:schemeClr val="tx1"/>
         </a:solidFill>
@@ -81,8 +79,8 @@
         <a:cs typeface="+mn-cs"/>
       </a:defRPr>
     </a:lvl5pPr>
-    <a:lvl6pPr algn="l" defTabSz="457200" eaLnBrk="1" hangingPunct="1" latinLnBrk="0" marL="2286000" rtl="0">
-      <a:defRPr kern="1200" sz="1800">
+    <a:lvl6pPr marL="2286000" algn="l" defTabSz="457200" rtl="0" eaLnBrk="1" latinLnBrk="0" hangingPunct="1">
+      <a:defRPr sz="1800" kern="1200">
         <a:solidFill>
           <a:schemeClr val="tx1"/>
         </a:solidFill>
@@ -91,8 +89,8 @@
         <a:cs typeface="+mn-cs"/>
       </a:defRPr>
     </a:lvl6pPr>
-    <a:lvl7pPr algn="l" defTabSz="457200" eaLnBrk="1" hangingPunct="1" latinLnBrk="0" marL="2743200" rtl="0">
-      <a:defRPr kern="1200" sz="1800">
+    <a:lvl7pPr marL="2743200" algn="l" defTabSz="457200" rtl="0" eaLnBrk="1" latinLnBrk="0" hangingPunct="1">
+      <a:defRPr sz="1800" kern="1200">
         <a:solidFill>
           <a:schemeClr val="tx1"/>
         </a:solidFill>
@@ -101,8 +99,8 @@
         <a:cs typeface="+mn-cs"/>
       </a:defRPr>
     </a:lvl7pPr>
-    <a:lvl8pPr algn="l" defTabSz="457200" eaLnBrk="1" hangingPunct="1" latinLnBrk="0" marL="3200400" rtl="0">
-      <a:defRPr kern="1200" sz="1800">
+    <a:lvl8pPr marL="3200400" algn="l" defTabSz="457200" rtl="0" eaLnBrk="1" latinLnBrk="0" hangingPunct="1">
+      <a:defRPr sz="1800" kern="1200">
         <a:solidFill>
           <a:schemeClr val="tx1"/>
         </a:solidFill>
@@ -111,8 +109,8 @@
         <a:cs typeface="+mn-cs"/>
       </a:defRPr>
     </a:lvl8pPr>
-    <a:lvl9pPr algn="l" defTabSz="457200" eaLnBrk="1" hangingPunct="1" latinLnBrk="0" marL="3657600" rtl="0">
-      <a:defRPr kern="1200" sz="1800">
+    <a:lvl9pPr marL="3657600" algn="l" defTabSz="457200" rtl="0" eaLnBrk="1" latinLnBrk="0" hangingPunct="1">
+      <a:defRPr sz="1800" kern="1200">
         <a:solidFill>
           <a:schemeClr val="tx1"/>
         </a:solidFill>
@@ -223,7 +221,7 @@
           <a:p>
             <a:fld id="{0F9C1CCF-B725-44A7-AA57-5E433BD85C9F}" type="datetimeFigureOut">
               <a:rPr lang="en-US" smtClean="0"/>
-              <a:t>1/2/22</a:t>
+              <a:t>11/18/25</a:t>
             </a:fld>
             <a:endParaRPr lang="en-US"/>
           </a:p>
@@ -534,266 +532,157 @@
           <a:bodyPr/>
           <a:lstStyle/>
           <a:p>
-            <a:pPr lvl="0" indent="0" marL="0">
+            <a:pPr marL="0" lvl="0" indent="0">
               <a:buNone/>
             </a:pPr>
             <a:r>
-              <a:rPr b="1"/>
-              <a:t>Opening hook (Bloom + AI tutors):</a:t>
-            </a:r>
-          </a:p>
-          <a:p>
-            <a:pPr lvl="0" indent="0" marL="0">
+              <a:rPr lang="en-AU" sz="1200" dirty="0"/>
+              <a:t>“Two standard deviations.”</a:t>
+            </a:r>
+            <a:br>
+              <a:rPr lang="en-AU" sz="1200" dirty="0"/>
+            </a:br>
+            <a:r>
+              <a:rPr lang="en-AU" sz="1200" dirty="0"/>
+              <a:t>[pause 2–3 seconds, make eye contact]</a:t>
+            </a:r>
+            <a:br>
+              <a:rPr lang="en-AU" sz="1200" dirty="0"/>
+            </a:br>
+            <a:r>
+              <a:rPr lang="en-AU" sz="1200" dirty="0"/>
+              <a:t>That’s the gap Benjamin Bloom reported in the 1980s between students in a typical classroom and students who received one‑to‑one human tutoring – enough to turn an average student into a top performer.</a:t>
+            </a:r>
+          </a:p>
+          <a:p>
+            <a:pPr marL="0" lvl="0" indent="0">
               <a:buNone/>
             </a:pPr>
-          </a:p>
-          <a:p>
-            <a:pPr lvl="0" indent="0" marL="1270000">
+            <a:endParaRPr lang="en-AU" sz="1200" dirty="0"/>
+          </a:p>
+          <a:p>
+            <a:pPr marL="0" lvl="0" indent="0">
               <a:buNone/>
             </a:pPr>
             <a:r>
-              <a:rPr sz="2000"/>
-              <a:t>“Two standard deviations.</a:t>
-            </a:r>
-            <a:br/>
-            <a:r>
-              <a:rPr sz="2000"/>
-              <a:t>[pause 2–3 seconds, make eye contact]</a:t>
-            </a:r>
-            <a:br/>
-            <a:r>
-              <a:rPr sz="2000"/>
-              <a:t>That’s the gap Benjamin Bloom reported in the 1980s between students in a typical classroom and students who received </a:t>
-            </a:r>
-            <a:r>
-              <a:rPr sz="2000" b="1"/>
-              <a:t>one‑to‑one human tutoring</a:t>
-            </a:r>
-            <a:r>
-              <a:rPr sz="2000"/>
-              <a:t> – enough to turn an average student into a top performer.</a:t>
-            </a:r>
-          </a:p>
-          <a:p>
-            <a:pPr lvl="0" indent="0" marL="0">
+              <a:rPr lang="en-AU" sz="1200" dirty="0"/>
+              <a:t>Fast‑forward forty years. Sal Khan – the Khan Academy guy – stands on a TED stage and says: with AI tutors and AI teaching assistants, we might finally be able to get something like that 2‑sigma effect at scale. A personal tutor for every student, and an AI assistant for every teacher.</a:t>
+            </a:r>
+          </a:p>
+          <a:p>
+            <a:pPr marL="0" lvl="0" indent="0">
               <a:buNone/>
             </a:pPr>
-          </a:p>
-          <a:p>
-            <a:pPr lvl="0" indent="0" marL="1270000">
+            <a:endParaRPr lang="en-AU" sz="1200" dirty="0"/>
+          </a:p>
+          <a:p>
+            <a:pPr marL="0" lvl="0" indent="0">
               <a:buNone/>
             </a:pPr>
             <a:r>
-              <a:rPr sz="2000"/>
-              <a:t>Fast‑forward forty years. Sal Khan – the Khan Academy guy – stands on a TED stage and says: with AI tutors and AI teaching assistants, we might finally be able to get </a:t>
-            </a:r>
-            <a:r>
-              <a:rPr sz="2000" b="1"/>
-              <a:t>something like that 2‑sigma effect at scale</a:t>
-            </a:r>
-            <a:r>
-              <a:rPr sz="2000"/>
-              <a:t>. A personal tutor for every student, and an AI assistant for every teacher.</a:t>
-            </a:r>
-          </a:p>
-          <a:p>
-            <a:pPr lvl="0" indent="0" marL="0">
+              <a:rPr lang="en-AU" sz="1200" dirty="0"/>
+              <a:t>Whether that makes you excited or slightly ill, it raises a very practical question for us here at Curtin:</a:t>
+            </a:r>
+            <a:br>
+              <a:rPr lang="en-AU" sz="1200" dirty="0"/>
+            </a:br>
+            <a:endParaRPr lang="en-AU" sz="1200" dirty="0"/>
+          </a:p>
+          <a:p>
+            <a:pPr marL="0" lvl="0" indent="0">
               <a:buNone/>
             </a:pPr>
-          </a:p>
-          <a:p>
-            <a:pPr lvl="0" indent="0" marL="1270000">
+            <a:r>
+              <a:rPr lang="en-AU" sz="1200" dirty="0"/>
+              <a:t>If tools like this are going to sit in our students’ hands – and in our own enterprise Copilot environment – how do we design teaching, assessment and support so that we get the upside without losing what actually matters?</a:t>
+            </a:r>
+          </a:p>
+          <a:p>
+            <a:pPr marL="0" lvl="0" indent="0">
               <a:buNone/>
             </a:pPr>
-            <a:r>
-              <a:rPr sz="2000"/>
-              <a:t>Whether that makes you excited or slightly ill, it raises a very practical question for us here at Curtin:</a:t>
-            </a:r>
-            <a:br/>
-            <a:r>
-              <a:rPr sz="2000"/>
-              <a:t>If tools like this are going to sit in our students’ hands – and in our own enterprise Copilot environment – </a:t>
-            </a:r>
-            <a:r>
-              <a:rPr sz="2000" b="1"/>
-              <a:t>how do we design teaching, assessment and support so that we get the upside without losing what actually matters?</a:t>
-            </a:r>
-            <a:br/>
-            <a:r>
-              <a:rPr sz="2000"/>
-              <a:t>And how does that sit alongside </a:t>
-            </a:r>
-            <a:r>
-              <a:rPr sz="2000" b="1"/>
-              <a:t>Assessment 2030</a:t>
-            </a:r>
-            <a:r>
-              <a:rPr sz="2000"/>
-              <a:t>, academic integrity, and the reality that students can now summon a ‘tutor’ at 2am from their phone?”</a:t>
-            </a:r>
-          </a:p>
-          <a:p>
-            <a:pPr lvl="0" indent="0" marL="0">
+            <a:endParaRPr lang="en-AU" sz="1200" dirty="0"/>
+          </a:p>
+          <a:p>
+            <a:pPr marL="0" lvl="0" indent="0">
               <a:buNone/>
             </a:pPr>
-          </a:p>
-          <a:p>
-            <a:pPr lvl="0" indent="0" marL="0">
+            <a:r>
+              <a:rPr lang="en-AU" sz="1200" dirty="0"/>
+              <a:t>And how does that sit alongside Assessment 2030, academic integrity, and the reality that students can now summon a ‘tutor’ at 2am from their phone?”</a:t>
+            </a:r>
+          </a:p>
+          <a:p>
+            <a:pPr marL="0" lvl="0" indent="0">
               <a:buNone/>
             </a:pPr>
-            <a:r>
-              <a:rPr/>
-              <a:t>To widen beyond teaching staff, you can add:</a:t>
-            </a:r>
-          </a:p>
-          <a:p>
-            <a:pPr lvl="0" indent="0" marL="0">
+            <a:endParaRPr lang="en-AU" sz="1200" dirty="0"/>
+          </a:p>
+          <a:p>
+            <a:pPr marL="0" lvl="0" indent="0">
               <a:buNone/>
             </a:pPr>
-          </a:p>
-          <a:p>
-            <a:pPr lvl="0" indent="0" marL="1270000">
+            <a:r>
+              <a:rPr lang="en-AU" sz="1200" dirty="0"/>
+              <a:t>“Even if you’re not teaching every day, there’s a similar promise in our research and professional roles – a kind of co‑pilot for the boring parts of our jobs – drafting, summarising, chasing patterns – so we can spend more time on work that needs human judgement and relationships.”</a:t>
+            </a:r>
+          </a:p>
+          <a:p>
+            <a:pPr marL="0" lvl="0" indent="0">
               <a:buNone/>
             </a:pPr>
-            <a:r>
-              <a:rPr sz="2000"/>
-              <a:t>“Even if you’re not teaching every day, there’s a similar promise in our research and professional roles – a kind of </a:t>
-            </a:r>
-            <a:r>
-              <a:rPr sz="2000" b="1"/>
-              <a:t>co‑pilot for the boring parts</a:t>
-            </a:r>
-            <a:r>
-              <a:rPr sz="2000"/>
-              <a:t> of our jobs – drafting, summarising, chasing patterns – so we can spend more time on work that needs human judgement and relationships.”</a:t>
-            </a:r>
-          </a:p>
-          <a:p>
-            <a:pPr lvl="0" indent="0" marL="0">
+            <a:endParaRPr lang="en-AU" sz="1200" dirty="0"/>
+          </a:p>
+          <a:p>
+            <a:pPr marL="0" lvl="0" indent="0">
               <a:buNone/>
             </a:pPr>
-          </a:p>
-          <a:p>
-            <a:pPr lvl="0" indent="0" marL="0">
+            <a:r>
+              <a:rPr lang="en-AU" sz="1200" dirty="0"/>
+              <a:t>“That’s what this session is about. We’re going to:</a:t>
+            </a:r>
+            <a:br>
+              <a:rPr lang="en-AU" sz="1200" dirty="0"/>
+            </a:br>
+            <a:r>
+              <a:rPr lang="en-AU" sz="1200" dirty="0"/>
+              <a:t>– Experiment with using AI to automate some of the tedious work,</a:t>
+            </a:r>
+            <a:br>
+              <a:rPr lang="en-AU" sz="1200" dirty="0"/>
+            </a:br>
+            <a:r>
+              <a:rPr lang="en-AU" sz="1200" dirty="0"/>
+              <a:t>– Practise how to design prompts and critique AI outputs, and</a:t>
+            </a:r>
+            <a:br>
+              <a:rPr lang="en-AU" sz="1200" dirty="0"/>
+            </a:br>
+            <a:r>
+              <a:rPr lang="en-AU" sz="1200" dirty="0"/>
+              <a:t>– Stress‑test our own assessments and practices in the spirit of Assessment 2030 – not to ban AI, but to redesign so that student judgement, process, and human skills remain irreplaceable.”</a:t>
+            </a:r>
+          </a:p>
+          <a:p>
+            <a:pPr marL="0" lvl="0" indent="0">
               <a:buNone/>
             </a:pPr>
-            <a:r>
-              <a:rPr b="1"/>
-              <a:t>Position the session:</a:t>
-            </a:r>
-          </a:p>
-          <a:p>
-            <a:pPr lvl="0" indent="0" marL="0">
+            <a:endParaRPr lang="en-AU" sz="1200" dirty="0"/>
+          </a:p>
+          <a:p>
+            <a:pPr marL="0" lvl="0" indent="0">
               <a:buNone/>
             </a:pPr>
-          </a:p>
-          <a:p>
-            <a:pPr lvl="0" indent="0" marL="1270000">
+            <a:r>
+              <a:rPr lang="en-AU" sz="1200" dirty="0"/>
+              <a:t>“We also know from recent work that if we lean too hard on these tools, we risk cognitive offloading, students feeling less connected, and making cheating easier if our assessments are too automatable. So we’ll spend as much time on how to critique and design around AI as we do on the shiny productivity side.”</a:t>
+            </a:r>
+          </a:p>
+          <a:p>
+            <a:pPr marL="0" lvl="0" indent="0">
               <a:buNone/>
             </a:pPr>
-            <a:r>
-              <a:rPr sz="2000"/>
-              <a:t>“That’s what this session is about. We’re going to:</a:t>
-            </a:r>
-            <a:br/>
-            <a:r>
-              <a:rPr sz="2000"/>
-              <a:t>– Experiment with using AI to </a:t>
-            </a:r>
-            <a:r>
-              <a:rPr sz="2000" b="1"/>
-              <a:t>automate some of the tedious work</a:t>
-            </a:r>
-            <a:r>
-              <a:rPr sz="2000"/>
-              <a:t>,</a:t>
-            </a:r>
-            <a:br/>
-            <a:r>
-              <a:rPr sz="2000"/>
-              <a:t>– Practise how to </a:t>
-            </a:r>
-            <a:r>
-              <a:rPr sz="2000" b="1"/>
-              <a:t>design prompts</a:t>
-            </a:r>
-            <a:r>
-              <a:rPr sz="2000"/>
-              <a:t> and </a:t>
-            </a:r>
-            <a:r>
-              <a:rPr sz="2000" b="1"/>
-              <a:t>critique AI outputs</a:t>
-            </a:r>
-            <a:r>
-              <a:rPr sz="2000"/>
-              <a:t>, and</a:t>
-            </a:r>
-            <a:br/>
-            <a:r>
-              <a:rPr sz="2000"/>
-              <a:t>– Stress‑test our own assessments and practices in the spirit of </a:t>
-            </a:r>
-            <a:r>
-              <a:rPr sz="2000" b="1"/>
-              <a:t>Assessment 2030</a:t>
-            </a:r>
-            <a:r>
-              <a:rPr sz="2000"/>
-              <a:t> – not to ban AI, but to redesign so that </a:t>
-            </a:r>
-            <a:r>
-              <a:rPr sz="2000" b="1"/>
-              <a:t>student judgement, process, and human skills</a:t>
-            </a:r>
-            <a:r>
-              <a:rPr sz="2000"/>
-              <a:t> remain irreplaceable.”</a:t>
-            </a:r>
-          </a:p>
-          <a:p>
-            <a:pPr lvl="0" indent="0" marL="0">
-              <a:buNone/>
-            </a:pPr>
-          </a:p>
-          <a:p>
-            <a:pPr lvl="0" indent="0" marL="0">
-              <a:buNone/>
-            </a:pPr>
-            <a:r>
-              <a:rPr/>
-              <a:t>You can lightly nod to risks, but unpack them later:</a:t>
-            </a:r>
-          </a:p>
-          <a:p>
-            <a:pPr lvl="0" indent="0" marL="0">
-              <a:buNone/>
-            </a:pPr>
-          </a:p>
-          <a:p>
-            <a:pPr lvl="0" indent="0" marL="1270000">
-              <a:buNone/>
-            </a:pPr>
-            <a:r>
-              <a:rPr sz="2000"/>
-              <a:t>“We also know from recent work that if we lean too hard on these tools, we risk </a:t>
-            </a:r>
-            <a:r>
-              <a:rPr sz="2000" b="1"/>
-              <a:t>cognitive offloading</a:t>
-            </a:r>
-            <a:r>
-              <a:rPr sz="2000"/>
-              <a:t>, students feeling less connected, and making cheating easier if our assessments are too automatable. So we’ll spend as much time on </a:t>
-            </a:r>
-            <a:r>
-              <a:rPr sz="2000" b="1"/>
-              <a:t>how to critique and design around AI</a:t>
-            </a:r>
-            <a:r>
-              <a:rPr sz="2000"/>
-              <a:t> as we do on the shiny productivity side.”</a:t>
-            </a:r>
+            <a:endParaRPr lang="en-AU" sz="1200" dirty="0"/>
           </a:p>
         </p:txBody>
       </p:sp>
@@ -804,7 +693,7 @@
             <a:spLocks noGrp="1"/>
           </p:cNvSpPr>
           <p:nvPr>
-            <p:ph type="sldNum" sz="quarter" idx="10"/>
+            <p:ph type="sldNum" sz="quarter" idx="5"/>
           </p:nvPr>
         </p:nvSpPr>
         <p:spPr/>
@@ -813,15 +702,23 @@
           <a:lstStyle/>
           <a:p>
             <a:fld id="{18BDFEC3-8487-43E8-A154-7C12CBC1FFF2}" type="slidenum">
-              <a:rPr lang="en-US"/>
-              <a:t>3</a:t>
+              <a:rPr lang="en-US" smtClean="0"/>
+              <a:t>1</a:t>
             </a:fld>
             <a:endParaRPr lang="en-US"/>
           </a:p>
         </p:txBody>
       </p:sp>
     </p:spTree>
+    <p:extLst>
+      <p:ext uri="{BB962C8B-B14F-4D97-AF65-F5344CB8AC3E}">
+        <p14:creationId xmlns:p14="http://schemas.microsoft.com/office/powerpoint/2010/main" val="2996944276"/>
+      </p:ext>
+    </p:extLst>
   </p:cSld>
+  <p:clrMapOvr>
+    <a:masterClrMapping/>
+  </p:clrMapOvr>
 </p:notes>
 </file>
 
@@ -869,170 +766,27 @@
           <a:bodyPr/>
           <a:lstStyle/>
           <a:p>
-            <a:pPr lvl="0" indent="0" marL="0">
+            <a:pPr marL="0" lvl="0" indent="0">
               <a:buNone/>
             </a:pPr>
             <a:r>
-              <a:rPr/>
-              <a:t>Purpose: “Evaluate AI outputs quickly and decide: refine, re‑prompt, or start over.”</a:t>
-            </a:r>
-          </a:p>
-          <a:p>
-            <a:pPr lvl="0" indent="0" marL="0">
+              <a:rPr lang="en-AU" dirty="0"/>
+              <a:t>In Activity 3 you learn a quick 5‑step critique for any AI output: Purpose, Plausibility, Evidence, Stakes, and Action. You apply it to something AI produced earlier (for example a summary, announcement, quiz or teaching idea) and record one strength and one concern for each step.</a:t>
+            </a:r>
+          </a:p>
+          <a:p>
+            <a:pPr marL="0" lvl="0" indent="0">
               <a:buNone/>
             </a:pPr>
-          </a:p>
-          <a:p>
-            <a:pPr lvl="0" indent="0" marL="0">
+            <a:endParaRPr lang="en-AU" dirty="0"/>
+          </a:p>
+          <a:p>
+            <a:pPr marL="0" lvl="0" indent="0">
               <a:buNone/>
             </a:pPr>
             <a:r>
-              <a:rPr/>
-              <a:t>Core instructions:</a:t>
-            </a:r>
-          </a:p>
-          <a:p>
-            <a:pPr lvl="0" indent="0" marL="0">
-              <a:buNone/>
-            </a:pPr>
-          </a:p>
-          <a:p>
-            <a:pPr lvl="0" indent="-342900" marL="342900">
-              <a:buAutoNum type="arabicPeriod"/>
-            </a:pPr>
-            <a:r>
-              <a:rPr/>
-              <a:t>Pick one AI output from Activities 1–2.</a:t>
-            </a:r>
-          </a:p>
-          <a:p>
-            <a:pPr lvl="0" indent="0" marL="0">
-              <a:buNone/>
-            </a:pPr>
-          </a:p>
-          <a:p>
-            <a:pPr lvl="0" indent="-342900" marL="342900">
-              <a:buAutoNum type="arabicPeriod"/>
-            </a:pPr>
-            <a:r>
-              <a:rPr/>
-              <a:t>For each step, note one strength + one concern:</a:t>
-            </a:r>
-          </a:p>
-          <a:p>
-            <a:pPr lvl="0" indent="0" marL="0">
-              <a:buNone/>
-            </a:pPr>
-          </a:p>
-          <a:p>
-            <a:pPr lvl="1"/>
-            <a:r>
-              <a:rPr/>
-              <a:t>Purpose, Plausibility, Evidence, Stakes, Action.</a:t>
-            </a:r>
-          </a:p>
-          <a:p>
-            <a:pPr lvl="0" indent="0" marL="0">
-              <a:buNone/>
-            </a:pPr>
-          </a:p>
-          <a:p>
-            <a:pPr lvl="0" indent="-342900" marL="342900">
-              <a:buAutoNum type="arabicPeriod"/>
-            </a:pPr>
-            <a:r>
-              <a:rPr/>
-              <a:t>Decide:</a:t>
-            </a:r>
-          </a:p>
-          <a:p>
-            <a:pPr lvl="0" indent="0" marL="0">
-              <a:buNone/>
-            </a:pPr>
-          </a:p>
-          <a:p>
-            <a:pPr lvl="1"/>
-            <a:r>
-              <a:rPr/>
-              <a:t>Keep and lightly edit?</a:t>
-            </a:r>
-            <a:br/>
-          </a:p>
-          <a:p>
-            <a:pPr lvl="0" indent="0" marL="0">
-              <a:buNone/>
-            </a:pPr>
-          </a:p>
-          <a:p>
-            <a:pPr lvl="1"/>
-            <a:r>
-              <a:rPr/>
-              <a:t>Re‑prompt in a new direction?</a:t>
-            </a:r>
-            <a:br/>
-          </a:p>
-          <a:p>
-            <a:pPr lvl="0" indent="0" marL="0">
-              <a:buNone/>
-            </a:pPr>
-          </a:p>
-          <a:p>
-            <a:pPr lvl="1"/>
-            <a:r>
-              <a:rPr/>
-              <a:t>Discard and start fresh?</a:t>
-            </a:r>
-          </a:p>
-          <a:p>
-            <a:pPr lvl="0" indent="0" marL="0">
-              <a:buNone/>
-            </a:pPr>
-          </a:p>
-          <a:p>
-            <a:pPr lvl="0" indent="0" marL="0">
-              <a:buNone/>
-            </a:pPr>
-            <a:r>
-              <a:rPr/>
-              <a:t>Include a small 5‑column table they can scribble in.</a:t>
-            </a:r>
-          </a:p>
-          <a:p>
-            <a:pPr lvl="0" indent="0" marL="0">
-              <a:buNone/>
-            </a:pPr>
-          </a:p>
-          <a:p>
-            <a:pPr lvl="0" indent="0" marL="0">
-              <a:buNone/>
-            </a:pPr>
-            <a:r>
-              <a:rPr/>
-              <a:t>Variants box:</a:t>
-            </a:r>
-          </a:p>
-          <a:p>
-            <a:pPr lvl="0" indent="0" marL="0">
-              <a:buNone/>
-            </a:pPr>
-          </a:p>
-          <a:p>
-            <a:pPr lvl="0"/>
-            <a:r>
-              <a:rPr/>
-              <a:t>Researchers: critique an AI‑generated abstract, “related work” section, or summary.</a:t>
-            </a:r>
-          </a:p>
-          <a:p>
-            <a:pPr lvl="0" indent="0" marL="0">
-              <a:buNone/>
-            </a:pPr>
-          </a:p>
-          <a:p>
-            <a:pPr lvl="0"/>
-            <a:r>
-              <a:rPr/>
-              <a:t>Professional staff: critique an AI‑generated student email, FAQ, or web page.</a:t>
+              <a:rPr lang="en-AU" dirty="0"/>
+              <a:t>The goal is to decide whether to keep and lightly edit, re‑prompt in a new direction, or discard and start again. For a fuller explanation and templates you can reuse, see ‘Activity 3 – 5‑Step Critique Framework’, ‘Cognitive Prompting in Education’, and ‘AI Critique Toolkit – Becoming a Smart Business Professional’.</a:t>
             </a:r>
           </a:p>
         </p:txBody>
@@ -1054,7 +808,7 @@
           <a:p>
             <a:fld id="{18BDFEC3-8487-43E8-A154-7C12CBC1FFF2}" type="slidenum">
               <a:rPr lang="en-US"/>
-              <a:t>12</a:t>
+              <a:t>10</a:t>
             </a:fld>
             <a:endParaRPr lang="en-US"/>
           </a:p>
@@ -1062,6 +816,9 @@
       </p:sp>
     </p:spTree>
   </p:cSld>
+  <p:clrMapOvr>
+    <a:masterClrMapping/>
+  </p:clrMapOvr>
 </p:notes>
 </file>
 
@@ -1109,194 +866,27 @@
           <a:bodyPr/>
           <a:lstStyle/>
           <a:p>
-            <a:pPr lvl="0" indent="0" marL="0">
+            <a:pPr marL="0" lvl="0" indent="0">
               <a:buNone/>
             </a:pPr>
             <a:r>
-              <a:rPr/>
-              <a:t>Purpose: “Use AI to stress‑test an assessment (or parallel task) and sketch small redesigns.”</a:t>
-            </a:r>
-          </a:p>
-          <a:p>
-            <a:pPr lvl="0" indent="0" marL="0">
+              <a:rPr lang="en-AU" dirty="0"/>
+              <a:t>Activity 4 invites you to test how your assessment (or a similar task) behaves when AI is allowed. You first see how well AI can complete the task, then analyse where the response looks like a strong submission and where genuine student thinking or personal context is missing.</a:t>
+            </a:r>
+          </a:p>
+          <a:p>
+            <a:pPr marL="0" lvl="0" indent="0">
               <a:buNone/>
             </a:pPr>
-          </a:p>
-          <a:p>
-            <a:pPr lvl="0" indent="0" marL="0">
+            <a:endParaRPr lang="en-AU" dirty="0"/>
+          </a:p>
+          <a:p>
+            <a:pPr marL="0" lvl="0" indent="0">
               <a:buNone/>
             </a:pPr>
             <a:r>
-              <a:rPr/>
-              <a:t>Core instructions:</a:t>
-            </a:r>
-          </a:p>
-          <a:p>
-            <a:pPr lvl="0" indent="0" marL="0">
-              <a:buNone/>
-            </a:pPr>
-          </a:p>
-          <a:p>
-            <a:pPr lvl="0" indent="-342900" marL="342900">
-              <a:buAutoNum type="arabicPeriod"/>
-            </a:pPr>
-            <a:r>
-              <a:rPr/>
-              <a:t>Choose a task:</a:t>
-            </a:r>
-          </a:p>
-          <a:p>
-            <a:pPr lvl="0" indent="0" marL="0">
-              <a:buNone/>
-            </a:pPr>
-          </a:p>
-          <a:p>
-            <a:pPr lvl="1"/>
-            <a:r>
-              <a:rPr/>
-              <a:t>Your own assessment, or a provided example.</a:t>
-            </a:r>
-          </a:p>
-          <a:p>
-            <a:pPr lvl="0" indent="0" marL="0">
-              <a:buNone/>
-            </a:pPr>
-          </a:p>
-          <a:p>
-            <a:pPr lvl="0" indent="-342900" marL="342900">
-              <a:buAutoNum type="arabicPeriod"/>
-            </a:pPr>
-            <a:r>
-              <a:rPr/>
-              <a:t>Step 1 – Completion:</a:t>
-            </a:r>
-          </a:p>
-          <a:p>
-            <a:pPr lvl="0" indent="0" marL="0">
-              <a:buNone/>
-            </a:pPr>
-          </a:p>
-          <a:p>
-            <a:pPr lvl="1"/>
-            <a:r>
-              <a:rPr/>
-              <a:t>(If AI available) Ask AI to complete the task as a strong student.</a:t>
-            </a:r>
-          </a:p>
-          <a:p>
-            <a:pPr lvl="0" indent="0" marL="0">
-              <a:buNone/>
-            </a:pPr>
-          </a:p>
-          <a:p>
-            <a:pPr lvl="0" indent="-342900" marL="342900">
-              <a:buAutoNum type="arabicPeriod"/>
-            </a:pPr>
-            <a:r>
-              <a:rPr/>
-              <a:t>Step 2 – Critique:</a:t>
-            </a:r>
-          </a:p>
-          <a:p>
-            <a:pPr lvl="0" indent="0" marL="0">
-              <a:buNone/>
-            </a:pPr>
-          </a:p>
-          <a:p>
-            <a:pPr lvl="1"/>
-            <a:r>
-              <a:rPr/>
-              <a:t>Where does the AI answer look like a pass/HD?</a:t>
-            </a:r>
-            <a:br/>
-          </a:p>
-          <a:p>
-            <a:pPr lvl="0" indent="0" marL="0">
-              <a:buNone/>
-            </a:pPr>
-          </a:p>
-          <a:p>
-            <a:pPr lvl="1"/>
-            <a:r>
-              <a:rPr/>
-              <a:t>Where is student thinking/judgement invisible?</a:t>
-            </a:r>
-            <a:br/>
-          </a:p>
-          <a:p>
-            <a:pPr lvl="0" indent="0" marL="0">
-              <a:buNone/>
-            </a:pPr>
-          </a:p>
-          <a:p>
-            <a:pPr lvl="1"/>
-            <a:r>
-              <a:rPr/>
-              <a:t>What worries you most?</a:t>
-            </a:r>
-          </a:p>
-          <a:p>
-            <a:pPr lvl="0" indent="0" marL="0">
-              <a:buNone/>
-            </a:pPr>
-          </a:p>
-          <a:p>
-            <a:pPr lvl="0" indent="-342900" marL="342900">
-              <a:buAutoNum type="arabicPeriod"/>
-            </a:pPr>
-            <a:r>
-              <a:rPr/>
-              <a:t>Step 3 – Redesign:</a:t>
-            </a:r>
-          </a:p>
-          <a:p>
-            <a:pPr lvl="0" indent="0" marL="0">
-              <a:buNone/>
-            </a:pPr>
-          </a:p>
-          <a:p>
-            <a:pPr lvl="1"/>
-            <a:r>
-              <a:rPr/>
-              <a:t>Brainstorm 2–3 tweaks that would make student process more visible and allow transparent, limited AI use (e.g., in‑class element, AI use log, personal context).</a:t>
-            </a:r>
-          </a:p>
-          <a:p>
-            <a:pPr lvl="0" indent="0" marL="0">
-              <a:buNone/>
-            </a:pPr>
-          </a:p>
-          <a:p>
-            <a:pPr lvl="0" indent="0" marL="0">
-              <a:buNone/>
-            </a:pPr>
-            <a:r>
-              <a:rPr/>
-              <a:t>Variants box:</a:t>
-            </a:r>
-          </a:p>
-          <a:p>
-            <a:pPr lvl="0" indent="0" marL="0">
-              <a:buNone/>
-            </a:pPr>
-          </a:p>
-          <a:p>
-            <a:pPr lvl="0"/>
-            <a:r>
-              <a:rPr/>
-              <a:t>Researchers: stress‑test a grant section, data‑collection plan, or “impact” statement.</a:t>
-            </a:r>
-          </a:p>
-          <a:p>
-            <a:pPr lvl="0" indent="0" marL="0">
-              <a:buNone/>
-            </a:pPr>
-          </a:p>
-          <a:p>
-            <a:pPr lvl="0"/>
-            <a:r>
-              <a:rPr/>
-              <a:t>Professional staff: stress‑test a process description or comms piece (e.g., special consideration instructions).</a:t>
+              <a:rPr lang="en-AU" dirty="0"/>
+              <a:t>From there, you sketch small redesigns—such as adding an in‑class component, requiring an AI use log, or anchoring the task in local or personal examples—to make student judgement more visible while still allowing transparent, limited AI use. For detailed prompts and variants, see ‘Activity 4 – Unlocking the Impossible’ and the overview ‘AI in Pedagogical Design and Delivery’.</a:t>
             </a:r>
           </a:p>
         </p:txBody>
@@ -1318,7 +908,7 @@
           <a:p>
             <a:fld id="{18BDFEC3-8487-43E8-A154-7C12CBC1FFF2}" type="slidenum">
               <a:rPr lang="en-US"/>
-              <a:t>13</a:t>
+              <a:t>11</a:t>
             </a:fld>
             <a:endParaRPr lang="en-US"/>
           </a:p>
@@ -1326,6 +916,9 @@
       </p:sp>
     </p:spTree>
   </p:cSld>
+  <p:clrMapOvr>
+    <a:masterClrMapping/>
+  </p:clrMapOvr>
 </p:notes>
 </file>
 
@@ -1373,346 +966,27 @@
           <a:bodyPr/>
           <a:lstStyle/>
           <a:p>
-            <a:pPr lvl="0" indent="0" marL="0">
+            <a:pPr marL="0" lvl="0" indent="0">
               <a:buNone/>
             </a:pPr>
             <a:r>
-              <a:rPr/>
-              <a:t>Purpose: “Make one small, realistic commitment about safe AI use in your context.”</a:t>
-            </a:r>
-          </a:p>
-          <a:p>
-            <a:pPr lvl="0" indent="0" marL="0">
+              <a:rPr lang="en-AU" dirty="0"/>
+              <a:t>Activity 5 is about choosing one small, concrete next step for secure, safe and sustainable AI use in your own context. You might draft a short guideline for AI use in your unit or team, run a quick risk–benefit check on one planned AI use, or write a Week 1 statement you could say to students or colleagues.</a:t>
+            </a:r>
+          </a:p>
+          <a:p>
+            <a:pPr marL="0" lvl="0" indent="0">
               <a:buNone/>
             </a:pPr>
-          </a:p>
-          <a:p>
-            <a:pPr lvl="0" indent="0" marL="0">
+            <a:endParaRPr lang="en-AU" dirty="0"/>
+          </a:p>
+          <a:p>
+            <a:pPr marL="0" lvl="0" indent="0">
               <a:buNone/>
             </a:pPr>
             <a:r>
-              <a:rPr/>
-              <a:t>“Secure, Safe, Sustainable AI – Why it matters”</a:t>
-            </a:r>
-          </a:p>
-          <a:p>
-            <a:pPr lvl="0" indent="0" marL="0">
-              <a:buNone/>
-            </a:pPr>
-          </a:p>
-          <a:p>
-            <a:pPr lvl="0"/>
-            <a:r>
-              <a:rPr/>
-              <a:t>We now have enterprise Copilot (data protection) and tools like Turnitin Clarity.</a:t>
-            </a:r>
-            <a:br/>
-          </a:p>
-          <a:p>
-            <a:pPr lvl="0" indent="0" marL="0">
-              <a:buNone/>
-            </a:pPr>
-          </a:p>
-          <a:p>
-            <a:pPr lvl="0"/>
-            <a:r>
-              <a:rPr/>
-              <a:t>Security ≠ safety ≠ good pedagogy.</a:t>
-            </a:r>
-            <a:br/>
-          </a:p>
-          <a:p>
-            <a:pPr lvl="0" indent="0" marL="0">
-              <a:buNone/>
-            </a:pPr>
-          </a:p>
-          <a:p>
-            <a:pPr lvl="0"/>
-            <a:r>
-              <a:rPr/>
-              <a:t>We still need simple, explicit norms for:</a:t>
-            </a:r>
-          </a:p>
-          <a:p>
-            <a:pPr lvl="0" indent="0" marL="0">
-              <a:buNone/>
-            </a:pPr>
-          </a:p>
-          <a:p>
-            <a:pPr lvl="1"/>
-            <a:r>
-              <a:rPr/>
-              <a:t>how we use AI in teaching</a:t>
-            </a:r>
-            <a:br/>
-          </a:p>
-          <a:p>
-            <a:pPr lvl="0" indent="0" marL="0">
-              <a:buNone/>
-            </a:pPr>
-          </a:p>
-          <a:p>
-            <a:pPr lvl="1"/>
-            <a:r>
-              <a:rPr/>
-              <a:t>what we ask / allow from students</a:t>
-            </a:r>
-            <a:br/>
-          </a:p>
-          <a:p>
-            <a:pPr lvl="0" indent="0" marL="0">
-              <a:buNone/>
-            </a:pPr>
-          </a:p>
-          <a:p>
-            <a:pPr lvl="1"/>
-            <a:r>
-              <a:rPr/>
-              <a:t>how this aligns with Assessment 2030 (human irreplaceability).</a:t>
-            </a:r>
-          </a:p>
-          <a:p>
-            <a:pPr lvl="0" indent="0" marL="0">
-              <a:buNone/>
-            </a:pPr>
-          </a:p>
-          <a:p>
-            <a:pPr lvl="0" indent="0" marL="1270000">
-              <a:buNone/>
-            </a:pPr>
-            <a:r>
-              <a:rPr sz="2000"/>
-              <a:t>“The tools give us guardrails, but they don’t make decisions for us. This activity is about one small, concrete step you can take in your own unit.”</a:t>
-            </a:r>
-          </a:p>
-          <a:p>
-            <a:pPr lvl="0" indent="0" marL="0">
-              <a:buNone/>
-            </a:pPr>
-          </a:p>
-          <a:p>
-            <a:pPr lvl="0" indent="0" marL="0">
-              <a:buNone/>
-            </a:pPr>
-            <a:r>
-              <a:rPr/>
-              <a:t>Core instructions:</a:t>
-            </a:r>
-          </a:p>
-          <a:p>
-            <a:pPr lvl="0" indent="0" marL="0">
-              <a:buNone/>
-            </a:pPr>
-          </a:p>
-          <a:p>
-            <a:pPr lvl="0" indent="-342900" marL="342900">
-              <a:buAutoNum type="arabicPeriod"/>
-            </a:pPr>
-            <a:r>
-              <a:rPr/>
-              <a:t>Choose one micro‑task:</a:t>
-            </a:r>
-          </a:p>
-          <a:p>
-            <a:pPr lvl="0" indent="0" marL="0">
-              <a:buNone/>
-            </a:pPr>
-          </a:p>
-          <a:p>
-            <a:pPr lvl="1"/>
-            <a:r>
-              <a:rPr/>
-              <a:t>A short “AI use in this unit/team” guideline,</a:t>
-            </a:r>
-            <a:br/>
-          </a:p>
-          <a:p>
-            <a:pPr lvl="0" indent="0" marL="0">
-              <a:buNone/>
-            </a:pPr>
-          </a:p>
-          <a:p>
-            <a:pPr lvl="1"/>
-            <a:r>
-              <a:rPr/>
-              <a:t>A risk/benefit check for one planned AI use,</a:t>
-            </a:r>
-            <a:br/>
-          </a:p>
-          <a:p>
-            <a:pPr lvl="0" indent="0" marL="0">
-              <a:buNone/>
-            </a:pPr>
-          </a:p>
-          <a:p>
-            <a:pPr lvl="1"/>
-            <a:r>
-              <a:rPr/>
-              <a:t>A Week‑1 statement for students/staff.</a:t>
-            </a:r>
-          </a:p>
-          <a:p>
-            <a:pPr lvl="0" indent="0" marL="0">
-              <a:buNone/>
-            </a:pPr>
-          </a:p>
-          <a:p>
-            <a:pPr lvl="0" indent="-342900" marL="342900">
-              <a:buAutoNum type="arabicPeriod"/>
-            </a:pPr>
-            <a:r>
-              <a:rPr/>
-              <a:t>Use AI to draft it (or write by hand).</a:t>
-            </a:r>
-          </a:p>
-          <a:p>
-            <a:pPr lvl="0" indent="0" marL="0">
-              <a:buNone/>
-            </a:pPr>
-          </a:p>
-          <a:p>
-            <a:pPr lvl="0" indent="-342900" marL="342900">
-              <a:buAutoNum type="arabicPeriod"/>
-            </a:pPr>
-            <a:r>
-              <a:rPr/>
-              <a:t>Edit to:</a:t>
-            </a:r>
-          </a:p>
-          <a:p>
-            <a:pPr lvl="0" indent="0" marL="0">
-              <a:buNone/>
-            </a:pPr>
-          </a:p>
-          <a:p>
-            <a:pPr lvl="1"/>
-            <a:r>
-              <a:rPr/>
-              <a:t>Fit your tone,</a:t>
-            </a:r>
-            <a:br/>
-          </a:p>
-          <a:p>
-            <a:pPr lvl="0" indent="0" marL="0">
-              <a:buNone/>
-            </a:pPr>
-          </a:p>
-          <a:p>
-            <a:pPr lvl="1"/>
-            <a:r>
-              <a:rPr/>
-              <a:t>Align with policy,</a:t>
-            </a:r>
-            <a:br/>
-          </a:p>
-          <a:p>
-            <a:pPr lvl="0" indent="0" marL="0">
-              <a:buNone/>
-            </a:pPr>
-          </a:p>
-          <a:p>
-            <a:pPr lvl="1"/>
-            <a:r>
-              <a:rPr/>
-              <a:t>Emphasise human judgement and transparency.</a:t>
-            </a:r>
-          </a:p>
-          <a:p>
-            <a:pPr lvl="0" indent="0" marL="0">
-              <a:buNone/>
-            </a:pPr>
-          </a:p>
-          <a:p>
-            <a:pPr lvl="0" indent="0" marL="0">
-              <a:buNone/>
-            </a:pPr>
-            <a:r>
-              <a:rPr/>
-              <a:t>Variants box:</a:t>
-            </a:r>
-          </a:p>
-          <a:p>
-            <a:pPr lvl="0" indent="0" marL="0">
-              <a:buNone/>
-            </a:pPr>
-          </a:p>
-          <a:p>
-            <a:pPr lvl="0"/>
-            <a:r>
-              <a:rPr/>
-              <a:t>Researchers: “AI in this project” statement; risk check for AI in data analysis or writing.</a:t>
-            </a:r>
-          </a:p>
-          <a:p>
-            <a:pPr lvl="0" indent="0" marL="0">
-              <a:buNone/>
-            </a:pPr>
-          </a:p>
-          <a:p>
-            <a:pPr lvl="0"/>
-            <a:r>
-              <a:rPr/>
-              <a:t>Professional staff: “AI in this team” guideline; student‑facing statement about how you’ll (not) use AI on their data.</a:t>
-            </a:r>
-          </a:p>
-          <a:p>
-            <a:pPr lvl="0" indent="0" marL="0">
-              <a:buNone/>
-            </a:pPr>
-          </a:p>
-          <a:p>
-            <a:pPr lvl="0"/>
-            <a:r>
-              <a:rPr/>
-              <a:t>If the morning session already had heavy discussion on privacy/ethics, you can:</a:t>
-            </a:r>
-          </a:p>
-          <a:p>
-            <a:pPr lvl="0" indent="0" marL="0">
-              <a:buNone/>
-            </a:pPr>
-          </a:p>
-          <a:p>
-            <a:pPr lvl="1"/>
-            <a:r>
-              <a:rPr/>
-              <a:t>Shrink Activity 5 to a 5–7 minute micro‑task, not a big new block.</a:t>
-            </a:r>
-          </a:p>
-          <a:p>
-            <a:pPr lvl="0" indent="0" marL="0">
-              <a:buNone/>
-            </a:pPr>
-          </a:p>
-          <a:p>
-            <a:pPr lvl="1"/>
-            <a:r>
-              <a:rPr/>
-              <a:t>Focus on one concrete output:</a:t>
-            </a:r>
-          </a:p>
-          <a:p>
-            <a:pPr lvl="0" indent="0" marL="0">
-              <a:buNone/>
-            </a:pPr>
-          </a:p>
-          <a:p>
-            <a:pPr lvl="2"/>
-            <a:r>
-              <a:rPr/>
-              <a:t>Option 1 (if they’re fresh): run the 3‑option micro‑task we designed (guideline, risk check, Week‑1 statement).</a:t>
-            </a:r>
-          </a:p>
-          <a:p>
-            <a:pPr lvl="0" indent="0" marL="0">
-              <a:buNone/>
-            </a:pPr>
-          </a:p>
-          <a:p>
-            <a:pPr lvl="2"/>
-            <a:r>
-              <a:rPr/>
-              <a:t>Option 2 (if they’re exhausted): just do one thing: &gt; “Take 3 minutes to draft a single sentence you could say to your students in Week 1 about how AI may be used in this unit, in a way that supports human judgement and Assessment 2030. You can use AI to help, or just write it.”</a:t>
+              <a:rPr lang="en-AU" dirty="0"/>
+              <a:t>The emphasis is on clear expectations, transparency, and keeping human judgement central, rather than banning AI or outsourcing decisions to tools like Copilot or Turnitin Clarity. For example prompts and micro‑tasks that you can adapt after the workshop, see ‘Activity 5 – Secure, Safe, and Sustainable AI’, ‘Ethics, Data Governance &amp; Integrity’, and ‘Using AI in Education: Roles for Teaching &amp; Research’. For framing broader AI risk, Black Swans and Grey Swans, see ‘Black &amp; Grey Swans in AI’.</a:t>
             </a:r>
           </a:p>
         </p:txBody>
@@ -1734,7 +1008,7 @@
           <a:p>
             <a:fld id="{18BDFEC3-8487-43E8-A154-7C12CBC1FFF2}" type="slidenum">
               <a:rPr lang="en-US"/>
-              <a:t>14</a:t>
+              <a:t>12</a:t>
             </a:fld>
             <a:endParaRPr lang="en-US"/>
           </a:p>
@@ -1742,6 +1016,9 @@
       </p:sp>
     </p:spTree>
   </p:cSld>
+  <p:clrMapOvr>
+    <a:masterClrMapping/>
+  </p:clrMapOvr>
 </p:notes>
 </file>
 
@@ -1789,228 +1066,189 @@
           <a:bodyPr/>
           <a:lstStyle/>
           <a:p>
-            <a:pPr lvl="0" indent="0" marL="0">
+            <a:pPr lvl="0"/>
+            <a:r>
+              <a:rPr lang="en-AU" b="1" dirty="0"/>
+              <a:t>Recap the journey</a:t>
+            </a:r>
+            <a:r>
+              <a:rPr lang="en-AU" dirty="0"/>
+              <a:t> very briefly:  </a:t>
+            </a:r>
+            <a:r>
+              <a:rPr dirty="0"/>
+              <a:t>“We started by seeing how AI can </a:t>
+            </a:r>
+            <a:r>
+              <a:rPr b="1" dirty="0"/>
+              <a:t>automate tedious tasks</a:t>
+            </a:r>
+            <a:r>
+              <a:rPr dirty="0"/>
+              <a:t> and draft first versions for us.</a:t>
+            </a:r>
+            <a:br>
+              <a:rPr dirty="0"/>
+            </a:br>
+            <a:r>
+              <a:rPr dirty="0"/>
+              <a:t>We then worked on </a:t>
+            </a:r>
+            <a:r>
+              <a:rPr b="1" dirty="0"/>
+              <a:t>designing better prompts</a:t>
+            </a:r>
+            <a:r>
+              <a:rPr dirty="0"/>
+              <a:t>, </a:t>
+            </a:r>
+            <a:r>
+              <a:rPr b="1" dirty="0"/>
+              <a:t>critiquing AI outputs</a:t>
+            </a:r>
+            <a:r>
+              <a:rPr dirty="0"/>
+              <a:t>, and finally </a:t>
+            </a:r>
+            <a:r>
+              <a:rPr b="1" dirty="0"/>
+              <a:t>stress‑testing our assessments</a:t>
+            </a:r>
+            <a:r>
+              <a:rPr dirty="0"/>
+              <a:t> and thinking about </a:t>
+            </a:r>
+            <a:r>
+              <a:rPr b="1" dirty="0"/>
+              <a:t>safe, sustainable use</a:t>
+            </a:r>
+            <a:r>
+              <a:rPr dirty="0"/>
+              <a:t>.”</a:t>
+            </a:r>
+          </a:p>
+          <a:p>
+            <a:pPr marL="0" lvl="0" indent="0">
               <a:buNone/>
             </a:pPr>
-            <a:r>
-              <a:rPr b="1"/>
-              <a:t>Suggested closing thread:</a:t>
-            </a:r>
-          </a:p>
-          <a:p>
-            <a:pPr lvl="0" indent="0" marL="0">
+            <a:endParaRPr dirty="0"/>
+          </a:p>
+          <a:p>
+            <a:pPr lvl="0"/>
+            <a:r>
+              <a:rPr b="1" dirty="0"/>
+              <a:t>Tie back to Assessment 2030 and your stance:</a:t>
+            </a:r>
+            <a:r>
+              <a:rPr lang="en-AU" b="1" dirty="0"/>
+              <a:t> </a:t>
+            </a:r>
+            <a:r>
+              <a:rPr dirty="0"/>
+              <a:t>“All of that sits inside the Assessment 2030 idea: we’re not trying to ban AI, and we’re not blindly embracing it. We’re redesigning assessment and teaching so that </a:t>
+            </a:r>
+            <a:r>
+              <a:rPr b="1" dirty="0"/>
+              <a:t>student judgement, process, and human skills</a:t>
+            </a:r>
+            <a:r>
+              <a:rPr dirty="0"/>
+              <a:t> are what really matter.”</a:t>
+            </a:r>
+          </a:p>
+          <a:p>
+            <a:pPr marL="0" lvl="0" indent="0">
               <a:buNone/>
             </a:pPr>
+            <a:endParaRPr dirty="0"/>
           </a:p>
           <a:p>
             <a:pPr lvl="0"/>
             <a:r>
-              <a:rPr b="1"/>
-              <a:t>Recap the journey</a:t>
-            </a:r>
-            <a:r>
-              <a:rPr/>
-              <a:t> very briefly:</a:t>
-            </a:r>
-          </a:p>
-          <a:p>
-            <a:pPr lvl="0" indent="0" marL="0">
+              <a:rPr b="1" dirty="0"/>
+              <a:t>Reinforce the human edge:</a:t>
+            </a:r>
+            <a:r>
+              <a:rPr lang="en-AU" b="1" dirty="0"/>
+              <a:t> </a:t>
+            </a:r>
+            <a:r>
+              <a:rPr dirty="0"/>
+              <a:t>“As more routine writing and </a:t>
+            </a:r>
+            <a:r>
+              <a:rPr dirty="0" err="1"/>
+              <a:t>summarising</a:t>
+            </a:r>
+            <a:r>
+              <a:rPr dirty="0"/>
+              <a:t> gets automated, the value of what only we can do – </a:t>
+            </a:r>
+            <a:r>
+              <a:rPr b="1" dirty="0"/>
+              <a:t>empathy, feedback, facilitation, contextual judgement</a:t>
+            </a:r>
+            <a:r>
+              <a:rPr dirty="0"/>
+              <a:t> – actually goes up. AI is the infrastructure; our job is to design how it supports learning, not replaces it.”</a:t>
+            </a:r>
+          </a:p>
+          <a:p>
+            <a:pPr marL="0" lvl="0" indent="0">
               <a:buNone/>
             </a:pPr>
-          </a:p>
-          <a:p>
-            <a:pPr lvl="1"/>
-            <a:r>
-              <a:rPr/>
-              <a:t>“We started by seeing how AI can </a:t>
-            </a:r>
-            <a:r>
-              <a:rPr b="1"/>
-              <a:t>automate tedious tasks</a:t>
-            </a:r>
-            <a:r>
-              <a:rPr/>
-              <a:t> and draft first versions for us.</a:t>
-            </a:r>
-            <a:br/>
-            <a:r>
-              <a:rPr/>
-              <a:t>We then worked on </a:t>
-            </a:r>
-            <a:r>
-              <a:rPr b="1"/>
-              <a:t>designing better prompts</a:t>
-            </a:r>
-            <a:r>
-              <a:rPr/>
-              <a:t>, </a:t>
-            </a:r>
-            <a:r>
-              <a:rPr b="1"/>
-              <a:t>critiquing AI outputs</a:t>
-            </a:r>
-            <a:r>
-              <a:rPr/>
-              <a:t>, and finally </a:t>
-            </a:r>
-            <a:r>
-              <a:rPr b="1"/>
-              <a:t>stress‑testing our assessments</a:t>
-            </a:r>
-            <a:r>
-              <a:rPr/>
-              <a:t> and thinking about </a:t>
-            </a:r>
-            <a:r>
-              <a:rPr b="1"/>
-              <a:t>safe, sustainable use</a:t>
-            </a:r>
-            <a:r>
-              <a:rPr/>
-              <a:t>.”</a:t>
-            </a:r>
-          </a:p>
-          <a:p>
-            <a:pPr lvl="0" indent="0" marL="0">
+            <a:endParaRPr dirty="0"/>
+          </a:p>
+          <a:p>
+            <a:pPr lvl="0"/>
+            <a:r>
+              <a:rPr b="1" dirty="0"/>
+              <a:t>Point to next steps and resources:</a:t>
+            </a:r>
+            <a:r>
+              <a:rPr lang="en-AU" b="1" dirty="0"/>
+              <a:t> </a:t>
+            </a:r>
+            <a:r>
+              <a:rPr dirty="0"/>
+              <a:t>“If you want to keep experimenting, the companion website has the handouts, prompt frameworks, and references we’ve touched on today. You can pick one activity and try it in a small way in your own unit or team.”</a:t>
+            </a:r>
+          </a:p>
+          <a:p>
+            <a:pPr marL="0" lvl="0" indent="0">
               <a:buNone/>
             </a:pPr>
-          </a:p>
-          <a:p>
-            <a:pPr lvl="0"/>
-            <a:r>
-              <a:rPr b="1"/>
-              <a:t>Tie back to Assessment 2030 and your stance:</a:t>
-            </a:r>
-          </a:p>
-          <a:p>
-            <a:pPr lvl="0" indent="0" marL="0">
+            <a:endParaRPr dirty="0"/>
+          </a:p>
+          <a:p>
+            <a:pPr marL="0" lvl="0" indent="0">
               <a:buNone/>
             </a:pPr>
-          </a:p>
-          <a:p>
-            <a:pPr lvl="1"/>
-            <a:r>
-              <a:rPr/>
-              <a:t>“All of that sits inside the Assessment 2030 idea: we’re not trying to ban AI, and we’re not blindly embracing it. We’re redesigning assessment and teaching so that </a:t>
-            </a:r>
-            <a:r>
-              <a:rPr b="1"/>
-              <a:t>student judgement, process, and human skills</a:t>
-            </a:r>
-            <a:r>
-              <a:rPr/>
-              <a:t> are what really matter.”</a:t>
-            </a:r>
-          </a:p>
-          <a:p>
-            <a:pPr lvl="0" indent="0" marL="0">
+            <a:r>
+              <a:rPr b="1" dirty="0"/>
+              <a:t>Pause for questions (no dedicated Q&amp;A slide):</a:t>
+            </a:r>
+            <a:r>
+              <a:rPr lang="en-AU" b="1" dirty="0"/>
+              <a:t> </a:t>
+            </a:r>
+            <a:r>
+              <a:rPr sz="2000" dirty="0"/>
+              <a:t>“I’ll pause here – what questions, worries, or ideas are bubbling up for you? They can be about the tools, the activities, or how this fits with Assessment 2030 in your own context.”</a:t>
+            </a:r>
+          </a:p>
+          <a:p>
+            <a:pPr marL="0" lvl="0" indent="0">
               <a:buNone/>
             </a:pPr>
-          </a:p>
-          <a:p>
-            <a:pPr lvl="0"/>
-            <a:r>
-              <a:rPr b="1"/>
-              <a:t>Reinforce the human edge:</a:t>
-            </a:r>
-          </a:p>
-          <a:p>
-            <a:pPr lvl="0" indent="0" marL="0">
+            <a:endParaRPr sz="2000" dirty="0"/>
+          </a:p>
+          <a:p>
+            <a:pPr marL="0" lvl="0" indent="0">
               <a:buNone/>
             </a:pPr>
-          </a:p>
-          <a:p>
-            <a:pPr lvl="1"/>
-            <a:r>
-              <a:rPr/>
-              <a:t>“As more routine writing and summarising gets automated, the value of what only we can do – </a:t>
-            </a:r>
-            <a:r>
-              <a:rPr b="1"/>
-              <a:t>empathy, feedback, facilitation, contextual judgement</a:t>
-            </a:r>
-            <a:r>
-              <a:rPr/>
-              <a:t> – actually goes up. AI is the infrastructure; our job is to design how it supports learning, not replaces it.”</a:t>
-            </a:r>
-          </a:p>
-          <a:p>
-            <a:pPr lvl="0" indent="0" marL="0">
-              <a:buNone/>
-            </a:pPr>
-          </a:p>
-          <a:p>
-            <a:pPr lvl="0"/>
-            <a:r>
-              <a:rPr b="1"/>
-              <a:t>Point to next steps and resources:</a:t>
-            </a:r>
-          </a:p>
-          <a:p>
-            <a:pPr lvl="0" indent="0" marL="0">
-              <a:buNone/>
-            </a:pPr>
-          </a:p>
-          <a:p>
-            <a:pPr lvl="1"/>
-            <a:r>
-              <a:rPr/>
-              <a:t>“If you want to keep experimenting, the companion website has the handouts, prompt frameworks, and references we’ve touched on today. You can pick one activity and try it in a small way in your own unit or team.”</a:t>
-            </a:r>
-          </a:p>
-          <a:p>
-            <a:pPr lvl="0" indent="0" marL="0">
-              <a:buNone/>
-            </a:pPr>
-          </a:p>
-          <a:p>
-            <a:pPr lvl="0" indent="0" marL="0">
-              <a:buNone/>
-            </a:pPr>
-            <a:r>
-              <a:rPr b="1"/>
-              <a:t>Pause for questions (no dedicated Q&amp;A slide):</a:t>
-            </a:r>
-          </a:p>
-          <a:p>
-            <a:pPr lvl="0" indent="0" marL="0">
-              <a:buNone/>
-            </a:pPr>
-          </a:p>
-          <a:p>
-            <a:pPr lvl="0" indent="0" marL="1270000">
-              <a:buNone/>
-            </a:pPr>
-            <a:r>
-              <a:rPr sz="2000"/>
-              <a:t>“I’ll pause here – what questions, worries, or ideas are bubbling up for you? They can be about the tools, the activities, or how this fits with Assessment 2030 in your own context.”</a:t>
-            </a:r>
-          </a:p>
-          <a:p>
-            <a:pPr lvl="0" indent="0" marL="0">
-              <a:buNone/>
-            </a:pPr>
-          </a:p>
-          <a:p>
-            <a:pPr lvl="0" indent="0" marL="0">
-              <a:buNone/>
-            </a:pPr>
-            <a:r>
-              <a:rPr/>
-              <a:t>Because this is an internal session, you can close informally, for example:</a:t>
-            </a:r>
-          </a:p>
-          <a:p>
-            <a:pPr lvl="0" indent="0" marL="0">
-              <a:buNone/>
-            </a:pPr>
-          </a:p>
-          <a:p>
-            <a:pPr lvl="0" indent="0" marL="1270000">
-              <a:buNone/>
-            </a:pPr>
-            <a:r>
-              <a:rPr sz="2000"/>
+            <a:r>
+              <a:rPr sz="2000" dirty="0"/>
               <a:t>“If things come to you later, feel free to grab me in the corridor, drop me a message, or send through a sample assessment you’d like to stress‑test. I’m very happy to keep working on this with you.”</a:t>
             </a:r>
           </a:p>
@@ -2033,7 +1271,7 @@
           <a:p>
             <a:fld id="{18BDFEC3-8487-43E8-A154-7C12CBC1FFF2}" type="slidenum">
               <a:rPr lang="en-US"/>
-              <a:t>15</a:t>
+              <a:t>13</a:t>
             </a:fld>
             <a:endParaRPr lang="en-US"/>
           </a:p>
@@ -2041,6 +1279,9 @@
       </p:sp>
     </p:spTree>
   </p:cSld>
+  <p:clrMapOvr>
+    <a:masterClrMapping/>
+  </p:clrMapOvr>
 </p:notes>
 </file>
 
@@ -2088,20 +1329,27 @@
           <a:bodyPr/>
           <a:lstStyle/>
           <a:p>
-            <a:pPr lvl="0" indent="0" marL="0">
+            <a:pPr marL="0" lvl="0" indent="0">
               <a:buNone/>
             </a:pPr>
             <a:r>
-              <a:rPr/>
-              <a:t>This slide is mainly for people who scroll the deck later and want to see </a:t>
-            </a:r>
-            <a:r>
-              <a:rPr b="1"/>
-              <a:t>which references connect to which ideas</a:t>
-            </a:r>
-            <a:r>
-              <a:rPr/>
-              <a:t>. You don’t have to talk through it, but you can point participants to the full References page on the website if they want to explore further.</a:t>
+              <a:rPr lang="en-AU" dirty="0"/>
+              <a:t>This slide links key readings to the main ideas in the workshop (for example Bloom’s work on tutoring, research on intelligent tutoring systems, and recent studies on AI in higher education, integrity and ethics).</a:t>
+            </a:r>
+          </a:p>
+          <a:p>
+            <a:pPr marL="0" lvl="0" indent="0">
+              <a:buNone/>
+            </a:pPr>
+            <a:endParaRPr lang="en-AU" dirty="0"/>
+          </a:p>
+          <a:p>
+            <a:pPr marL="0" lvl="0" indent="0">
+              <a:buNone/>
+            </a:pPr>
+            <a:r>
+              <a:rPr lang="en-AU" dirty="0"/>
+              <a:t>If you want to explore the evidence base or cite work in your own teaching or research, see the ‘References’ document and the overview ‘AI in Pedagogical Design and Delivery’.</a:t>
             </a:r>
           </a:p>
         </p:txBody>
@@ -2123,7 +1371,7 @@
           <a:p>
             <a:fld id="{18BDFEC3-8487-43E8-A154-7C12CBC1FFF2}" type="slidenum">
               <a:rPr lang="en-US"/>
-              <a:t>16</a:t>
+              <a:t>14</a:t>
             </a:fld>
             <a:endParaRPr lang="en-US"/>
           </a:p>
@@ -2131,6 +1379,9 @@
       </p:sp>
     </p:spTree>
   </p:cSld>
+  <p:clrMapOvr>
+    <a:masterClrMapping/>
+  </p:clrMapOvr>
 </p:notes>
 </file>
 
@@ -2178,90 +1429,90 @@
           <a:bodyPr/>
           <a:lstStyle/>
           <a:p>
-            <a:pPr lvl="0" indent="0" marL="0">
+            <a:pPr marL="0" lvl="0" indent="0">
               <a:buNone/>
             </a:pPr>
             <a:r>
-              <a:rPr/>
+              <a:rPr dirty="0"/>
               <a:t>So the shape of the next two hours is roughly this: a bit of context to connect AI to Assessment 2030, then five very practical activities – automate, prompt, critique, multi‑step workflows, and safe use – and then a short wrap‑up.</a:t>
             </a:r>
           </a:p>
           <a:p>
-            <a:pPr lvl="0" indent="0" marL="0">
+            <a:pPr marL="0" lvl="0" indent="0">
               <a:buNone/>
             </a:pPr>
-          </a:p>
-          <a:p>
-            <a:pPr lvl="0" indent="0" marL="0">
+            <a:endParaRPr dirty="0"/>
+          </a:p>
+          <a:p>
+            <a:pPr marL="0" lvl="0" indent="0">
               <a:buNone/>
             </a:pPr>
             <a:r>
-              <a:rPr/>
+              <a:rPr dirty="0"/>
               <a:t>It’s designed to be mostly hands‑on and beginner‑friendly, with space for questions and discussion as we go.</a:t>
             </a:r>
           </a:p>
           <a:p>
-            <a:pPr lvl="0" indent="0" marL="0">
+            <a:pPr marL="0" lvl="0" indent="0">
               <a:buNone/>
             </a:pPr>
-          </a:p>
-          <a:p>
-            <a:pPr lvl="0" indent="0" marL="0">
+            <a:endParaRPr dirty="0"/>
+          </a:p>
+          <a:p>
+            <a:pPr marL="0" lvl="0" indent="0">
               <a:buNone/>
             </a:pPr>
             <a:r>
-              <a:rPr/>
+              <a:rPr dirty="0"/>
               <a:t>For Activity 4 we have two possible paths, depending on how much Assessment 2030 you’ve already had today:</a:t>
             </a:r>
-            <a:br/>
-            <a:r>
-              <a:rPr/>
+            <a:br>
+              <a:rPr dirty="0"/>
+            </a:br>
+            <a:r>
+              <a:rPr dirty="0"/>
               <a:t>we can either probe one of our assessments with AI and discuss redesign, or we can use a multi‑step AI workflow to tackle one of those ‘impossible’ teaching or design problems. We’ll pick on the day based on the room.</a:t>
             </a:r>
-          </a:p>
-          <a:p>
-            <a:pPr lvl="0" indent="0" marL="0">
+            <a:r>
+              <a:rPr lang="en-AU" dirty="0"/>
+              <a:t>   </a:t>
+            </a:r>
+          </a:p>
+          <a:p>
+            <a:pPr marL="0" lvl="0" indent="0">
               <a:buNone/>
             </a:pPr>
-          </a:p>
-          <a:p>
-            <a:pPr lvl="0" indent="0" marL="0">
+            <a:endParaRPr lang="en-AU" sz="2000" dirty="0"/>
+          </a:p>
+          <a:p>
+            <a:pPr marL="0" lvl="0" indent="0">
               <a:buNone/>
             </a:pPr>
             <a:r>
-              <a:rPr/>
-              <a:t>You can also briefly note that the </a:t>
-            </a:r>
-            <a:r>
-              <a:rPr b="1"/>
-              <a:t>presentation and companion website themselves</a:t>
-            </a:r>
-            <a:r>
-              <a:rPr/>
-              <a:t> are examples of using AI as a co‑pilot:</a:t>
-            </a:r>
-          </a:p>
-          <a:p>
-            <a:pPr lvl="0" indent="0" marL="0">
+              <a:rPr sz="2000" dirty="0"/>
+              <a:t>“Just as we’ll explore today, these slides and the website were developed with AI support – for drafting, structuring and idea generation – but always with human oversight, editing and verification. So this session is very much about </a:t>
+            </a:r>
+            <a:r>
+              <a:rPr sz="2000" i="1" dirty="0"/>
+              <a:t>walking the talk</a:t>
+            </a:r>
+            <a:r>
+              <a:rPr sz="2000" dirty="0"/>
+              <a:t> as well as talking about it.”</a:t>
+            </a:r>
+            <a:endParaRPr lang="en-AU" sz="2000" dirty="0"/>
+          </a:p>
+          <a:p>
+            <a:pPr marL="0" lvl="0" indent="0">
               <a:buNone/>
             </a:pPr>
-          </a:p>
-          <a:p>
-            <a:pPr lvl="0" indent="0" marL="1270000">
+            <a:endParaRPr lang="en-AU" sz="2000" dirty="0"/>
+          </a:p>
+          <a:p>
+            <a:pPr marL="0" lvl="0" indent="0">
               <a:buNone/>
             </a:pPr>
-            <a:r>
-              <a:rPr sz="2000"/>
-              <a:t>“Just as we’ll explore today, these slides and the website were developed with AI support – for drafting, structuring and idea generation – but always with human oversight, editing and verification. So this session is very much about </a:t>
-            </a:r>
-            <a:r>
-              <a:rPr sz="2000" i="1"/>
-              <a:t>walking the talk</a:t>
-            </a:r>
-            <a:r>
-              <a:rPr sz="2000"/>
-              <a:t> as well as talking about it.”</a:t>
-            </a:r>
+            <a:endParaRPr lang="en-AU" sz="2000" dirty="0"/>
           </a:p>
         </p:txBody>
       </p:sp>
@@ -2282,7 +1533,7 @@
           <a:p>
             <a:fld id="{18BDFEC3-8487-43E8-A154-7C12CBC1FFF2}" type="slidenum">
               <a:rPr lang="en-US"/>
-              <a:t>4</a:t>
+              <a:t>2</a:t>
             </a:fld>
             <a:endParaRPr lang="en-US"/>
           </a:p>
@@ -2290,6 +1541,9 @@
       </p:sp>
     </p:spTree>
   </p:cSld>
+  <p:clrMapOvr>
+    <a:masterClrMapping/>
+  </p:clrMapOvr>
 </p:notes>
 </file>
 
@@ -2337,97 +1591,102 @@
           <a:bodyPr/>
           <a:lstStyle/>
           <a:p>
-            <a:pPr lvl="0" indent="0" marL="0">
+            <a:pPr marL="0" lvl="0" indent="0">
               <a:buNone/>
             </a:pPr>
             <a:r>
-              <a:rPr b="1"/>
+              <a:rPr b="1" dirty="0"/>
               <a:t>Key Takeaway:</a:t>
             </a:r>
             <a:r>
-              <a:rPr/>
+              <a:rPr dirty="0"/>
               <a:t> ITS deliver </a:t>
             </a:r>
             <a:r>
-              <a:rPr b="1"/>
-              <a:t>personalised, one-on-one instruction</a:t>
-            </a:r>
-            <a:r>
-              <a:rPr/>
+              <a:rPr b="1" dirty="0" err="1"/>
+              <a:t>personalised</a:t>
+            </a:r>
+            <a:r>
+              <a:rPr b="1" dirty="0"/>
+              <a:t>, one-on-one instruction</a:t>
+            </a:r>
+            <a:r>
+              <a:rPr dirty="0"/>
               <a:t> by relying on an integrated architecture of four key components: the </a:t>
             </a:r>
             <a:r>
-              <a:rPr b="1"/>
+              <a:rPr b="1" dirty="0"/>
               <a:t>Domain Model</a:t>
             </a:r>
             <a:r>
-              <a:rPr/>
+              <a:rPr dirty="0"/>
               <a:t> (what is taught), the </a:t>
             </a:r>
             <a:r>
-              <a:rPr b="1"/>
+              <a:rPr b="1" dirty="0"/>
               <a:t>Learner Model</a:t>
             </a:r>
             <a:r>
-              <a:rPr/>
+              <a:rPr dirty="0"/>
               <a:t> (who is learning, including successes and misconceptions), the </a:t>
             </a:r>
             <a:r>
-              <a:rPr b="1"/>
+              <a:rPr b="1" dirty="0"/>
               <a:t>Tutoring Model</a:t>
             </a:r>
             <a:r>
-              <a:rPr/>
+              <a:rPr dirty="0"/>
               <a:t> (how to teach), and the </a:t>
             </a:r>
             <a:r>
-              <a:rPr b="1"/>
+              <a:rPr b="1" dirty="0"/>
               <a:t>User Interface Model</a:t>
             </a:r>
             <a:r>
-              <a:rPr/>
+              <a:rPr dirty="0"/>
               <a:t> (interaction). The quality of instruction is directly determined by the sophistication of these underlying models, which collectively ensure that the system adjusts the pace, difficulty, and focus of lessons in real-time.</a:t>
             </a:r>
           </a:p>
           <a:p>
-            <a:pPr lvl="0" indent="0" marL="0">
+            <a:pPr marL="0" lvl="0" indent="0">
               <a:buNone/>
             </a:pPr>
-          </a:p>
-          <a:p>
-            <a:pPr lvl="0" indent="0" marL="0">
+            <a:endParaRPr dirty="0"/>
+          </a:p>
+          <a:p>
+            <a:pPr marL="0" lvl="0" indent="0">
               <a:buNone/>
             </a:pPr>
             <a:r>
-              <a:rPr b="1"/>
+              <a:rPr b="1" dirty="0"/>
               <a:t>Analogy:</a:t>
             </a:r>
             <a:r>
-              <a:rPr/>
+              <a:rPr dirty="0"/>
               <a:t> Intelligent Tutoring Systems function much like an automated personal trainer at a gym. Just as the trainer analyzes your current fitness level, pace, and weaknesses (the </a:t>
             </a:r>
             <a:r>
-              <a:rPr b="1"/>
+              <a:rPr b="1" dirty="0"/>
               <a:t>Student Model</a:t>
             </a:r>
             <a:r>
-              <a:rPr/>
+              <a:rPr dirty="0"/>
               <a:t>), knows the curriculum of exercises (the </a:t>
             </a:r>
             <a:r>
-              <a:rPr b="1"/>
+              <a:rPr b="1" dirty="0"/>
               <a:t>Domain Model</a:t>
             </a:r>
             <a:r>
-              <a:rPr/>
+              <a:rPr dirty="0"/>
               <a:t>), and determines the optimal routine to challenge you without overwhelming you (the </a:t>
             </a:r>
             <a:r>
-              <a:rPr b="1"/>
+              <a:rPr b="1" dirty="0"/>
               <a:t>Tutoring Model</a:t>
             </a:r>
             <a:r>
-              <a:rPr/>
+              <a:rPr dirty="0"/>
               <a:t>), the ITS continuously adjusts the learning path to ensure instruction is both challenging and achievable, promoting deeper understanding.</a:t>
             </a:r>
           </a:p>
@@ -2450,7 +1709,7 @@
           <a:p>
             <a:fld id="{18BDFEC3-8487-43E8-A154-7C12CBC1FFF2}" type="slidenum">
               <a:rPr lang="en-US"/>
-              <a:t>5</a:t>
+              <a:t>3</a:t>
             </a:fld>
             <a:endParaRPr lang="en-US"/>
           </a:p>
@@ -2458,6 +1717,9 @@
       </p:sp>
     </p:spTree>
   </p:cSld>
+  <p:clrMapOvr>
+    <a:masterClrMapping/>
+  </p:clrMapOvr>
 </p:notes>
 </file>
 
@@ -2505,50 +1767,59 @@
           <a:bodyPr/>
           <a:lstStyle/>
           <a:p>
-            <a:pPr lvl="0" indent="0" marL="0">
+            <a:pPr marL="0" lvl="0" indent="0">
               <a:buNone/>
             </a:pPr>
             <a:r>
-              <a:rPr b="1"/>
+              <a:rPr b="1" dirty="0"/>
               <a:t>Key Takeaway:</a:t>
             </a:r>
             <a:r>
-              <a:rPr/>
+              <a:rPr dirty="0"/>
               <a:t> AI fundamentally transforms the pedagogical designer’s role from a manual content creator to a </a:t>
             </a:r>
             <a:r>
-              <a:rPr b="1"/>
+              <a:rPr b="1" dirty="0"/>
               <a:t>Strategic Architect</a:t>
             </a:r>
             <a:r>
-              <a:rPr/>
+              <a:rPr dirty="0"/>
               <a:t> by automating previously slow and tedious tasks, such as generating course outlines, assessments, and multimedia. This automation forces the designer to focus on </a:t>
             </a:r>
             <a:r>
-              <a:rPr b="1"/>
+              <a:rPr b="1" dirty="0"/>
               <a:t>high-level, human-centric design</a:t>
             </a:r>
             <a:r>
-              <a:rPr/>
+              <a:rPr dirty="0"/>
               <a:t>—creating flexible, dynamic frameworks and addressing emotional barriers to learning, rather than formatting slides or writing quiz questions.</a:t>
             </a:r>
           </a:p>
           <a:p>
-            <a:pPr lvl="0" indent="0" marL="0">
+            <a:pPr marL="0" lvl="0" indent="0">
               <a:buNone/>
             </a:pPr>
-          </a:p>
-          <a:p>
-            <a:pPr lvl="0" indent="0" marL="0">
+            <a:endParaRPr dirty="0"/>
+          </a:p>
+          <a:p>
+            <a:pPr marL="0" lvl="0" indent="0">
               <a:buNone/>
             </a:pPr>
             <a:r>
-              <a:rPr b="1"/>
+              <a:rPr b="1" dirty="0"/>
               <a:t>Analogy:</a:t>
             </a:r>
             <a:r>
-              <a:rPr/>
-              <a:t> If traditional pedagogical design was like crafting a single, hand-built ship (a static course) that everyone had to sail on, the AI era redesigns the role of the architect. The new Pedagogical Architect now designs a complex, adaptive fleet where each ship (module) can adjust its sails, speed, and navigation (difficulty, pace, content) based on the real-time weather (student performance data), ensuring everyone reaches their destination, but along a personalised route. The architect’s most critical new job is ensuring the human crew (teachers and students) still communicate and build rapport, not just follow the automated navigation system.</a:t>
+              <a:rPr dirty="0"/>
+              <a:t> If traditional pedagogical design was like crafting a single, hand-built ship (a static course) that everyone had to sail on, the AI era redesigns the role of the architect. The new Pedagogical Architect now designs a complex, adaptive fleet where each ship (module) can adjust its sails, speed, and navigation (difficulty, pace, content) based on the real-time weather (student performance data), ensuring everyone reaches their destination, but along a </a:t>
+            </a:r>
+            <a:r>
+              <a:rPr dirty="0" err="1"/>
+              <a:t>personalised</a:t>
+            </a:r>
+            <a:r>
+              <a:rPr dirty="0"/>
+              <a:t> route. The architect’s most critical new job is ensuring the human crew (teachers and students) still communicate and build rapport, not just follow the automated navigation system.</a:t>
             </a:r>
           </a:p>
         </p:txBody>
@@ -2570,7 +1841,7 @@
           <a:p>
             <a:fld id="{18BDFEC3-8487-43E8-A154-7C12CBC1FFF2}" type="slidenum">
               <a:rPr lang="en-US"/>
-              <a:t>6</a:t>
+              <a:t>4</a:t>
             </a:fld>
             <a:endParaRPr lang="en-US"/>
           </a:p>
@@ -2578,6 +1849,9 @@
       </p:sp>
     </p:spTree>
   </p:cSld>
+  <p:clrMapOvr>
+    <a:masterClrMapping/>
+  </p:clrMapOvr>
 </p:notes>
 </file>
 
@@ -2625,7 +1899,7 @@
           <a:bodyPr/>
           <a:lstStyle/>
           <a:p>
-            <a:pPr lvl="0" indent="0" marL="0">
+            <a:pPr marL="0" lvl="0" indent="0">
               <a:buNone/>
             </a:pPr>
             <a:r>
@@ -2633,7 +1907,6 @@
               <a:t>Key Takeaway:</a:t>
             </a:r>
             <a:r>
-              <a:rPr/>
               <a:t> AI revolutionizes pedagogical delivery by collapsing the feedback loop and providing educators with </a:t>
             </a:r>
             <a:r>
@@ -2641,7 +1914,6 @@
               <a:t>real-time data insights</a:t>
             </a:r>
             <a:r>
-              <a:rPr/>
               <a:t> into student progress, performance patterns, and cognitive states. This data-driven delivery allows the human teacher to transition into a </a:t>
             </a:r>
             <a:r>
@@ -2649,17 +1921,17 @@
               <a:t>“real-time interventionist,”</a:t>
             </a:r>
             <a:r>
-              <a:rPr/>
               <a:t> enabling them to abandon content presentation to the “average” student and instead focus on targeted, high-value interventions based on immediate, actionable data. It can be viewed the impact of AI on pedagogical delivery not as a replacement for the teacher, but as an augmented reality for the classroom. AI handles the mechanics of instruction and data analysis, allowing the human practitioner to execute their craft with surgical precision, focusing their limited time on high-value, empathetic, and complex human interactions.</a:t>
             </a:r>
           </a:p>
           <a:p>
-            <a:pPr lvl="0" indent="0" marL="0">
+            <a:pPr marL="0" lvl="0" indent="0">
               <a:buNone/>
             </a:pPr>
-          </a:p>
-          <a:p>
-            <a:pPr lvl="0" indent="0" marL="0">
+            <a:endParaRPr/>
+          </a:p>
+          <a:p>
+            <a:pPr marL="0" lvl="0" indent="0">
               <a:buNone/>
             </a:pPr>
             <a:r>
@@ -2667,7 +1939,6 @@
               <a:t>Analogy:</a:t>
             </a:r>
             <a:r>
-              <a:rPr/>
               <a:t>. AI in the classroom functions as an AI Co-Pilot. The AI (co-pilot) handles the routine mechanics of flight (content delivery, system monitoring, and performance tracking), allowing the human pilot (the educator) to focus on complex navigation, communicating with the crew (students), and managing unexpected turbulence (misconceptions or emotional barriers) with surgical precision.</a:t>
             </a:r>
           </a:p>
@@ -2690,7 +1961,7 @@
           <a:p>
             <a:fld id="{18BDFEC3-8487-43E8-A154-7C12CBC1FFF2}" type="slidenum">
               <a:rPr lang="en-US"/>
-              <a:t>7</a:t>
+              <a:t>5</a:t>
             </a:fld>
             <a:endParaRPr lang="en-US"/>
           </a:p>
@@ -2698,6 +1969,9 @@
       </p:sp>
     </p:spTree>
   </p:cSld>
+  <p:clrMapOvr>
+    <a:masterClrMapping/>
+  </p:clrMapOvr>
 </p:notes>
 </file>
 
@@ -2745,7 +2019,7 @@
           <a:bodyPr/>
           <a:lstStyle/>
           <a:p>
-            <a:pPr lvl="0" indent="0" marL="0">
+            <a:pPr marL="0" lvl="0" indent="0">
               <a:buNone/>
             </a:pPr>
             <a:r>
@@ -2753,7 +2027,6 @@
               <a:t>Key Takeaway:</a:t>
             </a:r>
             <a:r>
-              <a:rPr/>
               <a:t> Despite the technological promise, a critical challenge for AIED is the </a:t>
             </a:r>
             <a:r>
@@ -2761,7 +2034,6 @@
               <a:t>risk of eroding the human element</a:t>
             </a:r>
             <a:r>
-              <a:rPr/>
               <a:t> and exacerbating </a:t>
             </a:r>
             <a:r>
@@ -2769,7 +2041,6 @@
               <a:t>educational inequity</a:t>
             </a:r>
             <a:r>
-              <a:rPr/>
               <a:t> through algorithmic bias. Over-reliance on ITS and generative tools can reduce valuable face-to-face interactions, while studies show that students using AI sometimes feel </a:t>
             </a:r>
             <a:r>
@@ -2777,21 +2048,20 @@
               <a:t>less connected to their teachers</a:t>
             </a:r>
             <a:r>
-              <a:rPr/>
               <a:t> (the “paradox of connection”). Furthermore, predictive models trained on historical data risk perpetuating existing biases against marginalized groups when allocating resources or flagging “at-risk” learners.</a:t>
             </a:r>
           </a:p>
           <a:p>
-            <a:pPr lvl="0" indent="0" marL="0">
+            <a:pPr marL="0" lvl="0" indent="0">
               <a:buNone/>
             </a:pPr>
-          </a:p>
-          <a:p>
-            <a:pPr lvl="0" indent="0" marL="0">
+            <a:endParaRPr/>
+          </a:p>
+          <a:p>
+            <a:pPr marL="0" lvl="0" indent="0">
               <a:buNone/>
             </a:pPr>
             <a:r>
-              <a:rPr/>
               <a:t>Recent work also highlights broader risks: generative AI can </a:t>
             </a:r>
             <a:r>
@@ -2799,7 +2069,6 @@
               <a:t>hallucinate</a:t>
             </a:r>
             <a:r>
-              <a:rPr/>
               <a:t> plausible but incorrect information, enable large‑scale </a:t>
             </a:r>
             <a:r>
@@ -2807,7 +2076,6 @@
               <a:t>misinformation and deepfakes</a:t>
             </a:r>
             <a:r>
-              <a:rPr/>
               <a:t>, and make it easier to </a:t>
             </a:r>
             <a:r>
@@ -2815,7 +2083,6 @@
               <a:t>circumvent traditional assessments</a:t>
             </a:r>
             <a:r>
-              <a:rPr/>
               <a:t> if those tasks are easily automated. These are not reasons to ban AI outright, but reasons to </a:t>
             </a:r>
             <a:r>
@@ -2823,21 +2090,20 @@
               <a:t>redesign tasks and guardrails</a:t>
             </a:r>
             <a:r>
-              <a:rPr/>
               <a:t> so that human judgement and process remain visible.</a:t>
             </a:r>
           </a:p>
           <a:p>
-            <a:pPr lvl="0" indent="0" marL="0">
+            <a:pPr marL="0" lvl="0" indent="0">
               <a:buNone/>
             </a:pPr>
-          </a:p>
-          <a:p>
-            <a:pPr lvl="0" indent="0" marL="0">
+            <a:endParaRPr/>
+          </a:p>
+          <a:p>
+            <a:pPr marL="0" lvl="0" indent="0">
               <a:buNone/>
             </a:pPr>
             <a:r>
-              <a:rPr/>
               <a:t>You can link this directly to </a:t>
             </a:r>
             <a:r>
@@ -2845,17 +2111,17 @@
               <a:t>Assessment 2030</a:t>
             </a:r>
             <a:r>
-              <a:rPr/>
               <a:t> and later activities:</a:t>
             </a:r>
           </a:p>
           <a:p>
-            <a:pPr lvl="0" indent="0" marL="0">
+            <a:pPr marL="0" lvl="0" indent="0">
               <a:buNone/>
             </a:pPr>
-          </a:p>
-          <a:p>
-            <a:pPr lvl="0" indent="0" marL="1270000">
+            <a:endParaRPr/>
+          </a:p>
+          <a:p>
+            <a:pPr marL="1270000" lvl="0" indent="0">
               <a:buNone/>
             </a:pPr>
             <a:r>
@@ -2872,12 +2138,13 @@
             </a:r>
           </a:p>
           <a:p>
-            <a:pPr lvl="0" indent="0" marL="0">
+            <a:pPr marL="0" lvl="0" indent="0">
               <a:buNone/>
             </a:pPr>
-          </a:p>
-          <a:p>
-            <a:pPr lvl="0" indent="0" marL="0">
+            <a:endParaRPr sz="2000"/>
+          </a:p>
+          <a:p>
+            <a:pPr marL="0" lvl="0" indent="0">
               <a:buNone/>
             </a:pPr>
             <a:r>
@@ -2885,7 +2152,6 @@
               <a:t>Analogy:</a:t>
             </a:r>
             <a:r>
-              <a:rPr/>
               <a:t> Think of AIED as a new, highly efficient Automated Factory. While it produces learning materials at scale (efficiency), it risks creating a sterile, one-size-fits-all product that lacks the “human touch” (eroding connection). More dangerously, if the factory’s blueprints (the algorithm) have a flaw (bias), it doesn’t just create one bad product; it replicates that flaw thousands of times, perpetuating the inequity at scale.</a:t>
             </a:r>
           </a:p>
@@ -2908,7 +2174,7 @@
           <a:p>
             <a:fld id="{18BDFEC3-8487-43E8-A154-7C12CBC1FFF2}" type="slidenum">
               <a:rPr lang="en-US"/>
-              <a:t>8</a:t>
+              <a:t>6</a:t>
             </a:fld>
             <a:endParaRPr lang="en-US"/>
           </a:p>
@@ -2916,6 +2182,9 @@
       </p:sp>
     </p:spTree>
   </p:cSld>
+  <p:clrMapOvr>
+    <a:masterClrMapping/>
+  </p:clrMapOvr>
 </p:notes>
 </file>
 
@@ -2963,7 +2232,7 @@
           <a:bodyPr/>
           <a:lstStyle/>
           <a:p>
-            <a:pPr lvl="0" indent="0" marL="0">
+            <a:pPr marL="0" lvl="0" indent="0">
               <a:buNone/>
             </a:pPr>
             <a:r>
@@ -2971,7 +2240,6 @@
               <a:t>Key Takeaway:</a:t>
             </a:r>
             <a:r>
-              <a:rPr/>
               <a:t> The long-term impact of AI is a </a:t>
             </a:r>
             <a:r>
@@ -2979,7 +2247,6 @@
               <a:t>forced re-humanization</a:t>
             </a:r>
             <a:r>
-              <a:rPr/>
               <a:t> of the educator’s role, where the practitioner is compelled to abandon the commoditized, technical tasks (which AI can perform) and focus on the </a:t>
             </a:r>
             <a:r>
@@ -2987,7 +2254,6 @@
               <a:t>Human Edge of AI</a:t>
             </a:r>
             <a:r>
-              <a:rPr/>
               <a:t>. This means prioritizing </a:t>
             </a:r>
             <a:r>
@@ -2995,7 +2261,6 @@
               <a:t>empathy, creativity, strategic thinking, mentorship, and socio-emotional support</a:t>
             </a:r>
             <a:r>
-              <a:rPr/>
               <a:t>—the unique human skills vital for holistic student development that AI fundamentally cannot replicate. Educators must also become proficient in </a:t>
             </a:r>
             <a:r>
@@ -3003,7 +2268,6 @@
               <a:t>interpreting AI data</a:t>
             </a:r>
             <a:r>
-              <a:rPr/>
               <a:t> and developing </a:t>
             </a:r>
             <a:r>
@@ -3011,17 +2275,17 @@
               <a:t>ethical reasoning</a:t>
             </a:r>
             <a:r>
-              <a:rPr/>
               <a:t> to guide responsible technology use.</a:t>
             </a:r>
           </a:p>
           <a:p>
-            <a:pPr lvl="0" indent="0" marL="0">
+            <a:pPr marL="0" lvl="0" indent="0">
               <a:buNone/>
             </a:pPr>
-          </a:p>
-          <a:p>
-            <a:pPr lvl="0" indent="0" marL="0">
+            <a:endParaRPr/>
+          </a:p>
+          <a:p>
+            <a:pPr marL="0" lvl="0" indent="0">
               <a:buNone/>
             </a:pPr>
             <a:r>
@@ -3029,7 +2293,6 @@
               <a:t>Analogy:</a:t>
             </a:r>
             <a:r>
-              <a:rPr/>
               <a:t> The integration of AI is like a Rising Tide. As the AI “tide” rises, it automates and submerges all the routine, technical “lowlands” of the job (grading, content delivery). This forces the educator to move to the “high ground”—the uniquely human skills of empathy, mentorship, and creative problem-solving that the tide cannot reach. Their value is no longer in the submerged tasks, but on this new, more human-centric high ground.</a:t>
             </a:r>
           </a:p>
@@ -3052,7 +2315,7 @@
           <a:p>
             <a:fld id="{18BDFEC3-8487-43E8-A154-7C12CBC1FFF2}" type="slidenum">
               <a:rPr lang="en-US"/>
-              <a:t>9</a:t>
+              <a:t>7</a:t>
             </a:fld>
             <a:endParaRPr lang="en-US"/>
           </a:p>
@@ -3060,6 +2323,9 @@
       </p:sp>
     </p:spTree>
   </p:cSld>
+  <p:clrMapOvr>
+    <a:masterClrMapping/>
+  </p:clrMapOvr>
 </p:notes>
 </file>
 
@@ -3107,182 +2373,27 @@
           <a:bodyPr/>
           <a:lstStyle/>
           <a:p>
-            <a:pPr lvl="0" indent="0" marL="0">
+            <a:pPr marL="0" lvl="0" indent="0">
               <a:buNone/>
             </a:pPr>
             <a:r>
-              <a:rPr/>
-              <a:t>Purpose: “Use AI to draft summaries and repurpose them for teaching tasks.”</a:t>
-            </a:r>
-          </a:p>
-          <a:p>
-            <a:pPr lvl="0" indent="0" marL="0">
+              <a:rPr lang="en-AU" dirty="0"/>
+              <a:t>In Activity 1 you use AI as a summariser and re‑packager. You start from a real text (such as a reading excerpt, assignment brief or policy section), ask AI for a short, student‑friendly summary, then turn that summary into something useful: an LMS announcement, a two‑slide outline, or a short quiz.</a:t>
+            </a:r>
+          </a:p>
+          <a:p>
+            <a:pPr marL="0" lvl="0" indent="0">
               <a:buNone/>
             </a:pPr>
-          </a:p>
-          <a:p>
-            <a:pPr lvl="0" indent="0" marL="0">
+            <a:endParaRPr lang="en-AU" dirty="0"/>
+          </a:p>
+          <a:p>
+            <a:pPr marL="0" lvl="0" indent="0">
               <a:buNone/>
             </a:pPr>
             <a:r>
-              <a:rPr/>
-              <a:t>Core instructions:</a:t>
-            </a:r>
-          </a:p>
-          <a:p>
-            <a:pPr lvl="0" indent="0" marL="0">
-              <a:buNone/>
-            </a:pPr>
-          </a:p>
-          <a:p>
-            <a:pPr lvl="0" indent="-342900" marL="342900">
-              <a:buAutoNum type="arabicPeriod"/>
-            </a:pPr>
-            <a:r>
-              <a:rPr/>
-              <a:t>Choose a short text:</a:t>
-            </a:r>
-          </a:p>
-          <a:p>
-            <a:pPr lvl="0" indent="0" marL="0">
-              <a:buNone/>
-            </a:pPr>
-          </a:p>
-          <a:p>
-            <a:pPr lvl="1"/>
-            <a:r>
-              <a:rPr/>
-              <a:t>reading excerpt, assignment brief, policy section, etc.</a:t>
-            </a:r>
-          </a:p>
-          <a:p>
-            <a:pPr lvl="0" indent="0" marL="0">
-              <a:buNone/>
-            </a:pPr>
-          </a:p>
-          <a:p>
-            <a:pPr lvl="0" indent="-342900" marL="342900">
-              <a:buAutoNum type="arabicPeriod"/>
-            </a:pPr>
-            <a:r>
-              <a:rPr/>
-              <a:t>Run the summary prompt:</a:t>
-            </a:r>
-          </a:p>
-          <a:p>
-            <a:pPr lvl="0" indent="0" marL="0">
-              <a:buNone/>
-            </a:pPr>
-          </a:p>
-          <a:p>
-            <a:pPr lvl="1"/>
-            <a:r>
-              <a:rPr/>
-              <a:t>“Summarise this for year level students in 5–7 bullet points. Use plain language, highlight 2–3 key ideas, end with one discussion question.”</a:t>
-            </a:r>
-          </a:p>
-          <a:p>
-            <a:pPr lvl="0" indent="0" marL="0">
-              <a:buNone/>
-            </a:pPr>
-          </a:p>
-          <a:p>
-            <a:pPr lvl="0" indent="-342900" marL="342900">
-              <a:buAutoNum type="arabicPeriod"/>
-            </a:pPr>
-            <a:r>
-              <a:rPr/>
-              <a:t>Choose a twist:</a:t>
-            </a:r>
-          </a:p>
-          <a:p>
-            <a:pPr lvl="0" indent="0" marL="0">
-              <a:buNone/>
-            </a:pPr>
-          </a:p>
-          <a:p>
-            <a:pPr lvl="1"/>
-            <a:r>
-              <a:rPr/>
-              <a:t>LMS announcement,</a:t>
-            </a:r>
-            <a:br/>
-          </a:p>
-          <a:p>
-            <a:pPr lvl="0" indent="0" marL="0">
-              <a:buNone/>
-            </a:pPr>
-          </a:p>
-          <a:p>
-            <a:pPr lvl="1"/>
-            <a:r>
-              <a:rPr/>
-              <a:t>2‑slide outline,</a:t>
-            </a:r>
-            <a:br/>
-          </a:p>
-          <a:p>
-            <a:pPr lvl="0" indent="0" marL="0">
-              <a:buNone/>
-            </a:pPr>
-          </a:p>
-          <a:p>
-            <a:pPr lvl="1"/>
-            <a:r>
-              <a:rPr/>
-              <a:t>short quiz.</a:t>
-            </a:r>
-          </a:p>
-          <a:p>
-            <a:pPr lvl="0" indent="0" marL="0">
-              <a:buNone/>
-            </a:pPr>
-          </a:p>
-          <a:p>
-            <a:pPr lvl="0" indent="-342900" marL="342900">
-              <a:buAutoNum type="arabicPeriod"/>
-            </a:pPr>
-            <a:r>
-              <a:rPr/>
-              <a:t>Edit the output as needed.</a:t>
-            </a:r>
-          </a:p>
-          <a:p>
-            <a:pPr lvl="0" indent="0" marL="0">
-              <a:buNone/>
-            </a:pPr>
-          </a:p>
-          <a:p>
-            <a:pPr lvl="0" indent="0" marL="0">
-              <a:buNone/>
-            </a:pPr>
-            <a:r>
-              <a:rPr/>
-              <a:t>Variants box:</a:t>
-            </a:r>
-          </a:p>
-          <a:p>
-            <a:pPr lvl="0" indent="0" marL="0">
-              <a:buNone/>
-            </a:pPr>
-          </a:p>
-          <a:p>
-            <a:pPr lvl="0"/>
-            <a:r>
-              <a:rPr/>
-              <a:t>Researchers: summarise an abstract → plain English for participants / media; summarise reviewer comments → draft response.</a:t>
-            </a:r>
-          </a:p>
-          <a:p>
-            <a:pPr lvl="0" indent="0" marL="0">
-              <a:buNone/>
-            </a:pPr>
-          </a:p>
-          <a:p>
-            <a:pPr lvl="0"/>
-            <a:r>
-              <a:rPr/>
-              <a:t>Professional staff: summarise a policy or process → student email, FAQ, or staff bulletin.</a:t>
+              <a:rPr lang="en-AU" dirty="0"/>
+              <a:t>The key idea is that AI can speed up routine drafting, but you still review and edit the output so it fits your unit, students and voice. For step‑by‑step prompts and variants for research and professional roles, see the handout ‘Activity 1 – Automate the Tedious’ and the ‘Quick Start Guide: AI in Education’.</a:t>
             </a:r>
           </a:p>
         </p:txBody>
@@ -3304,7 +2415,7 @@
           <a:p>
             <a:fld id="{18BDFEC3-8487-43E8-A154-7C12CBC1FFF2}" type="slidenum">
               <a:rPr lang="en-US"/>
-              <a:t>10</a:t>
+              <a:t>8</a:t>
             </a:fld>
             <a:endParaRPr lang="en-US"/>
           </a:p>
@@ -3312,6 +2423,9 @@
       </p:sp>
     </p:spTree>
   </p:cSld>
+  <p:clrMapOvr>
+    <a:masterClrMapping/>
+  </p:clrMapOvr>
 </p:notes>
 </file>
 
@@ -3359,194 +2473,27 @@
           <a:bodyPr/>
           <a:lstStyle/>
           <a:p>
-            <a:pPr lvl="0" indent="0" marL="0">
+            <a:pPr marL="0" lvl="0" indent="0">
               <a:buNone/>
             </a:pPr>
             <a:r>
-              <a:rPr/>
-              <a:t>Purpose: “Move from vague prompts to structured, high‑quality ones.”</a:t>
-            </a:r>
-          </a:p>
-          <a:p>
-            <a:pPr lvl="0" indent="0" marL="0">
+              <a:rPr lang="en-AU" dirty="0"/>
+              <a:t>Activity 2 is about improving how you ask AI for help. You take a vague prompt you actually used, then rewrite it using a simple structure: context, role, action, format and tone/constraints. Running both prompts side‑by‑side shows how much clearer, more relevant and more usable the structured output is.</a:t>
+            </a:r>
+          </a:p>
+          <a:p>
+            <a:pPr marL="0" lvl="0" indent="0">
               <a:buNone/>
             </a:pPr>
-          </a:p>
-          <a:p>
-            <a:pPr lvl="0" indent="0" marL="0">
+            <a:endParaRPr lang="en-AU" dirty="0"/>
+          </a:p>
+          <a:p>
+            <a:pPr marL="0" lvl="0" indent="0">
               <a:buNone/>
             </a:pPr>
             <a:r>
-              <a:rPr/>
-              <a:t>Core instructions:</a:t>
-            </a:r>
-          </a:p>
-          <a:p>
-            <a:pPr lvl="0" indent="0" marL="0">
-              <a:buNone/>
-            </a:pPr>
-          </a:p>
-          <a:p>
-            <a:pPr lvl="0" indent="-342900" marL="342900">
-              <a:buAutoNum type="arabicPeriod"/>
-            </a:pPr>
-            <a:r>
-              <a:rPr/>
-              <a:t>Copy one prompt you actually used in Activity 1.</a:t>
-            </a:r>
-          </a:p>
-          <a:p>
-            <a:pPr lvl="0" indent="0" marL="0">
-              <a:buNone/>
-            </a:pPr>
-          </a:p>
-          <a:p>
-            <a:pPr lvl="0" indent="-342900" marL="342900">
-              <a:buAutoNum type="arabicPeriod"/>
-            </a:pPr>
-            <a:r>
-              <a:rPr/>
-              <a:t>Underneath it, rewrite using:</a:t>
-            </a:r>
-          </a:p>
-          <a:p>
-            <a:pPr lvl="0" indent="0" marL="0">
-              <a:buNone/>
-            </a:pPr>
-          </a:p>
-          <a:p>
-            <a:pPr lvl="1"/>
-            <a:r>
-              <a:rPr/>
-              <a:t>CONTEXT (unit/role, level, constraints)</a:t>
-            </a:r>
-          </a:p>
-          <a:p>
-            <a:pPr lvl="0" indent="0" marL="0">
-              <a:buNone/>
-            </a:pPr>
-          </a:p>
-          <a:p>
-            <a:pPr lvl="1"/>
-            <a:r>
-              <a:rPr/>
-              <a:t>ROLE (“You are a…”)</a:t>
-            </a:r>
-          </a:p>
-          <a:p>
-            <a:pPr lvl="0" indent="0" marL="0">
-              <a:buNone/>
-            </a:pPr>
-          </a:p>
-          <a:p>
-            <a:pPr lvl="1"/>
-            <a:r>
-              <a:rPr/>
-              <a:t>ACTION (what you want AI to do)</a:t>
-            </a:r>
-          </a:p>
-          <a:p>
-            <a:pPr lvl="0" indent="0" marL="0">
-              <a:buNone/>
-            </a:pPr>
-          </a:p>
-          <a:p>
-            <a:pPr lvl="1"/>
-            <a:r>
-              <a:rPr/>
-              <a:t>FORMAT (bullets, table, slides, etc.)</a:t>
-            </a:r>
-          </a:p>
-          <a:p>
-            <a:pPr lvl="0" indent="0" marL="0">
-              <a:buNone/>
-            </a:pPr>
-          </a:p>
-          <a:p>
-            <a:pPr lvl="1"/>
-            <a:r>
-              <a:rPr/>
-              <a:t>TONE/CONSTRAINTS (word limit, level, etc.)</a:t>
-            </a:r>
-          </a:p>
-          <a:p>
-            <a:pPr lvl="0" indent="0" marL="0">
-              <a:buNone/>
-            </a:pPr>
-          </a:p>
-          <a:p>
-            <a:pPr lvl="0" indent="-342900" marL="342900">
-              <a:buAutoNum type="arabicPeriod"/>
-            </a:pPr>
-            <a:r>
-              <a:rPr/>
-              <a:t>Run both prompts and compare outputs.</a:t>
-            </a:r>
-          </a:p>
-          <a:p>
-            <a:pPr lvl="0" indent="0" marL="0">
-              <a:buNone/>
-            </a:pPr>
-          </a:p>
-          <a:p>
-            <a:pPr lvl="0" indent="-342900" marL="342900">
-              <a:buAutoNum type="arabicPeriod"/>
-            </a:pPr>
-            <a:r>
-              <a:rPr/>
-              <a:t>Note what changed in quality, relevance, and usefulness.</a:t>
-            </a:r>
-          </a:p>
-          <a:p>
-            <a:pPr lvl="0" indent="0" marL="0">
-              <a:buNone/>
-            </a:pPr>
-          </a:p>
-          <a:p>
-            <a:pPr lvl="0" indent="0" marL="0">
-              <a:buNone/>
-            </a:pPr>
-            <a:r>
-              <a:rPr/>
-              <a:t>Include 1–2 patterns on the page (e.g. teaching activity prompt + feedback helper).</a:t>
-            </a:r>
-          </a:p>
-          <a:p>
-            <a:pPr lvl="0" indent="0" marL="0">
-              <a:buNone/>
-            </a:pPr>
-          </a:p>
-          <a:p>
-            <a:pPr lvl="0" indent="0" marL="0">
-              <a:buNone/>
-            </a:pPr>
-            <a:r>
-              <a:rPr/>
-              <a:t>Variants box:</a:t>
-            </a:r>
-          </a:p>
-          <a:p>
-            <a:pPr lvl="0" indent="0" marL="0">
-              <a:buNone/>
-            </a:pPr>
-          </a:p>
-          <a:p>
-            <a:pPr lvl="0"/>
-            <a:r>
-              <a:rPr/>
-              <a:t>Researchers: prompt makeover for literature review help, grant impact section, interview protocol.</a:t>
-            </a:r>
-          </a:p>
-          <a:p>
-            <a:pPr lvl="0" indent="0" marL="0">
-              <a:buNone/>
-            </a:pPr>
-          </a:p>
-          <a:p>
-            <a:pPr lvl="0"/>
-            <a:r>
-              <a:rPr/>
-              <a:t>Professional staff: prompt makeover for student comms, website copy, internal memos.</a:t>
+              <a:rPr lang="en-AU" dirty="0"/>
+              <a:t>This activity links directly to the C.R.A.F.T. approach to prompting. For worked examples and extra patterns (including feedback helpers and redesign prompts), see ‘Activity 2 – The Art of the Prompt’ and the ‘C.R.A.F.T. Prompting Framework’.</a:t>
             </a:r>
           </a:p>
         </p:txBody>
@@ -3568,7 +2515,7 @@
           <a:p>
             <a:fld id="{18BDFEC3-8487-43E8-A154-7C12CBC1FFF2}" type="slidenum">
               <a:rPr lang="en-US"/>
-              <a:t>11</a:t>
+              <a:t>9</a:t>
             </a:fld>
             <a:endParaRPr lang="en-US"/>
           </a:p>
@@ -3576,6 +2523,9 @@
       </p:sp>
     </p:spTree>
   </p:cSld>
+  <p:clrMapOvr>
+    <a:masterClrMapping/>
+  </p:clrMapOvr>
 </p:notes>
 </file>
 
@@ -3758,7 +2708,7 @@
           <a:p>
             <a:fld id="{241EB5C9-1307-BA42-ABA2-0BC069CD8E7F}" type="datetimeFigureOut">
               <a:rPr lang="en-US" smtClean="0"/>
-              <a:t>1/2/22</a:t>
+              <a:t>11/18/25</a:t>
             </a:fld>
             <a:endParaRPr lang="en-US"/>
           </a:p>
@@ -3926,7 +2876,7 @@
           <a:p>
             <a:fld id="{241EB5C9-1307-BA42-ABA2-0BC069CD8E7F}" type="datetimeFigureOut">
               <a:rPr lang="en-US" smtClean="0"/>
-              <a:t>1/2/22</a:t>
+              <a:t>11/18/25</a:t>
             </a:fld>
             <a:endParaRPr lang="en-US"/>
           </a:p>
@@ -4104,7 +3054,7 @@
           <a:p>
             <a:fld id="{241EB5C9-1307-BA42-ABA2-0BC069CD8E7F}" type="datetimeFigureOut">
               <a:rPr lang="en-US" smtClean="0"/>
-              <a:t>1/2/22</a:t>
+              <a:t>11/18/25</a:t>
             </a:fld>
             <a:endParaRPr lang="en-US"/>
           </a:p>
@@ -4272,7 +3222,7 @@
           <a:p>
             <a:fld id="{241EB5C9-1307-BA42-ABA2-0BC069CD8E7F}" type="datetimeFigureOut">
               <a:rPr lang="en-US" smtClean="0"/>
-              <a:t>1/2/22</a:t>
+              <a:t>11/18/25</a:t>
             </a:fld>
             <a:endParaRPr lang="en-US"/>
           </a:p>
@@ -4517,7 +3467,7 @@
           <a:p>
             <a:fld id="{241EB5C9-1307-BA42-ABA2-0BC069CD8E7F}" type="datetimeFigureOut">
               <a:rPr lang="en-US" smtClean="0"/>
-              <a:t>1/2/22</a:t>
+              <a:t>11/18/25</a:t>
             </a:fld>
             <a:endParaRPr lang="en-US"/>
           </a:p>
@@ -4802,7 +3752,7 @@
           <a:p>
             <a:fld id="{241EB5C9-1307-BA42-ABA2-0BC069CD8E7F}" type="datetimeFigureOut">
               <a:rPr lang="en-US" smtClean="0"/>
-              <a:t>1/2/22</a:t>
+              <a:t>11/18/25</a:t>
             </a:fld>
             <a:endParaRPr lang="en-US"/>
           </a:p>
@@ -5221,7 +4171,7 @@
           <a:p>
             <a:fld id="{241EB5C9-1307-BA42-ABA2-0BC069CD8E7F}" type="datetimeFigureOut">
               <a:rPr lang="en-US" smtClean="0"/>
-              <a:t>1/2/22</a:t>
+              <a:t>11/18/25</a:t>
             </a:fld>
             <a:endParaRPr lang="en-US"/>
           </a:p>
@@ -5338,7 +4288,7 @@
           <a:p>
             <a:fld id="{241EB5C9-1307-BA42-ABA2-0BC069CD8E7F}" type="datetimeFigureOut">
               <a:rPr lang="en-US" smtClean="0"/>
-              <a:t>1/2/22</a:t>
+              <a:t>11/18/25</a:t>
             </a:fld>
             <a:endParaRPr lang="en-US"/>
           </a:p>
@@ -5433,7 +4383,7 @@
           <a:p>
             <a:fld id="{241EB5C9-1307-BA42-ABA2-0BC069CD8E7F}" type="datetimeFigureOut">
               <a:rPr lang="en-US" smtClean="0"/>
-              <a:t>1/2/22</a:t>
+              <a:t>11/18/25</a:t>
             </a:fld>
             <a:endParaRPr lang="en-US"/>
           </a:p>
@@ -5708,7 +4658,7 @@
           <a:p>
             <a:fld id="{241EB5C9-1307-BA42-ABA2-0BC069CD8E7F}" type="datetimeFigureOut">
               <a:rPr lang="en-US" smtClean="0"/>
-              <a:t>1/2/22</a:t>
+              <a:t>11/18/25</a:t>
             </a:fld>
             <a:endParaRPr lang="en-US"/>
           </a:p>
@@ -5960,7 +4910,7 @@
           <a:p>
             <a:fld id="{241EB5C9-1307-BA42-ABA2-0BC069CD8E7F}" type="datetimeFigureOut">
               <a:rPr lang="en-US" smtClean="0"/>
-              <a:t>1/2/22</a:t>
+              <a:t>11/18/25</a:t>
             </a:fld>
             <a:endParaRPr lang="en-US"/>
           </a:p>
@@ -6022,7 +4972,7 @@
 </file>
 
 <file path=ppt/slideMasters/slideMaster1.xml><?xml version="1.0" encoding="utf-8"?>
-<p:sldMaster xmlns:a="http://schemas.openxmlformats.org/drawingml/2006/main" xmlns:p="http://schemas.openxmlformats.org/presentationml/2006/main" xmlns:r="http://schemas.openxmlformats.org/officeDocument/2006/relationships">
+<p:sldMaster xmlns:a="http://schemas.openxmlformats.org/drawingml/2006/main" xmlns:r="http://schemas.openxmlformats.org/officeDocument/2006/relationships" xmlns:p="http://schemas.openxmlformats.org/presentationml/2006/main">
   <p:cSld>
     <p:bg>
       <p:bgRef idx="1001">
@@ -6063,7 +5013,7 @@
           </a:prstGeom>
         </p:spPr>
         <p:txBody>
-          <a:bodyPr anchor="ctr" bIns="45720" lIns="91440" rIns="91440" rtlCol="0" tIns="45720" vert="horz">
+          <a:bodyPr vert="horz" lIns="91440" tIns="45720" rIns="91440" bIns="45720" rtlCol="0" anchor="ctr">
             <a:normAutofit/>
           </a:bodyPr>
           <a:lstStyle/>
@@ -6082,7 +5032,7 @@
             <a:spLocks noGrp="1"/>
           </p:cNvSpPr>
           <p:nvPr>
-            <p:ph idx="1" type="body"/>
+            <p:ph type="body" idx="1"/>
           </p:nvPr>
         </p:nvSpPr>
         <p:spPr>
@@ -6095,7 +5045,7 @@
           </a:prstGeom>
         </p:spPr>
         <p:txBody>
-          <a:bodyPr bIns="45720" lIns="91440" rIns="91440" rtlCol="0" tIns="45720" vert="horz">
+          <a:bodyPr vert="horz" lIns="91440" tIns="45720" rIns="91440" bIns="45720" rtlCol="0">
             <a:normAutofit/>
           </a:bodyPr>
           <a:lstStyle/>
@@ -6143,7 +5093,7 @@
             <a:spLocks noGrp="1"/>
           </p:cNvSpPr>
           <p:nvPr>
-            <p:ph idx="2" sz="half" type="dt"/>
+            <p:ph type="dt" sz="half" idx="2"/>
           </p:nvPr>
         </p:nvSpPr>
         <p:spPr>
@@ -6156,7 +5106,7 @@
           </a:prstGeom>
         </p:spPr>
         <p:txBody>
-          <a:bodyPr anchor="ctr" bIns="45720" lIns="91440" rIns="91440" rtlCol="0" tIns="45720" vert="horz"/>
+          <a:bodyPr vert="horz" lIns="91440" tIns="45720" rIns="91440" bIns="45720" rtlCol="0" anchor="ctr"/>
           <a:lstStyle>
             <a:lvl1pPr algn="l">
               <a:defRPr sz="900">
@@ -6171,7 +5121,7 @@
           <a:p>
             <a:fld id="{241EB5C9-1307-BA42-ABA2-0BC069CD8E7F}" type="datetimeFigureOut">
               <a:rPr lang="en-US" smtClean="0"/>
-              <a:t>1/2/22</a:t>
+              <a:t>11/18/25</a:t>
             </a:fld>
             <a:endParaRPr lang="en-US"/>
           </a:p>
@@ -6184,7 +5134,7 @@
             <a:spLocks noGrp="1"/>
           </p:cNvSpPr>
           <p:nvPr>
-            <p:ph idx="3" sz="quarter" type="ftr"/>
+            <p:ph type="ftr" sz="quarter" idx="3"/>
           </p:nvPr>
         </p:nvSpPr>
         <p:spPr>
@@ -6197,7 +5147,7 @@
           </a:prstGeom>
         </p:spPr>
         <p:txBody>
-          <a:bodyPr anchor="ctr" bIns="45720" lIns="91440" rIns="91440" rtlCol="0" tIns="45720" vert="horz"/>
+          <a:bodyPr vert="horz" lIns="91440" tIns="45720" rIns="91440" bIns="45720" rtlCol="0" anchor="ctr"/>
           <a:lstStyle>
             <a:lvl1pPr algn="ctr">
               <a:defRPr sz="900">
@@ -6221,7 +5171,7 @@
             <a:spLocks noGrp="1"/>
           </p:cNvSpPr>
           <p:nvPr>
-            <p:ph idx="4" sz="quarter" type="sldNum"/>
+            <p:ph type="sldNum" sz="quarter" idx="4"/>
           </p:nvPr>
         </p:nvSpPr>
         <p:spPr>
@@ -6234,7 +5184,7 @@
           </a:prstGeom>
         </p:spPr>
         <p:txBody>
-          <a:bodyPr anchor="ctr" bIns="45720" lIns="91440" rIns="91440" rtlCol="0" tIns="45720" vert="horz"/>
+          <a:bodyPr vert="horz" lIns="91440" tIns="45720" rIns="91440" bIns="45720" rtlCol="0" anchor="ctr"/>
           <a:lstStyle>
             <a:lvl1pPr algn="r">
               <a:defRPr sz="900">
@@ -6262,7 +5212,7 @@
       </p:ext>
     </p:extLst>
   </p:cSld>
-  <p:clrMap accent1="accent1" accent2="accent2" accent3="accent3" accent4="accent4" accent5="accent5" accent6="accent6" bg1="lt1" bg2="lt2" folHlink="folHlink" hlink="hlink" tx1="dk1" tx2="dk2"/>
+  <p:clrMap bg1="lt1" tx1="dk1" bg2="lt2" tx2="dk2" accent1="accent1" accent2="accent2" accent3="accent3" accent4="accent4" accent5="accent5" accent6="accent6" hlink="hlink" folHlink="folHlink"/>
   <p:sldLayoutIdLst>
     <p:sldLayoutId id="2147483649" r:id="rId1"/>
     <p:sldLayoutId id="2147483650" r:id="rId2"/>
@@ -6278,12 +5228,12 @@
   </p:sldLayoutIdLst>
   <p:txStyles>
     <p:titleStyle>
-      <a:lvl1pPr algn="ctr" defTabSz="342900" eaLnBrk="1" hangingPunct="1" latinLnBrk="0" rtl="0">
+      <a:lvl1pPr algn="ctr" defTabSz="342900" rtl="0" eaLnBrk="1" latinLnBrk="0" hangingPunct="1">
         <a:spcBef>
           <a:spcPct val="0"/>
         </a:spcBef>
         <a:buNone/>
-        <a:defRPr kern="1200" sz="3300">
+        <a:defRPr sz="3300" kern="1200">
           <a:solidFill>
             <a:schemeClr val="tx1"/>
           </a:solidFill>
@@ -6294,13 +5244,13 @@
       </a:lvl1pPr>
     </p:titleStyle>
     <p:bodyStyle>
-      <a:lvl1pPr algn="l" defTabSz="342900" eaLnBrk="1" hangingPunct="1" indent="-342900" latinLnBrk="0" marL="342900" rtl="0">
+      <a:lvl1pPr marL="342900" indent="-342900" algn="l" defTabSz="342900" rtl="0" eaLnBrk="1" latinLnBrk="0" hangingPunct="1">
         <a:spcBef>
           <a:spcPct val="20000"/>
         </a:spcBef>
         <a:buFont typeface="Arial"/>
         <a:buChar char="•"/>
-        <a:defRPr kern="1200" sz="2400">
+        <a:defRPr sz="2400" kern="1200">
           <a:solidFill>
             <a:schemeClr val="tx1"/>
           </a:solidFill>
@@ -6309,13 +5259,13 @@
           <a:cs typeface="+mn-cs"/>
         </a:defRPr>
       </a:lvl1pPr>
-      <a:lvl2pPr algn="l" defTabSz="342900" eaLnBrk="1" hangingPunct="1" indent="-342900" latinLnBrk="0" marL="685800" rtl="0">
+      <a:lvl2pPr marL="685800" indent="-342900" algn="l" defTabSz="342900" rtl="0" eaLnBrk="1" latinLnBrk="0" hangingPunct="1">
         <a:spcBef>
           <a:spcPct val="20000"/>
         </a:spcBef>
         <a:buFont typeface="Arial"/>
         <a:buChar char="–"/>
-        <a:defRPr kern="1200" sz="2100">
+        <a:defRPr sz="2100" kern="1200">
           <a:solidFill>
             <a:schemeClr val="tx1"/>
           </a:solidFill>
@@ -6324,13 +5274,13 @@
           <a:cs typeface="+mn-cs"/>
         </a:defRPr>
       </a:lvl2pPr>
-      <a:lvl3pPr algn="l" defTabSz="342900" eaLnBrk="1" hangingPunct="1" indent="-342900" latinLnBrk="0" marL="1028700" rtl="0">
+      <a:lvl3pPr marL="1028700" indent="-342900" algn="l" defTabSz="342900" rtl="0" eaLnBrk="1" latinLnBrk="0" hangingPunct="1">
         <a:spcBef>
           <a:spcPct val="20000"/>
         </a:spcBef>
         <a:buFont typeface="Arial"/>
         <a:buChar char="•"/>
-        <a:defRPr kern="1200" sz="1800">
+        <a:defRPr sz="1800" kern="1200">
           <a:solidFill>
             <a:schemeClr val="tx1"/>
           </a:solidFill>
@@ -6339,13 +5289,13 @@
           <a:cs typeface="+mn-cs"/>
         </a:defRPr>
       </a:lvl3pPr>
-      <a:lvl4pPr algn="l" defTabSz="342900" eaLnBrk="1" hangingPunct="1" indent="-342900" latinLnBrk="0" marL="1371600" rtl="0">
+      <a:lvl4pPr marL="1371600" indent="-342900" algn="l" defTabSz="342900" rtl="0" eaLnBrk="1" latinLnBrk="0" hangingPunct="1">
         <a:spcBef>
           <a:spcPct val="20000"/>
         </a:spcBef>
         <a:buFont typeface="Arial"/>
         <a:buChar char="–"/>
-        <a:defRPr kern="1200" sz="1500">
+        <a:defRPr sz="1500" kern="1200">
           <a:solidFill>
             <a:schemeClr val="tx1"/>
           </a:solidFill>
@@ -6354,13 +5304,13 @@
           <a:cs typeface="+mn-cs"/>
         </a:defRPr>
       </a:lvl4pPr>
-      <a:lvl5pPr algn="l" defTabSz="342900" eaLnBrk="1" hangingPunct="1" indent="-342900" latinLnBrk="0" marL="1714500" rtl="0">
+      <a:lvl5pPr marL="1714500" indent="-342900" algn="l" defTabSz="342900" rtl="0" eaLnBrk="1" latinLnBrk="0" hangingPunct="1">
         <a:spcBef>
           <a:spcPct val="20000"/>
         </a:spcBef>
         <a:buFont typeface="Arial"/>
         <a:buChar char="»"/>
-        <a:defRPr kern="1200" sz="1500">
+        <a:defRPr sz="1500" kern="1200">
           <a:solidFill>
             <a:schemeClr val="tx1"/>
           </a:solidFill>
@@ -6369,13 +5319,13 @@
           <a:cs typeface="+mn-cs"/>
         </a:defRPr>
       </a:lvl5pPr>
-      <a:lvl6pPr algn="l" defTabSz="342900" eaLnBrk="1" hangingPunct="1" indent="-342900" latinLnBrk="0" marL="2057400" rtl="0">
+      <a:lvl6pPr marL="2057400" indent="-342900" algn="l" defTabSz="342900" rtl="0" eaLnBrk="1" latinLnBrk="0" hangingPunct="1">
         <a:spcBef>
           <a:spcPct val="20000"/>
         </a:spcBef>
         <a:buFont typeface="Arial"/>
         <a:buChar char="•"/>
-        <a:defRPr kern="1200" sz="1500">
+        <a:defRPr sz="1500" kern="1200">
           <a:solidFill>
             <a:schemeClr val="tx1"/>
           </a:solidFill>
@@ -6384,13 +5334,13 @@
           <a:cs typeface="+mn-cs"/>
         </a:defRPr>
       </a:lvl6pPr>
-      <a:lvl7pPr algn="l" defTabSz="342900" eaLnBrk="1" hangingPunct="1" indent="-342900" latinLnBrk="0" marL="2400300" rtl="0">
+      <a:lvl7pPr marL="2400300" indent="-342900" algn="l" defTabSz="342900" rtl="0" eaLnBrk="1" latinLnBrk="0" hangingPunct="1">
         <a:spcBef>
           <a:spcPct val="20000"/>
         </a:spcBef>
         <a:buFont typeface="Arial"/>
         <a:buChar char="•"/>
-        <a:defRPr kern="1200" sz="1500">
+        <a:defRPr sz="1500" kern="1200">
           <a:solidFill>
             <a:schemeClr val="tx1"/>
           </a:solidFill>
@@ -6399,13 +5349,13 @@
           <a:cs typeface="+mn-cs"/>
         </a:defRPr>
       </a:lvl7pPr>
-      <a:lvl8pPr algn="l" defTabSz="342900" eaLnBrk="1" hangingPunct="1" indent="-342900" latinLnBrk="0" marL="2743200" rtl="0">
+      <a:lvl8pPr marL="2743200" indent="-342900" algn="l" defTabSz="342900" rtl="0" eaLnBrk="1" latinLnBrk="0" hangingPunct="1">
         <a:spcBef>
           <a:spcPct val="20000"/>
         </a:spcBef>
         <a:buFont typeface="Arial"/>
         <a:buChar char="•"/>
-        <a:defRPr kern="1200" sz="1500">
+        <a:defRPr sz="1500" kern="1200">
           <a:solidFill>
             <a:schemeClr val="tx1"/>
           </a:solidFill>
@@ -6414,13 +5364,13 @@
           <a:cs typeface="+mn-cs"/>
         </a:defRPr>
       </a:lvl8pPr>
-      <a:lvl9pPr algn="l" defTabSz="342900" eaLnBrk="1" hangingPunct="1" indent="-342900" latinLnBrk="0" marL="3086100" rtl="0">
+      <a:lvl9pPr marL="3086100" indent="-342900" algn="l" defTabSz="342900" rtl="0" eaLnBrk="1" latinLnBrk="0" hangingPunct="1">
         <a:spcBef>
           <a:spcPct val="20000"/>
         </a:spcBef>
         <a:buFont typeface="Arial"/>
         <a:buChar char="•"/>
-        <a:defRPr kern="1200" sz="1500">
+        <a:defRPr sz="1500" kern="1200">
           <a:solidFill>
             <a:schemeClr val="tx1"/>
           </a:solidFill>
@@ -6434,8 +5384,8 @@
       <a:defPPr>
         <a:defRPr lang="en-US"/>
       </a:defPPr>
-      <a:lvl1pPr algn="l" defTabSz="342900" eaLnBrk="1" hangingPunct="1" latinLnBrk="0" marL="0" rtl="0">
-        <a:defRPr kern="1200" sz="1350">
+      <a:lvl1pPr marL="0" algn="l" defTabSz="342900" rtl="0" eaLnBrk="1" latinLnBrk="0" hangingPunct="1">
+        <a:defRPr sz="1350" kern="1200">
           <a:solidFill>
             <a:schemeClr val="tx1"/>
           </a:solidFill>
@@ -6444,8 +5394,8 @@
           <a:cs typeface="+mn-cs"/>
         </a:defRPr>
       </a:lvl1pPr>
-      <a:lvl2pPr algn="l" defTabSz="342900" eaLnBrk="1" hangingPunct="1" latinLnBrk="0" marL="342900" rtl="0">
-        <a:defRPr kern="1200" sz="1350">
+      <a:lvl2pPr marL="342900" algn="l" defTabSz="342900" rtl="0" eaLnBrk="1" latinLnBrk="0" hangingPunct="1">
+        <a:defRPr sz="1350" kern="1200">
           <a:solidFill>
             <a:schemeClr val="tx1"/>
           </a:solidFill>
@@ -6454,8 +5404,8 @@
           <a:cs typeface="+mn-cs"/>
         </a:defRPr>
       </a:lvl2pPr>
-      <a:lvl3pPr algn="l" defTabSz="342900" eaLnBrk="1" hangingPunct="1" latinLnBrk="0" marL="685800" rtl="0">
-        <a:defRPr kern="1200" sz="1350">
+      <a:lvl3pPr marL="685800" algn="l" defTabSz="342900" rtl="0" eaLnBrk="1" latinLnBrk="0" hangingPunct="1">
+        <a:defRPr sz="1350" kern="1200">
           <a:solidFill>
             <a:schemeClr val="tx1"/>
           </a:solidFill>
@@ -6464,8 +5414,8 @@
           <a:cs typeface="+mn-cs"/>
         </a:defRPr>
       </a:lvl3pPr>
-      <a:lvl4pPr algn="l" defTabSz="342900" eaLnBrk="1" hangingPunct="1" latinLnBrk="0" marL="1028700" rtl="0">
-        <a:defRPr kern="1200" sz="1350">
+      <a:lvl4pPr marL="1028700" algn="l" defTabSz="342900" rtl="0" eaLnBrk="1" latinLnBrk="0" hangingPunct="1">
+        <a:defRPr sz="1350" kern="1200">
           <a:solidFill>
             <a:schemeClr val="tx1"/>
           </a:solidFill>
@@ -6474,8 +5424,8 @@
           <a:cs typeface="+mn-cs"/>
         </a:defRPr>
       </a:lvl4pPr>
-      <a:lvl5pPr algn="l" defTabSz="342900" eaLnBrk="1" hangingPunct="1" latinLnBrk="0" marL="1371600" rtl="0">
-        <a:defRPr kern="1200" sz="1350">
+      <a:lvl5pPr marL="1371600" algn="l" defTabSz="342900" rtl="0" eaLnBrk="1" latinLnBrk="0" hangingPunct="1">
+        <a:defRPr sz="1350" kern="1200">
           <a:solidFill>
             <a:schemeClr val="tx1"/>
           </a:solidFill>
@@ -6484,8 +5434,8 @@
           <a:cs typeface="+mn-cs"/>
         </a:defRPr>
       </a:lvl5pPr>
-      <a:lvl6pPr algn="l" defTabSz="342900" eaLnBrk="1" hangingPunct="1" latinLnBrk="0" marL="1714500" rtl="0">
-        <a:defRPr kern="1200" sz="1350">
+      <a:lvl6pPr marL="1714500" algn="l" defTabSz="342900" rtl="0" eaLnBrk="1" latinLnBrk="0" hangingPunct="1">
+        <a:defRPr sz="1350" kern="1200">
           <a:solidFill>
             <a:schemeClr val="tx1"/>
           </a:solidFill>
@@ -6494,8 +5444,8 @@
           <a:cs typeface="+mn-cs"/>
         </a:defRPr>
       </a:lvl6pPr>
-      <a:lvl7pPr algn="l" defTabSz="342900" eaLnBrk="1" hangingPunct="1" latinLnBrk="0" marL="2057400" rtl="0">
-        <a:defRPr kern="1200" sz="1350">
+      <a:lvl7pPr marL="2057400" algn="l" defTabSz="342900" rtl="0" eaLnBrk="1" latinLnBrk="0" hangingPunct="1">
+        <a:defRPr sz="1350" kern="1200">
           <a:solidFill>
             <a:schemeClr val="tx1"/>
           </a:solidFill>
@@ -6504,8 +5454,8 @@
           <a:cs typeface="+mn-cs"/>
         </a:defRPr>
       </a:lvl7pPr>
-      <a:lvl8pPr algn="l" defTabSz="342900" eaLnBrk="1" hangingPunct="1" latinLnBrk="0" marL="2400300" rtl="0">
-        <a:defRPr kern="1200" sz="1350">
+      <a:lvl8pPr marL="2400300" algn="l" defTabSz="342900" rtl="0" eaLnBrk="1" latinLnBrk="0" hangingPunct="1">
+        <a:defRPr sz="1350" kern="1200">
           <a:solidFill>
             <a:schemeClr val="tx1"/>
           </a:solidFill>
@@ -6514,8 +5464,8 @@
           <a:cs typeface="+mn-cs"/>
         </a:defRPr>
       </a:lvl8pPr>
-      <a:lvl9pPr algn="l" defTabSz="342900" eaLnBrk="1" hangingPunct="1" latinLnBrk="0" marL="2743200" rtl="0">
-        <a:defRPr kern="1200" sz="1350">
+      <a:lvl9pPr marL="2743200" algn="l" defTabSz="342900" rtl="0" eaLnBrk="1" latinLnBrk="0" hangingPunct="1">
+        <a:defRPr sz="1350" kern="1200">
           <a:solidFill>
             <a:schemeClr val="tx1"/>
           </a:solidFill>
@@ -6532,6 +5482,14 @@
 <file path=ppt/slides/slide1.xml><?xml version="1.0" encoding="utf-8"?>
 <p:sld xmlns:a="http://schemas.openxmlformats.org/drawingml/2006/main" xmlns:r="http://schemas.openxmlformats.org/officeDocument/2006/relationships" xmlns:p="http://schemas.openxmlformats.org/presentationml/2006/main">
   <p:cSld>
+    <p:bg>
+      <p:bgPr>
+        <a:solidFill>
+          <a:schemeClr val="bg1"/>
+        </a:solidFill>
+        <a:effectLst/>
+      </p:bgPr>
+    </p:bg>
     <p:spTree>
       <p:nvGrpSpPr>
         <p:cNvPr id="1" name=""/>
@@ -6546,31 +5504,687 @@
           <a:chExt cx="0" cy="0"/>
         </a:xfrm>
       </p:grpSpPr>
-      <p:sp>
-        <p:nvSpPr>
-          <p:cNvPr id="2" name="Title 1"/>
-          <p:cNvSpPr>
-            <a:spLocks noGrp="1"/>
-          </p:cNvSpPr>
-          <p:nvPr>
-            <p:ph type="ctrTitle"/>
+      <p:sp useBgFill="1">
+        <p:nvSpPr>
+          <p:cNvPr id="19" name="Rectangle 18">
+            <a:extLst>
+              <a:ext uri="{FF2B5EF4-FFF2-40B4-BE49-F238E27FC236}">
+                <a16:creationId xmlns:a16="http://schemas.microsoft.com/office/drawing/2014/main" id="{7DA3C418-758E-4180-A5D0-8655D6804587}"/>
+              </a:ext>
+              <a:ext uri="{C183D7F6-B498-43B3-948B-1728B52AA6E4}">
+                <adec:decorative xmlns:adec="http://schemas.microsoft.com/office/drawing/2017/decorative" val="1"/>
+              </a:ext>
+            </a:extLst>
+          </p:cNvPr>
+          <p:cNvSpPr>
+            <a:spLocks noGrp="1" noRot="1" noChangeAspect="1" noMove="1" noResize="1" noEditPoints="1" noAdjustHandles="1" noChangeArrowheads="1" noChangeShapeType="1" noTextEdit="1"/>
+          </p:cNvSpPr>
+          <p:nvPr>
+            <p:extLst>
+              <p:ext uri="{386F3935-93C4-4BCD-93E2-E3B085C9AB24}">
+                <p16:designElem xmlns:p16="http://schemas.microsoft.com/office/powerpoint/2015/main" val="1"/>
+              </p:ext>
+            </p:extLst>
           </p:nvPr>
         </p:nvSpPr>
         <p:spPr>
           <a:xfrm>
-            <a:off x="685800" y="1597819"/>
-            <a:ext cx="7772400" cy="1102519"/>
+            <a:off x="0" y="0"/>
+            <a:ext cx="9144000" cy="5143500"/>
+          </a:xfrm>
+          <a:prstGeom prst="rect">
+            <a:avLst/>
+          </a:prstGeom>
+          <a:ln w="12700" cap="flat" cmpd="sng" algn="ctr">
+            <a:noFill/>
+            <a:prstDash val="solid"/>
+            <a:miter lim="800000"/>
+          </a:ln>
+          <a:effectLst/>
+          <a:extLst>
+            <a:ext uri="{91240B29-F687-4F45-9708-019B960494DF}">
+              <a14:hiddenLine xmlns:a14="http://schemas.microsoft.com/office/drawing/2010/main" w="12700" cap="flat" cmpd="sng" algn="ctr">
+                <a:solidFill>
+                  <a:schemeClr val="accent1">
+                    <a:shade val="50000"/>
+                  </a:schemeClr>
+                </a:solidFill>
+                <a:prstDash val="solid"/>
+                <a:miter lim="800000"/>
+              </a14:hiddenLine>
+            </a:ext>
+          </a:extLst>
+        </p:spPr>
+        <p:style>
+          <a:lnRef idx="2">
+            <a:schemeClr val="accent1">
+              <a:shade val="50000"/>
+            </a:schemeClr>
+          </a:lnRef>
+          <a:fillRef idx="1">
+            <a:schemeClr val="accent1"/>
+          </a:fillRef>
+          <a:effectRef idx="0">
+            <a:schemeClr val="accent1"/>
+          </a:effectRef>
+          <a:fontRef idx="minor">
+            <a:schemeClr val="lt1"/>
+          </a:fontRef>
+        </p:style>
+        <p:txBody>
+          <a:bodyPr rtlCol="0" anchor="ctr"/>
+          <a:lstStyle/>
+          <a:p>
+            <a:pPr algn="ctr"/>
+            <a:endParaRPr lang="en-US"/>
+          </a:p>
+        </p:txBody>
+      </p:sp>
+      <p:sp>
+        <p:nvSpPr>
+          <p:cNvPr id="21" name="Rectangle 20">
+            <a:extLst>
+              <a:ext uri="{FF2B5EF4-FFF2-40B4-BE49-F238E27FC236}">
+                <a16:creationId xmlns:a16="http://schemas.microsoft.com/office/drawing/2014/main" id="{28C8EF06-5EC3-4883-AFAF-D74FF46550FB}"/>
+              </a:ext>
+              <a:ext uri="{C183D7F6-B498-43B3-948B-1728B52AA6E4}">
+                <adec:decorative xmlns:adec="http://schemas.microsoft.com/office/drawing/2017/decorative" val="1"/>
+              </a:ext>
+            </a:extLst>
+          </p:cNvPr>
+          <p:cNvSpPr>
+            <a:spLocks noGrp="1" noRot="1" noChangeAspect="1" noMove="1" noResize="1" noEditPoints="1" noAdjustHandles="1" noChangeArrowheads="1" noChangeShapeType="1" noTextEdit="1"/>
+          </p:cNvSpPr>
+          <p:nvPr>
+            <p:extLst>
+              <p:ext uri="{386F3935-93C4-4BCD-93E2-E3B085C9AB24}">
+                <p16:designElem xmlns:p16="http://schemas.microsoft.com/office/powerpoint/2015/main" val="1"/>
+              </p:ext>
+            </p:extLst>
+          </p:nvPr>
+        </p:nvSpPr>
+        <p:spPr>
+          <a:xfrm>
+            <a:off x="-2" y="0"/>
+            <a:ext cx="3851978" cy="5153736"/>
+          </a:xfrm>
+          <a:prstGeom prst="rect">
+            <a:avLst/>
+          </a:prstGeom>
+          <a:solidFill>
+            <a:srgbClr val="82766A">
+              <a:alpha val="15000"/>
+            </a:srgbClr>
+          </a:solidFill>
+          <a:ln>
+            <a:noFill/>
+          </a:ln>
+        </p:spPr>
+        <p:style>
+          <a:lnRef idx="2">
+            <a:schemeClr val="accent1">
+              <a:shade val="50000"/>
+            </a:schemeClr>
+          </a:lnRef>
+          <a:fillRef idx="1">
+            <a:schemeClr val="accent1"/>
+          </a:fillRef>
+          <a:effectRef idx="0">
+            <a:schemeClr val="accent1"/>
+          </a:effectRef>
+          <a:fontRef idx="minor">
+            <a:schemeClr val="lt1"/>
+          </a:fontRef>
+        </p:style>
+        <p:txBody>
+          <a:bodyPr rtlCol="0" anchor="ctr"/>
+          <a:lstStyle/>
+          <a:p>
+            <a:pPr algn="ctr"/>
+            <a:endParaRPr lang="en-US"/>
+          </a:p>
+        </p:txBody>
+      </p:sp>
+      <p:pic>
+        <p:nvPicPr>
+          <p:cNvPr id="5" name="Picture 1" descr="../docs/images/copilot-2-sigma.png">
+            <a:extLst>
+              <a:ext uri="{FF2B5EF4-FFF2-40B4-BE49-F238E27FC236}">
+                <a16:creationId xmlns:a16="http://schemas.microsoft.com/office/drawing/2014/main" id="{C3A21620-66A7-3AE4-3A1B-EB7C6754CBBA}"/>
+              </a:ext>
+            </a:extLst>
+          </p:cNvPr>
+          <p:cNvPicPr>
+            <a:picLocks noGrp="1" noChangeAspect="1"/>
+          </p:cNvPicPr>
+          <p:nvPr/>
+        </p:nvPicPr>
+        <p:blipFill>
+          <a:blip r:embed="rId3"/>
+          <a:srcRect l="4005" r="11454"/>
+          <a:stretch>
+            <a:fillRect/>
+          </a:stretch>
+        </p:blipFill>
+        <p:spPr bwMode="auto">
+          <a:xfrm>
+            <a:off x="2186591" y="10"/>
+            <a:ext cx="6957409" cy="5143490"/>
+          </a:xfrm>
+          <a:custGeom>
+            <a:avLst/>
+            <a:gdLst/>
+            <a:ahLst/>
+            <a:cxnLst/>
+            <a:rect l="l" t="t" r="r" b="b"/>
+            <a:pathLst>
+              <a:path w="9276545" h="6871647">
+                <a:moveTo>
+                  <a:pt x="9276545" y="0"/>
+                </a:moveTo>
+                <a:lnTo>
+                  <a:pt x="9276545" y="6858000"/>
+                </a:lnTo>
+                <a:lnTo>
+                  <a:pt x="1546051" y="6871647"/>
+                </a:lnTo>
+                <a:lnTo>
+                  <a:pt x="1535751" y="6828910"/>
+                </a:lnTo>
+                <a:cubicBezTo>
+                  <a:pt x="1530460" y="6775140"/>
+                  <a:pt x="1515370" y="6618042"/>
+                  <a:pt x="1514301" y="6549029"/>
+                </a:cubicBezTo>
+                <a:cubicBezTo>
+                  <a:pt x="1518045" y="6491396"/>
+                  <a:pt x="1528503" y="6450608"/>
+                  <a:pt x="1529339" y="6414828"/>
+                </a:cubicBezTo>
+                <a:cubicBezTo>
+                  <a:pt x="1525062" y="6359280"/>
+                  <a:pt x="1502062" y="6307149"/>
+                  <a:pt x="1493941" y="6268848"/>
+                </a:cubicBezTo>
+                <a:cubicBezTo>
+                  <a:pt x="1502669" y="6254191"/>
+                  <a:pt x="1469920" y="6200171"/>
+                  <a:pt x="1480613" y="6185025"/>
+                </a:cubicBezTo>
+                <a:cubicBezTo>
+                  <a:pt x="1481020" y="6164522"/>
+                  <a:pt x="1458164" y="6060790"/>
+                  <a:pt x="1443364" y="6018360"/>
+                </a:cubicBezTo>
+                <a:cubicBezTo>
+                  <a:pt x="1426694" y="5970758"/>
+                  <a:pt x="1390307" y="5920074"/>
+                  <a:pt x="1380584" y="5899407"/>
+                </a:cubicBezTo>
+                <a:cubicBezTo>
+                  <a:pt x="1370860" y="5878740"/>
+                  <a:pt x="1392244" y="5920877"/>
+                  <a:pt x="1385023" y="5894356"/>
+                </a:cubicBezTo>
+                <a:cubicBezTo>
+                  <a:pt x="1377800" y="5867835"/>
+                  <a:pt x="1345702" y="5770498"/>
+                  <a:pt x="1337254" y="5740279"/>
+                </a:cubicBezTo>
+                <a:cubicBezTo>
+                  <a:pt x="1353956" y="5738860"/>
+                  <a:pt x="1323673" y="5722040"/>
+                  <a:pt x="1334321" y="5713042"/>
+                </a:cubicBezTo>
+                <a:cubicBezTo>
+                  <a:pt x="1343675" y="5706701"/>
+                  <a:pt x="1336672" y="5700118"/>
+                  <a:pt x="1335877" y="5692870"/>
+                </a:cubicBezTo>
+                <a:cubicBezTo>
+                  <a:pt x="1343201" y="5683812"/>
+                  <a:pt x="1329617" y="5652064"/>
+                  <a:pt x="1319978" y="5643427"/>
+                </a:cubicBezTo>
+                <a:cubicBezTo>
+                  <a:pt x="1286551" y="5622177"/>
+                  <a:pt x="1310947" y="5579803"/>
+                  <a:pt x="1285321" y="5562271"/>
+                </a:cubicBezTo>
+                <a:cubicBezTo>
+                  <a:pt x="1281540" y="5556238"/>
+                  <a:pt x="1279983" y="5550455"/>
+                  <a:pt x="1279815" y="5544867"/>
+                </a:cubicBezTo>
+                <a:lnTo>
+                  <a:pt x="1282507" y="5529404"/>
+                </a:lnTo>
+                <a:lnTo>
+                  <a:pt x="1289604" y="5525378"/>
+                </a:lnTo>
+                <a:lnTo>
+                  <a:pt x="1287766" y="5515726"/>
+                </a:lnTo>
+                <a:lnTo>
+                  <a:pt x="1288829" y="5513051"/>
+                </a:lnTo>
+                <a:cubicBezTo>
+                  <a:pt x="1290896" y="5507946"/>
+                  <a:pt x="1292688" y="5502897"/>
+                  <a:pt x="1293373" y="5497833"/>
+                </a:cubicBezTo>
+                <a:cubicBezTo>
+                  <a:pt x="1288690" y="5483829"/>
+                  <a:pt x="1272696" y="5459278"/>
+                  <a:pt x="1260736" y="5429027"/>
+                </a:cubicBezTo>
+                <a:cubicBezTo>
+                  <a:pt x="1238579" y="5396416"/>
+                  <a:pt x="1238884" y="5351600"/>
+                  <a:pt x="1221610" y="5316328"/>
+                </a:cubicBezTo>
+                <a:lnTo>
+                  <a:pt x="1216099" y="5309330"/>
+                </a:lnTo>
+                <a:lnTo>
+                  <a:pt x="1217278" y="5279477"/>
+                </a:lnTo>
+                <a:cubicBezTo>
+                  <a:pt x="1221588" y="5274318"/>
+                  <a:pt x="1222716" y="5266940"/>
+                  <a:pt x="1218469" y="5260597"/>
+                </a:cubicBezTo>
+                <a:lnTo>
+                  <a:pt x="1206220" y="5152555"/>
+                </a:lnTo>
+                <a:cubicBezTo>
+                  <a:pt x="1205294" y="5116878"/>
+                  <a:pt x="1196908" y="5101727"/>
+                  <a:pt x="1212921" y="5046536"/>
+                </a:cubicBezTo>
+                <a:cubicBezTo>
+                  <a:pt x="1234138" y="4987918"/>
+                  <a:pt x="1204801" y="4903116"/>
+                  <a:pt x="1212183" y="4837345"/>
+                </a:cubicBezTo>
+                <a:cubicBezTo>
+                  <a:pt x="1183151" y="4802424"/>
+                  <a:pt x="1209228" y="4821062"/>
+                  <a:pt x="1202048" y="4784195"/>
+                </a:cubicBezTo>
+                <a:cubicBezTo>
+                  <a:pt x="1202483" y="4760878"/>
+                  <a:pt x="1202919" y="4737561"/>
+                  <a:pt x="1203354" y="4714245"/>
+                </a:cubicBezTo>
+                <a:lnTo>
+                  <a:pt x="1201502" y="4700836"/>
+                </a:lnTo>
+                <a:lnTo>
+                  <a:pt x="1194919" y="4697224"/>
+                </a:lnTo>
+                <a:lnTo>
+                  <a:pt x="1187792" y="4677162"/>
+                </a:lnTo>
+                <a:cubicBezTo>
+                  <a:pt x="1186060" y="4669625"/>
+                  <a:pt x="1185291" y="4661478"/>
+                  <a:pt x="1186080" y="4652429"/>
+                </a:cubicBezTo>
+                <a:cubicBezTo>
+                  <a:pt x="1199189" y="4622456"/>
+                  <a:pt x="1167081" y="4571771"/>
+                  <a:pt x="1184722" y="4534840"/>
+                </a:cubicBezTo>
+                <a:cubicBezTo>
+                  <a:pt x="1182407" y="4499077"/>
+                  <a:pt x="1175424" y="4460227"/>
+                  <a:pt x="1172188" y="4437851"/>
+                </a:cubicBezTo>
+                <a:cubicBezTo>
+                  <a:pt x="1161331" y="4428466"/>
+                  <a:pt x="1178123" y="4398274"/>
+                  <a:pt x="1165306" y="4400581"/>
+                </a:cubicBezTo>
+                <a:cubicBezTo>
+                  <a:pt x="1171061" y="4389819"/>
+                  <a:pt x="1173552" y="4346771"/>
+                  <a:pt x="1168602" y="4335651"/>
+                </a:cubicBezTo>
+                <a:lnTo>
+                  <a:pt x="1178384" y="4280215"/>
+                </a:lnTo>
+                <a:lnTo>
+                  <a:pt x="1177294" y="4274660"/>
+                </a:lnTo>
+                <a:cubicBezTo>
+                  <a:pt x="1177138" y="4268882"/>
+                  <a:pt x="1177520" y="4251103"/>
+                  <a:pt x="1177448" y="4245552"/>
+                </a:cubicBezTo>
+                <a:cubicBezTo>
+                  <a:pt x="1177252" y="4244155"/>
+                  <a:pt x="1177058" y="4242757"/>
+                  <a:pt x="1176863" y="4241361"/>
+                </a:cubicBezTo>
+                <a:lnTo>
+                  <a:pt x="1162386" y="4207167"/>
+                </a:lnTo>
+                <a:cubicBezTo>
+                  <a:pt x="1162950" y="4202536"/>
+                  <a:pt x="1174655" y="4199565"/>
+                  <a:pt x="1174343" y="4192380"/>
+                </a:cubicBezTo>
+                <a:lnTo>
+                  <a:pt x="1160516" y="4164062"/>
+                </a:lnTo>
+                <a:lnTo>
+                  <a:pt x="1161365" y="4158623"/>
+                </a:lnTo>
+                <a:lnTo>
+                  <a:pt x="1144878" y="4076261"/>
+                </a:lnTo>
+                <a:lnTo>
+                  <a:pt x="1123687" y="4005692"/>
+                </a:lnTo>
+                <a:lnTo>
+                  <a:pt x="1096720" y="3754257"/>
+                </a:lnTo>
+                <a:cubicBezTo>
+                  <a:pt x="1083618" y="3639924"/>
+                  <a:pt x="1064313" y="3636659"/>
+                  <a:pt x="1047682" y="3517638"/>
+                </a:cubicBezTo>
+                <a:cubicBezTo>
+                  <a:pt x="1048550" y="3477187"/>
+                  <a:pt x="1049418" y="3436735"/>
+                  <a:pt x="1050285" y="3396284"/>
+                </a:cubicBezTo>
+                <a:lnTo>
+                  <a:pt x="1030166" y="3320814"/>
+                </a:lnTo>
+                <a:lnTo>
+                  <a:pt x="1034128" y="3260443"/>
+                </a:lnTo>
+                <a:lnTo>
+                  <a:pt x="1007751" y="3198916"/>
+                </a:lnTo>
+                <a:cubicBezTo>
+                  <a:pt x="1003323" y="3193074"/>
+                  <a:pt x="1001150" y="3187393"/>
+                  <a:pt x="1000384" y="3181839"/>
+                </a:cubicBezTo>
+                <a:cubicBezTo>
+                  <a:pt x="1000734" y="3176675"/>
+                  <a:pt x="1001085" y="3171511"/>
+                  <a:pt x="1001435" y="3166346"/>
+                </a:cubicBezTo>
+                <a:lnTo>
+                  <a:pt x="968918" y="3112638"/>
+                </a:lnTo>
+                <a:cubicBezTo>
+                  <a:pt x="957125" y="3092489"/>
+                  <a:pt x="955617" y="3065232"/>
+                  <a:pt x="934483" y="3031628"/>
+                </a:cubicBezTo>
+                <a:cubicBezTo>
+                  <a:pt x="914631" y="2997037"/>
+                  <a:pt x="908933" y="3005661"/>
+                  <a:pt x="879229" y="2948196"/>
+                </a:cubicBezTo>
+                <a:cubicBezTo>
+                  <a:pt x="850845" y="2897154"/>
+                  <a:pt x="820829" y="2806798"/>
+                  <a:pt x="798666" y="2761198"/>
+                </a:cubicBezTo>
+                <a:cubicBezTo>
+                  <a:pt x="773970" y="2714562"/>
+                  <a:pt x="758278" y="2715446"/>
+                  <a:pt x="746962" y="2694939"/>
+                </a:cubicBezTo>
+                <a:lnTo>
+                  <a:pt x="712796" y="2614779"/>
+                </a:lnTo>
+                <a:lnTo>
+                  <a:pt x="697701" y="2600020"/>
+                </a:lnTo>
+                <a:cubicBezTo>
+                  <a:pt x="697743" y="2598787"/>
+                  <a:pt x="697784" y="2597555"/>
+                  <a:pt x="697823" y="2596321"/>
+                </a:cubicBezTo>
+                <a:lnTo>
+                  <a:pt x="679645" y="2572602"/>
+                </a:lnTo>
+                <a:lnTo>
+                  <a:pt x="680789" y="2571831"/>
+                </a:lnTo>
+                <a:cubicBezTo>
+                  <a:pt x="682946" y="2569560"/>
+                  <a:pt x="683757" y="2566863"/>
+                  <a:pt x="681771" y="2563200"/>
+                </a:cubicBezTo>
+                <a:cubicBezTo>
+                  <a:pt x="705290" y="2562299"/>
+                  <a:pt x="688388" y="2558438"/>
+                  <a:pt x="680456" y="2547723"/>
+                </a:cubicBezTo>
+                <a:cubicBezTo>
+                  <a:pt x="679482" y="2534148"/>
+                  <a:pt x="677183" y="2493617"/>
+                  <a:pt x="675922" y="2481749"/>
+                </a:cubicBezTo>
+                <a:lnTo>
+                  <a:pt x="672894" y="2476509"/>
+                </a:lnTo>
+                <a:lnTo>
+                  <a:pt x="673143" y="2476297"/>
+                </a:lnTo>
+                <a:cubicBezTo>
+                  <a:pt x="673152" y="2474932"/>
+                  <a:pt x="672405" y="2473126"/>
+                  <a:pt x="670567" y="2470561"/>
+                </a:cubicBezTo>
+                <a:lnTo>
+                  <a:pt x="667369" y="2466951"/>
+                </a:lnTo>
+                <a:lnTo>
+                  <a:pt x="661495" y="2456785"/>
+                </a:lnTo>
+                <a:cubicBezTo>
+                  <a:pt x="661510" y="2455387"/>
+                  <a:pt x="661525" y="2453987"/>
+                  <a:pt x="661540" y="2452588"/>
+                </a:cubicBezTo>
+                <a:lnTo>
+                  <a:pt x="664540" y="2449913"/>
+                </a:lnTo>
+                <a:lnTo>
+                  <a:pt x="663581" y="2449129"/>
+                </a:lnTo>
+                <a:cubicBezTo>
+                  <a:pt x="653014" y="2444453"/>
+                  <a:pt x="642406" y="2445872"/>
+                  <a:pt x="663129" y="2426579"/>
+                </a:cubicBezTo>
+                <a:cubicBezTo>
+                  <a:pt x="643271" y="2414167"/>
+                  <a:pt x="657229" y="2404769"/>
+                  <a:pt x="650205" y="2379928"/>
+                </a:cubicBezTo>
+                <a:cubicBezTo>
+                  <a:pt x="634911" y="2374359"/>
+                  <a:pt x="634260" y="2365346"/>
+                  <a:pt x="638008" y="2354824"/>
+                </a:cubicBezTo>
+                <a:cubicBezTo>
+                  <a:pt x="621083" y="2334576"/>
+                  <a:pt x="620949" y="2310146"/>
+                  <a:pt x="609851" y="2284299"/>
+                </a:cubicBezTo>
+                <a:lnTo>
+                  <a:pt x="585585" y="2155739"/>
+                </a:lnTo>
+                <a:lnTo>
+                  <a:pt x="581391" y="2152892"/>
+                </a:lnTo>
+                <a:cubicBezTo>
+                  <a:pt x="578821" y="2150768"/>
+                  <a:pt x="577525" y="2149149"/>
+                  <a:pt x="577083" y="2147807"/>
+                </a:cubicBezTo>
+                <a:lnTo>
+                  <a:pt x="577251" y="2147544"/>
+                </a:lnTo>
+                <a:lnTo>
+                  <a:pt x="546845" y="2085601"/>
+                </a:lnTo>
+                <a:cubicBezTo>
+                  <a:pt x="538270" y="2073917"/>
+                  <a:pt x="486356" y="1955894"/>
+                  <a:pt x="470837" y="1931362"/>
+                </a:cubicBezTo>
+                <a:lnTo>
+                  <a:pt x="428154" y="1657167"/>
+                </a:lnTo>
+                <a:lnTo>
+                  <a:pt x="392797" y="1510175"/>
+                </a:lnTo>
+                <a:cubicBezTo>
+                  <a:pt x="380165" y="1504446"/>
+                  <a:pt x="369910" y="1451095"/>
+                  <a:pt x="372847" y="1440507"/>
+                </a:cubicBezTo>
+                <a:cubicBezTo>
+                  <a:pt x="369015" y="1433783"/>
+                  <a:pt x="338503" y="1376212"/>
+                  <a:pt x="344479" y="1367690"/>
+                </a:cubicBezTo>
+                <a:cubicBezTo>
+                  <a:pt x="332264" y="1342150"/>
+                  <a:pt x="321736" y="1310521"/>
+                  <a:pt x="299558" y="1287266"/>
+                </a:cubicBezTo>
+                <a:cubicBezTo>
+                  <a:pt x="277380" y="1264010"/>
+                  <a:pt x="259203" y="1269909"/>
+                  <a:pt x="243216" y="1249403"/>
+                </a:cubicBezTo>
+                <a:cubicBezTo>
+                  <a:pt x="227230" y="1228898"/>
+                  <a:pt x="218454" y="1166841"/>
+                  <a:pt x="203639" y="1164232"/>
+                </a:cubicBezTo>
+                <a:cubicBezTo>
+                  <a:pt x="192352" y="1144923"/>
+                  <a:pt x="198158" y="1133798"/>
+                  <a:pt x="169195" y="1087898"/>
+                </a:cubicBezTo>
+                <a:cubicBezTo>
+                  <a:pt x="139228" y="1002950"/>
+                  <a:pt x="140891" y="969630"/>
+                  <a:pt x="98775" y="910071"/>
+                </a:cubicBezTo>
+                <a:cubicBezTo>
+                  <a:pt x="45025" y="831068"/>
+                  <a:pt x="34038" y="817468"/>
+                  <a:pt x="43820" y="712632"/>
+                </a:cubicBezTo>
+                <a:cubicBezTo>
+                  <a:pt x="34816" y="659496"/>
+                  <a:pt x="43273" y="613587"/>
+                  <a:pt x="44748" y="591246"/>
+                </a:cubicBezTo>
+                <a:lnTo>
+                  <a:pt x="36767" y="546725"/>
+                </a:lnTo>
+                <a:cubicBezTo>
+                  <a:pt x="36093" y="528360"/>
+                  <a:pt x="35418" y="509996"/>
+                  <a:pt x="34744" y="491632"/>
+                </a:cubicBezTo>
+                <a:cubicBezTo>
+                  <a:pt x="34670" y="458441"/>
+                  <a:pt x="29296" y="473054"/>
+                  <a:pt x="29222" y="439863"/>
+                </a:cubicBezTo>
+                <a:cubicBezTo>
+                  <a:pt x="29152" y="439762"/>
+                  <a:pt x="2578" y="397168"/>
+                  <a:pt x="2507" y="397065"/>
+                </a:cubicBezTo>
+                <a:cubicBezTo>
+                  <a:pt x="-7796" y="385479"/>
+                  <a:pt x="17492" y="336832"/>
+                  <a:pt x="9810" y="317232"/>
+                </a:cubicBezTo>
+                <a:lnTo>
+                  <a:pt x="25323" y="268841"/>
+                </a:lnTo>
+                <a:cubicBezTo>
+                  <a:pt x="20582" y="241406"/>
+                  <a:pt x="55391" y="238509"/>
+                  <a:pt x="50278" y="195107"/>
+                </a:cubicBezTo>
+                <a:cubicBezTo>
+                  <a:pt x="49891" y="157638"/>
+                  <a:pt x="41873" y="124837"/>
+                  <a:pt x="47653" y="93413"/>
+                </a:cubicBezTo>
+                <a:cubicBezTo>
+                  <a:pt x="41389" y="80245"/>
+                  <a:pt x="38874" y="67990"/>
+                  <a:pt x="48323" y="56668"/>
+                </a:cubicBezTo>
+                <a:cubicBezTo>
+                  <a:pt x="46028" y="30349"/>
+                  <a:pt x="37896" y="18658"/>
+                  <a:pt x="38423" y="5323"/>
+                </a:cubicBezTo>
+                <a:lnTo>
+                  <a:pt x="39875" y="1"/>
+                </a:lnTo>
+                <a:close/>
+              </a:path>
+            </a:pathLst>
+          </a:custGeom>
+          <a:noFill/>
+        </p:spPr>
+      </p:pic>
+      <p:sp>
+        <p:nvSpPr>
+          <p:cNvPr id="2" name="Title 1"/>
+          <p:cNvSpPr>
+            <a:spLocks noGrp="1"/>
+          </p:cNvSpPr>
+          <p:nvPr>
+            <p:ph type="ctrTitle"/>
+          </p:nvPr>
+        </p:nvSpPr>
+        <p:spPr>
+          <a:xfrm>
+            <a:off x="314595" y="796260"/>
+            <a:ext cx="2371455" cy="1980186"/>
           </a:xfrm>
         </p:spPr>
         <p:txBody>
-          <a:bodyPr/>
-          <a:lstStyle/>
-          <a:p>
-            <a:pPr lvl="0" indent="0" marL="0">
+          <a:bodyPr>
+            <a:normAutofit/>
+          </a:bodyPr>
+          <a:lstStyle/>
+          <a:p>
+            <a:pPr marL="0" lvl="0" indent="0" algn="l">
               <a:buNone/>
             </a:pPr>
             <a:r>
-              <a:rPr/>
+              <a:rPr lang="en-AU" sz="2700" dirty="0">
+                <a:solidFill>
+                  <a:schemeClr val="tx1">
+                    <a:lumMod val="85000"/>
+                    <a:lumOff val="15000"/>
+                  </a:schemeClr>
+                </a:solidFill>
+              </a:rPr>
               <a:t>AI in Pedagogical Design and Delivery</a:t>
             </a:r>
           </a:p>
@@ -6583,26 +6197,56 @@
             <a:spLocks noGrp="1"/>
           </p:cNvSpPr>
           <p:nvPr>
-            <p:ph idx="1" type="subTitle"/>
+            <p:ph type="subTitle" idx="1"/>
           </p:nvPr>
         </p:nvSpPr>
         <p:spPr>
           <a:xfrm>
-            <a:off x="1371600" y="2914650"/>
-            <a:ext cx="6400800" cy="1314450"/>
+            <a:off x="417566" y="2682359"/>
+            <a:ext cx="2479567" cy="499352"/>
           </a:xfrm>
         </p:spPr>
         <p:txBody>
-          <a:bodyPr/>
-          <a:lstStyle/>
-          <a:p>
-            <a:pPr lvl="0" indent="0" marL="0">
+          <a:bodyPr>
+            <a:normAutofit/>
+          </a:bodyPr>
+          <a:lstStyle/>
+          <a:p>
+            <a:pPr marL="0" lvl="0" indent="0" algn="l">
+              <a:lnSpc>
+                <a:spcPct val="90000"/>
+              </a:lnSpc>
               <a:buNone/>
             </a:pPr>
-            <a:br/>
-            <a:br/>
-            <a:r>
-              <a:rPr/>
+            <a:br>
+              <a:rPr lang="en-AU" sz="900" dirty="0">
+                <a:solidFill>
+                  <a:schemeClr val="tx1">
+                    <a:lumMod val="85000"/>
+                    <a:lumOff val="15000"/>
+                  </a:schemeClr>
+                </a:solidFill>
+              </a:rPr>
+            </a:br>
+            <a:br>
+              <a:rPr lang="en-AU" sz="900" dirty="0">
+                <a:solidFill>
+                  <a:schemeClr val="tx1">
+                    <a:lumMod val="85000"/>
+                    <a:lumOff val="15000"/>
+                  </a:schemeClr>
+                </a:solidFill>
+              </a:rPr>
+            </a:br>
+            <a:r>
+              <a:rPr lang="en-AU" sz="900" dirty="0">
+                <a:solidFill>
+                  <a:schemeClr val="tx1">
+                    <a:lumMod val="85000"/>
+                    <a:lumOff val="15000"/>
+                  </a:schemeClr>
+                </a:solidFill>
+              </a:rPr>
               <a:t>Michael Borck</a:t>
             </a:r>
           </a:p>
@@ -6615,26 +6259,96 @@
             <a:spLocks noGrp="1"/>
           </p:cNvSpPr>
           <p:nvPr>
-            <p:ph idx="10" sz="half" type="dt"/>
-          </p:nvPr>
-        </p:nvSpPr>
-        <p:spPr/>
-        <p:txBody>
-          <a:bodyPr/>
-          <a:lstStyle/>
-          <a:p>
-            <a:pPr lvl="0" indent="0" marL="0">
+            <p:ph type="dt" sz="half" idx="10"/>
+          </p:nvPr>
+        </p:nvSpPr>
+        <p:spPr>
+          <a:xfrm>
+            <a:off x="417566" y="3044789"/>
+            <a:ext cx="2057400" cy="273844"/>
+          </a:xfrm>
+        </p:spPr>
+        <p:txBody>
+          <a:bodyPr>
+            <a:normAutofit/>
+          </a:bodyPr>
+          <a:lstStyle/>
+          <a:p>
+            <a:pPr marL="0" lvl="0" indent="0">
+              <a:spcAft>
+                <a:spcPts val="600"/>
+              </a:spcAft>
               <a:buNone/>
             </a:pPr>
             <a:r>
-              <a:rPr/>
+              <a:rPr lang="en-AU" sz="800" dirty="0">
+                <a:solidFill>
+                  <a:schemeClr val="tx1">
+                    <a:lumMod val="50000"/>
+                    <a:lumOff val="50000"/>
+                  </a:schemeClr>
+                </a:solidFill>
+              </a:rPr>
               <a:t>2025-11-17</a:t>
             </a:r>
+          </a:p>
+        </p:txBody>
+      </p:sp>
+      <p:sp>
+        <p:nvSpPr>
+          <p:cNvPr id="7" name="TextBox 6">
+            <a:extLst>
+              <a:ext uri="{FF2B5EF4-FFF2-40B4-BE49-F238E27FC236}">
+                <a16:creationId xmlns:a16="http://schemas.microsoft.com/office/drawing/2014/main" id="{343DB149-105D-6B1E-5C74-5BD4EE3CB927}"/>
+              </a:ext>
+            </a:extLst>
+          </p:cNvPr>
+          <p:cNvSpPr txBox="1"/>
+          <p:nvPr/>
+        </p:nvSpPr>
+        <p:spPr>
+          <a:xfrm>
+            <a:off x="50141" y="4176581"/>
+            <a:ext cx="2900362" cy="1169551"/>
+          </a:xfrm>
+          <a:prstGeom prst="rect">
+            <a:avLst/>
+          </a:prstGeom>
+          <a:noFill/>
+        </p:spPr>
+        <p:txBody>
+          <a:bodyPr wrap="square">
+            <a:spAutoFit/>
+          </a:bodyPr>
+          <a:lstStyle/>
+          <a:p>
+            <a:pPr>
+              <a:buNone/>
+            </a:pPr>
+            <a:r>
+              <a:rPr lang="en-AU" sz="1000" b="0" i="0" dirty="0">
+                <a:effectLst/>
+                <a:latin typeface="-apple-system"/>
+              </a:rPr>
+              <a:t>Drafting and ideation for these materials were supported by generative AI tools, Python scripts, Quarto, and standard image editors under human oversight. All content has been reviewed, edited and verified by the author.</a:t>
+            </a:r>
+          </a:p>
+          <a:p>
+            <a:pPr>
+              <a:buNone/>
+            </a:pPr>
+            <a:br>
+              <a:rPr lang="en-AU" sz="1000" dirty="0"/>
+            </a:br>
+            <a:endParaRPr lang="en-US" sz="1000" dirty="0"/>
           </a:p>
         </p:txBody>
       </p:sp>
     </p:spTree>
   </p:cSld>
+  <p:clrMapOvr>
+    <a:masterClrMapping/>
+  </p:clrMapOvr>
 </p:sld>
 </file>
 
@@ -6670,19 +6384,18 @@
           <a:bodyPr/>
           <a:lstStyle/>
           <a:p>
-            <a:pPr lvl="0" indent="0" marL="0">
+            <a:pPr marL="0" lvl="0" indent="0">
               <a:buNone/>
             </a:pPr>
             <a:r>
-              <a:rPr/>
-              <a:t>Activity 1: Automate the Tedious</a:t>
+              <a:t>Activity 3: Your 5-Step Critique Framework</a:t>
             </a:r>
           </a:p>
         </p:txBody>
       </p:sp>
       <p:pic>
         <p:nvPicPr>
-          <p:cNvPr descr="../docs/images/automate_nobg.png" id="0" name="Picture 1"/>
+          <p:cNvPr id="3" name="Picture 1" descr="../docs/images/check_nobg.png"/>
           <p:cNvPicPr>
             <a:picLocks noGrp="1" noChangeAspect="1"/>
           </p:cNvPicPr>
@@ -6690,14 +6403,15 @@
         </p:nvPicPr>
         <p:blipFill>
           <a:blip r:embed="rId3"/>
+          <a:srcRect t="17150" b="17036"/>
           <a:stretch>
             <a:fillRect/>
           </a:stretch>
         </p:blipFill>
         <p:spPr bwMode="auto">
           <a:xfrm>
-            <a:off x="2209800" y="1193800"/>
-            <a:ext cx="4737100" cy="3390900"/>
+            <a:off x="0" y="1063228"/>
+            <a:ext cx="9144000" cy="4080271"/>
           </a:xfrm>
           <a:prstGeom prst="rect">
             <a:avLst/>
@@ -6710,8 +6424,46 @@
           </a:ln>
         </p:spPr>
       </p:pic>
+      <p:sp>
+        <p:nvSpPr>
+          <p:cNvPr id="4" name="TextBox 3">
+            <a:extLst>
+              <a:ext uri="{FF2B5EF4-FFF2-40B4-BE49-F238E27FC236}">
+                <a16:creationId xmlns:a16="http://schemas.microsoft.com/office/drawing/2014/main" id="{79FB18F3-0FB0-1333-38E2-40BC829CD6C8}"/>
+              </a:ext>
+            </a:extLst>
+          </p:cNvPr>
+          <p:cNvSpPr txBox="1"/>
+          <p:nvPr/>
+        </p:nvSpPr>
+        <p:spPr>
+          <a:xfrm>
+            <a:off x="6943725" y="4568189"/>
+            <a:ext cx="2050498" cy="369332"/>
+          </a:xfrm>
+          <a:prstGeom prst="rect">
+            <a:avLst/>
+          </a:prstGeom>
+          <a:noFill/>
+        </p:spPr>
+        <p:txBody>
+          <a:bodyPr wrap="none" rtlCol="0">
+            <a:spAutoFit/>
+          </a:bodyPr>
+          <a:lstStyle/>
+          <a:p>
+            <a:r>
+              <a:rPr lang="en-US" dirty="0"/>
+              <a:t>AI Generated Image</a:t>
+            </a:r>
+          </a:p>
+        </p:txBody>
+      </p:sp>
     </p:spTree>
   </p:cSld>
+  <p:clrMapOvr>
+    <a:masterClrMapping/>
+  </p:clrMapOvr>
 </p:sld>
 </file>
 
@@ -6747,19 +6499,18 @@
           <a:bodyPr/>
           <a:lstStyle/>
           <a:p>
-            <a:pPr lvl="0" indent="0" marL="0">
+            <a:pPr marL="0" lvl="0" indent="0">
               <a:buNone/>
             </a:pPr>
             <a:r>
-              <a:rPr/>
-              <a:t>Activity 2: The Art of the Prompt</a:t>
+              <a:t>Activity 4: Unlocking The Impossible</a:t>
             </a:r>
           </a:p>
         </p:txBody>
       </p:sp>
       <p:pic>
         <p:nvPicPr>
-          <p:cNvPr descr="../docs/images/prompt_nobg.png" id="0" name="Picture 1"/>
+          <p:cNvPr id="3" name="Picture 1" descr="../docs/images/stress_nobg.png"/>
           <p:cNvPicPr>
             <a:picLocks noGrp="1" noChangeAspect="1"/>
           </p:cNvPicPr>
@@ -6773,8 +6524,8 @@
         </p:blipFill>
         <p:spPr bwMode="auto">
           <a:xfrm>
-            <a:off x="2870200" y="1193800"/>
-            <a:ext cx="3390900" cy="3390900"/>
+            <a:off x="932688" y="1054989"/>
+            <a:ext cx="6986016" cy="3882532"/>
           </a:xfrm>
           <a:prstGeom prst="rect">
             <a:avLst/>
@@ -6787,8 +6538,46 @@
           </a:ln>
         </p:spPr>
       </p:pic>
+      <p:sp>
+        <p:nvSpPr>
+          <p:cNvPr id="4" name="TextBox 3">
+            <a:extLst>
+              <a:ext uri="{FF2B5EF4-FFF2-40B4-BE49-F238E27FC236}">
+                <a16:creationId xmlns:a16="http://schemas.microsoft.com/office/drawing/2014/main" id="{24292A61-6A24-7955-51EB-4F149D6CFA0D}"/>
+              </a:ext>
+            </a:extLst>
+          </p:cNvPr>
+          <p:cNvSpPr txBox="1"/>
+          <p:nvPr/>
+        </p:nvSpPr>
+        <p:spPr>
+          <a:xfrm>
+            <a:off x="6943725" y="4568189"/>
+            <a:ext cx="2050498" cy="369332"/>
+          </a:xfrm>
+          <a:prstGeom prst="rect">
+            <a:avLst/>
+          </a:prstGeom>
+          <a:noFill/>
+        </p:spPr>
+        <p:txBody>
+          <a:bodyPr wrap="none" rtlCol="0">
+            <a:spAutoFit/>
+          </a:bodyPr>
+          <a:lstStyle/>
+          <a:p>
+            <a:r>
+              <a:rPr lang="en-US" dirty="0"/>
+              <a:t>AI Generated Image</a:t>
+            </a:r>
+          </a:p>
+        </p:txBody>
+      </p:sp>
     </p:spTree>
   </p:cSld>
+  <p:clrMapOvr>
+    <a:masterClrMapping/>
+  </p:clrMapOvr>
 </p:sld>
 </file>
 
@@ -6824,19 +6613,18 @@
           <a:bodyPr/>
           <a:lstStyle/>
           <a:p>
-            <a:pPr lvl="0" indent="0" marL="0">
+            <a:pPr marL="0" lvl="0" indent="0">
               <a:buNone/>
             </a:pPr>
             <a:r>
-              <a:rPr/>
-              <a:t>Activity 3: Your 5-Step Critique Framework</a:t>
+              <a:t>Activity 5: Secure, Safe, and Sustainable AI</a:t>
             </a:r>
           </a:p>
         </p:txBody>
       </p:sp>
       <p:pic>
         <p:nvPicPr>
-          <p:cNvPr descr="../docs/images/check_nobg.png" id="0" name="Picture 1"/>
+          <p:cNvPr id="3" name="Picture 1" descr="../docs/images/safety_nobg.png"/>
           <p:cNvPicPr>
             <a:picLocks noGrp="1" noChangeAspect="1"/>
           </p:cNvPicPr>
@@ -6844,14 +6632,15 @@
         </p:nvPicPr>
         <p:blipFill>
           <a:blip r:embed="rId3"/>
+          <a:srcRect l="18214" t="8602" r="12413" b="7796"/>
           <a:stretch>
             <a:fillRect/>
           </a:stretch>
         </p:blipFill>
         <p:spPr bwMode="auto">
           <a:xfrm>
-            <a:off x="2870200" y="1193800"/>
-            <a:ext cx="3390900" cy="3390900"/>
+            <a:off x="2066544" y="877824"/>
+            <a:ext cx="5468112" cy="4265676"/>
           </a:xfrm>
           <a:prstGeom prst="rect">
             <a:avLst/>
@@ -6864,8 +6653,46 @@
           </a:ln>
         </p:spPr>
       </p:pic>
+      <p:sp>
+        <p:nvSpPr>
+          <p:cNvPr id="4" name="TextBox 3">
+            <a:extLst>
+              <a:ext uri="{FF2B5EF4-FFF2-40B4-BE49-F238E27FC236}">
+                <a16:creationId xmlns:a16="http://schemas.microsoft.com/office/drawing/2014/main" id="{2DC65C8B-4F93-B1ED-B904-496EF9C7D534}"/>
+              </a:ext>
+            </a:extLst>
+          </p:cNvPr>
+          <p:cNvSpPr txBox="1"/>
+          <p:nvPr/>
+        </p:nvSpPr>
+        <p:spPr>
+          <a:xfrm>
+            <a:off x="6943725" y="4568189"/>
+            <a:ext cx="2050498" cy="369332"/>
+          </a:xfrm>
+          <a:prstGeom prst="rect">
+            <a:avLst/>
+          </a:prstGeom>
+          <a:noFill/>
+        </p:spPr>
+        <p:txBody>
+          <a:bodyPr wrap="none" rtlCol="0">
+            <a:spAutoFit/>
+          </a:bodyPr>
+          <a:lstStyle/>
+          <a:p>
+            <a:r>
+              <a:rPr lang="en-US" dirty="0"/>
+              <a:t>AI Generated Image</a:t>
+            </a:r>
+          </a:p>
+        </p:txBody>
+      </p:sp>
     </p:spTree>
   </p:cSld>
+  <p:clrMapOvr>
+    <a:masterClrMapping/>
+  </p:clrMapOvr>
 </p:sld>
 </file>
 
@@ -6901,19 +6728,18 @@
           <a:bodyPr/>
           <a:lstStyle/>
           <a:p>
-            <a:pPr lvl="0" indent="0" marL="0">
+            <a:pPr marL="0" lvl="0" indent="0">
               <a:buNone/>
             </a:pPr>
             <a:r>
-              <a:rPr/>
-              <a:t>Activity 4: Unlocking The Impossible</a:t>
+              <a:t>Wrap-Up &amp; Next Steps</a:t>
             </a:r>
           </a:p>
         </p:txBody>
       </p:sp>
       <p:pic>
         <p:nvPicPr>
-          <p:cNvPr descr="../docs/images/stress_nobg.png" id="0" name="Picture 1"/>
+          <p:cNvPr id="3" name="Picture 1" descr="../docs/images/next_nobg.png"/>
           <p:cNvPicPr>
             <a:picLocks noGrp="1" noChangeAspect="1"/>
           </p:cNvPicPr>
@@ -6927,8 +6753,8 @@
         </p:blipFill>
         <p:spPr bwMode="auto">
           <a:xfrm>
-            <a:off x="2870200" y="1193800"/>
-            <a:ext cx="3390900" cy="3390900"/>
+            <a:off x="457200" y="804672"/>
+            <a:ext cx="8229600" cy="4338828"/>
           </a:xfrm>
           <a:prstGeom prst="rect">
             <a:avLst/>
@@ -6941,8 +6767,46 @@
           </a:ln>
         </p:spPr>
       </p:pic>
+      <p:sp>
+        <p:nvSpPr>
+          <p:cNvPr id="4" name="TextBox 3">
+            <a:extLst>
+              <a:ext uri="{FF2B5EF4-FFF2-40B4-BE49-F238E27FC236}">
+                <a16:creationId xmlns:a16="http://schemas.microsoft.com/office/drawing/2014/main" id="{A5FFAE19-FE95-90D7-FC86-EA76B0F14178}"/>
+              </a:ext>
+            </a:extLst>
+          </p:cNvPr>
+          <p:cNvSpPr txBox="1"/>
+          <p:nvPr/>
+        </p:nvSpPr>
+        <p:spPr>
+          <a:xfrm>
+            <a:off x="6943725" y="4568189"/>
+            <a:ext cx="2050498" cy="369332"/>
+          </a:xfrm>
+          <a:prstGeom prst="rect">
+            <a:avLst/>
+          </a:prstGeom>
+          <a:noFill/>
+        </p:spPr>
+        <p:txBody>
+          <a:bodyPr wrap="none" rtlCol="0">
+            <a:spAutoFit/>
+          </a:bodyPr>
+          <a:lstStyle/>
+          <a:p>
+            <a:r>
+              <a:rPr lang="en-US" dirty="0"/>
+              <a:t>AI Generated Image</a:t>
+            </a:r>
+          </a:p>
+        </p:txBody>
+      </p:sp>
     </p:spTree>
   </p:cSld>
+  <p:clrMapOvr>
+    <a:masterClrMapping/>
+  </p:clrMapOvr>
 </p:sld>
 </file>
 
@@ -6963,185 +6827,6 @@
           <a:chExt cx="0" cy="0"/>
         </a:xfrm>
       </p:grpSpPr>
-      <p:sp>
-        <p:nvSpPr>
-          <p:cNvPr id="2" name="Title 1"/>
-          <p:cNvSpPr>
-            <a:spLocks noGrp="1"/>
-          </p:cNvSpPr>
-          <p:nvPr>
-            <p:ph type="title"/>
-          </p:nvPr>
-        </p:nvSpPr>
-        <p:spPr/>
-        <p:txBody>
-          <a:bodyPr/>
-          <a:lstStyle/>
-          <a:p>
-            <a:pPr lvl="0" indent="0" marL="0">
-              <a:buNone/>
-            </a:pPr>
-            <a:r>
-              <a:rPr/>
-              <a:t>Activity 5: Secure, Safe, and Sustainable AI</a:t>
-            </a:r>
-          </a:p>
-        </p:txBody>
-      </p:sp>
-      <p:pic>
-        <p:nvPicPr>
-          <p:cNvPr descr="../docs/images/safety_nobg.png" id="0" name="Picture 1"/>
-          <p:cNvPicPr>
-            <a:picLocks noGrp="1" noChangeAspect="1"/>
-          </p:cNvPicPr>
-          <p:nvPr/>
-        </p:nvPicPr>
-        <p:blipFill>
-          <a:blip r:embed="rId3"/>
-          <a:stretch>
-            <a:fillRect/>
-          </a:stretch>
-        </p:blipFill>
-        <p:spPr bwMode="auto">
-          <a:xfrm>
-            <a:off x="2870200" y="1193800"/>
-            <a:ext cx="3390900" cy="3390900"/>
-          </a:xfrm>
-          <a:prstGeom prst="rect">
-            <a:avLst/>
-          </a:prstGeom>
-          <a:noFill/>
-          <a:ln w="9525">
-            <a:noFill/>
-            <a:headEnd/>
-            <a:tailEnd/>
-          </a:ln>
-        </p:spPr>
-      </p:pic>
-    </p:spTree>
-  </p:cSld>
-</p:sld>
-</file>
-
-<file path=ppt/slides/slide15.xml><?xml version="1.0" encoding="utf-8"?>
-<p:sld xmlns:a="http://schemas.openxmlformats.org/drawingml/2006/main" xmlns:r="http://schemas.openxmlformats.org/officeDocument/2006/relationships" xmlns:p="http://schemas.openxmlformats.org/presentationml/2006/main">
-  <p:cSld>
-    <p:spTree>
-      <p:nvGrpSpPr>
-        <p:cNvPr id="1" name=""/>
-        <p:cNvGrpSpPr/>
-        <p:nvPr/>
-      </p:nvGrpSpPr>
-      <p:grpSpPr>
-        <a:xfrm>
-          <a:off x="0" y="0"/>
-          <a:ext cx="0" cy="0"/>
-          <a:chOff x="0" y="0"/>
-          <a:chExt cx="0" cy="0"/>
-        </a:xfrm>
-      </p:grpSpPr>
-      <p:sp>
-        <p:nvSpPr>
-          <p:cNvPr id="2" name="Title 1"/>
-          <p:cNvSpPr>
-            <a:spLocks noGrp="1"/>
-          </p:cNvSpPr>
-          <p:nvPr>
-            <p:ph type="title"/>
-          </p:nvPr>
-        </p:nvSpPr>
-        <p:spPr/>
-        <p:txBody>
-          <a:bodyPr/>
-          <a:lstStyle/>
-          <a:p>
-            <a:pPr lvl="0" indent="0" marL="0">
-              <a:buNone/>
-            </a:pPr>
-            <a:r>
-              <a:rPr/>
-              <a:t>Wrap-Up &amp; Next Steps</a:t>
-            </a:r>
-          </a:p>
-        </p:txBody>
-      </p:sp>
-      <p:pic>
-        <p:nvPicPr>
-          <p:cNvPr descr="../docs/images/next_nobg.png" id="0" name="Picture 1"/>
-          <p:cNvPicPr>
-            <a:picLocks noGrp="1" noChangeAspect="1"/>
-          </p:cNvPicPr>
-          <p:nvPr/>
-        </p:nvPicPr>
-        <p:blipFill>
-          <a:blip r:embed="rId3"/>
-          <a:stretch>
-            <a:fillRect/>
-          </a:stretch>
-        </p:blipFill>
-        <p:spPr bwMode="auto">
-          <a:xfrm>
-            <a:off x="2870200" y="1193800"/>
-            <a:ext cx="3390900" cy="3390900"/>
-          </a:xfrm>
-          <a:prstGeom prst="rect">
-            <a:avLst/>
-          </a:prstGeom>
-          <a:noFill/>
-          <a:ln w="9525">
-            <a:noFill/>
-            <a:headEnd/>
-            <a:tailEnd/>
-          </a:ln>
-        </p:spPr>
-      </p:pic>
-    </p:spTree>
-  </p:cSld>
-</p:sld>
-</file>
-
-<file path=ppt/slides/slide16.xml><?xml version="1.0" encoding="utf-8"?>
-<p:sld xmlns:a="http://schemas.openxmlformats.org/drawingml/2006/main" xmlns:r="http://schemas.openxmlformats.org/officeDocument/2006/relationships" xmlns:p="http://schemas.openxmlformats.org/presentationml/2006/main">
-  <p:cSld>
-    <p:spTree>
-      <p:nvGrpSpPr>
-        <p:cNvPr id="1" name=""/>
-        <p:cNvGrpSpPr/>
-        <p:nvPr/>
-      </p:nvGrpSpPr>
-      <p:grpSpPr>
-        <a:xfrm>
-          <a:off x="0" y="0"/>
-          <a:ext cx="0" cy="0"/>
-          <a:chOff x="0" y="0"/>
-          <a:chExt cx="0" cy="0"/>
-        </a:xfrm>
-      </p:grpSpPr>
-      <p:sp>
-        <p:nvSpPr>
-          <p:cNvPr id="2" name="Title 1"/>
-          <p:cNvSpPr>
-            <a:spLocks noGrp="1"/>
-          </p:cNvSpPr>
-          <p:nvPr>
-            <p:ph type="title"/>
-          </p:nvPr>
-        </p:nvSpPr>
-        <p:spPr/>
-        <p:txBody>
-          <a:bodyPr/>
-          <a:lstStyle/>
-          <a:p>
-            <a:pPr lvl="0" indent="0" marL="0">
-              <a:buNone/>
-            </a:pPr>
-            <a:r>
-              <a:rPr/>
-              <a:t>Key Sources &amp; Slides (Optional)</a:t>
-            </a:r>
-          </a:p>
-        </p:txBody>
-      </p:sp>
       <p:graphicFrame>
         <p:nvGraphicFramePr>
           <p:cNvPr id="6" name="Content Placeholder 5"/>
@@ -7150,11 +6835,16 @@
           </p:cNvGraphicFramePr>
           <p:nvPr>
             <p:ph idx="1"/>
+            <p:extLst>
+              <p:ext uri="{D42A27DB-BD31-4B8C-83A1-F6EECF244321}">
+                <p14:modId xmlns:p14="http://schemas.microsoft.com/office/powerpoint/2010/main" val="3518197034"/>
+              </p:ext>
+            </p:extLst>
           </p:nvPr>
         </p:nvGraphicFramePr>
         <p:xfrm>
-          <a:off x="457200" y="1193800"/>
-          <a:ext cx="8229600" cy="3390900"/>
+          <a:off x="0" y="211880"/>
+          <a:ext cx="9144000" cy="4719740"/>
         </p:xfrm>
         <a:graphic>
           <a:graphicData uri="http://schemas.openxmlformats.org/drawingml/2006/table">
@@ -7163,20 +6853,31 @@
                 <a:tableStyleId>{5C22544A-7EE6-4342-B048-85BDC9FD1C3A}</a:tableStyleId>
               </a:tblPr>
               <a:tblGrid>
-                <a:gridCol w="4114800"/>
-                <a:gridCol w="4114800"/>
+                <a:gridCol w="2889504">
+                  <a:extLst>
+                    <a:ext uri="{9D8B030D-6E8A-4147-A177-3AD203B41FA5}">
+                      <a16:colId xmlns:a16="http://schemas.microsoft.com/office/drawing/2014/main" val="20000"/>
+                    </a:ext>
+                  </a:extLst>
+                </a:gridCol>
+                <a:gridCol w="6254496">
+                  <a:extLst>
+                    <a:ext uri="{9D8B030D-6E8A-4147-A177-3AD203B41FA5}">
+                      <a16:colId xmlns:a16="http://schemas.microsoft.com/office/drawing/2014/main" val="20001"/>
+                    </a:ext>
+                  </a:extLst>
+                </a:gridCol>
               </a:tblGrid>
-              <a:tr h="0">
+              <a:tr h="225486">
                 <a:tc>
                   <a:txBody>
                     <a:bodyPr/>
                     <a:lstStyle/>
                     <a:p>
-                      <a:pPr lvl="0" indent="0" marL="0">
+                      <a:pPr marL="0" lvl="0" indent="0">
                         <a:buNone/>
                       </a:pPr>
                       <a:r>
-                        <a:rPr/>
                         <a:t>Reference (short)</a:t>
                       </a:r>
                     </a:p>
@@ -7188,341 +6889,398 @@
                     <a:bodyPr/>
                     <a:lstStyle/>
                     <a:p>
-                      <a:pPr lvl="0" indent="0" marL="0">
+                      <a:pPr marL="0" lvl="0" indent="0">
                         <a:buNone/>
                       </a:pPr>
                       <a:r>
-                        <a:rPr/>
                         <a:t>Main slide(s) / themes</a:t>
                       </a:r>
                     </a:p>
                   </a:txBody>
                   <a:tcPr/>
                 </a:tc>
+                <a:extLst>
+                  <a:ext uri="{0D108BD9-81ED-4DB2-BD59-A6C34878D82A}">
+                    <a16:rowId xmlns:a16="http://schemas.microsoft.com/office/drawing/2014/main" val="10000"/>
+                  </a:ext>
+                </a:extLst>
               </a:tr>
-              <a:tr h="0">
+              <a:tr h="381592">
                 <a:tc>
                   <a:txBody>
                     <a:bodyPr/>
                     <a:lstStyle/>
                     <a:p>
-                      <a:pPr lvl="0" indent="0" marL="0">
+                      <a:pPr marL="0" lvl="0" indent="0">
                         <a:buNone/>
                       </a:pPr>
                       <a:r>
-                        <a:rPr/>
+                        <a:rPr dirty="0"/>
                         <a:t>Bloom (1984) – 2 Sigma Problem</a:t>
                       </a:r>
                     </a:p>
                   </a:txBody>
+                  <a:tcPr/>
                 </a:tc>
                 <a:tc>
                   <a:txBody>
                     <a:bodyPr/>
                     <a:lstStyle/>
                     <a:p>
-                      <a:pPr lvl="0" indent="0" marL="0">
+                      <a:pPr marL="0" lvl="0" indent="0">
                         <a:buNone/>
                       </a:pPr>
                       <a:r>
-                        <a:rPr/>
                         <a:t>Welcome &amp; AI Landscape (1‑to‑1 tutoring vs classroom; what we’re trying to approximate).</a:t>
                       </a:r>
                     </a:p>
                   </a:txBody>
+                  <a:tcPr/>
                 </a:tc>
+                <a:extLst>
+                  <a:ext uri="{0D108BD9-81ED-4DB2-BD59-A6C34878D82A}">
+                    <a16:rowId xmlns:a16="http://schemas.microsoft.com/office/drawing/2014/main" val="10001"/>
+                  </a:ext>
+                </a:extLst>
               </a:tr>
-              <a:tr h="0">
+              <a:tr h="381592">
                 <a:tc>
                   <a:txBody>
                     <a:bodyPr/>
                     <a:lstStyle/>
                     <a:p>
-                      <a:pPr lvl="0" indent="0" marL="0">
+                      <a:pPr marL="0" lvl="0" indent="0">
                         <a:buNone/>
                       </a:pPr>
                       <a:r>
-                        <a:rPr/>
+                        <a:rPr dirty="0"/>
                         <a:t>Sal Khan TED (2023) – </a:t>
                       </a:r>
                       <a:r>
-                        <a:rPr i="1"/>
+                        <a:rPr i="1" dirty="0"/>
                         <a:t>How AI Could Save (Not Destroy) Education</a:t>
                       </a:r>
                     </a:p>
                   </a:txBody>
+                  <a:tcPr/>
                 </a:tc>
                 <a:tc>
                   <a:txBody>
                     <a:bodyPr/>
                     <a:lstStyle/>
                     <a:p>
-                      <a:pPr lvl="0" indent="0" marL="0">
+                      <a:pPr marL="0" lvl="0" indent="0">
                         <a:buNone/>
                       </a:pPr>
                       <a:r>
-                        <a:rPr/>
                         <a:t>Welcome (idea of AI tutor for every student, AI assistant for every teacher).</a:t>
                       </a:r>
                     </a:p>
                   </a:txBody>
+                  <a:tcPr/>
                 </a:tc>
+                <a:extLst>
+                  <a:ext uri="{0D108BD9-81ED-4DB2-BD59-A6C34878D82A}">
+                    <a16:rowId xmlns:a16="http://schemas.microsoft.com/office/drawing/2014/main" val="10002"/>
+                  </a:ext>
+                </a:extLst>
               </a:tr>
-              <a:tr h="0">
+              <a:tr h="381592">
                 <a:tc>
                   <a:txBody>
                     <a:bodyPr/>
                     <a:lstStyle/>
                     <a:p>
-                      <a:pPr lvl="0" indent="0" marL="0">
+                      <a:pPr marL="0" lvl="0" indent="0">
                         <a:buNone/>
                       </a:pPr>
                       <a:r>
-                        <a:rPr/>
                         <a:t>Noroozi et al. (2025)</a:t>
                       </a:r>
                     </a:p>
                   </a:txBody>
+                  <a:tcPr/>
                 </a:tc>
                 <a:tc>
                   <a:txBody>
                     <a:bodyPr/>
                     <a:lstStyle/>
                     <a:p>
-                      <a:pPr lvl="0" indent="0" marL="0">
+                      <a:pPr marL="0" lvl="0" indent="0">
                         <a:buNone/>
                       </a:pPr>
                       <a:r>
-                        <a:rPr/>
                         <a:t>Practitioner (human agency, real‑time intervention); Challenges &amp; Limitations; Evolving Role of the Educator.</a:t>
                       </a:r>
                     </a:p>
                   </a:txBody>
+                  <a:tcPr/>
                 </a:tc>
+                <a:extLst>
+                  <a:ext uri="{0D108BD9-81ED-4DB2-BD59-A6C34878D82A}">
+                    <a16:rowId xmlns:a16="http://schemas.microsoft.com/office/drawing/2014/main" val="10003"/>
+                  </a:ext>
+                </a:extLst>
               </a:tr>
-              <a:tr h="0">
+              <a:tr h="381592">
                 <a:tc>
                   <a:txBody>
                     <a:bodyPr/>
                     <a:lstStyle/>
                     <a:p>
-                      <a:pPr lvl="0" indent="0" marL="0">
+                      <a:pPr marL="0" lvl="0" indent="0">
                         <a:buNone/>
                       </a:pPr>
                       <a:r>
-                        <a:rPr/>
                         <a:t>Pireci Sejdiu &amp; Sejdiu (2025)</a:t>
                       </a:r>
                     </a:p>
                   </a:txBody>
+                  <a:tcPr/>
                 </a:tc>
                 <a:tc>
                   <a:txBody>
                     <a:bodyPr/>
                     <a:lstStyle/>
                     <a:p>
-                      <a:pPr lvl="0" indent="0" marL="0">
+                      <a:pPr marL="0" lvl="0" indent="0">
                         <a:buNone/>
                       </a:pPr>
                       <a:r>
-                        <a:rPr/>
                         <a:t>Architect &amp; Practitioner (quiet transformation of HE); Evolving Role of the Educator.</a:t>
                       </a:r>
                     </a:p>
                   </a:txBody>
+                  <a:tcPr/>
                 </a:tc>
+                <a:extLst>
+                  <a:ext uri="{0D108BD9-81ED-4DB2-BD59-A6C34878D82A}">
+                    <a16:rowId xmlns:a16="http://schemas.microsoft.com/office/drawing/2014/main" val="10004"/>
+                  </a:ext>
+                </a:extLst>
               </a:tr>
-              <a:tr h="0">
+              <a:tr h="381592">
                 <a:tc>
                   <a:txBody>
                     <a:bodyPr/>
                     <a:lstStyle/>
                     <a:p>
-                      <a:pPr lvl="0" indent="0" marL="0">
+                      <a:pPr marL="0" lvl="0" indent="0">
                         <a:buNone/>
                       </a:pPr>
                       <a:r>
-                        <a:rPr/>
                         <a:t>Park University (2025)</a:t>
                       </a:r>
                     </a:p>
                   </a:txBody>
+                  <a:tcPr/>
                 </a:tc>
                 <a:tc>
                   <a:txBody>
                     <a:bodyPr/>
                     <a:lstStyle/>
                     <a:p>
-                      <a:pPr lvl="0" indent="0" marL="0">
+                      <a:pPr marL="0" lvl="0" indent="0">
                         <a:buNone/>
                       </a:pPr>
                       <a:r>
-                        <a:rPr/>
                         <a:t>Intelligent Tutoring Systems (overview of ITS and benefits).</a:t>
                       </a:r>
                     </a:p>
                   </a:txBody>
+                  <a:tcPr/>
                 </a:tc>
+                <a:extLst>
+                  <a:ext uri="{0D108BD9-81ED-4DB2-BD59-A6C34878D82A}">
+                    <a16:rowId xmlns:a16="http://schemas.microsoft.com/office/drawing/2014/main" val="10005"/>
+                  </a:ext>
+                </a:extLst>
               </a:tr>
-              <a:tr h="0">
+              <a:tr h="381592">
                 <a:tc>
                   <a:txBody>
                     <a:bodyPr/>
                     <a:lstStyle/>
                     <a:p>
-                      <a:pPr lvl="0" indent="0" marL="0">
+                      <a:pPr marL="0" lvl="0" indent="0">
                         <a:buNone/>
                       </a:pPr>
                       <a:r>
-                        <a:rPr/>
                         <a:t>Li et al. (2025); Budiman et al. (2025); Kwak (2025); Chen (2025)</a:t>
                       </a:r>
                     </a:p>
                   </a:txBody>
+                  <a:tcPr/>
                 </a:tc>
                 <a:tc>
                   <a:txBody>
                     <a:bodyPr/>
                     <a:lstStyle/>
                     <a:p>
-                      <a:pPr lvl="0" indent="0" marL="0">
+                      <a:pPr marL="0" lvl="0" indent="0">
                         <a:buNone/>
                       </a:pPr>
                       <a:r>
-                        <a:rPr/>
                         <a:t>ITS &amp; Practitioner slides (evidence that AI‑mediated teaching can improve outcomes).</a:t>
                       </a:r>
                     </a:p>
                   </a:txBody>
+                  <a:tcPr/>
                 </a:tc>
+                <a:extLst>
+                  <a:ext uri="{0D108BD9-81ED-4DB2-BD59-A6C34878D82A}">
+                    <a16:rowId xmlns:a16="http://schemas.microsoft.com/office/drawing/2014/main" val="10006"/>
+                  </a:ext>
+                </a:extLst>
               </a:tr>
-              <a:tr h="0">
+              <a:tr h="381592">
                 <a:tc>
                   <a:txBody>
                     <a:bodyPr/>
                     <a:lstStyle/>
                     <a:p>
-                      <a:pPr lvl="0" indent="0" marL="0">
+                      <a:pPr marL="0" lvl="0" indent="0">
                         <a:buNone/>
                       </a:pPr>
                       <a:r>
-                        <a:rPr/>
                         <a:t>Rojas (2025)</a:t>
                       </a:r>
                     </a:p>
                   </a:txBody>
+                  <a:tcPr/>
                 </a:tc>
                 <a:tc>
                   <a:txBody>
                     <a:bodyPr/>
                     <a:lstStyle/>
                     <a:p>
-                      <a:pPr lvl="0" indent="0" marL="0">
+                      <a:pPr marL="0" lvl="0" indent="0">
                         <a:buNone/>
                       </a:pPr>
                       <a:r>
-                        <a:rPr/>
                         <a:t>Architect slide (instructional design in the AI era); Evolving Role of the Educator.</a:t>
                       </a:r>
                     </a:p>
                   </a:txBody>
+                  <a:tcPr/>
                 </a:tc>
+                <a:extLst>
+                  <a:ext uri="{0D108BD9-81ED-4DB2-BD59-A6C34878D82A}">
+                    <a16:rowId xmlns:a16="http://schemas.microsoft.com/office/drawing/2014/main" val="10007"/>
+                  </a:ext>
+                </a:extLst>
               </a:tr>
-              <a:tr h="0">
+              <a:tr h="381592">
                 <a:tc>
                   <a:txBody>
                     <a:bodyPr/>
                     <a:lstStyle/>
                     <a:p>
-                      <a:pPr lvl="0" indent="0" marL="0">
+                      <a:pPr marL="0" lvl="0" indent="0">
                         <a:buNone/>
                       </a:pPr>
                       <a:r>
-                        <a:rPr/>
                         <a:t>Dwivedi et al. (2023)</a:t>
                       </a:r>
                     </a:p>
                   </a:txBody>
+                  <a:tcPr/>
                 </a:tc>
                 <a:tc>
                   <a:txBody>
                     <a:bodyPr/>
                     <a:lstStyle/>
                     <a:p>
-                      <a:pPr lvl="0" indent="0" marL="0">
+                      <a:pPr marL="0" lvl="0" indent="0">
                         <a:buNone/>
                       </a:pPr>
                       <a:r>
-                        <a:rPr/>
                         <a:t>Challenges &amp; Limitations (opportunities vs misuse, integrity, policy gaps).</a:t>
                       </a:r>
                     </a:p>
                   </a:txBody>
+                  <a:tcPr/>
                 </a:tc>
+                <a:extLst>
+                  <a:ext uri="{0D108BD9-81ED-4DB2-BD59-A6C34878D82A}">
+                    <a16:rowId xmlns:a16="http://schemas.microsoft.com/office/drawing/2014/main" val="10008"/>
+                  </a:ext>
+                </a:extLst>
               </a:tr>
-              <a:tr h="0">
+              <a:tr h="381592">
                 <a:tc>
                   <a:txBody>
                     <a:bodyPr/>
                     <a:lstStyle/>
                     <a:p>
-                      <a:pPr lvl="0" indent="0" marL="0">
+                      <a:pPr marL="0" lvl="0" indent="0">
                         <a:buNone/>
                       </a:pPr>
                       <a:r>
-                        <a:rPr/>
                         <a:t>Gerlich (2025); Kosmyna et al. (2025)</a:t>
                       </a:r>
                     </a:p>
                   </a:txBody>
+                  <a:tcPr/>
                 </a:tc>
                 <a:tc>
                   <a:txBody>
                     <a:bodyPr/>
                     <a:lstStyle/>
                     <a:p>
-                      <a:pPr lvl="0" indent="0" marL="0">
+                      <a:pPr marL="0" lvl="0" indent="0">
                         <a:buNone/>
                       </a:pPr>
                       <a:r>
-                        <a:rPr/>
                         <a:t>Challenges &amp; Activity 3 (cognitive offloading / cognitive debt in AI‑assisted work).</a:t>
                       </a:r>
                     </a:p>
                   </a:txBody>
+                  <a:tcPr/>
                 </a:tc>
+                <a:extLst>
+                  <a:ext uri="{0D108BD9-81ED-4DB2-BD59-A6C34878D82A}">
+                    <a16:rowId xmlns:a16="http://schemas.microsoft.com/office/drawing/2014/main" val="10009"/>
+                  </a:ext>
+                </a:extLst>
               </a:tr>
-              <a:tr h="0">
+              <a:tr h="381592">
                 <a:tc>
                   <a:txBody>
                     <a:bodyPr/>
                     <a:lstStyle/>
                     <a:p>
-                      <a:pPr lvl="0" indent="0" marL="0">
+                      <a:pPr marL="0" lvl="0" indent="0">
                         <a:buNone/>
                       </a:pPr>
                       <a:r>
-                        <a:rPr/>
                         <a:t>Yin et al. (2025); EDUCAUSE (2025); TEQSA (2025); Russell Group (2023)</a:t>
                       </a:r>
                     </a:p>
                   </a:txBody>
+                  <a:tcPr/>
                 </a:tc>
                 <a:tc>
                   <a:txBody>
                     <a:bodyPr/>
                     <a:lstStyle/>
                     <a:p>
-                      <a:pPr lvl="0" indent="0" marL="0">
+                      <a:pPr marL="0" lvl="0" indent="0">
                         <a:buNone/>
                       </a:pPr>
                       <a:r>
-                        <a:rPr/>
+                        <a:rPr dirty="0"/>
                         <a:t>Challenges &amp; Activity 5 (fairness, bias, ethics, institutional guidelines and guardrails).</a:t>
                       </a:r>
                     </a:p>
                   </a:txBody>
+                  <a:tcPr/>
                 </a:tc>
+                <a:extLst>
+                  <a:ext uri="{0D108BD9-81ED-4DB2-BD59-A6C34878D82A}">
+                    <a16:rowId xmlns:a16="http://schemas.microsoft.com/office/drawing/2014/main" val="10010"/>
+                  </a:ext>
+                </a:extLst>
               </a:tr>
             </a:tbl>
           </a:graphicData>
@@ -7530,6 +7288,9 @@
       </p:graphicFrame>
     </p:spTree>
   </p:cSld>
+  <p:clrMapOvr>
+    <a:masterClrMapping/>
+  </p:clrMapOvr>
 </p:sld>
 </file>
 
@@ -7565,48 +7326,98 @@
           <a:bodyPr/>
           <a:lstStyle/>
           <a:p>
-            <a:pPr lvl="0" indent="0" marL="0">
+            <a:pPr marL="0" lvl="0" indent="0">
               <a:buNone/>
             </a:pPr>
             <a:r>
-              <a:rPr/>
-              <a:t>Welcome &amp; The AI Landscape</a:t>
-            </a:r>
-          </a:p>
-        </p:txBody>
-      </p:sp>
-      <p:pic>
-        <p:nvPicPr>
-          <p:cNvPr descr="../docs/images/copilot-2-sigma.png" id="0" name="Picture 1"/>
-          <p:cNvPicPr>
-            <a:picLocks noGrp="1" noChangeAspect="1"/>
-          </p:cNvPicPr>
-          <p:nvPr/>
-        </p:nvPicPr>
-        <p:blipFill>
-          <a:blip r:embed="rId2"/>
-          <a:stretch>
-            <a:fillRect/>
-          </a:stretch>
-        </p:blipFill>
-        <p:spPr bwMode="auto">
-          <a:xfrm>
-            <a:off x="1854200" y="1193800"/>
-            <a:ext cx="5422900" cy="3390900"/>
-          </a:xfrm>
-          <a:prstGeom prst="rect">
-            <a:avLst/>
-          </a:prstGeom>
-          <a:noFill/>
-          <a:ln w="9525">
-            <a:noFill/>
-            <a:headEnd/>
-            <a:tailEnd/>
-          </a:ln>
-        </p:spPr>
-      </p:pic>
+              <a:t>What We’ll Do Today</a:t>
+            </a:r>
+          </a:p>
+        </p:txBody>
+      </p:sp>
+      <p:sp>
+        <p:nvSpPr>
+          <p:cNvPr id="3" name="Content Placeholder 2"/>
+          <p:cNvSpPr>
+            <a:spLocks noGrp="1"/>
+          </p:cNvSpPr>
+          <p:nvPr>
+            <p:ph idx="1"/>
+          </p:nvPr>
+        </p:nvSpPr>
+        <p:spPr/>
+        <p:txBody>
+          <a:bodyPr>
+            <a:normAutofit fontScale="77500" lnSpcReduction="20000"/>
+          </a:bodyPr>
+          <a:lstStyle/>
+          <a:p>
+            <a:pPr lvl="0"/>
+            <a:r>
+              <a:t>Set the scene: AI, Assessment 2030, and your context</a:t>
+            </a:r>
+            <a:br/>
+            <a:endParaRPr/>
+          </a:p>
+          <a:p>
+            <a:pPr lvl="0"/>
+            <a:r>
+              <a:t>Try out 5 hands‑on activities:</a:t>
+            </a:r>
+          </a:p>
+          <a:p>
+            <a:pPr lvl="1"/>
+            <a:r>
+              <a:t>Automate some of the tedious work</a:t>
+            </a:r>
+            <a:br/>
+            <a:endParaRPr/>
+          </a:p>
+          <a:p>
+            <a:pPr lvl="1"/>
+            <a:r>
+              <a:t>Design better prompts</a:t>
+            </a:r>
+            <a:br/>
+            <a:endParaRPr/>
+          </a:p>
+          <a:p>
+            <a:pPr lvl="1"/>
+            <a:r>
+              <a:t>Critique AI outputs with a simple framework</a:t>
+            </a:r>
+            <a:br/>
+            <a:endParaRPr/>
+          </a:p>
+          <a:p>
+            <a:pPr lvl="1"/>
+            <a:r>
+              <a:t>Use AI in a multi‑step workflow to probe or redesign a task</a:t>
+            </a:r>
+            <a:br/>
+            <a:endParaRPr/>
+          </a:p>
+          <a:p>
+            <a:pPr lvl="1"/>
+            <a:r>
+              <a:t>Make one small commitment about safe AI use</a:t>
+            </a:r>
+            <a:br/>
+            <a:endParaRPr/>
+          </a:p>
+          <a:p>
+            <a:pPr lvl="0"/>
+            <a:r>
+              <a:t>Wrap up with key takeaways and next steps</a:t>
+            </a:r>
+          </a:p>
+        </p:txBody>
+      </p:sp>
     </p:spTree>
   </p:cSld>
+  <p:clrMapOvr>
+    <a:masterClrMapping/>
+  </p:clrMapOvr>
 </p:sld>
 </file>
 
@@ -7629,12 +7440,12 @@
       </p:grpSpPr>
       <p:sp>
         <p:nvSpPr>
-          <p:cNvPr id="3" name="Content Placeholder 2"/>
-          <p:cNvSpPr>
-            <a:spLocks noGrp="1"/>
-          </p:cNvSpPr>
-          <p:nvPr>
-            <p:ph idx="1"/>
+          <p:cNvPr id="2" name="Title 1"/>
+          <p:cNvSpPr>
+            <a:spLocks noGrp="1"/>
+          </p:cNvSpPr>
+          <p:nvPr>
+            <p:ph type="title"/>
           </p:nvPr>
         </p:nvSpPr>
         <p:spPr/>
@@ -7642,18 +7453,97 @@
           <a:bodyPr/>
           <a:lstStyle/>
           <a:p>
-            <a:pPr lvl="0" indent="0" marL="0">
+            <a:pPr marL="0" lvl="0" indent="0">
               <a:buNone/>
             </a:pPr>
             <a:r>
-              <a:rPr/>
-              <a:t>Drafting and ideation for these materials were supported by generative AI tools, Python scripts, Quarto, and standard image editors under human oversight. All content has been reviewed, edited and verified by the author.</a:t>
+              <a:t>Intelligent Tutoring Systems (ITS)</a:t>
+            </a:r>
+          </a:p>
+        </p:txBody>
+      </p:sp>
+      <p:pic>
+        <p:nvPicPr>
+          <p:cNvPr id="3" name="Picture 1" descr="../docs/images/itts-paths_nobg.png"/>
+          <p:cNvPicPr>
+            <a:picLocks noGrp="1" noChangeAspect="1"/>
+          </p:cNvPicPr>
+          <p:nvPr/>
+        </p:nvPicPr>
+        <p:blipFill>
+          <a:blip r:embed="rId3">
+            <a:extLst>
+              <a:ext uri="{BEBA8EAE-BF5A-486C-A8C5-ECC9F3942E4B}">
+                <a14:imgProps xmlns:a14="http://schemas.microsoft.com/office/drawing/2010/main">
+                  <a14:imgLayer r:embed="rId4">
+                    <a14:imgEffect>
+                      <a14:brightnessContrast bright="-100000" contrast="100000"/>
+                    </a14:imgEffect>
+                  </a14:imgLayer>
+                </a14:imgProps>
+              </a:ext>
+            </a:extLst>
+          </a:blip>
+          <a:stretch>
+            <a:fillRect/>
+          </a:stretch>
+        </p:blipFill>
+        <p:spPr bwMode="auto">
+          <a:xfrm>
+            <a:off x="585216" y="729488"/>
+            <a:ext cx="7717536" cy="4414012"/>
+          </a:xfrm>
+          <a:prstGeom prst="rect">
+            <a:avLst/>
+          </a:prstGeom>
+          <a:noFill/>
+          <a:ln w="9525">
+            <a:noFill/>
+            <a:headEnd/>
+            <a:tailEnd/>
+          </a:ln>
+        </p:spPr>
+      </p:pic>
+      <p:sp>
+        <p:nvSpPr>
+          <p:cNvPr id="4" name="TextBox 3">
+            <a:extLst>
+              <a:ext uri="{FF2B5EF4-FFF2-40B4-BE49-F238E27FC236}">
+                <a16:creationId xmlns:a16="http://schemas.microsoft.com/office/drawing/2014/main" id="{2FE866E6-64BE-45C5-1C6B-975CF44928E5}"/>
+              </a:ext>
+            </a:extLst>
+          </p:cNvPr>
+          <p:cNvSpPr txBox="1"/>
+          <p:nvPr/>
+        </p:nvSpPr>
+        <p:spPr>
+          <a:xfrm>
+            <a:off x="6943725" y="4568189"/>
+            <a:ext cx="2050498" cy="369332"/>
+          </a:xfrm>
+          <a:prstGeom prst="rect">
+            <a:avLst/>
+          </a:prstGeom>
+          <a:noFill/>
+        </p:spPr>
+        <p:txBody>
+          <a:bodyPr wrap="none" rtlCol="0">
+            <a:spAutoFit/>
+          </a:bodyPr>
+          <a:lstStyle/>
+          <a:p>
+            <a:r>
+              <a:rPr lang="en-US" dirty="0"/>
+              <a:t>AI Generated Image</a:t>
             </a:r>
           </a:p>
         </p:txBody>
       </p:sp>
     </p:spTree>
   </p:cSld>
+  <p:clrMapOvr>
+    <a:masterClrMapping/>
+  </p:clrMapOvr>
 </p:sld>
 </file>
 
@@ -7689,96 +7579,85 @@
           <a:bodyPr/>
           <a:lstStyle/>
           <a:p>
-            <a:pPr lvl="0" indent="0" marL="0">
+            <a:pPr marL="0" lvl="0" indent="0">
               <a:buNone/>
             </a:pPr>
             <a:r>
-              <a:rPr/>
-              <a:t>What We’ll Do Today</a:t>
-            </a:r>
-          </a:p>
-        </p:txBody>
-      </p:sp>
-      <p:sp>
-        <p:nvSpPr>
-          <p:cNvPr id="3" name="Content Placeholder 2"/>
-          <p:cNvSpPr>
-            <a:spLocks noGrp="1"/>
-          </p:cNvSpPr>
-          <p:nvPr>
-            <p:ph idx="1"/>
-          </p:nvPr>
-        </p:nvSpPr>
-        <p:spPr/>
-        <p:txBody>
-          <a:bodyPr/>
-          <a:lstStyle/>
-          <a:p>
-            <a:pPr lvl="0"/>
-            <a:r>
-              <a:rPr/>
-              <a:t>Set the scene: AI, Assessment 2030, and your context</a:t>
-            </a:r>
-            <a:br/>
-          </a:p>
-          <a:p>
-            <a:pPr lvl="0"/>
-            <a:r>
-              <a:rPr/>
-              <a:t>Try out 5 hands‑on activities:</a:t>
-            </a:r>
-          </a:p>
-          <a:p>
-            <a:pPr lvl="1"/>
-            <a:r>
-              <a:rPr/>
-              <a:t>Automate some of the tedious work</a:t>
-            </a:r>
-            <a:br/>
-          </a:p>
-          <a:p>
-            <a:pPr lvl="1"/>
-            <a:r>
-              <a:rPr/>
-              <a:t>Design better prompts</a:t>
-            </a:r>
-            <a:br/>
-          </a:p>
-          <a:p>
-            <a:pPr lvl="1"/>
-            <a:r>
-              <a:rPr/>
-              <a:t>Critique AI outputs with a simple framework</a:t>
-            </a:r>
-            <a:br/>
-          </a:p>
-          <a:p>
-            <a:pPr lvl="1"/>
-            <a:r>
-              <a:rPr/>
-              <a:t>Use AI in a multi‑step workflow to probe or redesign a task</a:t>
-            </a:r>
-            <a:br/>
-          </a:p>
-          <a:p>
-            <a:pPr lvl="1"/>
-            <a:r>
-              <a:rPr/>
-              <a:t>Make one small commitment about safe AI use</a:t>
-            </a:r>
-            <a:br/>
-          </a:p>
-          <a:p>
-            <a:pPr lvl="0"/>
-            <a:r>
-              <a:rPr/>
-              <a:t>Wrap up with key takeaways and next steps</a:t>
+              <a:t>The Architect (Pedagogical Design)</a:t>
+            </a:r>
+          </a:p>
+        </p:txBody>
+      </p:sp>
+      <p:pic>
+        <p:nvPicPr>
+          <p:cNvPr id="3" name="Picture 1" descr="../docs/images/architect_nobg.png"/>
+          <p:cNvPicPr>
+            <a:picLocks noGrp="1" noChangeAspect="1"/>
+          </p:cNvPicPr>
+          <p:nvPr/>
+        </p:nvPicPr>
+        <p:blipFill>
+          <a:blip r:embed="rId3"/>
+          <a:stretch>
+            <a:fillRect/>
+          </a:stretch>
+        </p:blipFill>
+        <p:spPr bwMode="auto">
+          <a:xfrm>
+            <a:off x="676656" y="852693"/>
+            <a:ext cx="7187184" cy="4084828"/>
+          </a:xfrm>
+          <a:prstGeom prst="rect">
+            <a:avLst/>
+          </a:prstGeom>
+          <a:noFill/>
+          <a:ln w="9525">
+            <a:noFill/>
+            <a:headEnd/>
+            <a:tailEnd/>
+          </a:ln>
+        </p:spPr>
+      </p:pic>
+      <p:sp>
+        <p:nvSpPr>
+          <p:cNvPr id="4" name="TextBox 3">
+            <a:extLst>
+              <a:ext uri="{FF2B5EF4-FFF2-40B4-BE49-F238E27FC236}">
+                <a16:creationId xmlns:a16="http://schemas.microsoft.com/office/drawing/2014/main" id="{98D6FB3A-C4CB-8F9D-0555-509C6EFD1E9F}"/>
+              </a:ext>
+            </a:extLst>
+          </p:cNvPr>
+          <p:cNvSpPr txBox="1"/>
+          <p:nvPr/>
+        </p:nvSpPr>
+        <p:spPr>
+          <a:xfrm>
+            <a:off x="6943725" y="4568189"/>
+            <a:ext cx="2050498" cy="369332"/>
+          </a:xfrm>
+          <a:prstGeom prst="rect">
+            <a:avLst/>
+          </a:prstGeom>
+          <a:noFill/>
+        </p:spPr>
+        <p:txBody>
+          <a:bodyPr wrap="none" rtlCol="0">
+            <a:spAutoFit/>
+          </a:bodyPr>
+          <a:lstStyle/>
+          <a:p>
+            <a:r>
+              <a:rPr lang="en-US" dirty="0"/>
+              <a:t>AI Generated Image</a:t>
             </a:r>
           </a:p>
         </p:txBody>
       </p:sp>
     </p:spTree>
   </p:cSld>
+  <p:clrMapOvr>
+    <a:masterClrMapping/>
+  </p:clrMapOvr>
 </p:sld>
 </file>
 
@@ -7814,19 +7693,18 @@
           <a:bodyPr/>
           <a:lstStyle/>
           <a:p>
-            <a:pPr lvl="0" indent="0" marL="0">
+            <a:pPr marL="0" lvl="0" indent="0">
               <a:buNone/>
             </a:pPr>
             <a:r>
-              <a:rPr/>
-              <a:t>Intelligent Tutoring Systems (ITS)</a:t>
+              <a:t>The Practitioner (Pedagogical Delivery)</a:t>
             </a:r>
           </a:p>
         </p:txBody>
       </p:sp>
       <p:pic>
         <p:nvPicPr>
-          <p:cNvPr descr="../docs/images/itts-paths_nobg.png" id="0" name="Picture 1"/>
+          <p:cNvPr id="3" name="Picture 1" descr="../docs/images/ai-copilot_nobg.png"/>
           <p:cNvPicPr>
             <a:picLocks noGrp="1" noChangeAspect="1"/>
           </p:cNvPicPr>
@@ -7840,8 +7718,8 @@
         </p:blipFill>
         <p:spPr bwMode="auto">
           <a:xfrm>
-            <a:off x="2870200" y="1193800"/>
-            <a:ext cx="3390900" cy="3390900"/>
+            <a:off x="457200" y="425704"/>
+            <a:ext cx="8229600" cy="5072380"/>
           </a:xfrm>
           <a:prstGeom prst="rect">
             <a:avLst/>
@@ -7854,8 +7732,46 @@
           </a:ln>
         </p:spPr>
       </p:pic>
+      <p:sp>
+        <p:nvSpPr>
+          <p:cNvPr id="4" name="TextBox 3">
+            <a:extLst>
+              <a:ext uri="{FF2B5EF4-FFF2-40B4-BE49-F238E27FC236}">
+                <a16:creationId xmlns:a16="http://schemas.microsoft.com/office/drawing/2014/main" id="{5F1B42E0-14C3-23F4-052B-E9B85482765B}"/>
+              </a:ext>
+            </a:extLst>
+          </p:cNvPr>
+          <p:cNvSpPr txBox="1"/>
+          <p:nvPr/>
+        </p:nvSpPr>
+        <p:spPr>
+          <a:xfrm>
+            <a:off x="6943725" y="4568189"/>
+            <a:ext cx="2050498" cy="369332"/>
+          </a:xfrm>
+          <a:prstGeom prst="rect">
+            <a:avLst/>
+          </a:prstGeom>
+          <a:noFill/>
+        </p:spPr>
+        <p:txBody>
+          <a:bodyPr wrap="none" rtlCol="0">
+            <a:spAutoFit/>
+          </a:bodyPr>
+          <a:lstStyle/>
+          <a:p>
+            <a:r>
+              <a:rPr lang="en-US" dirty="0"/>
+              <a:t>AI Generated Image</a:t>
+            </a:r>
+          </a:p>
+        </p:txBody>
+      </p:sp>
     </p:spTree>
   </p:cSld>
+  <p:clrMapOvr>
+    <a:masterClrMapping/>
+  </p:clrMapOvr>
 </p:sld>
 </file>
 
@@ -7891,19 +7807,18 @@
           <a:bodyPr/>
           <a:lstStyle/>
           <a:p>
-            <a:pPr lvl="0" indent="0" marL="0">
+            <a:pPr marL="0" lvl="0" indent="0">
               <a:buNone/>
             </a:pPr>
             <a:r>
-              <a:rPr/>
-              <a:t>The Architect (Pedagogical Design)</a:t>
+              <a:t>Challenges &amp; Limitations</a:t>
             </a:r>
           </a:p>
         </p:txBody>
       </p:sp>
       <p:pic>
         <p:nvPicPr>
-          <p:cNvPr descr="../docs/images/architect_nobg.png" id="0" name="Picture 1"/>
+          <p:cNvPr id="3" name="Picture 1" descr="../docs/images/challenges_nobg.png"/>
           <p:cNvPicPr>
             <a:picLocks noGrp="1" noChangeAspect="1"/>
           </p:cNvPicPr>
@@ -7911,14 +7826,15 @@
         </p:nvPicPr>
         <p:blipFill>
           <a:blip r:embed="rId3"/>
+          <a:srcRect b="8127"/>
           <a:stretch>
             <a:fillRect/>
           </a:stretch>
         </p:blipFill>
         <p:spPr bwMode="auto">
           <a:xfrm>
-            <a:off x="2870200" y="1193800"/>
-            <a:ext cx="3390900" cy="3390900"/>
+            <a:off x="621792" y="634604"/>
+            <a:ext cx="7790688" cy="4508896"/>
           </a:xfrm>
           <a:prstGeom prst="rect">
             <a:avLst/>
@@ -7931,8 +7847,46 @@
           </a:ln>
         </p:spPr>
       </p:pic>
+      <p:sp>
+        <p:nvSpPr>
+          <p:cNvPr id="4" name="TextBox 3">
+            <a:extLst>
+              <a:ext uri="{FF2B5EF4-FFF2-40B4-BE49-F238E27FC236}">
+                <a16:creationId xmlns:a16="http://schemas.microsoft.com/office/drawing/2014/main" id="{152F11E3-2E3B-A0DE-6B4E-C2F91CC29BF6}"/>
+              </a:ext>
+            </a:extLst>
+          </p:cNvPr>
+          <p:cNvSpPr txBox="1"/>
+          <p:nvPr/>
+        </p:nvSpPr>
+        <p:spPr>
+          <a:xfrm>
+            <a:off x="6943725" y="4568189"/>
+            <a:ext cx="2050498" cy="369332"/>
+          </a:xfrm>
+          <a:prstGeom prst="rect">
+            <a:avLst/>
+          </a:prstGeom>
+          <a:noFill/>
+        </p:spPr>
+        <p:txBody>
+          <a:bodyPr wrap="none" rtlCol="0">
+            <a:spAutoFit/>
+          </a:bodyPr>
+          <a:lstStyle/>
+          <a:p>
+            <a:r>
+              <a:rPr lang="en-US" dirty="0"/>
+              <a:t>AI Generated Image</a:t>
+            </a:r>
+          </a:p>
+        </p:txBody>
+      </p:sp>
     </p:spTree>
   </p:cSld>
+  <p:clrMapOvr>
+    <a:masterClrMapping/>
+  </p:clrMapOvr>
 </p:sld>
 </file>
 
@@ -7968,19 +7922,18 @@
           <a:bodyPr/>
           <a:lstStyle/>
           <a:p>
-            <a:pPr lvl="0" indent="0" marL="0">
+            <a:pPr marL="0" lvl="0" indent="0">
               <a:buNone/>
             </a:pPr>
             <a:r>
-              <a:rPr/>
-              <a:t>The Practitioner (Pedagogical Delivery)</a:t>
+              <a:t>The Evolving Role of the Educator</a:t>
             </a:r>
           </a:p>
         </p:txBody>
       </p:sp>
       <p:pic>
         <p:nvPicPr>
-          <p:cNvPr descr="../docs/images/ai-copilot_nobg.png" id="0" name="Picture 1"/>
+          <p:cNvPr id="3" name="Picture 1" descr="../docs/images/rising-tide_nobg.png"/>
           <p:cNvPicPr>
             <a:picLocks noGrp="1" noChangeAspect="1"/>
           </p:cNvPicPr>
@@ -7988,14 +7941,15 @@
         </p:nvPicPr>
         <p:blipFill>
           <a:blip r:embed="rId3"/>
+          <a:srcRect t="25190" b="12734"/>
           <a:stretch>
             <a:fillRect/>
           </a:stretch>
         </p:blipFill>
         <p:spPr bwMode="auto">
           <a:xfrm>
-            <a:off x="2870200" y="1193800"/>
-            <a:ext cx="3390900" cy="3390900"/>
+            <a:off x="1121410" y="859536"/>
+            <a:ext cx="6901180" cy="4283964"/>
           </a:xfrm>
           <a:prstGeom prst="rect">
             <a:avLst/>
@@ -8008,8 +7962,46 @@
           </a:ln>
         </p:spPr>
       </p:pic>
+      <p:sp>
+        <p:nvSpPr>
+          <p:cNvPr id="4" name="TextBox 3">
+            <a:extLst>
+              <a:ext uri="{FF2B5EF4-FFF2-40B4-BE49-F238E27FC236}">
+                <a16:creationId xmlns:a16="http://schemas.microsoft.com/office/drawing/2014/main" id="{3A7D7446-E1B5-F712-81E8-ABFDA8DDE8CA}"/>
+              </a:ext>
+            </a:extLst>
+          </p:cNvPr>
+          <p:cNvSpPr txBox="1"/>
+          <p:nvPr/>
+        </p:nvSpPr>
+        <p:spPr>
+          <a:xfrm>
+            <a:off x="6943725" y="4568189"/>
+            <a:ext cx="2050498" cy="369332"/>
+          </a:xfrm>
+          <a:prstGeom prst="rect">
+            <a:avLst/>
+          </a:prstGeom>
+          <a:noFill/>
+        </p:spPr>
+        <p:txBody>
+          <a:bodyPr wrap="none" rtlCol="0">
+            <a:spAutoFit/>
+          </a:bodyPr>
+          <a:lstStyle/>
+          <a:p>
+            <a:r>
+              <a:rPr lang="en-US" dirty="0"/>
+              <a:t>AI Generated Image</a:t>
+            </a:r>
+          </a:p>
+        </p:txBody>
+      </p:sp>
     </p:spTree>
   </p:cSld>
+  <p:clrMapOvr>
+    <a:masterClrMapping/>
+  </p:clrMapOvr>
 </p:sld>
 </file>
 
@@ -8045,19 +8037,18 @@
           <a:bodyPr/>
           <a:lstStyle/>
           <a:p>
-            <a:pPr lvl="0" indent="0" marL="0">
+            <a:pPr marL="0" lvl="0" indent="0">
               <a:buNone/>
             </a:pPr>
             <a:r>
-              <a:rPr/>
-              <a:t>Challenges &amp; Limitations</a:t>
+              <a:t>Activity 1: Automate the Tedious</a:t>
             </a:r>
           </a:p>
         </p:txBody>
       </p:sp>
       <p:pic>
         <p:nvPicPr>
-          <p:cNvPr descr="../docs/images/challenges_nobg.png" id="0" name="Picture 1"/>
+          <p:cNvPr id="3" name="Picture 1" descr="../docs/images/automate_nobg.png"/>
           <p:cNvPicPr>
             <a:picLocks noGrp="1" noChangeAspect="1"/>
           </p:cNvPicPr>
@@ -8071,8 +8062,8 @@
         </p:blipFill>
         <p:spPr bwMode="auto">
           <a:xfrm>
-            <a:off x="2870200" y="1193800"/>
-            <a:ext cx="3390900" cy="3390900"/>
+            <a:off x="1481328" y="498058"/>
+            <a:ext cx="6489700" cy="4645442"/>
           </a:xfrm>
           <a:prstGeom prst="rect">
             <a:avLst/>
@@ -8085,8 +8076,46 @@
           </a:ln>
         </p:spPr>
       </p:pic>
+      <p:sp>
+        <p:nvSpPr>
+          <p:cNvPr id="4" name="TextBox 3">
+            <a:extLst>
+              <a:ext uri="{FF2B5EF4-FFF2-40B4-BE49-F238E27FC236}">
+                <a16:creationId xmlns:a16="http://schemas.microsoft.com/office/drawing/2014/main" id="{8A38906C-FD42-B837-BFD7-7F7CD189B711}"/>
+              </a:ext>
+            </a:extLst>
+          </p:cNvPr>
+          <p:cNvSpPr txBox="1"/>
+          <p:nvPr/>
+        </p:nvSpPr>
+        <p:spPr>
+          <a:xfrm>
+            <a:off x="6944658" y="4645442"/>
+            <a:ext cx="2050498" cy="369332"/>
+          </a:xfrm>
+          <a:prstGeom prst="rect">
+            <a:avLst/>
+          </a:prstGeom>
+          <a:noFill/>
+        </p:spPr>
+        <p:txBody>
+          <a:bodyPr wrap="none" rtlCol="0">
+            <a:spAutoFit/>
+          </a:bodyPr>
+          <a:lstStyle/>
+          <a:p>
+            <a:r>
+              <a:rPr lang="en-US" dirty="0"/>
+              <a:t>AI Generated Image</a:t>
+            </a:r>
+          </a:p>
+        </p:txBody>
+      </p:sp>
     </p:spTree>
   </p:cSld>
+  <p:clrMapOvr>
+    <a:masterClrMapping/>
+  </p:clrMapOvr>
 </p:sld>
 </file>
 
@@ -8122,19 +8151,18 @@
           <a:bodyPr/>
           <a:lstStyle/>
           <a:p>
-            <a:pPr lvl="0" indent="0" marL="0">
+            <a:pPr marL="0" lvl="0" indent="0">
               <a:buNone/>
             </a:pPr>
             <a:r>
-              <a:rPr/>
-              <a:t>The Evolving Role of the Educator</a:t>
+              <a:t>Activity 2: The Art of the Prompt</a:t>
             </a:r>
           </a:p>
         </p:txBody>
       </p:sp>
       <p:pic>
         <p:nvPicPr>
-          <p:cNvPr descr="../docs/images/rising-tide_nobg.png" id="0" name="Picture 1"/>
+          <p:cNvPr id="3" name="Picture 1" descr="../docs/images/prompt_nobg.png"/>
           <p:cNvPicPr>
             <a:picLocks noGrp="1" noChangeAspect="1"/>
           </p:cNvPicPr>
@@ -8142,14 +8170,15 @@
         </p:nvPicPr>
         <p:blipFill>
           <a:blip r:embed="rId3"/>
+          <a:srcRect t="7085" b="12448"/>
           <a:stretch>
             <a:fillRect/>
           </a:stretch>
         </p:blipFill>
         <p:spPr bwMode="auto">
           <a:xfrm>
-            <a:off x="2870200" y="1193800"/>
-            <a:ext cx="3390900" cy="3390900"/>
+            <a:off x="457200" y="841248"/>
+            <a:ext cx="8229600" cy="4096273"/>
           </a:xfrm>
           <a:prstGeom prst="rect">
             <a:avLst/>
@@ -8162,8 +8191,46 @@
           </a:ln>
         </p:spPr>
       </p:pic>
+      <p:sp>
+        <p:nvSpPr>
+          <p:cNvPr id="4" name="TextBox 3">
+            <a:extLst>
+              <a:ext uri="{FF2B5EF4-FFF2-40B4-BE49-F238E27FC236}">
+                <a16:creationId xmlns:a16="http://schemas.microsoft.com/office/drawing/2014/main" id="{0EC005CD-867E-4646-6BA3-9B845EC2BB10}"/>
+              </a:ext>
+            </a:extLst>
+          </p:cNvPr>
+          <p:cNvSpPr txBox="1"/>
+          <p:nvPr/>
+        </p:nvSpPr>
+        <p:spPr>
+          <a:xfrm>
+            <a:off x="6972300" y="4752855"/>
+            <a:ext cx="2050498" cy="369332"/>
+          </a:xfrm>
+          <a:prstGeom prst="rect">
+            <a:avLst/>
+          </a:prstGeom>
+          <a:noFill/>
+        </p:spPr>
+        <p:txBody>
+          <a:bodyPr wrap="none" rtlCol="0">
+            <a:spAutoFit/>
+          </a:bodyPr>
+          <a:lstStyle/>
+          <a:p>
+            <a:r>
+              <a:rPr lang="en-US" dirty="0"/>
+              <a:t>AI Generated Image</a:t>
+            </a:r>
+          </a:p>
+        </p:txBody>
+      </p:sp>
     </p:spTree>
   </p:cSld>
+  <p:clrMapOvr>
+    <a:masterClrMapping/>
+  </p:clrMapOvr>
 </p:sld>
 </file>
 
